--- a/Introduccion a la Ingenieria/Clases/Clase 15 - Exposicion final de proyectos/Presentacion.pptx
+++ b/Introduccion a la Ingenieria/Clases/Clase 15 - Exposicion final de proyectos/Presentacion.pptx
@@ -17,6 +17,14 @@
     <p:sldId id="265" r:id="rId16"/>
     <p:sldId id="266" r:id="rId17"/>
     <p:sldId id="267" r:id="rId18"/>
+    <p:sldId id="268" r:id="rId19"/>
+    <p:sldId id="269" r:id="rId20"/>
+    <p:sldId id="270" r:id="rId21"/>
+    <p:sldId id="271" r:id="rId22"/>
+    <p:sldId id="272" r:id="rId23"/>
+    <p:sldId id="273" r:id="rId24"/>
+    <p:sldId id="274" r:id="rId25"/>
+    <p:sldId id="275" r:id="rId26"/>
   </p:sldIdLst>
   <p:sldSz cx="12191695" cy="6858000" type="screen4x3"/>
   <p:notesSz cx="6858000" cy="9144000"/>
@@ -3511,7 +3519,7 @@
         <p:spPr>
           <a:xfrm>
             <a:off x="0" y="0"/>
-            <a:ext cx="12191695" cy="1170432"/>
+            <a:ext cx="12191695" cy="960120"/>
           </a:xfrm>
           <a:prstGeom prst="rect">
             <a:avLst/>
@@ -3553,7 +3561,7 @@
         </p:nvSpPr>
         <p:spPr>
           <a:xfrm>
-            <a:off x="0" y="1170432"/>
+            <a:off x="0" y="960120"/>
             <a:ext cx="12191695" cy="41148"/>
           </a:xfrm>
           <a:prstGeom prst="rect">
@@ -3597,7 +3605,7 @@
         <p:spPr>
           <a:xfrm>
             <a:off x="457200" y="164592"/>
-            <a:ext cx="11277295" cy="384048"/>
+            <a:ext cx="11277295" cy="502920"/>
           </a:xfrm>
           <a:prstGeom prst="rect">
             <a:avLst/>
@@ -3617,7 +3625,7 @@
                 </a:solidFill>
                 <a:latin typeface="Calibri"/>
               </a:rPr>
-              <a:t>Cómo se expone en 9 minutos</a:t>
+              <a:t>Cómo se encuadra el día, y por qué el sorteo importa (2/2)</a:t>
             </a:r>
           </a:p>
         </p:txBody>
@@ -3630,8 +3638,8 @@
         </p:nvSpPr>
         <p:spPr>
           <a:xfrm>
-            <a:off x="457200" y="566928"/>
-            <a:ext cx="11277295" cy="411480"/>
+            <a:off x="457200" y="1170432"/>
+            <a:ext cx="11277295" cy="5230368"/>
           </a:xfrm>
           <a:prstGeom prst="rect">
             <a:avLst/>
@@ -3644,1056 +3652,158 @@
           </a:bodyPr>
           <a:lstStyle/>
           <a:p>
-            <a:r>
-              <a:rPr sz="1400" b="0" i="0">
-                <a:solidFill>
-                  <a:srgbClr val="B8D8EE"/>
-                </a:solidFill>
-                <a:latin typeface="Calibri"/>
-              </a:rPr>
-              <a:t>Habla el vocero con la pantalla ya compartida · cronómetro en pantalla · se corta al llegar a cero</a:t>
-            </a:r>
-          </a:p>
-        </p:txBody>
-      </p:sp>
-      <p:sp>
-        <p:nvSpPr>
-          <p:cNvPr id="6" name="Rounded Rectangle 5"/>
-          <p:cNvSpPr/>
-          <p:nvPr/>
-        </p:nvSpPr>
-        <p:spPr>
-          <a:xfrm>
-            <a:off x="457200" y="1444752"/>
-            <a:ext cx="11277295" cy="745236"/>
-          </a:xfrm>
-          <a:prstGeom prst="roundRect">
-            <a:avLst>
-              <a:gd name="adj" fmla="val 12000"/>
-            </a:avLst>
-          </a:prstGeom>
-          <a:solidFill>
-            <a:srgbClr val="F2F2F2"/>
-          </a:solidFill>
-          <a:ln>
-            <a:noFill/>
-          </a:ln>
-        </p:spPr>
-        <p:style>
-          <a:lnRef idx="1">
-            <a:schemeClr val="accent1"/>
-          </a:lnRef>
-          <a:fillRef idx="3">
-            <a:schemeClr val="accent1"/>
-          </a:fillRef>
-          <a:effectRef idx="2">
-            <a:schemeClr val="accent1"/>
-          </a:effectRef>
-          <a:fontRef idx="minor">
-            <a:schemeClr val="lt1"/>
-          </a:fontRef>
-        </p:style>
-        <p:txBody>
-          <a:bodyPr rtlCol="0" anchor="ctr"/>
-          <a:lstStyle/>
-          <a:p>
-            <a:pPr algn="ctr"/>
-          </a:p>
-        </p:txBody>
-      </p:sp>
-      <p:sp>
-        <p:nvSpPr>
-          <p:cNvPr id="7" name="Rounded Rectangle 6"/>
-          <p:cNvSpPr/>
-          <p:nvPr/>
-        </p:nvSpPr>
-        <p:spPr>
-          <a:xfrm>
-            <a:off x="594360" y="1597914"/>
-            <a:ext cx="438912" cy="438912"/>
-          </a:xfrm>
-          <a:prstGeom prst="roundRect">
-            <a:avLst>
-              <a:gd name="adj" fmla="val 12000"/>
-            </a:avLst>
-          </a:prstGeom>
-          <a:solidFill>
-            <a:srgbClr val="095292"/>
-          </a:solidFill>
-          <a:ln>
-            <a:noFill/>
-          </a:ln>
-        </p:spPr>
-        <p:style>
-          <a:lnRef idx="1">
-            <a:schemeClr val="accent1"/>
-          </a:lnRef>
-          <a:fillRef idx="3">
-            <a:schemeClr val="accent1"/>
-          </a:fillRef>
-          <a:effectRef idx="2">
-            <a:schemeClr val="accent1"/>
-          </a:effectRef>
-          <a:fontRef idx="minor">
-            <a:schemeClr val="lt1"/>
-          </a:fontRef>
-        </p:style>
-        <p:txBody>
-          <a:bodyPr rtlCol="0" anchor="ctr"/>
-          <a:lstStyle/>
-          <a:p>
-            <a:pPr algn="ctr"/>
-          </a:p>
-        </p:txBody>
-      </p:sp>
-      <p:sp>
-        <p:nvSpPr>
-          <p:cNvPr id="8" name="TextBox 7"/>
-          <p:cNvSpPr txBox="1"/>
-          <p:nvPr/>
-        </p:nvSpPr>
-        <p:spPr>
-          <a:xfrm>
-            <a:off x="594360" y="1597914"/>
-            <a:ext cx="438912" cy="438912"/>
-          </a:xfrm>
-          <a:prstGeom prst="rect">
-            <a:avLst/>
-          </a:prstGeom>
-          <a:noFill/>
-        </p:spPr>
-        <p:txBody>
-          <a:bodyPr wrap="square" anchor="ctr"/>
-          <a:lstStyle/>
-          <a:p>
-            <a:pPr algn="ctr"/>
-            <a:r>
-              <a:rPr sz="1600" b="1" i="0">
-                <a:solidFill>
-                  <a:srgbClr val="FFFFFF"/>
-                </a:solidFill>
-                <a:latin typeface="Calibri"/>
-              </a:rPr>
-              <a:t>1</a:t>
-            </a:r>
-          </a:p>
-        </p:txBody>
-      </p:sp>
-      <p:sp>
-        <p:nvSpPr>
-          <p:cNvPr id="9" name="TextBox 8"/>
-          <p:cNvSpPr txBox="1"/>
-          <p:nvPr/>
-        </p:nvSpPr>
-        <p:spPr>
-          <a:xfrm>
-            <a:off x="1188720" y="1536192"/>
-            <a:ext cx="10271455" cy="580644"/>
-          </a:xfrm>
-          <a:prstGeom prst="rect">
-            <a:avLst/>
-          </a:prstGeom>
-          <a:noFill/>
-        </p:spPr>
-        <p:txBody>
-          <a:bodyPr wrap="square" anchor="ctr"/>
-          <a:lstStyle/>
-          <a:p>
-            <a:r>
-              <a:rPr sz="1500" b="1" i="0">
-                <a:solidFill>
-                  <a:srgbClr val="095292"/>
-                </a:solidFill>
-                <a:latin typeface="Calibri"/>
-              </a:rPr>
-              <a:t>Tramo 1 · 1 min</a:t>
-            </a:r>
-          </a:p>
-          <a:p>
             <a:pPr>
-              <a:spcBef>
-                <a:spcPts val="200"/>
-              </a:spcBef>
+              <a:spcAft>
+                <a:spcPts val="800"/>
+              </a:spcAft>
             </a:pPr>
             <a:r>
-              <a:rPr sz="1300" b="0" i="0">
-                <a:solidFill>
-                  <a:srgbClr val="333333"/>
-                </a:solidFill>
-                <a:latin typeface="Calibri"/>
-              </a:rPr>
-              <a:t>El problema con su cifra. Arranca sin saludos.</a:t>
-            </a:r>
-          </a:p>
-        </p:txBody>
-      </p:sp>
-      <p:sp>
-        <p:nvSpPr>
-          <p:cNvPr id="10" name="Rounded Rectangle 9"/>
-          <p:cNvSpPr/>
-          <p:nvPr/>
-        </p:nvSpPr>
-        <p:spPr>
-          <a:xfrm>
-            <a:off x="457200" y="2281428"/>
-            <a:ext cx="11277295" cy="745236"/>
-          </a:xfrm>
-          <a:prstGeom prst="roundRect">
-            <a:avLst>
-              <a:gd name="adj" fmla="val 12000"/>
-            </a:avLst>
-          </a:prstGeom>
-          <a:solidFill>
-            <a:srgbClr val="E8F4FA"/>
-          </a:solidFill>
-          <a:ln>
-            <a:noFill/>
-          </a:ln>
-        </p:spPr>
-        <p:style>
-          <a:lnRef idx="1">
-            <a:schemeClr val="accent1"/>
-          </a:lnRef>
-          <a:fillRef idx="3">
-            <a:schemeClr val="accent1"/>
-          </a:fillRef>
-          <a:effectRef idx="2">
-            <a:schemeClr val="accent1"/>
-          </a:effectRef>
-          <a:fontRef idx="minor">
-            <a:schemeClr val="lt1"/>
-          </a:fontRef>
-        </p:style>
-        <p:txBody>
-          <a:bodyPr rtlCol="0" anchor="ctr"/>
-          <a:lstStyle/>
-          <a:p>
-            <a:pPr algn="ctr"/>
-          </a:p>
-        </p:txBody>
-      </p:sp>
-      <p:sp>
-        <p:nvSpPr>
-          <p:cNvPr id="11" name="Rounded Rectangle 10"/>
-          <p:cNvSpPr/>
-          <p:nvPr/>
-        </p:nvSpPr>
-        <p:spPr>
-          <a:xfrm>
-            <a:off x="594360" y="2434590"/>
-            <a:ext cx="438912" cy="438912"/>
-          </a:xfrm>
-          <a:prstGeom prst="roundRect">
-            <a:avLst>
-              <a:gd name="adj" fmla="val 12000"/>
-            </a:avLst>
-          </a:prstGeom>
-          <a:solidFill>
-            <a:srgbClr val="095292"/>
-          </a:solidFill>
-          <a:ln>
-            <a:noFill/>
-          </a:ln>
-        </p:spPr>
-        <p:style>
-          <a:lnRef idx="1">
-            <a:schemeClr val="accent1"/>
-          </a:lnRef>
-          <a:fillRef idx="3">
-            <a:schemeClr val="accent1"/>
-          </a:fillRef>
-          <a:effectRef idx="2">
-            <a:schemeClr val="accent1"/>
-          </a:effectRef>
-          <a:fontRef idx="minor">
-            <a:schemeClr val="lt1"/>
-          </a:fontRef>
-        </p:style>
-        <p:txBody>
-          <a:bodyPr rtlCol="0" anchor="ctr"/>
-          <a:lstStyle/>
-          <a:p>
-            <a:pPr algn="ctr"/>
-          </a:p>
-        </p:txBody>
-      </p:sp>
-      <p:sp>
-        <p:nvSpPr>
-          <p:cNvPr id="12" name="TextBox 11"/>
-          <p:cNvSpPr txBox="1"/>
-          <p:nvPr/>
-        </p:nvSpPr>
-        <p:spPr>
-          <a:xfrm>
-            <a:off x="594360" y="2434590"/>
-            <a:ext cx="438912" cy="438912"/>
-          </a:xfrm>
-          <a:prstGeom prst="rect">
-            <a:avLst/>
-          </a:prstGeom>
-          <a:noFill/>
-        </p:spPr>
-        <p:txBody>
-          <a:bodyPr wrap="square" anchor="ctr"/>
-          <a:lstStyle/>
-          <a:p>
-            <a:pPr algn="ctr"/>
-            <a:r>
-              <a:rPr sz="1600" b="1" i="0">
-                <a:solidFill>
-                  <a:srgbClr val="FFFFFF"/>
-                </a:solidFill>
-                <a:latin typeface="Calibri"/>
-              </a:rPr>
-              <a:t>2</a:t>
-            </a:r>
-          </a:p>
-        </p:txBody>
-      </p:sp>
-      <p:sp>
-        <p:nvSpPr>
-          <p:cNvPr id="13" name="TextBox 12"/>
-          <p:cNvSpPr txBox="1"/>
-          <p:nvPr/>
-        </p:nvSpPr>
-        <p:spPr>
-          <a:xfrm>
-            <a:off x="1188720" y="2372868"/>
-            <a:ext cx="10271455" cy="580644"/>
-          </a:xfrm>
-          <a:prstGeom prst="rect">
-            <a:avLst/>
-          </a:prstGeom>
-          <a:noFill/>
-        </p:spPr>
-        <p:txBody>
-          <a:bodyPr wrap="square" anchor="ctr"/>
-          <a:lstStyle/>
-          <a:p>
-            <a:r>
-              <a:rPr sz="1500" b="1" i="0">
-                <a:solidFill>
-                  <a:srgbClr val="095292"/>
-                </a:solidFill>
-                <a:latin typeface="Calibri"/>
-              </a:rPr>
-              <a:t>Tramo 2 · 2 min</a:t>
+              <a:rPr sz="2000" b="0" i="0">
+                <a:solidFill>
+                  <a:srgbClr val="333333"/>
+                </a:solidFill>
+                <a:latin typeface="Calibri"/>
+              </a:rPr>
+              <a:t>–   Dígalo así.</a:t>
             </a:r>
           </a:p>
           <a:p>
             <a:pPr>
-              <a:spcBef>
-                <a:spcPts val="200"/>
-              </a:spcBef>
+              <a:spcAft>
+                <a:spcPts val="800"/>
+              </a:spcAft>
             </a:pPr>
             <a:r>
-              <a:rPr sz="1300" b="0" i="0">
-                <a:solidFill>
-                  <a:srgbClr val="333333"/>
-                </a:solidFill>
-                <a:latin typeface="Calibri"/>
-              </a:rPr>
-              <a:t>Los afectados —uno que no es usuario— y la decisión con su sacrificio.</a:t>
-            </a:r>
-          </a:p>
-        </p:txBody>
-      </p:sp>
-      <p:sp>
-        <p:nvSpPr>
-          <p:cNvPr id="14" name="Rounded Rectangle 13"/>
-          <p:cNvSpPr/>
-          <p:nvPr/>
-        </p:nvSpPr>
-        <p:spPr>
-          <a:xfrm>
-            <a:off x="457200" y="3118104"/>
-            <a:ext cx="11277295" cy="745236"/>
-          </a:xfrm>
-          <a:prstGeom prst="roundRect">
-            <a:avLst>
-              <a:gd name="adj" fmla="val 12000"/>
-            </a:avLst>
-          </a:prstGeom>
-          <a:solidFill>
-            <a:srgbClr val="F2F2F2"/>
-          </a:solidFill>
-          <a:ln>
-            <a:noFill/>
-          </a:ln>
-        </p:spPr>
-        <p:style>
-          <a:lnRef idx="1">
-            <a:schemeClr val="accent1"/>
-          </a:lnRef>
-          <a:fillRef idx="3">
-            <a:schemeClr val="accent1"/>
-          </a:fillRef>
-          <a:effectRef idx="2">
-            <a:schemeClr val="accent1"/>
-          </a:effectRef>
-          <a:fontRef idx="minor">
-            <a:schemeClr val="lt1"/>
-          </a:fontRef>
-        </p:style>
-        <p:txBody>
-          <a:bodyPr rtlCol="0" anchor="ctr"/>
-          <a:lstStyle/>
-          <a:p>
-            <a:pPr algn="ctr"/>
-          </a:p>
-        </p:txBody>
-      </p:sp>
-      <p:sp>
-        <p:nvSpPr>
-          <p:cNvPr id="15" name="Rounded Rectangle 14"/>
-          <p:cNvSpPr/>
-          <p:nvPr/>
-        </p:nvSpPr>
-        <p:spPr>
-          <a:xfrm>
-            <a:off x="594360" y="3271266"/>
-            <a:ext cx="438912" cy="438912"/>
-          </a:xfrm>
-          <a:prstGeom prst="roundRect">
-            <a:avLst>
-              <a:gd name="adj" fmla="val 12000"/>
-            </a:avLst>
-          </a:prstGeom>
-          <a:solidFill>
-            <a:srgbClr val="095292"/>
-          </a:solidFill>
-          <a:ln>
-            <a:noFill/>
-          </a:ln>
-        </p:spPr>
-        <p:style>
-          <a:lnRef idx="1">
-            <a:schemeClr val="accent1"/>
-          </a:lnRef>
-          <a:fillRef idx="3">
-            <a:schemeClr val="accent1"/>
-          </a:fillRef>
-          <a:effectRef idx="2">
-            <a:schemeClr val="accent1"/>
-          </a:effectRef>
-          <a:fontRef idx="minor">
-            <a:schemeClr val="lt1"/>
-          </a:fontRef>
-        </p:style>
-        <p:txBody>
-          <a:bodyPr rtlCol="0" anchor="ctr"/>
-          <a:lstStyle/>
-          <a:p>
-            <a:pPr algn="ctr"/>
-          </a:p>
-        </p:txBody>
-      </p:sp>
-      <p:sp>
-        <p:nvSpPr>
-          <p:cNvPr id="16" name="TextBox 15"/>
-          <p:cNvSpPr txBox="1"/>
-          <p:nvPr/>
-        </p:nvSpPr>
-        <p:spPr>
-          <a:xfrm>
-            <a:off x="594360" y="3271266"/>
-            <a:ext cx="438912" cy="438912"/>
-          </a:xfrm>
-          <a:prstGeom prst="rect">
-            <a:avLst/>
-          </a:prstGeom>
-          <a:noFill/>
-        </p:spPr>
-        <p:txBody>
-          <a:bodyPr wrap="square" anchor="ctr"/>
-          <a:lstStyle/>
-          <a:p>
-            <a:pPr algn="ctr"/>
-            <a:r>
-              <a:rPr sz="1600" b="1" i="0">
-                <a:solidFill>
-                  <a:srgbClr val="FFFFFF"/>
-                </a:solidFill>
-                <a:latin typeface="Calibri"/>
-              </a:rPr>
-              <a:t>3</a:t>
-            </a:r>
-          </a:p>
-        </p:txBody>
-      </p:sp>
-      <p:sp>
-        <p:nvSpPr>
-          <p:cNvPr id="17" name="TextBox 16"/>
-          <p:cNvSpPr txBox="1"/>
-          <p:nvPr/>
-        </p:nvSpPr>
-        <p:spPr>
-          <a:xfrm>
-            <a:off x="1188720" y="3209544"/>
-            <a:ext cx="10271455" cy="580644"/>
-          </a:xfrm>
-          <a:prstGeom prst="rect">
-            <a:avLst/>
-          </a:prstGeom>
-          <a:noFill/>
-        </p:spPr>
-        <p:txBody>
-          <a:bodyPr wrap="square" anchor="ctr"/>
-          <a:lstStyle/>
-          <a:p>
-            <a:r>
-              <a:rPr sz="1500" b="1" i="0">
-                <a:solidFill>
-                  <a:srgbClr val="095292"/>
-                </a:solidFill>
-                <a:latin typeface="Calibri"/>
-              </a:rPr>
-              <a:t>Tramo 3 · 3 min</a:t>
+              <a:rPr sz="2000" b="0" i="0">
+                <a:solidFill>
+                  <a:srgbClr val="333333"/>
+                </a:solidFill>
+                <a:latin typeface="Calibri"/>
+              </a:rPr>
+              <a:t>–   Antes de la primera exposición, </a:t>
+            </a:r>
+            <a:r>
+              <a:rPr sz="2000" b="1" i="0">
+                <a:solidFill>
+                  <a:srgbClr val="333333"/>
+                </a:solidFill>
+                <a:latin typeface="Calibri"/>
+              </a:rPr>
+              <a:t>verifique en voz alta el plan B de los cinco equipos</a:t>
+            </a:r>
+            <a:r>
+              <a:rPr sz="2000" b="0" i="0">
+                <a:solidFill>
+                  <a:srgbClr val="333333"/>
+                </a:solidFill>
+                <a:latin typeface="Calibri"/>
+              </a:rPr>
+              <a:t>: PDF descargado y capturas en la carpeta.</a:t>
             </a:r>
           </a:p>
           <a:p>
             <a:pPr>
-              <a:spcBef>
-                <a:spcPts val="200"/>
-              </a:spcBef>
+              <a:spcAft>
+                <a:spcPts val="800"/>
+              </a:spcAft>
             </a:pPr>
             <a:r>
-              <a:rPr sz="1300" b="0" i="0">
-                <a:solidFill>
-                  <a:srgbClr val="333333"/>
-                </a:solidFill>
-                <a:latin typeface="Calibri"/>
-              </a:rPr>
-              <a:t>El prototipo en vivo: tres pasos, una tarea cumpliéndose.</a:t>
-            </a:r>
-          </a:p>
-        </p:txBody>
-      </p:sp>
-      <p:sp>
-        <p:nvSpPr>
-          <p:cNvPr id="18" name="Rounded Rectangle 17"/>
-          <p:cNvSpPr/>
-          <p:nvPr/>
-        </p:nvSpPr>
-        <p:spPr>
-          <a:xfrm>
-            <a:off x="457200" y="3954780"/>
-            <a:ext cx="11277295" cy="745236"/>
-          </a:xfrm>
-          <a:prstGeom prst="roundRect">
-            <a:avLst>
-              <a:gd name="adj" fmla="val 12000"/>
-            </a:avLst>
-          </a:prstGeom>
-          <a:solidFill>
-            <a:srgbClr val="E8F4FA"/>
-          </a:solidFill>
-          <a:ln>
-            <a:noFill/>
-          </a:ln>
-        </p:spPr>
-        <p:style>
-          <a:lnRef idx="1">
-            <a:schemeClr val="accent1"/>
-          </a:lnRef>
-          <a:fillRef idx="3">
-            <a:schemeClr val="accent1"/>
-          </a:fillRef>
-          <a:effectRef idx="2">
-            <a:schemeClr val="accent1"/>
-          </a:effectRef>
-          <a:fontRef idx="minor">
-            <a:schemeClr val="lt1"/>
-          </a:fontRef>
-        </p:style>
-        <p:txBody>
-          <a:bodyPr rtlCol="0" anchor="ctr"/>
-          <a:lstStyle/>
-          <a:p>
-            <a:pPr algn="ctr"/>
-          </a:p>
-        </p:txBody>
-      </p:sp>
-      <p:sp>
-        <p:nvSpPr>
-          <p:cNvPr id="19" name="Rounded Rectangle 18"/>
-          <p:cNvSpPr/>
-          <p:nvPr/>
-        </p:nvSpPr>
-        <p:spPr>
-          <a:xfrm>
-            <a:off x="594360" y="4107942"/>
-            <a:ext cx="438912" cy="438912"/>
-          </a:xfrm>
-          <a:prstGeom prst="roundRect">
-            <a:avLst>
-              <a:gd name="adj" fmla="val 12000"/>
-            </a:avLst>
-          </a:prstGeom>
-          <a:solidFill>
-            <a:srgbClr val="095292"/>
-          </a:solidFill>
-          <a:ln>
-            <a:noFill/>
-          </a:ln>
-        </p:spPr>
-        <p:style>
-          <a:lnRef idx="1">
-            <a:schemeClr val="accent1"/>
-          </a:lnRef>
-          <a:fillRef idx="3">
-            <a:schemeClr val="accent1"/>
-          </a:fillRef>
-          <a:effectRef idx="2">
-            <a:schemeClr val="accent1"/>
-          </a:effectRef>
-          <a:fontRef idx="minor">
-            <a:schemeClr val="lt1"/>
-          </a:fontRef>
-        </p:style>
-        <p:txBody>
-          <a:bodyPr rtlCol="0" anchor="ctr"/>
-          <a:lstStyle/>
-          <a:p>
-            <a:pPr algn="ctr"/>
-          </a:p>
-        </p:txBody>
-      </p:sp>
-      <p:sp>
-        <p:nvSpPr>
-          <p:cNvPr id="20" name="TextBox 19"/>
-          <p:cNvSpPr txBox="1"/>
-          <p:nvPr/>
-        </p:nvSpPr>
-        <p:spPr>
-          <a:xfrm>
-            <a:off x="594360" y="4107942"/>
-            <a:ext cx="438912" cy="438912"/>
-          </a:xfrm>
-          <a:prstGeom prst="rect">
-            <a:avLst/>
-          </a:prstGeom>
-          <a:noFill/>
-        </p:spPr>
-        <p:txBody>
-          <a:bodyPr wrap="square" anchor="ctr"/>
-          <a:lstStyle/>
-          <a:p>
-            <a:pPr algn="ctr"/>
-            <a:r>
-              <a:rPr sz="1600" b="1" i="0">
-                <a:solidFill>
-                  <a:srgbClr val="FFFFFF"/>
-                </a:solidFill>
-                <a:latin typeface="Calibri"/>
-              </a:rPr>
-              <a:t>4</a:t>
-            </a:r>
-          </a:p>
-        </p:txBody>
-      </p:sp>
-      <p:sp>
-        <p:nvSpPr>
-          <p:cNvPr id="21" name="TextBox 20"/>
-          <p:cNvSpPr txBox="1"/>
-          <p:nvPr/>
-        </p:nvSpPr>
-        <p:spPr>
-          <a:xfrm>
-            <a:off x="1188720" y="4046220"/>
-            <a:ext cx="10271455" cy="580644"/>
-          </a:xfrm>
-          <a:prstGeom prst="rect">
-            <a:avLst/>
-          </a:prstGeom>
-          <a:noFill/>
-        </p:spPr>
-        <p:txBody>
-          <a:bodyPr wrap="square" anchor="ctr"/>
-          <a:lstStyle/>
-          <a:p>
-            <a:r>
-              <a:rPr sz="1500" b="1" i="0">
-                <a:solidFill>
-                  <a:srgbClr val="095292"/>
-                </a:solidFill>
-                <a:latin typeface="Calibri"/>
-              </a:rPr>
-              <a:t>Tramo 4 · 2 min</a:t>
+              <a:rPr sz="2000" b="0" i="0">
+                <a:solidFill>
+                  <a:srgbClr val="333333"/>
+                </a:solidFill>
+                <a:latin typeface="Calibri"/>
+              </a:rPr>
+              <a:t>–   Toma dos minutos y cada semestre salva al menos un equipo.</a:t>
             </a:r>
           </a:p>
           <a:p>
             <a:pPr>
-              <a:spcBef>
-                <a:spcPts val="200"/>
-              </a:spcBef>
+              <a:spcAft>
+                <a:spcPts val="800"/>
+              </a:spcAft>
             </a:pPr>
             <a:r>
-              <a:rPr sz="1300" b="0" i="0">
-                <a:solidFill>
-                  <a:srgbClr val="333333"/>
-                </a:solidFill>
-                <a:latin typeface="Calibri"/>
-              </a:rPr>
-              <a:t>Los hallazgos de la prueba, lo que se arregló y lo que no.</a:t>
-            </a:r>
-          </a:p>
-        </p:txBody>
-      </p:sp>
-      <p:sp>
-        <p:nvSpPr>
-          <p:cNvPr id="22" name="Rounded Rectangle 21"/>
-          <p:cNvSpPr/>
-          <p:nvPr/>
-        </p:nvSpPr>
-        <p:spPr>
-          <a:xfrm>
-            <a:off x="457200" y="4791456"/>
-            <a:ext cx="11277295" cy="745236"/>
-          </a:xfrm>
-          <a:prstGeom prst="roundRect">
-            <a:avLst>
-              <a:gd name="adj" fmla="val 12000"/>
-            </a:avLst>
-          </a:prstGeom>
-          <a:solidFill>
-            <a:srgbClr val="F2F2F2"/>
-          </a:solidFill>
-          <a:ln>
-            <a:noFill/>
-          </a:ln>
-        </p:spPr>
-        <p:style>
-          <a:lnRef idx="1">
-            <a:schemeClr val="accent1"/>
-          </a:lnRef>
-          <a:fillRef idx="3">
-            <a:schemeClr val="accent1"/>
-          </a:fillRef>
-          <a:effectRef idx="2">
-            <a:schemeClr val="accent1"/>
-          </a:effectRef>
-          <a:fontRef idx="minor">
-            <a:schemeClr val="lt1"/>
-          </a:fontRef>
-        </p:style>
-        <p:txBody>
-          <a:bodyPr rtlCol="0" anchor="ctr"/>
-          <a:lstStyle/>
-          <a:p>
-            <a:pPr algn="ctr"/>
-          </a:p>
-        </p:txBody>
-      </p:sp>
-      <p:sp>
-        <p:nvSpPr>
-          <p:cNvPr id="23" name="Rounded Rectangle 22"/>
-          <p:cNvSpPr/>
-          <p:nvPr/>
-        </p:nvSpPr>
-        <p:spPr>
-          <a:xfrm>
-            <a:off x="594360" y="4944618"/>
-            <a:ext cx="438912" cy="438912"/>
-          </a:xfrm>
-          <a:prstGeom prst="roundRect">
-            <a:avLst>
-              <a:gd name="adj" fmla="val 12000"/>
-            </a:avLst>
-          </a:prstGeom>
-          <a:solidFill>
-            <a:srgbClr val="095292"/>
-          </a:solidFill>
-          <a:ln>
-            <a:noFill/>
-          </a:ln>
-        </p:spPr>
-        <p:style>
-          <a:lnRef idx="1">
-            <a:schemeClr val="accent1"/>
-          </a:lnRef>
-          <a:fillRef idx="3">
-            <a:schemeClr val="accent1"/>
-          </a:fillRef>
-          <a:effectRef idx="2">
-            <a:schemeClr val="accent1"/>
-          </a:effectRef>
-          <a:fontRef idx="minor">
-            <a:schemeClr val="lt1"/>
-          </a:fontRef>
-        </p:style>
-        <p:txBody>
-          <a:bodyPr rtlCol="0" anchor="ctr"/>
-          <a:lstStyle/>
-          <a:p>
-            <a:pPr algn="ctr"/>
-          </a:p>
-        </p:txBody>
-      </p:sp>
-      <p:sp>
-        <p:nvSpPr>
-          <p:cNvPr id="24" name="TextBox 23"/>
-          <p:cNvSpPr txBox="1"/>
-          <p:nvPr/>
-        </p:nvSpPr>
-        <p:spPr>
-          <a:xfrm>
-            <a:off x="594360" y="4944618"/>
-            <a:ext cx="438912" cy="438912"/>
-          </a:xfrm>
-          <a:prstGeom prst="rect">
-            <a:avLst/>
-          </a:prstGeom>
-          <a:noFill/>
-        </p:spPr>
-        <p:txBody>
-          <a:bodyPr wrap="square" anchor="ctr"/>
-          <a:lstStyle/>
-          <a:p>
-            <a:pPr algn="ctr"/>
-            <a:r>
-              <a:rPr sz="1600" b="1" i="0">
-                <a:solidFill>
-                  <a:srgbClr val="FFFFFF"/>
-                </a:solidFill>
-                <a:latin typeface="Calibri"/>
-              </a:rPr>
-              <a:t>5</a:t>
-            </a:r>
-          </a:p>
-        </p:txBody>
-      </p:sp>
-      <p:sp>
-        <p:nvSpPr>
-          <p:cNvPr id="25" name="TextBox 24"/>
-          <p:cNvSpPr txBox="1"/>
-          <p:nvPr/>
-        </p:nvSpPr>
-        <p:spPr>
-          <a:xfrm>
-            <a:off x="1188720" y="4882896"/>
-            <a:ext cx="10271455" cy="580644"/>
-          </a:xfrm>
-          <a:prstGeom prst="rect">
-            <a:avLst/>
-          </a:prstGeom>
-          <a:noFill/>
-        </p:spPr>
-        <p:txBody>
-          <a:bodyPr wrap="square" anchor="ctr"/>
-          <a:lstStyle/>
-          <a:p>
-            <a:r>
-              <a:rPr sz="1500" b="1" i="0">
-                <a:solidFill>
-                  <a:srgbClr val="095292"/>
-                </a:solidFill>
-                <a:latin typeface="Calibri"/>
-              </a:rPr>
-              <a:t>Tramo 5 · 1 min</a:t>
+              <a:rPr sz="2000" b="0" i="0">
+                <a:solidFill>
+                  <a:srgbClr val="333333"/>
+                </a:solidFill>
+                <a:latin typeface="Calibri"/>
+              </a:rPr>
+              <a:t>–   Un equipo que no lo tenga y cuyo prototipo no cargue pierde el tramo de 25 puntos por algo que se prevenía en cinco minutos.</a:t>
             </a:r>
           </a:p>
           <a:p>
             <a:pPr>
-              <a:spcBef>
-                <a:spcPts val="200"/>
-              </a:spcBef>
+              <a:spcAft>
+                <a:spcPts val="800"/>
+              </a:spcAft>
             </a:pPr>
             <a:r>
-              <a:rPr sz="1300" b="0" i="0">
-                <a:solidFill>
-                  <a:srgbClr val="333333"/>
-                </a:solidFill>
-                <a:latin typeface="Calibri"/>
-              </a:rPr>
-              <a:t>Impacto positivo con su número, negativo con su mitigación, siguiente paso.</a:t>
-            </a:r>
-          </a:p>
-        </p:txBody>
-      </p:sp>
-      <p:sp>
-        <p:nvSpPr>
-          <p:cNvPr id="26" name="Rounded Rectangle 25"/>
-          <p:cNvSpPr/>
-          <p:nvPr/>
-        </p:nvSpPr>
-        <p:spPr>
-          <a:xfrm>
-            <a:off x="457200" y="5628132"/>
-            <a:ext cx="11277295" cy="745236"/>
-          </a:xfrm>
-          <a:prstGeom prst="roundRect">
-            <a:avLst>
-              <a:gd name="adj" fmla="val 12000"/>
-            </a:avLst>
-          </a:prstGeom>
-          <a:solidFill>
-            <a:srgbClr val="E8F4FA"/>
-          </a:solidFill>
-          <a:ln>
-            <a:noFill/>
-          </a:ln>
-        </p:spPr>
-        <p:style>
-          <a:lnRef idx="1">
-            <a:schemeClr val="accent1"/>
-          </a:lnRef>
-          <a:fillRef idx="3">
-            <a:schemeClr val="accent1"/>
-          </a:fillRef>
-          <a:effectRef idx="2">
-            <a:schemeClr val="accent1"/>
-          </a:effectRef>
-          <a:fontRef idx="minor">
-            <a:schemeClr val="lt1"/>
-          </a:fontRef>
-        </p:style>
-        <p:txBody>
-          <a:bodyPr rtlCol="0" anchor="ctr"/>
-          <a:lstStyle/>
-          <a:p>
-            <a:pPr algn="ctr"/>
-          </a:p>
-        </p:txBody>
-      </p:sp>
-      <p:sp>
-        <p:nvSpPr>
-          <p:cNvPr id="27" name="Rounded Rectangle 26"/>
-          <p:cNvSpPr/>
-          <p:nvPr/>
-        </p:nvSpPr>
-        <p:spPr>
-          <a:xfrm>
-            <a:off x="594360" y="5781294"/>
-            <a:ext cx="438912" cy="438912"/>
-          </a:xfrm>
-          <a:prstGeom prst="roundRect">
-            <a:avLst>
-              <a:gd name="adj" fmla="val 12000"/>
-            </a:avLst>
-          </a:prstGeom>
-          <a:solidFill>
-            <a:srgbClr val="095292"/>
-          </a:solidFill>
-          <a:ln>
-            <a:noFill/>
-          </a:ln>
-        </p:spPr>
-        <p:style>
-          <a:lnRef idx="1">
-            <a:schemeClr val="accent1"/>
-          </a:lnRef>
-          <a:fillRef idx="3">
-            <a:schemeClr val="accent1"/>
-          </a:fillRef>
-          <a:effectRef idx="2">
-            <a:schemeClr val="accent1"/>
-          </a:effectRef>
-          <a:fontRef idx="minor">
-            <a:schemeClr val="lt1"/>
-          </a:fontRef>
-        </p:style>
-        <p:txBody>
-          <a:bodyPr rtlCol="0" anchor="ctr"/>
-          <a:lstStyle/>
-          <a:p>
-            <a:pPr algn="ctr"/>
-          </a:p>
-        </p:txBody>
-      </p:sp>
-      <p:sp>
-        <p:nvSpPr>
-          <p:cNvPr id="28" name="TextBox 27"/>
-          <p:cNvSpPr txBox="1"/>
-          <p:nvPr/>
-        </p:nvSpPr>
-        <p:spPr>
-          <a:xfrm>
-            <a:off x="594360" y="5781294"/>
-            <a:ext cx="438912" cy="438912"/>
-          </a:xfrm>
-          <a:prstGeom prst="rect">
-            <a:avLst/>
-          </a:prstGeom>
-          <a:noFill/>
-        </p:spPr>
-        <p:txBody>
-          <a:bodyPr wrap="square" anchor="ctr"/>
-          <a:lstStyle/>
-          <a:p>
-            <a:pPr algn="ctr"/>
-            <a:r>
-              <a:rPr sz="1600" b="1" i="0">
-                <a:solidFill>
-                  <a:srgbClr val="FFFFFF"/>
-                </a:solidFill>
-                <a:latin typeface="Calibri"/>
-              </a:rPr>
-              <a:t>6</a:t>
-            </a:r>
-          </a:p>
-        </p:txBody>
-      </p:sp>
-      <p:sp>
-        <p:nvSpPr>
-          <p:cNvPr id="29" name="TextBox 28"/>
-          <p:cNvSpPr txBox="1"/>
-          <p:nvPr/>
-        </p:nvSpPr>
-        <p:spPr>
-          <a:xfrm>
-            <a:off x="1188720" y="5719572"/>
-            <a:ext cx="10271455" cy="580644"/>
-          </a:xfrm>
-          <a:prstGeom prst="rect">
-            <a:avLst/>
-          </a:prstGeom>
-          <a:noFill/>
-        </p:spPr>
-        <p:txBody>
-          <a:bodyPr wrap="square" anchor="ctr"/>
-          <a:lstStyle/>
-          <a:p>
-            <a:r>
-              <a:rPr sz="1500" b="1" i="0">
-                <a:solidFill>
-                  <a:srgbClr val="095292"/>
-                </a:solidFill>
-                <a:latin typeface="Calibri"/>
-              </a:rPr>
-              <a:t>Preguntas · 3 min</a:t>
+              <a:rPr sz="2000" b="0" i="0">
+                <a:solidFill>
+                  <a:srgbClr val="333333"/>
+                </a:solidFill>
+                <a:latin typeface="Calibri"/>
+              </a:rPr>
+              <a:t>–   Sobre el rol de quien no expone, hay que ser explícito porque de lo contrario nadie escucha: </a:t>
+            </a:r>
+            <a:r>
+              <a:rPr sz="2000" b="1" i="0">
+                <a:solidFill>
+                  <a:srgbClr val="333333"/>
+                </a:solidFill>
+                <a:latin typeface="Calibri"/>
+              </a:rPr>
+              <a:t>la ficha de valoración entre pares se califica</a:t>
+            </a:r>
+            <a:r>
+              <a:rPr sz="2000" b="0" i="0">
+                <a:solidFill>
+                  <a:srgbClr val="333333"/>
+                </a:solidFill>
+                <a:latin typeface="Calibri"/>
+              </a:rPr>
+              <a:t>, dentro de la nota de exposiciones del corte.</a:t>
             </a:r>
           </a:p>
           <a:p>
             <a:pPr>
-              <a:spcBef>
-                <a:spcPts val="200"/>
-              </a:spcBef>
+              <a:spcAft>
+                <a:spcPts val="800"/>
+              </a:spcAft>
             </a:pPr>
             <a:r>
-              <a:rPr sz="1300" b="0" i="0">
-                <a:solidFill>
-                  <a:srgbClr val="333333"/>
-                </a:solidFill>
-                <a:latin typeface="Calibri"/>
-              </a:rPr>
-              <a:t>Una del curso y una del docente. </a:t>
-            </a:r>
-            <a:r>
-              <a:rPr sz="1300" b="1" i="0">
-                <a:solidFill>
-                  <a:srgbClr val="333333"/>
-                </a:solidFill>
-                <a:latin typeface="Calibri"/>
-              </a:rPr>
-              <a:t>Responde quien tiene el tramo.</a:t>
-            </a:r>
-          </a:p>
-        </p:txBody>
-      </p:sp>
-      <p:sp>
-        <p:nvSpPr>
-          <p:cNvPr id="30" name="TextBox 29"/>
+              <a:rPr sz="2000" b="0" i="0">
+                <a:solidFill>
+                  <a:srgbClr val="333333"/>
+                </a:solidFill>
+                <a:latin typeface="Calibri"/>
+              </a:rPr>
+              <a:t>–   Una fila por equipo con lo más fuerte, lo que no quedó claro y una pregunta.</a:t>
+            </a:r>
+          </a:p>
+          <a:p>
+            <a:pPr>
+              <a:spcAft>
+                <a:spcPts val="800"/>
+              </a:spcAft>
+            </a:pPr>
+            <a:r>
+              <a:rPr sz="2000" b="0" i="0">
+                <a:solidFill>
+                  <a:srgbClr val="333333"/>
+                </a:solidFill>
+                <a:latin typeface="Calibri"/>
+              </a:rPr>
+              <a:t>–   Y la ficha tiene un beneficio para quien la llena: obliga a comparar el proyecto propio con cuatro más, que es la manera más rápida de ver los vacíos del propio informe.</a:t>
+            </a:r>
+          </a:p>
+        </p:txBody>
+      </p:sp>
+      <p:sp>
+        <p:nvSpPr>
+          <p:cNvPr id="6" name="TextBox 5"/>
           <p:cNvSpPr txBox="1"/>
           <p:nvPr/>
         </p:nvSpPr>
@@ -4867,7 +3977,7 @@
                 </a:solidFill>
                 <a:latin typeface="Calibri"/>
               </a:rPr>
-              <a:t>Para la Clase 16</a:t>
+              <a:t>Cómo se califica cada tramo, sin discutir con el reloj (1/2)</a:t>
             </a:r>
           </a:p>
         </p:txBody>
@@ -4906,7 +4016,7 @@
                 </a:solidFill>
                 <a:latin typeface="Calibri"/>
               </a:rPr>
-              <a:t>–   </a:t>
+              <a:t>–   La rúbrica se proyecta al empezar y hay que dejarla visible: calificar con criterios publicados evita la discusión posterior y, sobre todo, </a:t>
             </a:r>
             <a:r>
               <a:rPr sz="2000" b="1" i="0">
@@ -4915,7 +4025,7 @@
                 </a:solidFill>
                 <a:latin typeface="Calibri"/>
               </a:rPr>
-              <a:t>Trabajo dirigido:</a:t>
+              <a:t>le dice al que expone qué es lo importante</a:t>
             </a:r>
             <a:r>
               <a:rPr sz="2000" b="0" i="0">
@@ -4924,7 +4034,7 @@
                 </a:solidFill>
                 <a:latin typeface="Calibri"/>
               </a:rPr>
-              <a:t> Valoración de presentaciones — completar la ficha de valoración de los otros cuatro equipos en el muro, si no quedó terminada en clase.</a:t>
+              <a:t>.</a:t>
             </a:r>
           </a:p>
           <a:p>
@@ -4940,79 +4050,7 @@
                 </a:solidFill>
                 <a:latin typeface="Calibri"/>
               </a:rPr>
-              <a:t>–   </a:t>
-            </a:r>
-            <a:r>
-              <a:rPr sz="2000" b="1" i="0">
-                <a:solidFill>
-                  <a:srgbClr val="333333"/>
-                </a:solidFill>
-                <a:latin typeface="Calibri"/>
-              </a:rPr>
-              <a:t>Trabajo independiente:</a:t>
-            </a:r>
-            <a:r>
-              <a:rPr sz="2000" b="0" i="0">
-                <a:solidFill>
-                  <a:srgbClr val="333333"/>
-                </a:solidFill>
-                <a:latin typeface="Calibri"/>
-              </a:rPr>
-              <a:t> Ajustes del informe final: </a:t>
-            </a:r>
-            <a:r>
-              <a:rPr sz="2000" b="1" i="0">
-                <a:solidFill>
-                  <a:srgbClr val="333333"/>
-                </a:solidFill>
-                <a:latin typeface="Calibri"/>
-              </a:rPr>
-              <a:t>reunir las doce secciones</a:t>
-            </a:r>
-            <a:r>
-              <a:rPr sz="2000" b="0" i="0">
-                <a:solidFill>
-                  <a:srgbClr val="333333"/>
-                </a:solidFill>
-                <a:latin typeface="Calibri"/>
-              </a:rPr>
-              <a:t> en un solo documento, tomando lo que ya está escrito desde la sesión 3, y </a:t>
-            </a:r>
-            <a:r>
-              <a:rPr sz="2000" b="1" i="0">
-                <a:solidFill>
-                  <a:srgbClr val="333333"/>
-                </a:solidFill>
-                <a:latin typeface="Calibri"/>
-              </a:rPr>
-              <a:t>escribir el resumen de media página</a:t>
-            </a:r>
-            <a:r>
-              <a:rPr sz="2000" b="0" i="0">
-                <a:solidFill>
-                  <a:srgbClr val="333333"/>
-                </a:solidFill>
-                <a:latin typeface="Calibri"/>
-              </a:rPr>
-              <a:t>, que es lo único nuevo. Y una tarea corta que vale mucho: </a:t>
-            </a:r>
-            <a:r>
-              <a:rPr sz="2000" b="1" i="0">
-                <a:solidFill>
-                  <a:srgbClr val="333333"/>
-                </a:solidFill>
-                <a:latin typeface="Calibri"/>
-              </a:rPr>
-              <a:t>anotar lo que el curso no entendió</a:t>
-            </a:r>
-            <a:r>
-              <a:rPr sz="2000" b="0" i="0">
-                <a:solidFill>
-                  <a:srgbClr val="333333"/>
-                </a:solidFill>
-                <a:latin typeface="Calibri"/>
-              </a:rPr>
-              <a:t> hoy de su proyecto.</a:t>
+              <a:t>–   Los pesos no son arbitrarios — el tramo 3 vale más porque es la evidencia de que hicieron algo</a:t>
             </a:r>
           </a:p>
           <a:p>
@@ -5028,7 +4066,7 @@
                 </a:solidFill>
                 <a:latin typeface="Calibri"/>
               </a:rPr>
-              <a:t>–   </a:t>
+              <a:t>–   Y el tramo 4 vale 20 porque es lo que distingue un proyecto de una idea. </a:t>
             </a:r>
             <a:r>
               <a:rPr sz="2000" b="1" i="0">
@@ -5037,7 +4075,7 @@
                 </a:solidFill>
                 <a:latin typeface="Calibri"/>
               </a:rPr>
-              <a:t>Clase 16 · Socialización y evaluación final del curso</a:t>
+              <a:t>Califique mientras escucha, no después.</a:t>
             </a:r>
             <a:r>
               <a:rPr sz="2000" b="0" i="0">
@@ -5046,43 +4084,7 @@
                 </a:solidFill>
                 <a:latin typeface="Calibri"/>
               </a:rPr>
-              <a:t> — es la última: se </a:t>
-            </a:r>
-            <a:r>
-              <a:rPr sz="2000" b="1" i="0">
-                <a:solidFill>
-                  <a:srgbClr val="333333"/>
-                </a:solidFill>
-                <a:latin typeface="Calibri"/>
-              </a:rPr>
-              <a:t>entrega el informe final (20 %)</a:t>
-            </a:r>
-            <a:r>
-              <a:rPr sz="2000" b="0" i="0">
-                <a:solidFill>
-                  <a:srgbClr val="333333"/>
-                </a:solidFill>
-                <a:latin typeface="Calibri"/>
-              </a:rPr>
-              <a:t>, se socializa la galería de proyectos del curso y se hace la </a:t>
-            </a:r>
-            <a:r>
-              <a:rPr sz="2000" b="1" i="0">
-                <a:solidFill>
-                  <a:srgbClr val="333333"/>
-                </a:solidFill>
-                <a:latin typeface="Calibri"/>
-              </a:rPr>
-              <a:t>autoevaluación y coevaluación</a:t>
-            </a:r>
-            <a:r>
-              <a:rPr sz="2000" b="0" i="0">
-                <a:solidFill>
-                  <a:srgbClr val="333333"/>
-                </a:solidFill>
-                <a:latin typeface="Calibri"/>
-              </a:rPr>
-              <a:t>.</a:t>
+              <a:t> Con cinco equipos seguidos, la memoria mezcla las exposiciones y termina premiando al último.</a:t>
             </a:r>
           </a:p>
           <a:p>
@@ -5098,43 +4100,7 @@
                 </a:solidFill>
                 <a:latin typeface="Calibri"/>
               </a:rPr>
-              <a:t>–   </a:t>
-            </a:r>
-            <a:r>
-              <a:rPr sz="2000" b="1" i="0">
-                <a:solidFill>
-                  <a:srgbClr val="333333"/>
-                </a:solidFill>
-                <a:latin typeface="Calibri"/>
-              </a:rPr>
-              <a:t>Aviso:</a:t>
-            </a:r>
-            <a:r>
-              <a:rPr sz="2000" b="0" i="0">
-                <a:solidFill>
-                  <a:srgbClr val="333333"/>
-                </a:solidFill>
-                <a:latin typeface="Calibri"/>
-              </a:rPr>
-              <a:t> El informe se entrega </a:t>
-            </a:r>
-            <a:r>
-              <a:rPr sz="2000" b="1" i="0">
-                <a:solidFill>
-                  <a:srgbClr val="333333"/>
-                </a:solidFill>
-                <a:latin typeface="Calibri"/>
-              </a:rPr>
-              <a:t>en la Clase 16, dentro de la clase</a:t>
-            </a:r>
-            <a:r>
-              <a:rPr sz="2000" b="0" i="0">
-                <a:solidFill>
-                  <a:srgbClr val="333333"/>
-                </a:solidFill>
-                <a:latin typeface="Calibri"/>
-              </a:rPr>
-              <a:t>: se revisa y se completa ahí mismo, con la lista de verificación. Lleguen con el documento armado —no con las secciones dispersas en cinco archivos— porque los 24 minutos de revisión no alcanzan para copiar y pegar el curso entero.</a:t>
+              <a:t>–   Tenga la tabla de cinco tramos por equipo abierta y anote el puntaje al terminar cada tramo, más una frase de por qué.</a:t>
             </a:r>
           </a:p>
           <a:p>
@@ -5150,7 +4116,39 @@
                 </a:solidFill>
                 <a:latin typeface="Calibri"/>
               </a:rPr>
-              <a:t>–   </a:t>
+              <a:t>–   Esa frase es lo que después se devuelve como retroalimentación. **Los dos descuentos hay que aplicarlos</a:t>
+            </a:r>
+          </a:p>
+          <a:p>
+            <a:pPr>
+              <a:spcAft>
+                <a:spcPts val="800"/>
+              </a:spcAft>
+            </a:pPr>
+            <a:r>
+              <a:rPr sz="2000" b="0" i="0">
+                <a:solidFill>
+                  <a:srgbClr val="333333"/>
+                </a:solidFill>
+                <a:latin typeface="Calibri"/>
+              </a:rPr>
+              <a:t>–   Y anunciarlos antes.** Hasta 10 puntos si no todos los integrantes hablan —porque la exposición en equipo es lo que se está evaluando— y hasta 10 si nadie sabe responder una pregunta de su propio tramo.</a:t>
+            </a:r>
+          </a:p>
+          <a:p>
+            <a:pPr>
+              <a:spcAft>
+                <a:spcPts val="800"/>
+              </a:spcAft>
+            </a:pPr>
+            <a:r>
+              <a:rPr sz="2000" b="0" i="0">
+                <a:solidFill>
+                  <a:srgbClr val="333333"/>
+                </a:solidFill>
+                <a:latin typeface="Calibri"/>
+              </a:rPr>
+              <a:t>–   El segundo descuento es el que más enseña: destapa al equipo donde uno solo hizo el trabajo y los demás leyeron un guion. </a:t>
             </a:r>
             <a:r>
               <a:rPr sz="2000" b="1" i="0">
@@ -5159,7 +4157,7 @@
                 </a:solidFill>
                 <a:latin typeface="Calibri"/>
               </a:rPr>
-              <a:t>Antes de salir:</a:t>
+              <a:t>Sobre el corte a los nueve minutos:</a:t>
             </a:r>
             <a:r>
               <a:rPr sz="2000" b="0" i="0">
@@ -5168,7 +4166,7 @@
                 </a:solidFill>
                 <a:latin typeface="Calibri"/>
               </a:rPr>
-              <a:t> el enlace del documento del equipo en el chat, con permiso de lectura para el docente, y el nombre del vocero de hoy.</a:t>
+              <a:t> avise en el chat a los 8, y corte a los 9 aunque quede una frase a medias.</a:t>
             </a:r>
           </a:p>
         </p:txBody>
@@ -5243,7 +4241,1933 @@
         <p:spPr>
           <a:xfrm>
             <a:off x="0" y="0"/>
-            <a:ext cx="12191695" cy="164592"/>
+            <a:ext cx="12191695" cy="960120"/>
+          </a:xfrm>
+          <a:prstGeom prst="rect">
+            <a:avLst/>
+          </a:prstGeom>
+          <a:solidFill>
+            <a:srgbClr val="095292"/>
+          </a:solidFill>
+          <a:ln>
+            <a:noFill/>
+          </a:ln>
+        </p:spPr>
+        <p:style>
+          <a:lnRef idx="1">
+            <a:schemeClr val="accent1"/>
+          </a:lnRef>
+          <a:fillRef idx="3">
+            <a:schemeClr val="accent1"/>
+          </a:fillRef>
+          <a:effectRef idx="2">
+            <a:schemeClr val="accent1"/>
+          </a:effectRef>
+          <a:fontRef idx="minor">
+            <a:schemeClr val="lt1"/>
+          </a:fontRef>
+        </p:style>
+        <p:txBody>
+          <a:bodyPr rtlCol="0" anchor="ctr"/>
+          <a:lstStyle/>
+          <a:p>
+            <a:pPr algn="ctr"/>
+          </a:p>
+        </p:txBody>
+      </p:sp>
+      <p:sp>
+        <p:nvSpPr>
+          <p:cNvPr id="3" name="Rectangle 2"/>
+          <p:cNvSpPr/>
+          <p:nvPr/>
+        </p:nvSpPr>
+        <p:spPr>
+          <a:xfrm>
+            <a:off x="0" y="960120"/>
+            <a:ext cx="12191695" cy="41148"/>
+          </a:xfrm>
+          <a:prstGeom prst="rect">
+            <a:avLst/>
+          </a:prstGeom>
+          <a:solidFill>
+            <a:srgbClr val="FFD000"/>
+          </a:solidFill>
+          <a:ln>
+            <a:noFill/>
+          </a:ln>
+        </p:spPr>
+        <p:style>
+          <a:lnRef idx="1">
+            <a:schemeClr val="accent1"/>
+          </a:lnRef>
+          <a:fillRef idx="3">
+            <a:schemeClr val="accent1"/>
+          </a:fillRef>
+          <a:effectRef idx="2">
+            <a:schemeClr val="accent1"/>
+          </a:effectRef>
+          <a:fontRef idx="minor">
+            <a:schemeClr val="lt1"/>
+          </a:fontRef>
+        </p:style>
+        <p:txBody>
+          <a:bodyPr rtlCol="0" anchor="ctr"/>
+          <a:lstStyle/>
+          <a:p>
+            <a:pPr algn="ctr"/>
+          </a:p>
+        </p:txBody>
+      </p:sp>
+      <p:sp>
+        <p:nvSpPr>
+          <p:cNvPr id="4" name="TextBox 3"/>
+          <p:cNvSpPr txBox="1"/>
+          <p:nvPr/>
+        </p:nvSpPr>
+        <p:spPr>
+          <a:xfrm>
+            <a:off x="457200" y="164592"/>
+            <a:ext cx="11277295" cy="502920"/>
+          </a:xfrm>
+          <a:prstGeom prst="rect">
+            <a:avLst/>
+          </a:prstGeom>
+          <a:noFill/>
+        </p:spPr>
+        <p:txBody>
+          <a:bodyPr wrap="square">
+            <a:spAutoFit/>
+          </a:bodyPr>
+          <a:lstStyle/>
+          <a:p>
+            <a:r>
+              <a:rPr sz="2600" b="1" i="0">
+                <a:solidFill>
+                  <a:srgbClr val="FFFFFF"/>
+                </a:solidFill>
+                <a:latin typeface="Calibri"/>
+              </a:rPr>
+              <a:t>Cómo se califica cada tramo, sin discutir con el reloj (2/2)</a:t>
+            </a:r>
+          </a:p>
+        </p:txBody>
+      </p:sp>
+      <p:sp>
+        <p:nvSpPr>
+          <p:cNvPr id="5" name="TextBox 4"/>
+          <p:cNvSpPr txBox="1"/>
+          <p:nvPr/>
+        </p:nvSpPr>
+        <p:spPr>
+          <a:xfrm>
+            <a:off x="457200" y="1170432"/>
+            <a:ext cx="11277295" cy="5230368"/>
+          </a:xfrm>
+          <a:prstGeom prst="rect">
+            <a:avLst/>
+          </a:prstGeom>
+          <a:noFill/>
+        </p:spPr>
+        <p:txBody>
+          <a:bodyPr wrap="square">
+            <a:spAutoFit/>
+          </a:bodyPr>
+          <a:lstStyle/>
+          <a:p>
+            <a:pPr>
+              <a:spcAft>
+                <a:spcPts val="800"/>
+              </a:spcAft>
+            </a:pPr>
+            <a:r>
+              <a:rPr sz="2000" b="0" i="0">
+                <a:solidFill>
+                  <a:srgbClr val="333333"/>
+                </a:solidFill>
+                <a:latin typeface="Calibri"/>
+              </a:rPr>
+              <a:t>–   Es incómodo la primera vez y después el curso lo acepta como parte del juego.</a:t>
+            </a:r>
+          </a:p>
+          <a:p>
+            <a:pPr>
+              <a:spcAft>
+                <a:spcPts val="800"/>
+              </a:spcAft>
+            </a:pPr>
+            <a:r>
+              <a:rPr sz="2000" b="0" i="0">
+                <a:solidFill>
+                  <a:srgbClr val="333333"/>
+                </a:solidFill>
+                <a:latin typeface="Calibri"/>
+              </a:rPr>
+              <a:t>–   El argumento, si alguien reclama, es aritmético y no disciplinario: cinco equipos por 12 minutos son 60</a:t>
+            </a:r>
+          </a:p>
+          <a:p>
+            <a:pPr>
+              <a:spcAft>
+                <a:spcPts val="800"/>
+              </a:spcAft>
+            </a:pPr>
+            <a:r>
+              <a:rPr sz="2000" b="0" i="0">
+                <a:solidFill>
+                  <a:srgbClr val="333333"/>
+                </a:solidFill>
+                <a:latin typeface="Calibri"/>
+              </a:rPr>
+              <a:t>–   Y el tiempo que un equipo se pasa lo pierde el último. </a:t>
+            </a:r>
+            <a:r>
+              <a:rPr sz="2000" b="1" i="0">
+                <a:solidFill>
+                  <a:srgbClr val="333333"/>
+                </a:solidFill>
+                <a:latin typeface="Calibri"/>
+              </a:rPr>
+              <a:t>No descuente puntos adicionales por pasarse</a:t>
+            </a:r>
+            <a:r>
+              <a:rPr sz="2000" b="0" i="0">
+                <a:solidFill>
+                  <a:srgbClr val="333333"/>
+                </a:solidFill>
+                <a:latin typeface="Calibri"/>
+              </a:rPr>
+              <a:t>: el corte ya es el castigo, porque los tramos que faltaban valen cero.</a:t>
+            </a:r>
+          </a:p>
+          <a:p>
+            <a:pPr>
+              <a:spcAft>
+                <a:spcPts val="800"/>
+              </a:spcAft>
+            </a:pPr>
+            <a:r>
+              <a:rPr sz="2000" b="0" i="0">
+                <a:solidFill>
+                  <a:srgbClr val="333333"/>
+                </a:solidFill>
+                <a:latin typeface="Calibri"/>
+              </a:rPr>
+              <a:t>–   Un criterio de calificación que conviene tener claro de antemano: </a:t>
+            </a:r>
+            <a:r>
+              <a:rPr sz="2000" b="1" i="0">
+                <a:solidFill>
+                  <a:srgbClr val="333333"/>
+                </a:solidFill>
+                <a:latin typeface="Calibri"/>
+              </a:rPr>
+              <a:t>un equipo que cuenta un fracaso con honestidad saca más que uno que presenta todo perfecto.</a:t>
+            </a:r>
+            <a:r>
+              <a:rPr sz="2000" b="0" i="0">
+                <a:solidFill>
+                  <a:srgbClr val="333333"/>
+                </a:solidFill>
+                <a:latin typeface="Calibri"/>
+              </a:rPr>
+              <a:t> No es generosidad: en un prototipo de primer semestre</a:t>
+            </a:r>
+          </a:p>
+          <a:p>
+            <a:pPr>
+              <a:spcAft>
+                <a:spcPts val="800"/>
+              </a:spcAft>
+            </a:pPr>
+            <a:r>
+              <a:rPr sz="2000" b="0" i="0">
+                <a:solidFill>
+                  <a:srgbClr val="333333"/>
+                </a:solidFill>
+                <a:latin typeface="Calibri"/>
+              </a:rPr>
+              <a:t>–   «todo funcionó a la primera» significa casi siempre que no se probó con nadie.</a:t>
+            </a:r>
+          </a:p>
+          <a:p>
+            <a:pPr>
+              <a:spcAft>
+                <a:spcPts val="800"/>
+              </a:spcAft>
+            </a:pPr>
+            <a:r>
+              <a:rPr sz="2000" b="0" i="0">
+                <a:solidFill>
+                  <a:srgbClr val="333333"/>
+                </a:solidFill>
+                <a:latin typeface="Calibri"/>
+              </a:rPr>
+              <a:t>–   Si un equipo no reporta ningún hallazgo en el tramo 4, la pregunta obligatoria es </a:t>
+            </a:r>
+            <a:r>
+              <a:rPr sz="2000" b="1" i="0">
+                <a:solidFill>
+                  <a:srgbClr val="333333"/>
+                </a:solidFill>
+                <a:latin typeface="Calibri"/>
+              </a:rPr>
+              <a:t>«¿con quién lo probaron y qué hizo esa persona?»</a:t>
+            </a:r>
+            <a:r>
+              <a:rPr sz="2000" b="0" i="0">
+                <a:solidFill>
+                  <a:srgbClr val="333333"/>
+                </a:solidFill>
+                <a:latin typeface="Calibri"/>
+              </a:rPr>
+              <a:t>.</a:t>
+            </a:r>
+          </a:p>
+        </p:txBody>
+      </p:sp>
+      <p:sp>
+        <p:nvSpPr>
+          <p:cNvPr id="6" name="TextBox 5"/>
+          <p:cNvSpPr txBox="1"/>
+          <p:nvPr/>
+        </p:nvSpPr>
+        <p:spPr>
+          <a:xfrm>
+            <a:off x="11185855" y="6473952"/>
+            <a:ext cx="640080" cy="274320"/>
+          </a:xfrm>
+          <a:prstGeom prst="rect">
+            <a:avLst/>
+          </a:prstGeom>
+          <a:noFill/>
+        </p:spPr>
+        <p:txBody>
+          <a:bodyPr wrap="square">
+            <a:spAutoFit/>
+          </a:bodyPr>
+          <a:lstStyle/>
+          <a:p>
+            <a:pPr algn="r"/>
+            <a:r>
+              <a:rPr sz="1100" b="0" i="0">
+                <a:solidFill>
+                  <a:srgbClr val="666666"/>
+                </a:solidFill>
+                <a:latin typeface="Calibri"/>
+              </a:rPr>
+              <a:t>12</a:t>
+            </a:r>
+          </a:p>
+        </p:txBody>
+      </p:sp>
+    </p:spTree>
+  </p:cSld>
+  <p:clrMapOvr>
+    <a:masterClrMapping/>
+  </p:clrMapOvr>
+</p:sld>
+</file>
+
+<file path=ppt/slides/slide13.xml><?xml version="1.0" encoding="utf-8"?>
+<p:sld xmlns:a="http://schemas.openxmlformats.org/drawingml/2006/main" xmlns:p="http://schemas.openxmlformats.org/presentationml/2006/main" xmlns:r="http://schemas.openxmlformats.org/officeDocument/2006/relationships">
+  <p:cSld>
+    <p:bg>
+      <p:bgPr>
+        <a:solidFill>
+          <a:srgbClr val="FFFFFF"/>
+        </a:solidFill>
+        <a:effectLst/>
+      </p:bgPr>
+    </p:bg>
+    <p:spTree>
+      <p:nvGrpSpPr>
+        <p:cNvPr id="1" name=""/>
+        <p:cNvGrpSpPr/>
+        <p:nvPr/>
+      </p:nvGrpSpPr>
+      <p:grpSpPr/>
+      <p:sp>
+        <p:nvSpPr>
+          <p:cNvPr id="2" name="Rectangle 1"/>
+          <p:cNvSpPr/>
+          <p:nvPr/>
+        </p:nvSpPr>
+        <p:spPr>
+          <a:xfrm>
+            <a:off x="0" y="0"/>
+            <a:ext cx="12191695" cy="960120"/>
+          </a:xfrm>
+          <a:prstGeom prst="rect">
+            <a:avLst/>
+          </a:prstGeom>
+          <a:solidFill>
+            <a:srgbClr val="095292"/>
+          </a:solidFill>
+          <a:ln>
+            <a:noFill/>
+          </a:ln>
+        </p:spPr>
+        <p:style>
+          <a:lnRef idx="1">
+            <a:schemeClr val="accent1"/>
+          </a:lnRef>
+          <a:fillRef idx="3">
+            <a:schemeClr val="accent1"/>
+          </a:fillRef>
+          <a:effectRef idx="2">
+            <a:schemeClr val="accent1"/>
+          </a:effectRef>
+          <a:fontRef idx="minor">
+            <a:schemeClr val="lt1"/>
+          </a:fontRef>
+        </p:style>
+        <p:txBody>
+          <a:bodyPr rtlCol="0" anchor="ctr"/>
+          <a:lstStyle/>
+          <a:p>
+            <a:pPr algn="ctr"/>
+          </a:p>
+        </p:txBody>
+      </p:sp>
+      <p:sp>
+        <p:nvSpPr>
+          <p:cNvPr id="3" name="Rectangle 2"/>
+          <p:cNvSpPr/>
+          <p:nvPr/>
+        </p:nvSpPr>
+        <p:spPr>
+          <a:xfrm>
+            <a:off x="0" y="960120"/>
+            <a:ext cx="12191695" cy="41148"/>
+          </a:xfrm>
+          <a:prstGeom prst="rect">
+            <a:avLst/>
+          </a:prstGeom>
+          <a:solidFill>
+            <a:srgbClr val="FFD000"/>
+          </a:solidFill>
+          <a:ln>
+            <a:noFill/>
+          </a:ln>
+        </p:spPr>
+        <p:style>
+          <a:lnRef idx="1">
+            <a:schemeClr val="accent1"/>
+          </a:lnRef>
+          <a:fillRef idx="3">
+            <a:schemeClr val="accent1"/>
+          </a:fillRef>
+          <a:effectRef idx="2">
+            <a:schemeClr val="accent1"/>
+          </a:effectRef>
+          <a:fontRef idx="minor">
+            <a:schemeClr val="lt1"/>
+          </a:fontRef>
+        </p:style>
+        <p:txBody>
+          <a:bodyPr rtlCol="0" anchor="ctr"/>
+          <a:lstStyle/>
+          <a:p>
+            <a:pPr algn="ctr"/>
+          </a:p>
+        </p:txBody>
+      </p:sp>
+      <p:sp>
+        <p:nvSpPr>
+          <p:cNvPr id="4" name="TextBox 3"/>
+          <p:cNvSpPr txBox="1"/>
+          <p:nvPr/>
+        </p:nvSpPr>
+        <p:spPr>
+          <a:xfrm>
+            <a:off x="457200" y="164592"/>
+            <a:ext cx="11277295" cy="502920"/>
+          </a:xfrm>
+          <a:prstGeom prst="rect">
+            <a:avLst/>
+          </a:prstGeom>
+          <a:noFill/>
+        </p:spPr>
+        <p:txBody>
+          <a:bodyPr wrap="square">
+            <a:spAutoFit/>
+          </a:bodyPr>
+          <a:lstStyle/>
+          <a:p>
+            <a:r>
+              <a:rPr sz="2600" b="1" i="0">
+                <a:solidFill>
+                  <a:srgbClr val="FFFFFF"/>
+                </a:solidFill>
+                <a:latin typeface="Calibri"/>
+              </a:rPr>
+              <a:t>Las preguntas: los tres minutos que destapan el trabajo real (1/2)</a:t>
+            </a:r>
+          </a:p>
+        </p:txBody>
+      </p:sp>
+      <p:sp>
+        <p:nvSpPr>
+          <p:cNvPr id="5" name="TextBox 4"/>
+          <p:cNvSpPr txBox="1"/>
+          <p:nvPr/>
+        </p:nvSpPr>
+        <p:spPr>
+          <a:xfrm>
+            <a:off x="457200" y="1170432"/>
+            <a:ext cx="11277295" cy="5230368"/>
+          </a:xfrm>
+          <a:prstGeom prst="rect">
+            <a:avLst/>
+          </a:prstGeom>
+          <a:noFill/>
+        </p:spPr>
+        <p:txBody>
+          <a:bodyPr wrap="square">
+            <a:spAutoFit/>
+          </a:bodyPr>
+          <a:lstStyle/>
+          <a:p>
+            <a:pPr>
+              <a:spcAft>
+                <a:spcPts val="800"/>
+              </a:spcAft>
+            </a:pPr>
+            <a:r>
+              <a:rPr sz="2000" b="0" i="0">
+                <a:solidFill>
+                  <a:srgbClr val="333333"/>
+                </a:solidFill>
+                <a:latin typeface="Calibri"/>
+              </a:rPr>
+              <a:t>–   Los tres minutos de preguntas no son un trámite: son la parte de la sesión donde se ve quién entendió el proyecto.</a:t>
+            </a:r>
+          </a:p>
+          <a:p>
+            <a:pPr>
+              <a:spcAft>
+                <a:spcPts val="800"/>
+              </a:spcAft>
+            </a:pPr>
+            <a:r>
+              <a:rPr sz="2000" b="0" i="0">
+                <a:solidFill>
+                  <a:srgbClr val="333333"/>
+                </a:solidFill>
+                <a:latin typeface="Calibri"/>
+              </a:rPr>
+              <a:t>–   Por eso la regla es </a:t>
+            </a:r>
+            <a:r>
+              <a:rPr sz="2000" b="1" i="0">
+                <a:solidFill>
+                  <a:srgbClr val="333333"/>
+                </a:solidFill>
+                <a:latin typeface="Calibri"/>
+              </a:rPr>
+              <a:t>responde quien tiene el tramo</a:t>
+            </a:r>
+            <a:r>
+              <a:rPr sz="2000" b="0" i="0">
+                <a:solidFill>
+                  <a:srgbClr val="333333"/>
+                </a:solidFill>
+                <a:latin typeface="Calibri"/>
+              </a:rPr>
+              <a:t>, y hay que hacerla cumplir con firmeza —si el mismo integrante responde todo, redirija: «esa es del tramo 4, ¿quién lo presentó?»—.</a:t>
+            </a:r>
+          </a:p>
+          <a:p>
+            <a:pPr>
+              <a:spcAft>
+                <a:spcPts val="800"/>
+              </a:spcAft>
+            </a:pPr>
+            <a:r>
+              <a:rPr sz="2000" b="0" i="0">
+                <a:solidFill>
+                  <a:srgbClr val="333333"/>
+                </a:solidFill>
+                <a:latin typeface="Calibri"/>
+              </a:rPr>
+              <a:t>–   Enseñe explícitamente que </a:t>
+            </a:r>
+            <a:r>
+              <a:rPr sz="2000" b="1" i="0">
+                <a:solidFill>
+                  <a:srgbClr val="333333"/>
+                </a:solidFill>
+                <a:latin typeface="Calibri"/>
+              </a:rPr>
+              <a:t>«no lo medimos» es una respuesta válida y buena</a:t>
+            </a:r>
+            <a:r>
+              <a:rPr sz="2000" b="0" i="0">
+                <a:solidFill>
+                  <a:srgbClr val="333333"/>
+                </a:solidFill>
+                <a:latin typeface="Calibri"/>
+              </a:rPr>
+              <a:t>.</a:t>
+            </a:r>
+          </a:p>
+          <a:p>
+            <a:pPr>
+              <a:spcAft>
+                <a:spcPts val="800"/>
+              </a:spcAft>
+            </a:pPr>
+            <a:r>
+              <a:rPr sz="2000" b="0" i="0">
+                <a:solidFill>
+                  <a:srgbClr val="333333"/>
+                </a:solidFill>
+                <a:latin typeface="Calibri"/>
+              </a:rPr>
+              <a:t>–   Un estudiante de primer semestre cree que no saber es un fracaso, y por eso inventa cifras.</a:t>
+            </a:r>
+          </a:p>
+          <a:p>
+            <a:pPr>
+              <a:spcAft>
+                <a:spcPts val="800"/>
+              </a:spcAft>
+            </a:pPr>
+            <a:r>
+              <a:rPr sz="2000" b="0" i="0">
+                <a:solidFill>
+                  <a:srgbClr val="333333"/>
+                </a:solidFill>
+                <a:latin typeface="Calibri"/>
+              </a:rPr>
+              <a:t>–   Es la misma lección de la sesión 5 sobre datos con fuente y de la 11 sobre la IA que </a:t>
+            </a:r>
+            <a:r>
+              <a:rPr sz="2000" b="1" i="0">
+                <a:solidFill>
+                  <a:srgbClr val="333333"/>
+                </a:solidFill>
+                <a:latin typeface="Calibri"/>
+              </a:rPr>
+              <a:t>inventa con seguridad</a:t>
+            </a:r>
+            <a:r>
+              <a:rPr sz="2000" b="0" i="0">
+                <a:solidFill>
+                  <a:srgbClr val="333333"/>
+                </a:solidFill>
+                <a:latin typeface="Calibri"/>
+              </a:rPr>
+              <a:t>.</a:t>
+            </a:r>
+          </a:p>
+          <a:p>
+            <a:pPr>
+              <a:spcAft>
+                <a:spcPts val="800"/>
+              </a:spcAft>
+            </a:pPr>
+            <a:r>
+              <a:rPr sz="2000" b="0" i="0">
+                <a:solidFill>
+                  <a:srgbClr val="333333"/>
+                </a:solidFill>
+                <a:latin typeface="Calibri"/>
+              </a:rPr>
+              <a:t>–   La segunda enseñanza es la diferencia entre excusa y decisión.</a:t>
+            </a:r>
+          </a:p>
+          <a:p>
+            <a:pPr>
+              <a:spcAft>
+                <a:spcPts val="800"/>
+              </a:spcAft>
+            </a:pPr>
+            <a:r>
+              <a:rPr sz="2000" b="0" i="0">
+                <a:solidFill>
+                  <a:srgbClr val="333333"/>
+                </a:solidFill>
+                <a:latin typeface="Calibri"/>
+              </a:rPr>
+              <a:t>–   «No lo hicimos porque no nos alcanzó el tiempo» suena a incumplimiento; </a:t>
+            </a:r>
+            <a:r>
+              <a:rPr sz="2000" b="1" i="0">
+                <a:solidFill>
+                  <a:srgbClr val="333333"/>
+                </a:solidFill>
+                <a:latin typeface="Calibri"/>
+              </a:rPr>
+              <a:t>«decidimos no hacerlo y sacrificamos esto a cambio»</a:t>
+            </a:r>
+            <a:r>
+              <a:rPr sz="2000" b="0" i="0">
+                <a:solidFill>
+                  <a:srgbClr val="333333"/>
+                </a:solidFill>
+                <a:latin typeface="Calibri"/>
+              </a:rPr>
+              <a:t> es exactamente el lenguaje del alcance mínimo de la sesión 8.</a:t>
+            </a:r>
+          </a:p>
+        </p:txBody>
+      </p:sp>
+      <p:sp>
+        <p:nvSpPr>
+          <p:cNvPr id="6" name="TextBox 5"/>
+          <p:cNvSpPr txBox="1"/>
+          <p:nvPr/>
+        </p:nvSpPr>
+        <p:spPr>
+          <a:xfrm>
+            <a:off x="11185855" y="6473952"/>
+            <a:ext cx="640080" cy="274320"/>
+          </a:xfrm>
+          <a:prstGeom prst="rect">
+            <a:avLst/>
+          </a:prstGeom>
+          <a:noFill/>
+        </p:spPr>
+        <p:txBody>
+          <a:bodyPr wrap="square">
+            <a:spAutoFit/>
+          </a:bodyPr>
+          <a:lstStyle/>
+          <a:p>
+            <a:pPr algn="r"/>
+            <a:r>
+              <a:rPr sz="1100" b="0" i="0">
+                <a:solidFill>
+                  <a:srgbClr val="666666"/>
+                </a:solidFill>
+                <a:latin typeface="Calibri"/>
+              </a:rPr>
+              <a:t>13</a:t>
+            </a:r>
+          </a:p>
+        </p:txBody>
+      </p:sp>
+    </p:spTree>
+  </p:cSld>
+  <p:clrMapOvr>
+    <a:masterClrMapping/>
+  </p:clrMapOvr>
+</p:sld>
+</file>
+
+<file path=ppt/slides/slide14.xml><?xml version="1.0" encoding="utf-8"?>
+<p:sld xmlns:a="http://schemas.openxmlformats.org/drawingml/2006/main" xmlns:p="http://schemas.openxmlformats.org/presentationml/2006/main" xmlns:r="http://schemas.openxmlformats.org/officeDocument/2006/relationships">
+  <p:cSld>
+    <p:bg>
+      <p:bgPr>
+        <a:solidFill>
+          <a:srgbClr val="FFFFFF"/>
+        </a:solidFill>
+        <a:effectLst/>
+      </p:bgPr>
+    </p:bg>
+    <p:spTree>
+      <p:nvGrpSpPr>
+        <p:cNvPr id="1" name=""/>
+        <p:cNvGrpSpPr/>
+        <p:nvPr/>
+      </p:nvGrpSpPr>
+      <p:grpSpPr/>
+      <p:sp>
+        <p:nvSpPr>
+          <p:cNvPr id="2" name="Rectangle 1"/>
+          <p:cNvSpPr/>
+          <p:nvPr/>
+        </p:nvSpPr>
+        <p:spPr>
+          <a:xfrm>
+            <a:off x="0" y="0"/>
+            <a:ext cx="12191695" cy="960120"/>
+          </a:xfrm>
+          <a:prstGeom prst="rect">
+            <a:avLst/>
+          </a:prstGeom>
+          <a:solidFill>
+            <a:srgbClr val="095292"/>
+          </a:solidFill>
+          <a:ln>
+            <a:noFill/>
+          </a:ln>
+        </p:spPr>
+        <p:style>
+          <a:lnRef idx="1">
+            <a:schemeClr val="accent1"/>
+          </a:lnRef>
+          <a:fillRef idx="3">
+            <a:schemeClr val="accent1"/>
+          </a:fillRef>
+          <a:effectRef idx="2">
+            <a:schemeClr val="accent1"/>
+          </a:effectRef>
+          <a:fontRef idx="minor">
+            <a:schemeClr val="lt1"/>
+          </a:fontRef>
+        </p:style>
+        <p:txBody>
+          <a:bodyPr rtlCol="0" anchor="ctr"/>
+          <a:lstStyle/>
+          <a:p>
+            <a:pPr algn="ctr"/>
+          </a:p>
+        </p:txBody>
+      </p:sp>
+      <p:sp>
+        <p:nvSpPr>
+          <p:cNvPr id="3" name="Rectangle 2"/>
+          <p:cNvSpPr/>
+          <p:nvPr/>
+        </p:nvSpPr>
+        <p:spPr>
+          <a:xfrm>
+            <a:off x="0" y="960120"/>
+            <a:ext cx="12191695" cy="41148"/>
+          </a:xfrm>
+          <a:prstGeom prst="rect">
+            <a:avLst/>
+          </a:prstGeom>
+          <a:solidFill>
+            <a:srgbClr val="FFD000"/>
+          </a:solidFill>
+          <a:ln>
+            <a:noFill/>
+          </a:ln>
+        </p:spPr>
+        <p:style>
+          <a:lnRef idx="1">
+            <a:schemeClr val="accent1"/>
+          </a:lnRef>
+          <a:fillRef idx="3">
+            <a:schemeClr val="accent1"/>
+          </a:fillRef>
+          <a:effectRef idx="2">
+            <a:schemeClr val="accent1"/>
+          </a:effectRef>
+          <a:fontRef idx="minor">
+            <a:schemeClr val="lt1"/>
+          </a:fontRef>
+        </p:style>
+        <p:txBody>
+          <a:bodyPr rtlCol="0" anchor="ctr"/>
+          <a:lstStyle/>
+          <a:p>
+            <a:pPr algn="ctr"/>
+          </a:p>
+        </p:txBody>
+      </p:sp>
+      <p:sp>
+        <p:nvSpPr>
+          <p:cNvPr id="4" name="TextBox 3"/>
+          <p:cNvSpPr txBox="1"/>
+          <p:nvPr/>
+        </p:nvSpPr>
+        <p:spPr>
+          <a:xfrm>
+            <a:off x="457200" y="164592"/>
+            <a:ext cx="11277295" cy="502920"/>
+          </a:xfrm>
+          <a:prstGeom prst="rect">
+            <a:avLst/>
+          </a:prstGeom>
+          <a:noFill/>
+        </p:spPr>
+        <p:txBody>
+          <a:bodyPr wrap="square">
+            <a:spAutoFit/>
+          </a:bodyPr>
+          <a:lstStyle/>
+          <a:p>
+            <a:r>
+              <a:rPr sz="2600" b="1" i="0">
+                <a:solidFill>
+                  <a:srgbClr val="FFFFFF"/>
+                </a:solidFill>
+                <a:latin typeface="Calibri"/>
+              </a:rPr>
+              <a:t>Las preguntas: los tres minutos que destapan el trabajo real (2/2)</a:t>
+            </a:r>
+          </a:p>
+        </p:txBody>
+      </p:sp>
+      <p:sp>
+        <p:nvSpPr>
+          <p:cNvPr id="5" name="TextBox 4"/>
+          <p:cNvSpPr txBox="1"/>
+          <p:nvPr/>
+        </p:nvSpPr>
+        <p:spPr>
+          <a:xfrm>
+            <a:off x="457200" y="1170432"/>
+            <a:ext cx="11277295" cy="5230368"/>
+          </a:xfrm>
+          <a:prstGeom prst="rect">
+            <a:avLst/>
+          </a:prstGeom>
+          <a:noFill/>
+        </p:spPr>
+        <p:txBody>
+          <a:bodyPr wrap="square">
+            <a:spAutoFit/>
+          </a:bodyPr>
+          <a:lstStyle/>
+          <a:p>
+            <a:pPr>
+              <a:spcAft>
+                <a:spcPts val="800"/>
+              </a:spcAft>
+            </a:pPr>
+            <a:r>
+              <a:rPr sz="2000" b="0" i="0">
+                <a:solidFill>
+                  <a:srgbClr val="333333"/>
+                </a:solidFill>
+                <a:latin typeface="Calibri"/>
+              </a:rPr>
+              <a:t>–   Los equipos ya tienen la decisión escrita desde entonces: solo hay que recordarles que la usen. **Reserve una pregunta suya para cada equipo</a:t>
+            </a:r>
+          </a:p>
+          <a:p>
+            <a:pPr>
+              <a:spcAft>
+                <a:spcPts val="800"/>
+              </a:spcAft>
+            </a:pPr>
+            <a:r>
+              <a:rPr sz="2000" b="0" i="0">
+                <a:solidFill>
+                  <a:srgbClr val="333333"/>
+                </a:solidFill>
+                <a:latin typeface="Calibri"/>
+              </a:rPr>
+              <a:t>–   Y hágala útil.** Las tres que más rinden: «¿con quién lo probaron y qué hizo esa persona?» —destapa si hubo prueba real—</a:t>
+            </a:r>
+          </a:p>
+          <a:p>
+            <a:pPr>
+              <a:spcAft>
+                <a:spcPts val="800"/>
+              </a:spcAft>
+            </a:pPr>
+            <a:r>
+              <a:rPr sz="2000" b="0" i="0">
+                <a:solidFill>
+                  <a:srgbClr val="333333"/>
+                </a:solidFill>
+                <a:latin typeface="Calibri"/>
+              </a:rPr>
+              <a:t>–   «¿qué pasa con alguien que no tiene datos móviles?» —destapa si pensaron en los afectados no usuarios— y «si tuvieran una semana más, ¿qué harían primero?» —destapa si tienen criterio de prioridad o solo una lista de deseos—.</a:t>
+            </a:r>
+          </a:p>
+          <a:p>
+            <a:pPr>
+              <a:spcAft>
+                <a:spcPts val="800"/>
+              </a:spcAft>
+            </a:pPr>
+            <a:r>
+              <a:rPr sz="2000" b="0" i="0">
+                <a:solidFill>
+                  <a:srgbClr val="333333"/>
+                </a:solidFill>
+                <a:latin typeface="Calibri"/>
+              </a:rPr>
+              <a:t>–   Cuide el tiempo de las respuestas: tres minutos alcanzan para dos o tres preguntas </a:t>
+            </a:r>
+            <a:r>
+              <a:rPr sz="2000" b="1" i="0">
+                <a:solidFill>
+                  <a:srgbClr val="333333"/>
+                </a:solidFill>
+                <a:latin typeface="Calibri"/>
+              </a:rPr>
+              <a:t>si las respuestas duran treinta segundos</a:t>
+            </a:r>
+            <a:r>
+              <a:rPr sz="2000" b="0" i="0">
+                <a:solidFill>
+                  <a:srgbClr val="333333"/>
+                </a:solidFill>
+                <a:latin typeface="Calibri"/>
+              </a:rPr>
+              <a:t>.</a:t>
+            </a:r>
+          </a:p>
+          <a:p>
+            <a:pPr>
+              <a:spcAft>
+                <a:spcPts val="800"/>
+              </a:spcAft>
+            </a:pPr>
+            <a:r>
+              <a:rPr sz="2000" b="0" i="0">
+                <a:solidFill>
+                  <a:srgbClr val="333333"/>
+                </a:solidFill>
+                <a:latin typeface="Calibri"/>
+              </a:rPr>
+              <a:t>–   Una respuesta de dos minutos se come las preguntas de los demás, y hay que interrumpirla con cortesía.</a:t>
+            </a:r>
+          </a:p>
+        </p:txBody>
+      </p:sp>
+      <p:sp>
+        <p:nvSpPr>
+          <p:cNvPr id="6" name="TextBox 5"/>
+          <p:cNvSpPr txBox="1"/>
+          <p:nvPr/>
+        </p:nvSpPr>
+        <p:spPr>
+          <a:xfrm>
+            <a:off x="11185855" y="6473952"/>
+            <a:ext cx="640080" cy="274320"/>
+          </a:xfrm>
+          <a:prstGeom prst="rect">
+            <a:avLst/>
+          </a:prstGeom>
+          <a:noFill/>
+        </p:spPr>
+        <p:txBody>
+          <a:bodyPr wrap="square">
+            <a:spAutoFit/>
+          </a:bodyPr>
+          <a:lstStyle/>
+          <a:p>
+            <a:pPr algn="r"/>
+            <a:r>
+              <a:rPr sz="1100" b="0" i="0">
+                <a:solidFill>
+                  <a:srgbClr val="666666"/>
+                </a:solidFill>
+                <a:latin typeface="Calibri"/>
+              </a:rPr>
+              <a:t>14</a:t>
+            </a:r>
+          </a:p>
+        </p:txBody>
+      </p:sp>
+    </p:spTree>
+  </p:cSld>
+  <p:clrMapOvr>
+    <a:masterClrMapping/>
+  </p:clrMapOvr>
+</p:sld>
+</file>
+
+<file path=ppt/slides/slide15.xml><?xml version="1.0" encoding="utf-8"?>
+<p:sld xmlns:a="http://schemas.openxmlformats.org/drawingml/2006/main" xmlns:p="http://schemas.openxmlformats.org/presentationml/2006/main" xmlns:r="http://schemas.openxmlformats.org/officeDocument/2006/relationships">
+  <p:cSld>
+    <p:bg>
+      <p:bgPr>
+        <a:solidFill>
+          <a:srgbClr val="FFFFFF"/>
+        </a:solidFill>
+        <a:effectLst/>
+      </p:bgPr>
+    </p:bg>
+    <p:spTree>
+      <p:nvGrpSpPr>
+        <p:cNvPr id="1" name=""/>
+        <p:cNvGrpSpPr/>
+        <p:nvPr/>
+      </p:nvGrpSpPr>
+      <p:grpSpPr/>
+      <p:sp>
+        <p:nvSpPr>
+          <p:cNvPr id="2" name="Rectangle 1"/>
+          <p:cNvSpPr/>
+          <p:nvPr/>
+        </p:nvSpPr>
+        <p:spPr>
+          <a:xfrm>
+            <a:off x="0" y="0"/>
+            <a:ext cx="12191695" cy="960120"/>
+          </a:xfrm>
+          <a:prstGeom prst="rect">
+            <a:avLst/>
+          </a:prstGeom>
+          <a:solidFill>
+            <a:srgbClr val="095292"/>
+          </a:solidFill>
+          <a:ln>
+            <a:noFill/>
+          </a:ln>
+        </p:spPr>
+        <p:style>
+          <a:lnRef idx="1">
+            <a:schemeClr val="accent1"/>
+          </a:lnRef>
+          <a:fillRef idx="3">
+            <a:schemeClr val="accent1"/>
+          </a:fillRef>
+          <a:effectRef idx="2">
+            <a:schemeClr val="accent1"/>
+          </a:effectRef>
+          <a:fontRef idx="minor">
+            <a:schemeClr val="lt1"/>
+          </a:fontRef>
+        </p:style>
+        <p:txBody>
+          <a:bodyPr rtlCol="0" anchor="ctr"/>
+          <a:lstStyle/>
+          <a:p>
+            <a:pPr algn="ctr"/>
+          </a:p>
+        </p:txBody>
+      </p:sp>
+      <p:sp>
+        <p:nvSpPr>
+          <p:cNvPr id="3" name="Rectangle 2"/>
+          <p:cNvSpPr/>
+          <p:nvPr/>
+        </p:nvSpPr>
+        <p:spPr>
+          <a:xfrm>
+            <a:off x="0" y="960120"/>
+            <a:ext cx="12191695" cy="41148"/>
+          </a:xfrm>
+          <a:prstGeom prst="rect">
+            <a:avLst/>
+          </a:prstGeom>
+          <a:solidFill>
+            <a:srgbClr val="FFD000"/>
+          </a:solidFill>
+          <a:ln>
+            <a:noFill/>
+          </a:ln>
+        </p:spPr>
+        <p:style>
+          <a:lnRef idx="1">
+            <a:schemeClr val="accent1"/>
+          </a:lnRef>
+          <a:fillRef idx="3">
+            <a:schemeClr val="accent1"/>
+          </a:fillRef>
+          <a:effectRef idx="2">
+            <a:schemeClr val="accent1"/>
+          </a:effectRef>
+          <a:fontRef idx="minor">
+            <a:schemeClr val="lt1"/>
+          </a:fontRef>
+        </p:style>
+        <p:txBody>
+          <a:bodyPr rtlCol="0" anchor="ctr"/>
+          <a:lstStyle/>
+          <a:p>
+            <a:pPr algn="ctr"/>
+          </a:p>
+        </p:txBody>
+      </p:sp>
+      <p:sp>
+        <p:nvSpPr>
+          <p:cNvPr id="4" name="TextBox 3"/>
+          <p:cNvSpPr txBox="1"/>
+          <p:nvPr/>
+        </p:nvSpPr>
+        <p:spPr>
+          <a:xfrm>
+            <a:off x="457200" y="164592"/>
+            <a:ext cx="11277295" cy="502920"/>
+          </a:xfrm>
+          <a:prstGeom prst="rect">
+            <a:avLst/>
+          </a:prstGeom>
+          <a:noFill/>
+        </p:spPr>
+        <p:txBody>
+          <a:bodyPr wrap="square">
+            <a:spAutoFit/>
+          </a:bodyPr>
+          <a:lstStyle/>
+          <a:p>
+            <a:r>
+              <a:rPr sz="2600" b="1" i="0">
+                <a:solidFill>
+                  <a:srgbClr val="FFFFFF"/>
+                </a:solidFill>
+                <a:latin typeface="Calibri"/>
+              </a:rPr>
+              <a:t>El cierre: qué hacer con lo que salió hoy (1/2)</a:t>
+            </a:r>
+          </a:p>
+        </p:txBody>
+      </p:sp>
+      <p:sp>
+        <p:nvSpPr>
+          <p:cNvPr id="5" name="TextBox 4"/>
+          <p:cNvSpPr txBox="1"/>
+          <p:nvPr/>
+        </p:nvSpPr>
+        <p:spPr>
+          <a:xfrm>
+            <a:off x="457200" y="1170432"/>
+            <a:ext cx="11277295" cy="5230368"/>
+          </a:xfrm>
+          <a:prstGeom prst="rect">
+            <a:avLst/>
+          </a:prstGeom>
+          <a:noFill/>
+        </p:spPr>
+        <p:txBody>
+          <a:bodyPr wrap="square">
+            <a:spAutoFit/>
+          </a:bodyPr>
+          <a:lstStyle/>
+          <a:p>
+            <a:pPr>
+              <a:spcAft>
+                <a:spcPts val="800"/>
+              </a:spcAft>
+            </a:pPr>
+            <a:r>
+              <a:rPr sz="2000" b="0" i="0">
+                <a:solidFill>
+                  <a:srgbClr val="333333"/>
+                </a:solidFill>
+                <a:latin typeface="Calibri"/>
+              </a:rPr>
+              <a:t>–   Los ocho minutos de cierre no son para felicitar.</a:t>
+            </a:r>
+          </a:p>
+          <a:p>
+            <a:pPr>
+              <a:spcAft>
+                <a:spcPts val="800"/>
+              </a:spcAft>
+            </a:pPr>
+            <a:r>
+              <a:rPr sz="2000" b="0" i="0">
+                <a:solidFill>
+                  <a:srgbClr val="333333"/>
+                </a:solidFill>
+                <a:latin typeface="Calibri"/>
+              </a:rPr>
+              <a:t>–   Son para </a:t>
+            </a:r>
+            <a:r>
+              <a:rPr sz="2000" b="1" i="0">
+                <a:solidFill>
+                  <a:srgbClr val="333333"/>
+                </a:solidFill>
+                <a:latin typeface="Calibri"/>
+              </a:rPr>
+              <a:t>convertir las cinco exposiciones en trabajo concreto para el informe final</a:t>
+            </a:r>
+            <a:r>
+              <a:rPr sz="2000" b="0" i="0">
+                <a:solidFill>
+                  <a:srgbClr val="333333"/>
+                </a:solidFill>
+                <a:latin typeface="Calibri"/>
+              </a:rPr>
+              <a:t>, que se entrega la próxima sesión y vale el 20 %.</a:t>
+            </a:r>
+          </a:p>
+          <a:p>
+            <a:pPr>
+              <a:spcAft>
+                <a:spcPts val="800"/>
+              </a:spcAft>
+            </a:pPr>
+            <a:r>
+              <a:rPr sz="2000" b="0" i="0">
+                <a:solidFill>
+                  <a:srgbClr val="333333"/>
+                </a:solidFill>
+                <a:latin typeface="Calibri"/>
+              </a:rPr>
+              <a:t>–   La instrucción operativa para cada equipo es una: **anoten lo que el curso no entendió de su proyecto</a:t>
+            </a:r>
+          </a:p>
+          <a:p>
+            <a:pPr>
+              <a:spcAft>
+                <a:spcPts val="800"/>
+              </a:spcAft>
+            </a:pPr>
+            <a:r>
+              <a:rPr sz="2000" b="0" i="0">
+                <a:solidFill>
+                  <a:srgbClr val="333333"/>
+                </a:solidFill>
+                <a:latin typeface="Calibri"/>
+              </a:rPr>
+              <a:t>–   Porque eso es exactamente lo que hay que escribir mejor en el informe.** Si tres personas preguntaron cómo se actualiza la lista, la sección de la solución no está clara.</a:t>
+            </a:r>
+          </a:p>
+          <a:p>
+            <a:pPr>
+              <a:spcAft>
+                <a:spcPts val="800"/>
+              </a:spcAft>
+            </a:pPr>
+            <a:r>
+              <a:rPr sz="2000" b="0" i="0">
+                <a:solidFill>
+                  <a:srgbClr val="333333"/>
+                </a:solidFill>
+                <a:latin typeface="Calibri"/>
+              </a:rPr>
+              <a:t>–   Una pregunta repetida es un diagnóstico gratis.</a:t>
+            </a:r>
+          </a:p>
+          <a:p>
+            <a:pPr>
+              <a:spcAft>
+                <a:spcPts val="800"/>
+              </a:spcAft>
+            </a:pPr>
+            <a:r>
+              <a:rPr sz="2000" b="0" i="0">
+                <a:solidFill>
+                  <a:srgbClr val="333333"/>
+                </a:solidFill>
+                <a:latin typeface="Calibri"/>
+              </a:rPr>
+              <a:t>–   Devuelva </a:t>
+            </a:r>
+            <a:r>
+              <a:rPr sz="2000" b="1" i="0">
+                <a:solidFill>
+                  <a:srgbClr val="333333"/>
+                </a:solidFill>
+                <a:latin typeface="Calibri"/>
+              </a:rPr>
+              <a:t>una observación por equipo, dicha en público y en una frase</a:t>
+            </a:r>
+            <a:r>
+              <a:rPr sz="2000" b="0" i="0">
+                <a:solidFill>
+                  <a:srgbClr val="333333"/>
+                </a:solidFill>
+                <a:latin typeface="Calibri"/>
+              </a:rPr>
+              <a:t> —lo que más sumó y la única cosa que cambiaría—.</a:t>
+            </a:r>
+          </a:p>
+        </p:txBody>
+      </p:sp>
+      <p:sp>
+        <p:nvSpPr>
+          <p:cNvPr id="6" name="TextBox 5"/>
+          <p:cNvSpPr txBox="1"/>
+          <p:nvPr/>
+        </p:nvSpPr>
+        <p:spPr>
+          <a:xfrm>
+            <a:off x="11185855" y="6473952"/>
+            <a:ext cx="640080" cy="274320"/>
+          </a:xfrm>
+          <a:prstGeom prst="rect">
+            <a:avLst/>
+          </a:prstGeom>
+          <a:noFill/>
+        </p:spPr>
+        <p:txBody>
+          <a:bodyPr wrap="square">
+            <a:spAutoFit/>
+          </a:bodyPr>
+          <a:lstStyle/>
+          <a:p>
+            <a:pPr algn="r"/>
+            <a:r>
+              <a:rPr sz="1100" b="0" i="0">
+                <a:solidFill>
+                  <a:srgbClr val="666666"/>
+                </a:solidFill>
+                <a:latin typeface="Calibri"/>
+              </a:rPr>
+              <a:t>15</a:t>
+            </a:r>
+          </a:p>
+        </p:txBody>
+      </p:sp>
+    </p:spTree>
+  </p:cSld>
+  <p:clrMapOvr>
+    <a:masterClrMapping/>
+  </p:clrMapOvr>
+</p:sld>
+</file>
+
+<file path=ppt/slides/slide16.xml><?xml version="1.0" encoding="utf-8"?>
+<p:sld xmlns:a="http://schemas.openxmlformats.org/drawingml/2006/main" xmlns:p="http://schemas.openxmlformats.org/presentationml/2006/main" xmlns:r="http://schemas.openxmlformats.org/officeDocument/2006/relationships">
+  <p:cSld>
+    <p:bg>
+      <p:bgPr>
+        <a:solidFill>
+          <a:srgbClr val="FFFFFF"/>
+        </a:solidFill>
+        <a:effectLst/>
+      </p:bgPr>
+    </p:bg>
+    <p:spTree>
+      <p:nvGrpSpPr>
+        <p:cNvPr id="1" name=""/>
+        <p:cNvGrpSpPr/>
+        <p:nvPr/>
+      </p:nvGrpSpPr>
+      <p:grpSpPr/>
+      <p:sp>
+        <p:nvSpPr>
+          <p:cNvPr id="2" name="Rectangle 1"/>
+          <p:cNvSpPr/>
+          <p:nvPr/>
+        </p:nvSpPr>
+        <p:spPr>
+          <a:xfrm>
+            <a:off x="0" y="0"/>
+            <a:ext cx="12191695" cy="960120"/>
+          </a:xfrm>
+          <a:prstGeom prst="rect">
+            <a:avLst/>
+          </a:prstGeom>
+          <a:solidFill>
+            <a:srgbClr val="095292"/>
+          </a:solidFill>
+          <a:ln>
+            <a:noFill/>
+          </a:ln>
+        </p:spPr>
+        <p:style>
+          <a:lnRef idx="1">
+            <a:schemeClr val="accent1"/>
+          </a:lnRef>
+          <a:fillRef idx="3">
+            <a:schemeClr val="accent1"/>
+          </a:fillRef>
+          <a:effectRef idx="2">
+            <a:schemeClr val="accent1"/>
+          </a:effectRef>
+          <a:fontRef idx="minor">
+            <a:schemeClr val="lt1"/>
+          </a:fontRef>
+        </p:style>
+        <p:txBody>
+          <a:bodyPr rtlCol="0" anchor="ctr"/>
+          <a:lstStyle/>
+          <a:p>
+            <a:pPr algn="ctr"/>
+          </a:p>
+        </p:txBody>
+      </p:sp>
+      <p:sp>
+        <p:nvSpPr>
+          <p:cNvPr id="3" name="Rectangle 2"/>
+          <p:cNvSpPr/>
+          <p:nvPr/>
+        </p:nvSpPr>
+        <p:spPr>
+          <a:xfrm>
+            <a:off x="0" y="960120"/>
+            <a:ext cx="12191695" cy="41148"/>
+          </a:xfrm>
+          <a:prstGeom prst="rect">
+            <a:avLst/>
+          </a:prstGeom>
+          <a:solidFill>
+            <a:srgbClr val="FFD000"/>
+          </a:solidFill>
+          <a:ln>
+            <a:noFill/>
+          </a:ln>
+        </p:spPr>
+        <p:style>
+          <a:lnRef idx="1">
+            <a:schemeClr val="accent1"/>
+          </a:lnRef>
+          <a:fillRef idx="3">
+            <a:schemeClr val="accent1"/>
+          </a:fillRef>
+          <a:effectRef idx="2">
+            <a:schemeClr val="accent1"/>
+          </a:effectRef>
+          <a:fontRef idx="minor">
+            <a:schemeClr val="lt1"/>
+          </a:fontRef>
+        </p:style>
+        <p:txBody>
+          <a:bodyPr rtlCol="0" anchor="ctr"/>
+          <a:lstStyle/>
+          <a:p>
+            <a:pPr algn="ctr"/>
+          </a:p>
+        </p:txBody>
+      </p:sp>
+      <p:sp>
+        <p:nvSpPr>
+          <p:cNvPr id="4" name="TextBox 3"/>
+          <p:cNvSpPr txBox="1"/>
+          <p:nvPr/>
+        </p:nvSpPr>
+        <p:spPr>
+          <a:xfrm>
+            <a:off x="457200" y="164592"/>
+            <a:ext cx="11277295" cy="502920"/>
+          </a:xfrm>
+          <a:prstGeom prst="rect">
+            <a:avLst/>
+          </a:prstGeom>
+          <a:noFill/>
+        </p:spPr>
+        <p:txBody>
+          <a:bodyPr wrap="square">
+            <a:spAutoFit/>
+          </a:bodyPr>
+          <a:lstStyle/>
+          <a:p>
+            <a:r>
+              <a:rPr sz="2600" b="1" i="0">
+                <a:solidFill>
+                  <a:srgbClr val="FFFFFF"/>
+                </a:solidFill>
+                <a:latin typeface="Calibri"/>
+              </a:rPr>
+              <a:t>El cierre: qué hacer con lo que salió hoy (2/2)</a:t>
+            </a:r>
+          </a:p>
+        </p:txBody>
+      </p:sp>
+      <p:sp>
+        <p:nvSpPr>
+          <p:cNvPr id="5" name="TextBox 4"/>
+          <p:cNvSpPr txBox="1"/>
+          <p:nvPr/>
+        </p:nvSpPr>
+        <p:spPr>
+          <a:xfrm>
+            <a:off x="457200" y="1170432"/>
+            <a:ext cx="11277295" cy="5230368"/>
+          </a:xfrm>
+          <a:prstGeom prst="rect">
+            <a:avLst/>
+          </a:prstGeom>
+          <a:noFill/>
+        </p:spPr>
+        <p:txBody>
+          <a:bodyPr wrap="square">
+            <a:spAutoFit/>
+          </a:bodyPr>
+          <a:lstStyle/>
+          <a:p>
+            <a:pPr>
+              <a:spcAft>
+                <a:spcPts val="800"/>
+              </a:spcAft>
+            </a:pPr>
+            <a:r>
+              <a:rPr sz="2000" b="0" i="0">
+                <a:solidFill>
+                  <a:srgbClr val="333333"/>
+                </a:solidFill>
+                <a:latin typeface="Calibri"/>
+              </a:rPr>
+              <a:t>–   La retroalimentación detallada va después, por escrito, con las frases que anotó mientras calificaba.</a:t>
+            </a:r>
+          </a:p>
+          <a:p>
+            <a:pPr>
+              <a:spcAft>
+                <a:spcPts val="800"/>
+              </a:spcAft>
+            </a:pPr>
+            <a:r>
+              <a:rPr sz="2000" b="0" i="0">
+                <a:solidFill>
+                  <a:srgbClr val="333333"/>
+                </a:solidFill>
+                <a:latin typeface="Calibri"/>
+              </a:rPr>
+              <a:t>–   En público, una sola cosa: es la misma regla de la Clase 12 sobre retroalimentación útil.</a:t>
+            </a:r>
+          </a:p>
+          <a:p>
+            <a:pPr>
+              <a:spcAft>
+                <a:spcPts val="800"/>
+              </a:spcAft>
+            </a:pPr>
+            <a:r>
+              <a:rPr sz="2000" b="0" i="0">
+                <a:solidFill>
+                  <a:srgbClr val="333333"/>
+                </a:solidFill>
+                <a:latin typeface="Calibri"/>
+              </a:rPr>
+              <a:t>–   Y cierre nombrando lo que efectivamente pasó, sin discurso: hace quince sesiones estos equipos tenían una ocurrencia</a:t>
+            </a:r>
+          </a:p>
+          <a:p>
+            <a:pPr>
+              <a:spcAft>
+                <a:spcPts val="800"/>
+              </a:spcAft>
+            </a:pPr>
+            <a:r>
+              <a:rPr sz="2000" b="0" i="0">
+                <a:solidFill>
+                  <a:srgbClr val="333333"/>
+                </a:solidFill>
+                <a:latin typeface="Calibri"/>
+              </a:rPr>
+              <a:t>–   Hoy sustentaron un problema con evidencia, una decisión con criterios, un prototipo probado con personas reales y un impacto con sus costos. </a:t>
+            </a:r>
+            <a:r>
+              <a:rPr sz="2000" b="1" i="0">
+                <a:solidFill>
+                  <a:srgbClr val="333333"/>
+                </a:solidFill>
+                <a:latin typeface="Calibri"/>
+              </a:rPr>
+              <a:t>Eso es el ciclo completo de un proyecto de ingeniería</a:t>
+            </a:r>
+            <a:r>
+              <a:rPr sz="2000" b="0" i="0">
+                <a:solidFill>
+                  <a:srgbClr val="333333"/>
+                </a:solidFill>
+                <a:latin typeface="Calibri"/>
+              </a:rPr>
+              <a:t>, y lo hicieron en primer semestre.</a:t>
+            </a:r>
+          </a:p>
+          <a:p>
+            <a:pPr>
+              <a:spcAft>
+                <a:spcPts val="800"/>
+              </a:spcAft>
+            </a:pPr>
+            <a:r>
+              <a:rPr sz="2000" b="0" i="0">
+                <a:solidFill>
+                  <a:srgbClr val="333333"/>
+                </a:solidFill>
+                <a:latin typeface="Calibri"/>
+              </a:rPr>
+              <a:t>–   Vale decirlo una vez, en serio y corto.</a:t>
+            </a:r>
+          </a:p>
+        </p:txBody>
+      </p:sp>
+      <p:sp>
+        <p:nvSpPr>
+          <p:cNvPr id="6" name="TextBox 5"/>
+          <p:cNvSpPr txBox="1"/>
+          <p:nvPr/>
+        </p:nvSpPr>
+        <p:spPr>
+          <a:xfrm>
+            <a:off x="11185855" y="6473952"/>
+            <a:ext cx="640080" cy="274320"/>
+          </a:xfrm>
+          <a:prstGeom prst="rect">
+            <a:avLst/>
+          </a:prstGeom>
+          <a:noFill/>
+        </p:spPr>
+        <p:txBody>
+          <a:bodyPr wrap="square">
+            <a:spAutoFit/>
+          </a:bodyPr>
+          <a:lstStyle/>
+          <a:p>
+            <a:pPr algn="r"/>
+            <a:r>
+              <a:rPr sz="1100" b="0" i="0">
+                <a:solidFill>
+                  <a:srgbClr val="666666"/>
+                </a:solidFill>
+                <a:latin typeface="Calibri"/>
+              </a:rPr>
+              <a:t>16</a:t>
+            </a:r>
+          </a:p>
+        </p:txBody>
+      </p:sp>
+    </p:spTree>
+  </p:cSld>
+  <p:clrMapOvr>
+    <a:masterClrMapping/>
+  </p:clrMapOvr>
+</p:sld>
+</file>
+
+<file path=ppt/slides/slide17.xml><?xml version="1.0" encoding="utf-8"?>
+<p:sld xmlns:a="http://schemas.openxmlformats.org/drawingml/2006/main" xmlns:p="http://schemas.openxmlformats.org/presentationml/2006/main" xmlns:r="http://schemas.openxmlformats.org/officeDocument/2006/relationships">
+  <p:cSld>
+    <p:bg>
+      <p:bgPr>
+        <a:solidFill>
+          <a:srgbClr val="FFFFFF"/>
+        </a:solidFill>
+        <a:effectLst/>
+      </p:bgPr>
+    </p:bg>
+    <p:spTree>
+      <p:nvGrpSpPr>
+        <p:cNvPr id="1" name=""/>
+        <p:cNvGrpSpPr/>
+        <p:nvPr/>
+      </p:nvGrpSpPr>
+      <p:grpSpPr/>
+      <p:sp>
+        <p:nvSpPr>
+          <p:cNvPr id="2" name="Rectangle 1"/>
+          <p:cNvSpPr/>
+          <p:nvPr/>
+        </p:nvSpPr>
+        <p:spPr>
+          <a:xfrm>
+            <a:off x="0" y="0"/>
+            <a:ext cx="12191695" cy="1170432"/>
+          </a:xfrm>
+          <a:prstGeom prst="rect">
+            <a:avLst/>
+          </a:prstGeom>
+          <a:solidFill>
+            <a:srgbClr val="095292"/>
+          </a:solidFill>
+          <a:ln>
+            <a:noFill/>
+          </a:ln>
+        </p:spPr>
+        <p:style>
+          <a:lnRef idx="1">
+            <a:schemeClr val="accent1"/>
+          </a:lnRef>
+          <a:fillRef idx="3">
+            <a:schemeClr val="accent1"/>
+          </a:fillRef>
+          <a:effectRef idx="2">
+            <a:schemeClr val="accent1"/>
+          </a:effectRef>
+          <a:fontRef idx="minor">
+            <a:schemeClr val="lt1"/>
+          </a:fontRef>
+        </p:style>
+        <p:txBody>
+          <a:bodyPr rtlCol="0" anchor="ctr"/>
+          <a:lstStyle/>
+          <a:p>
+            <a:pPr algn="ctr"/>
+          </a:p>
+        </p:txBody>
+      </p:sp>
+      <p:sp>
+        <p:nvSpPr>
+          <p:cNvPr id="3" name="Rectangle 2"/>
+          <p:cNvSpPr/>
+          <p:nvPr/>
+        </p:nvSpPr>
+        <p:spPr>
+          <a:xfrm>
+            <a:off x="0" y="1170432"/>
+            <a:ext cx="12191695" cy="41148"/>
+          </a:xfrm>
+          <a:prstGeom prst="rect">
+            <a:avLst/>
+          </a:prstGeom>
+          <a:solidFill>
+            <a:srgbClr val="FFD000"/>
+          </a:solidFill>
+          <a:ln>
+            <a:noFill/>
+          </a:ln>
+        </p:spPr>
+        <p:style>
+          <a:lnRef idx="1">
+            <a:schemeClr val="accent1"/>
+          </a:lnRef>
+          <a:fillRef idx="3">
+            <a:schemeClr val="accent1"/>
+          </a:fillRef>
+          <a:effectRef idx="2">
+            <a:schemeClr val="accent1"/>
+          </a:effectRef>
+          <a:fontRef idx="minor">
+            <a:schemeClr val="lt1"/>
+          </a:fontRef>
+        </p:style>
+        <p:txBody>
+          <a:bodyPr rtlCol="0" anchor="ctr"/>
+          <a:lstStyle/>
+          <a:p>
+            <a:pPr algn="ctr"/>
+          </a:p>
+        </p:txBody>
+      </p:sp>
+      <p:sp>
+        <p:nvSpPr>
+          <p:cNvPr id="4" name="TextBox 3"/>
+          <p:cNvSpPr txBox="1"/>
+          <p:nvPr/>
+        </p:nvSpPr>
+        <p:spPr>
+          <a:xfrm>
+            <a:off x="457200" y="164592"/>
+            <a:ext cx="11277295" cy="384048"/>
+          </a:xfrm>
+          <a:prstGeom prst="rect">
+            <a:avLst/>
+          </a:prstGeom>
+          <a:noFill/>
+        </p:spPr>
+        <p:txBody>
+          <a:bodyPr wrap="square">
+            <a:spAutoFit/>
+          </a:bodyPr>
+          <a:lstStyle/>
+          <a:p>
+            <a:r>
+              <a:rPr sz="2600" b="1" i="0">
+                <a:solidFill>
+                  <a:srgbClr val="FFFFFF"/>
+                </a:solidFill>
+                <a:latin typeface="Calibri"/>
+              </a:rPr>
+              <a:t>Taller de hoy: Exposición final del proyecto</a:t>
+            </a:r>
+          </a:p>
+        </p:txBody>
+      </p:sp>
+      <p:sp>
+        <p:nvSpPr>
+          <p:cNvPr id="5" name="TextBox 4"/>
+          <p:cNvSpPr txBox="1"/>
+          <p:nvPr/>
+        </p:nvSpPr>
+        <p:spPr>
+          <a:xfrm>
+            <a:off x="457200" y="566928"/>
+            <a:ext cx="11277295" cy="411480"/>
+          </a:xfrm>
+          <a:prstGeom prst="rect">
+            <a:avLst/>
+          </a:prstGeom>
+          <a:noFill/>
+        </p:spPr>
+        <p:txBody>
+          <a:bodyPr wrap="square">
+            <a:spAutoFit/>
+          </a:bodyPr>
+          <a:lstStyle/>
+          <a:p>
+            <a:r>
+              <a:rPr sz="1400" b="0" i="0">
+                <a:solidFill>
+                  <a:srgbClr val="B8D8EE"/>
+                </a:solidFill>
+                <a:latin typeface="Calibri"/>
+              </a:rPr>
+              <a:t>60 min en equipos · 9 min de exposición + 3 de preguntas, por equipo · exposición de 9 min + ficha de valoración de los otros equipos</a:t>
+            </a:r>
+          </a:p>
+        </p:txBody>
+      </p:sp>
+      <p:sp>
+        <p:nvSpPr>
+          <p:cNvPr id="6" name="Rounded Rectangle 5"/>
+          <p:cNvSpPr/>
+          <p:nvPr/>
+        </p:nvSpPr>
+        <p:spPr>
+          <a:xfrm>
+            <a:off x="457200" y="1472184"/>
+            <a:ext cx="11277295" cy="566928"/>
+          </a:xfrm>
+          <a:prstGeom prst="roundRect">
+            <a:avLst>
+              <a:gd name="adj" fmla="val 12000"/>
+            </a:avLst>
+          </a:prstGeom>
+          <a:solidFill>
+            <a:srgbClr val="F2F2F2"/>
+          </a:solidFill>
+          <a:ln>
+            <a:noFill/>
+          </a:ln>
+        </p:spPr>
+        <p:style>
+          <a:lnRef idx="1">
+            <a:schemeClr val="accent1"/>
+          </a:lnRef>
+          <a:fillRef idx="3">
+            <a:schemeClr val="accent1"/>
+          </a:fillRef>
+          <a:effectRef idx="2">
+            <a:schemeClr val="accent1"/>
+          </a:effectRef>
+          <a:fontRef idx="minor">
+            <a:schemeClr val="lt1"/>
+          </a:fontRef>
+        </p:style>
+        <p:txBody>
+          <a:bodyPr rtlCol="0" anchor="ctr"/>
+          <a:lstStyle/>
+          <a:p>
+            <a:pPr algn="ctr"/>
+          </a:p>
+        </p:txBody>
+      </p:sp>
+      <p:sp>
+        <p:nvSpPr>
+          <p:cNvPr id="7" name="Rectangle 6"/>
+          <p:cNvSpPr/>
+          <p:nvPr/>
+        </p:nvSpPr>
+        <p:spPr>
+          <a:xfrm>
+            <a:off x="640080" y="1618487"/>
+            <a:ext cx="274320" cy="274320"/>
+          </a:xfrm>
+          <a:prstGeom prst="rect">
+            <a:avLst/>
+          </a:prstGeom>
+          <a:solidFill>
+            <a:srgbClr val="FFFFFF"/>
+          </a:solidFill>
+          <a:ln>
+            <a:solidFill>
+              <a:srgbClr val="333333"/>
+            </a:solidFill>
+          </a:ln>
+        </p:spPr>
+        <p:style>
+          <a:lnRef idx="1">
+            <a:schemeClr val="accent1"/>
+          </a:lnRef>
+          <a:fillRef idx="3">
+            <a:schemeClr val="accent1"/>
+          </a:fillRef>
+          <a:effectRef idx="2">
+            <a:schemeClr val="accent1"/>
+          </a:effectRef>
+          <a:fontRef idx="minor">
+            <a:schemeClr val="lt1"/>
+          </a:fontRef>
+        </p:style>
+        <p:txBody>
+          <a:bodyPr rtlCol="0" anchor="ctr"/>
+          <a:lstStyle/>
+          <a:p>
+            <a:pPr algn="ctr"/>
+          </a:p>
+        </p:txBody>
+      </p:sp>
+      <p:sp>
+        <p:nvSpPr>
+          <p:cNvPr id="8" name="Rectangle 7"/>
+          <p:cNvSpPr/>
+          <p:nvPr/>
+        </p:nvSpPr>
+        <p:spPr>
+          <a:xfrm>
+            <a:off x="640080" y="1618487"/>
+            <a:ext cx="73152" cy="274320"/>
           </a:xfrm>
           <a:prstGeom prst="rect">
             <a:avLst/>
@@ -5277,40 +6201,16 @@
           </a:p>
         </p:txBody>
       </p:sp>
-      <p:pic>
-        <p:nvPicPr>
-          <p:cNvPr id="3" name="Picture 2" descr="logo_uniajc_color.png"/>
-          <p:cNvPicPr>
-            <a:picLocks noChangeAspect="1"/>
-          </p:cNvPicPr>
-          <p:nvPr/>
-        </p:nvPicPr>
-        <p:blipFill>
-          <a:blip r:embed="rId2"/>
-          <a:stretch>
-            <a:fillRect/>
-          </a:stretch>
-        </p:blipFill>
-        <p:spPr>
-          <a:xfrm>
-            <a:off x="10271455" y="5998464"/>
-            <a:ext cx="1463040" cy="643233"/>
-          </a:xfrm>
-          <a:prstGeom prst="rect">
-            <a:avLst/>
-          </a:prstGeom>
-        </p:spPr>
-      </p:pic>
-      <p:sp>
-        <p:nvSpPr>
-          <p:cNvPr id="4" name="TextBox 3"/>
+      <p:sp>
+        <p:nvSpPr>
+          <p:cNvPr id="9" name="TextBox 8"/>
           <p:cNvSpPr txBox="1"/>
           <p:nvPr/>
         </p:nvSpPr>
         <p:spPr>
           <a:xfrm>
-            <a:off x="457200" y="1737360"/>
-            <a:ext cx="11277295" cy="1097280"/>
+            <a:off x="1097280" y="1563624"/>
+            <a:ext cx="10362895" cy="402336"/>
           </a:xfrm>
           <a:prstGeom prst="rect">
             <a:avLst/>
@@ -5321,29 +6221,895 @@
           <a:bodyPr wrap="square" anchor="ctr"/>
           <a:lstStyle/>
           <a:p>
+            <a:r>
+              <a:rPr sz="1500" b="1" i="0">
+                <a:solidFill>
+                  <a:srgbClr val="333333"/>
+                </a:solidFill>
+                <a:latin typeface="Calibri"/>
+              </a:rPr>
+              <a:t>EL PROBLEMA CON SU CIFRA</a:t>
+            </a:r>
+            <a:r>
+              <a:rPr sz="1500" b="0" i="0">
+                <a:solidFill>
+                  <a:srgbClr val="333333"/>
+                </a:solidFill>
+                <a:latin typeface="Calibri"/>
+              </a:rPr>
+              <a:t> — Una frase y </a:t>
+            </a:r>
+            <a:r>
+              <a:rPr sz="1500" b="1" i="0">
+                <a:solidFill>
+                  <a:srgbClr val="333333"/>
+                </a:solidFill>
+                <a:latin typeface="Calibri"/>
+              </a:rPr>
+              <a:t>un número</a:t>
+            </a:r>
+            <a:r>
+              <a:rPr sz="1500" b="0" i="0">
+                <a:solidFill>
+                  <a:srgbClr val="333333"/>
+                </a:solidFill>
+                <a:latin typeface="Calibri"/>
+              </a:rPr>
+              <a:t>, con de dónde salió. </a:t>
+            </a:r>
+            <a:r>
+              <a:rPr sz="1500" b="1" i="0">
+                <a:solidFill>
+                  <a:srgbClr val="333333"/>
+                </a:solidFill>
+                <a:latin typeface="Calibri"/>
+              </a:rPr>
+              <a:t>Sin saludos ni presentaciones personales</a:t>
+            </a:r>
+            <a:r>
+              <a:rPr sz="1500" b="0" i="0">
+                <a:solidFill>
+                  <a:srgbClr val="333333"/>
+                </a:solidFill>
+                <a:latin typeface="Calibri"/>
+              </a:rPr>
+              <a:t>: el nombre del equipo está en la diapositiva.</a:t>
+            </a:r>
+          </a:p>
+        </p:txBody>
+      </p:sp>
+      <p:sp>
+        <p:nvSpPr>
+          <p:cNvPr id="10" name="Rounded Rectangle 9"/>
+          <p:cNvSpPr/>
+          <p:nvPr/>
+        </p:nvSpPr>
+        <p:spPr>
+          <a:xfrm>
+            <a:off x="457200" y="2148839"/>
+            <a:ext cx="11277295" cy="566928"/>
+          </a:xfrm>
+          <a:prstGeom prst="roundRect">
+            <a:avLst>
+              <a:gd name="adj" fmla="val 12000"/>
+            </a:avLst>
+          </a:prstGeom>
+          <a:solidFill>
+            <a:srgbClr val="F2F2F2"/>
+          </a:solidFill>
+          <a:ln>
+            <a:noFill/>
+          </a:ln>
+        </p:spPr>
+        <p:style>
+          <a:lnRef idx="1">
+            <a:schemeClr val="accent1"/>
+          </a:lnRef>
+          <a:fillRef idx="3">
+            <a:schemeClr val="accent1"/>
+          </a:fillRef>
+          <a:effectRef idx="2">
+            <a:schemeClr val="accent1"/>
+          </a:effectRef>
+          <a:fontRef idx="minor">
+            <a:schemeClr val="lt1"/>
+          </a:fontRef>
+        </p:style>
+        <p:txBody>
+          <a:bodyPr rtlCol="0" anchor="ctr"/>
+          <a:lstStyle/>
+          <a:p>
             <a:pPr algn="ctr"/>
-            <a:r>
-              <a:rPr sz="3400" b="1" i="0">
-                <a:solidFill>
-                  <a:srgbClr val="095292"/>
-                </a:solidFill>
-                <a:latin typeface="Calibri"/>
-              </a:rPr>
-              <a:t>Nos vemos en la Clase 16 · la última</a:t>
-            </a:r>
-          </a:p>
-        </p:txBody>
-      </p:sp>
-      <p:sp>
-        <p:nvSpPr>
-          <p:cNvPr id="5" name="TextBox 4"/>
+          </a:p>
+        </p:txBody>
+      </p:sp>
+      <p:sp>
+        <p:nvSpPr>
+          <p:cNvPr id="11" name="Rectangle 10"/>
+          <p:cNvSpPr/>
+          <p:nvPr/>
+        </p:nvSpPr>
+        <p:spPr>
+          <a:xfrm>
+            <a:off x="640080" y="2295144"/>
+            <a:ext cx="274320" cy="274320"/>
+          </a:xfrm>
+          <a:prstGeom prst="rect">
+            <a:avLst/>
+          </a:prstGeom>
+          <a:solidFill>
+            <a:srgbClr val="FFFFFF"/>
+          </a:solidFill>
+          <a:ln>
+            <a:solidFill>
+              <a:srgbClr val="333333"/>
+            </a:solidFill>
+          </a:ln>
+        </p:spPr>
+        <p:style>
+          <a:lnRef idx="1">
+            <a:schemeClr val="accent1"/>
+          </a:lnRef>
+          <a:fillRef idx="3">
+            <a:schemeClr val="accent1"/>
+          </a:fillRef>
+          <a:effectRef idx="2">
+            <a:schemeClr val="accent1"/>
+          </a:effectRef>
+          <a:fontRef idx="minor">
+            <a:schemeClr val="lt1"/>
+          </a:fontRef>
+        </p:style>
+        <p:txBody>
+          <a:bodyPr rtlCol="0" anchor="ctr"/>
+          <a:lstStyle/>
+          <a:p>
+            <a:pPr algn="ctr"/>
+          </a:p>
+        </p:txBody>
+      </p:sp>
+      <p:sp>
+        <p:nvSpPr>
+          <p:cNvPr id="12" name="Rectangle 11"/>
+          <p:cNvSpPr/>
+          <p:nvPr/>
+        </p:nvSpPr>
+        <p:spPr>
+          <a:xfrm>
+            <a:off x="640080" y="2295144"/>
+            <a:ext cx="73152" cy="274320"/>
+          </a:xfrm>
+          <a:prstGeom prst="rect">
+            <a:avLst/>
+          </a:prstGeom>
+          <a:solidFill>
+            <a:srgbClr val="269CCB"/>
+          </a:solidFill>
+          <a:ln>
+            <a:noFill/>
+          </a:ln>
+        </p:spPr>
+        <p:style>
+          <a:lnRef idx="1">
+            <a:schemeClr val="accent1"/>
+          </a:lnRef>
+          <a:fillRef idx="3">
+            <a:schemeClr val="accent1"/>
+          </a:fillRef>
+          <a:effectRef idx="2">
+            <a:schemeClr val="accent1"/>
+          </a:effectRef>
+          <a:fontRef idx="minor">
+            <a:schemeClr val="lt1"/>
+          </a:fontRef>
+        </p:style>
+        <p:txBody>
+          <a:bodyPr rtlCol="0" anchor="ctr"/>
+          <a:lstStyle/>
+          <a:p>
+            <a:pPr algn="ctr"/>
+          </a:p>
+        </p:txBody>
+      </p:sp>
+      <p:sp>
+        <p:nvSpPr>
+          <p:cNvPr id="13" name="TextBox 12"/>
           <p:cNvSpPr txBox="1"/>
           <p:nvPr/>
         </p:nvSpPr>
         <p:spPr>
           <a:xfrm>
-            <a:off x="457200" y="3017520"/>
-            <a:ext cx="11277295" cy="1645920"/>
+            <a:off x="1097280" y="2240279"/>
+            <a:ext cx="10362895" cy="402336"/>
+          </a:xfrm>
+          <a:prstGeom prst="rect">
+            <a:avLst/>
+          </a:prstGeom>
+          <a:noFill/>
+        </p:spPr>
+        <p:txBody>
+          <a:bodyPr wrap="square" anchor="ctr"/>
+          <a:lstStyle/>
+          <a:p>
+            <a:r>
+              <a:rPr sz="1500" b="1" i="0">
+                <a:solidFill>
+                  <a:srgbClr val="333333"/>
+                </a:solidFill>
+                <a:latin typeface="Calibri"/>
+              </a:rPr>
+              <a:t>LOS AFECTADOS Y LA DECISIÓN</a:t>
+            </a:r>
+            <a:r>
+              <a:rPr sz="1500" b="0" i="0">
+                <a:solidFill>
+                  <a:srgbClr val="333333"/>
+                </a:solidFill>
+                <a:latin typeface="Calibri"/>
+              </a:rPr>
+              <a:t> — Quiénes son los afectados —</a:t>
+            </a:r>
+            <a:r>
+              <a:rPr sz="1500" b="1" i="0">
+                <a:solidFill>
+                  <a:srgbClr val="333333"/>
+                </a:solidFill>
+                <a:latin typeface="Calibri"/>
+              </a:rPr>
+              <a:t>incluido uno que no es usuario</a:t>
+            </a:r>
+            <a:r>
+              <a:rPr sz="1500" b="0" i="0">
+                <a:solidFill>
+                  <a:srgbClr val="333333"/>
+                </a:solidFill>
+                <a:latin typeface="Calibri"/>
+              </a:rPr>
+              <a:t>— y qué alternativa se eligió, </a:t>
+            </a:r>
+            <a:r>
+              <a:rPr sz="1500" b="1" i="0">
+                <a:solidFill>
+                  <a:srgbClr val="333333"/>
+                </a:solidFill>
+                <a:latin typeface="Calibri"/>
+              </a:rPr>
+              <a:t>diciendo qué se sacrificó</a:t>
+            </a:r>
+            <a:r>
+              <a:rPr sz="1500" b="0" i="0">
+                <a:solidFill>
+                  <a:srgbClr val="333333"/>
+                </a:solidFill>
+                <a:latin typeface="Calibri"/>
+              </a:rPr>
+              <a:t>.</a:t>
+            </a:r>
+          </a:p>
+        </p:txBody>
+      </p:sp>
+      <p:sp>
+        <p:nvSpPr>
+          <p:cNvPr id="14" name="Rounded Rectangle 13"/>
+          <p:cNvSpPr/>
+          <p:nvPr/>
+        </p:nvSpPr>
+        <p:spPr>
+          <a:xfrm>
+            <a:off x="457200" y="2825496"/>
+            <a:ext cx="11277295" cy="566928"/>
+          </a:xfrm>
+          <a:prstGeom prst="roundRect">
+            <a:avLst>
+              <a:gd name="adj" fmla="val 12000"/>
+            </a:avLst>
+          </a:prstGeom>
+          <a:solidFill>
+            <a:srgbClr val="F2F2F2"/>
+          </a:solidFill>
+          <a:ln>
+            <a:noFill/>
+          </a:ln>
+        </p:spPr>
+        <p:style>
+          <a:lnRef idx="1">
+            <a:schemeClr val="accent1"/>
+          </a:lnRef>
+          <a:fillRef idx="3">
+            <a:schemeClr val="accent1"/>
+          </a:fillRef>
+          <a:effectRef idx="2">
+            <a:schemeClr val="accent1"/>
+          </a:effectRef>
+          <a:fontRef idx="minor">
+            <a:schemeClr val="lt1"/>
+          </a:fontRef>
+        </p:style>
+        <p:txBody>
+          <a:bodyPr rtlCol="0" anchor="ctr"/>
+          <a:lstStyle/>
+          <a:p>
+            <a:pPr algn="ctr"/>
+          </a:p>
+        </p:txBody>
+      </p:sp>
+      <p:sp>
+        <p:nvSpPr>
+          <p:cNvPr id="15" name="Rectangle 14"/>
+          <p:cNvSpPr/>
+          <p:nvPr/>
+        </p:nvSpPr>
+        <p:spPr>
+          <a:xfrm>
+            <a:off x="640080" y="2971800"/>
+            <a:ext cx="274320" cy="274320"/>
+          </a:xfrm>
+          <a:prstGeom prst="rect">
+            <a:avLst/>
+          </a:prstGeom>
+          <a:solidFill>
+            <a:srgbClr val="FFFFFF"/>
+          </a:solidFill>
+          <a:ln>
+            <a:solidFill>
+              <a:srgbClr val="333333"/>
+            </a:solidFill>
+          </a:ln>
+        </p:spPr>
+        <p:style>
+          <a:lnRef idx="1">
+            <a:schemeClr val="accent1"/>
+          </a:lnRef>
+          <a:fillRef idx="3">
+            <a:schemeClr val="accent1"/>
+          </a:fillRef>
+          <a:effectRef idx="2">
+            <a:schemeClr val="accent1"/>
+          </a:effectRef>
+          <a:fontRef idx="minor">
+            <a:schemeClr val="lt1"/>
+          </a:fontRef>
+        </p:style>
+        <p:txBody>
+          <a:bodyPr rtlCol="0" anchor="ctr"/>
+          <a:lstStyle/>
+          <a:p>
+            <a:pPr algn="ctr"/>
+          </a:p>
+        </p:txBody>
+      </p:sp>
+      <p:sp>
+        <p:nvSpPr>
+          <p:cNvPr id="16" name="Rectangle 15"/>
+          <p:cNvSpPr/>
+          <p:nvPr/>
+        </p:nvSpPr>
+        <p:spPr>
+          <a:xfrm>
+            <a:off x="640080" y="2971800"/>
+            <a:ext cx="73152" cy="274320"/>
+          </a:xfrm>
+          <a:prstGeom prst="rect">
+            <a:avLst/>
+          </a:prstGeom>
+          <a:solidFill>
+            <a:srgbClr val="269CCB"/>
+          </a:solidFill>
+          <a:ln>
+            <a:noFill/>
+          </a:ln>
+        </p:spPr>
+        <p:style>
+          <a:lnRef idx="1">
+            <a:schemeClr val="accent1"/>
+          </a:lnRef>
+          <a:fillRef idx="3">
+            <a:schemeClr val="accent1"/>
+          </a:fillRef>
+          <a:effectRef idx="2">
+            <a:schemeClr val="accent1"/>
+          </a:effectRef>
+          <a:fontRef idx="minor">
+            <a:schemeClr val="lt1"/>
+          </a:fontRef>
+        </p:style>
+        <p:txBody>
+          <a:bodyPr rtlCol="0" anchor="ctr"/>
+          <a:lstStyle/>
+          <a:p>
+            <a:pPr algn="ctr"/>
+          </a:p>
+        </p:txBody>
+      </p:sp>
+      <p:sp>
+        <p:nvSpPr>
+          <p:cNvPr id="17" name="TextBox 16"/>
+          <p:cNvSpPr txBox="1"/>
+          <p:nvPr/>
+        </p:nvSpPr>
+        <p:spPr>
+          <a:xfrm>
+            <a:off x="1097280" y="2916936"/>
+            <a:ext cx="10362895" cy="402336"/>
+          </a:xfrm>
+          <a:prstGeom prst="rect">
+            <a:avLst/>
+          </a:prstGeom>
+          <a:noFill/>
+        </p:spPr>
+        <p:txBody>
+          <a:bodyPr wrap="square" anchor="ctr"/>
+          <a:lstStyle/>
+          <a:p>
+            <a:r>
+              <a:rPr sz="1500" b="1" i="0">
+                <a:solidFill>
+                  <a:srgbClr val="333333"/>
+                </a:solidFill>
+                <a:latin typeface="Calibri"/>
+              </a:rPr>
+              <a:t>LA SOLUCIÓN Y EL PROTOTIPO EN VIVO</a:t>
+            </a:r>
+            <a:r>
+              <a:rPr sz="1500" b="0" i="0">
+                <a:solidFill>
+                  <a:srgbClr val="333333"/>
+                </a:solidFill>
+                <a:latin typeface="Calibri"/>
+              </a:rPr>
+              <a:t> — Un recorrido de </a:t>
+            </a:r>
+            <a:r>
+              <a:rPr sz="1500" b="1" i="0">
+                <a:solidFill>
+                  <a:srgbClr val="333333"/>
+                </a:solidFill>
+                <a:latin typeface="Calibri"/>
+              </a:rPr>
+              <a:t>tres pasos</a:t>
+            </a:r>
+            <a:r>
+              <a:rPr sz="1500" b="0" i="0">
+                <a:solidFill>
+                  <a:srgbClr val="333333"/>
+                </a:solidFill>
+                <a:latin typeface="Calibri"/>
+              </a:rPr>
+              <a:t> mostrando </a:t>
+            </a:r>
+            <a:r>
+              <a:rPr sz="1500" b="1" i="0">
+                <a:solidFill>
+                  <a:srgbClr val="333333"/>
+                </a:solidFill>
+                <a:latin typeface="Calibri"/>
+              </a:rPr>
+              <a:t>una tarea cumpliéndose</a:t>
+            </a:r>
+            <a:r>
+              <a:rPr sz="1500" b="0" i="0">
+                <a:solidFill>
+                  <a:srgbClr val="333333"/>
+                </a:solidFill>
+                <a:latin typeface="Calibri"/>
+              </a:rPr>
+              <a:t>. Narra una persona y maneja la pantalla otra.</a:t>
+            </a:r>
+          </a:p>
+        </p:txBody>
+      </p:sp>
+      <p:sp>
+        <p:nvSpPr>
+          <p:cNvPr id="18" name="Rounded Rectangle 17"/>
+          <p:cNvSpPr/>
+          <p:nvPr/>
+        </p:nvSpPr>
+        <p:spPr>
+          <a:xfrm>
+            <a:off x="457200" y="3502152"/>
+            <a:ext cx="11277295" cy="566928"/>
+          </a:xfrm>
+          <a:prstGeom prst="roundRect">
+            <a:avLst>
+              <a:gd name="adj" fmla="val 12000"/>
+            </a:avLst>
+          </a:prstGeom>
+          <a:solidFill>
+            <a:srgbClr val="F2F2F2"/>
+          </a:solidFill>
+          <a:ln>
+            <a:noFill/>
+          </a:ln>
+        </p:spPr>
+        <p:style>
+          <a:lnRef idx="1">
+            <a:schemeClr val="accent1"/>
+          </a:lnRef>
+          <a:fillRef idx="3">
+            <a:schemeClr val="accent1"/>
+          </a:fillRef>
+          <a:effectRef idx="2">
+            <a:schemeClr val="accent1"/>
+          </a:effectRef>
+          <a:fontRef idx="minor">
+            <a:schemeClr val="lt1"/>
+          </a:fontRef>
+        </p:style>
+        <p:txBody>
+          <a:bodyPr rtlCol="0" anchor="ctr"/>
+          <a:lstStyle/>
+          <a:p>
+            <a:pPr algn="ctr"/>
+          </a:p>
+        </p:txBody>
+      </p:sp>
+      <p:sp>
+        <p:nvSpPr>
+          <p:cNvPr id="19" name="Rectangle 18"/>
+          <p:cNvSpPr/>
+          <p:nvPr/>
+        </p:nvSpPr>
+        <p:spPr>
+          <a:xfrm>
+            <a:off x="640080" y="3648456"/>
+            <a:ext cx="274320" cy="274320"/>
+          </a:xfrm>
+          <a:prstGeom prst="rect">
+            <a:avLst/>
+          </a:prstGeom>
+          <a:solidFill>
+            <a:srgbClr val="FFFFFF"/>
+          </a:solidFill>
+          <a:ln>
+            <a:solidFill>
+              <a:srgbClr val="333333"/>
+            </a:solidFill>
+          </a:ln>
+        </p:spPr>
+        <p:style>
+          <a:lnRef idx="1">
+            <a:schemeClr val="accent1"/>
+          </a:lnRef>
+          <a:fillRef idx="3">
+            <a:schemeClr val="accent1"/>
+          </a:fillRef>
+          <a:effectRef idx="2">
+            <a:schemeClr val="accent1"/>
+          </a:effectRef>
+          <a:fontRef idx="minor">
+            <a:schemeClr val="lt1"/>
+          </a:fontRef>
+        </p:style>
+        <p:txBody>
+          <a:bodyPr rtlCol="0" anchor="ctr"/>
+          <a:lstStyle/>
+          <a:p>
+            <a:pPr algn="ctr"/>
+          </a:p>
+        </p:txBody>
+      </p:sp>
+      <p:sp>
+        <p:nvSpPr>
+          <p:cNvPr id="20" name="Rectangle 19"/>
+          <p:cNvSpPr/>
+          <p:nvPr/>
+        </p:nvSpPr>
+        <p:spPr>
+          <a:xfrm>
+            <a:off x="640080" y="3648456"/>
+            <a:ext cx="73152" cy="274320"/>
+          </a:xfrm>
+          <a:prstGeom prst="rect">
+            <a:avLst/>
+          </a:prstGeom>
+          <a:solidFill>
+            <a:srgbClr val="269CCB"/>
+          </a:solidFill>
+          <a:ln>
+            <a:noFill/>
+          </a:ln>
+        </p:spPr>
+        <p:style>
+          <a:lnRef idx="1">
+            <a:schemeClr val="accent1"/>
+          </a:lnRef>
+          <a:fillRef idx="3">
+            <a:schemeClr val="accent1"/>
+          </a:fillRef>
+          <a:effectRef idx="2">
+            <a:schemeClr val="accent1"/>
+          </a:effectRef>
+          <a:fontRef idx="minor">
+            <a:schemeClr val="lt1"/>
+          </a:fontRef>
+        </p:style>
+        <p:txBody>
+          <a:bodyPr rtlCol="0" anchor="ctr"/>
+          <a:lstStyle/>
+          <a:p>
+            <a:pPr algn="ctr"/>
+          </a:p>
+        </p:txBody>
+      </p:sp>
+      <p:sp>
+        <p:nvSpPr>
+          <p:cNvPr id="21" name="TextBox 20"/>
+          <p:cNvSpPr txBox="1"/>
+          <p:nvPr/>
+        </p:nvSpPr>
+        <p:spPr>
+          <a:xfrm>
+            <a:off x="1097280" y="3593592"/>
+            <a:ext cx="10362895" cy="402336"/>
+          </a:xfrm>
+          <a:prstGeom prst="rect">
+            <a:avLst/>
+          </a:prstGeom>
+          <a:noFill/>
+        </p:spPr>
+        <p:txBody>
+          <a:bodyPr wrap="square" anchor="ctr"/>
+          <a:lstStyle/>
+          <a:p>
+            <a:r>
+              <a:rPr sz="1500" b="1" i="0">
+                <a:solidFill>
+                  <a:srgbClr val="333333"/>
+                </a:solidFill>
+                <a:latin typeface="Calibri"/>
+              </a:rPr>
+              <a:t>LO QUE FALLÓ Y LO QUE APRENDIMOS</a:t>
+            </a:r>
+            <a:r>
+              <a:rPr sz="1500" b="0" i="0">
+                <a:solidFill>
+                  <a:srgbClr val="333333"/>
+                </a:solidFill>
+                <a:latin typeface="Calibri"/>
+              </a:rPr>
+              <a:t> — Los hallazgos con personas reales, qué se arregló y </a:t>
+            </a:r>
+            <a:r>
+              <a:rPr sz="1500" b="1" i="0">
+                <a:solidFill>
+                  <a:srgbClr val="333333"/>
+                </a:solidFill>
+                <a:latin typeface="Calibri"/>
+              </a:rPr>
+              <a:t>qué se decidió no arreglar</a:t>
+            </a:r>
+            <a:r>
+              <a:rPr sz="1500" b="0" i="0">
+                <a:solidFill>
+                  <a:srgbClr val="333333"/>
+                </a:solidFill>
+                <a:latin typeface="Calibri"/>
+              </a:rPr>
+              <a:t>, con el motivo.</a:t>
+            </a:r>
+          </a:p>
+        </p:txBody>
+      </p:sp>
+      <p:sp>
+        <p:nvSpPr>
+          <p:cNvPr id="22" name="Rounded Rectangle 21"/>
+          <p:cNvSpPr/>
+          <p:nvPr/>
+        </p:nvSpPr>
+        <p:spPr>
+          <a:xfrm>
+            <a:off x="457200" y="4178808"/>
+            <a:ext cx="11277295" cy="566928"/>
+          </a:xfrm>
+          <a:prstGeom prst="roundRect">
+            <a:avLst>
+              <a:gd name="adj" fmla="val 12000"/>
+            </a:avLst>
+          </a:prstGeom>
+          <a:solidFill>
+            <a:srgbClr val="F2F2F2"/>
+          </a:solidFill>
+          <a:ln>
+            <a:noFill/>
+          </a:ln>
+        </p:spPr>
+        <p:style>
+          <a:lnRef idx="1">
+            <a:schemeClr val="accent1"/>
+          </a:lnRef>
+          <a:fillRef idx="3">
+            <a:schemeClr val="accent1"/>
+          </a:fillRef>
+          <a:effectRef idx="2">
+            <a:schemeClr val="accent1"/>
+          </a:effectRef>
+          <a:fontRef idx="minor">
+            <a:schemeClr val="lt1"/>
+          </a:fontRef>
+        </p:style>
+        <p:txBody>
+          <a:bodyPr rtlCol="0" anchor="ctr"/>
+          <a:lstStyle/>
+          <a:p>
+            <a:pPr algn="ctr"/>
+          </a:p>
+        </p:txBody>
+      </p:sp>
+      <p:sp>
+        <p:nvSpPr>
+          <p:cNvPr id="23" name="Rectangle 22"/>
+          <p:cNvSpPr/>
+          <p:nvPr/>
+        </p:nvSpPr>
+        <p:spPr>
+          <a:xfrm>
+            <a:off x="640080" y="4325112"/>
+            <a:ext cx="274320" cy="274320"/>
+          </a:xfrm>
+          <a:prstGeom prst="rect">
+            <a:avLst/>
+          </a:prstGeom>
+          <a:solidFill>
+            <a:srgbClr val="FFFFFF"/>
+          </a:solidFill>
+          <a:ln>
+            <a:solidFill>
+              <a:srgbClr val="333333"/>
+            </a:solidFill>
+          </a:ln>
+        </p:spPr>
+        <p:style>
+          <a:lnRef idx="1">
+            <a:schemeClr val="accent1"/>
+          </a:lnRef>
+          <a:fillRef idx="3">
+            <a:schemeClr val="accent1"/>
+          </a:fillRef>
+          <a:effectRef idx="2">
+            <a:schemeClr val="accent1"/>
+          </a:effectRef>
+          <a:fontRef idx="minor">
+            <a:schemeClr val="lt1"/>
+          </a:fontRef>
+        </p:style>
+        <p:txBody>
+          <a:bodyPr rtlCol="0" anchor="ctr"/>
+          <a:lstStyle/>
+          <a:p>
+            <a:pPr algn="ctr"/>
+          </a:p>
+        </p:txBody>
+      </p:sp>
+      <p:sp>
+        <p:nvSpPr>
+          <p:cNvPr id="24" name="Rectangle 23"/>
+          <p:cNvSpPr/>
+          <p:nvPr/>
+        </p:nvSpPr>
+        <p:spPr>
+          <a:xfrm>
+            <a:off x="640080" y="4325112"/>
+            <a:ext cx="73152" cy="274320"/>
+          </a:xfrm>
+          <a:prstGeom prst="rect">
+            <a:avLst/>
+          </a:prstGeom>
+          <a:solidFill>
+            <a:srgbClr val="269CCB"/>
+          </a:solidFill>
+          <a:ln>
+            <a:noFill/>
+          </a:ln>
+        </p:spPr>
+        <p:style>
+          <a:lnRef idx="1">
+            <a:schemeClr val="accent1"/>
+          </a:lnRef>
+          <a:fillRef idx="3">
+            <a:schemeClr val="accent1"/>
+          </a:fillRef>
+          <a:effectRef idx="2">
+            <a:schemeClr val="accent1"/>
+          </a:effectRef>
+          <a:fontRef idx="minor">
+            <a:schemeClr val="lt1"/>
+          </a:fontRef>
+        </p:style>
+        <p:txBody>
+          <a:bodyPr rtlCol="0" anchor="ctr"/>
+          <a:lstStyle/>
+          <a:p>
+            <a:pPr algn="ctr"/>
+          </a:p>
+        </p:txBody>
+      </p:sp>
+      <p:sp>
+        <p:nvSpPr>
+          <p:cNvPr id="25" name="TextBox 24"/>
+          <p:cNvSpPr txBox="1"/>
+          <p:nvPr/>
+        </p:nvSpPr>
+        <p:spPr>
+          <a:xfrm>
+            <a:off x="1097280" y="4270248"/>
+            <a:ext cx="10362895" cy="402336"/>
+          </a:xfrm>
+          <a:prstGeom prst="rect">
+            <a:avLst/>
+          </a:prstGeom>
+          <a:noFill/>
+        </p:spPr>
+        <p:txBody>
+          <a:bodyPr wrap="square" anchor="ctr"/>
+          <a:lstStyle/>
+          <a:p>
+            <a:r>
+              <a:rPr sz="1500" b="1" i="0">
+                <a:solidFill>
+                  <a:srgbClr val="333333"/>
+                </a:solidFill>
+                <a:latin typeface="Calibri"/>
+              </a:rPr>
+              <a:t>IMPACTO Y SIGUIENTE PASO</a:t>
+            </a:r>
+            <a:r>
+              <a:rPr sz="1500" b="0" i="0">
+                <a:solidFill>
+                  <a:srgbClr val="333333"/>
+                </a:solidFill>
+                <a:latin typeface="Calibri"/>
+              </a:rPr>
+              <a:t> — El impacto positivo </a:t>
+            </a:r>
+            <a:r>
+              <a:rPr sz="1500" b="1" i="0">
+                <a:solidFill>
+                  <a:srgbClr val="333333"/>
+                </a:solidFill>
+                <a:latin typeface="Calibri"/>
+              </a:rPr>
+              <a:t>con su número</a:t>
+            </a:r>
+            <a:r>
+              <a:rPr sz="1500" b="0" i="0">
+                <a:solidFill>
+                  <a:srgbClr val="333333"/>
+                </a:solidFill>
+                <a:latin typeface="Calibri"/>
+              </a:rPr>
+              <a:t> y el negativo </a:t>
+            </a:r>
+            <a:r>
+              <a:rPr sz="1500" b="1" i="0">
+                <a:solidFill>
+                  <a:srgbClr val="333333"/>
+                </a:solidFill>
+                <a:latin typeface="Calibri"/>
+              </a:rPr>
+              <a:t>con su mitigación</a:t>
+            </a:r>
+            <a:r>
+              <a:rPr sz="1500" b="0" i="0">
+                <a:solidFill>
+                  <a:srgbClr val="333333"/>
+                </a:solidFill>
+                <a:latin typeface="Calibri"/>
+              </a:rPr>
+              <a:t>. Qué haría quien continúe el proyecto.</a:t>
+            </a:r>
+          </a:p>
+        </p:txBody>
+      </p:sp>
+      <p:sp>
+        <p:nvSpPr>
+          <p:cNvPr id="26" name="TextBox 25"/>
+          <p:cNvSpPr txBox="1"/>
+          <p:nvPr/>
+        </p:nvSpPr>
+        <p:spPr>
+          <a:xfrm>
+            <a:off x="11185855" y="6473952"/>
+            <a:ext cx="640080" cy="274320"/>
           </a:xfrm>
           <a:prstGeom prst="rect">
             <a:avLst/>
@@ -5356,49 +7122,141 @@
           </a:bodyPr>
           <a:lstStyle/>
           <a:p>
-            <a:pPr algn="ctr">
-              <a:spcAft>
-                <a:spcPts val="600"/>
-              </a:spcAft>
-            </a:pPr>
-            <a:r>
-              <a:rPr sz="1600" b="0" i="0">
-                <a:solidFill>
-                  <a:srgbClr val="333333"/>
-                </a:solidFill>
-                <a:latin typeface="Calibri"/>
-              </a:rPr>
-              <a:t>Exposición final de proyectos · Clase 15</a:t>
-            </a:r>
-          </a:p>
-          <a:p>
-            <a:pPr algn="ctr">
-              <a:spcAft>
-                <a:spcPts val="600"/>
-              </a:spcAft>
-            </a:pPr>
-            <a:r>
-              <a:rPr sz="1600" b="0" i="0">
-                <a:solidFill>
-                  <a:srgbClr val="333333"/>
-                </a:solidFill>
-                <a:latin typeface="Calibri"/>
-              </a:rPr>
-              <a:t>FI300101 · UNIAJC · Ingeniería de Sistemas</a:t>
-            </a:r>
-          </a:p>
-        </p:txBody>
-      </p:sp>
-      <p:sp>
-        <p:nvSpPr>
-          <p:cNvPr id="6" name="TextBox 5"/>
+            <a:pPr algn="r"/>
+            <a:r>
+              <a:rPr sz="1100" b="0" i="0">
+                <a:solidFill>
+                  <a:srgbClr val="666666"/>
+                </a:solidFill>
+                <a:latin typeface="Calibri"/>
+              </a:rPr>
+              <a:t>17</a:t>
+            </a:r>
+          </a:p>
+        </p:txBody>
+      </p:sp>
+    </p:spTree>
+  </p:cSld>
+  <p:clrMapOvr>
+    <a:masterClrMapping/>
+  </p:clrMapOvr>
+</p:sld>
+</file>
+
+<file path=ppt/slides/slide18.xml><?xml version="1.0" encoding="utf-8"?>
+<p:sld xmlns:a="http://schemas.openxmlformats.org/drawingml/2006/main" xmlns:p="http://schemas.openxmlformats.org/presentationml/2006/main" xmlns:r="http://schemas.openxmlformats.org/officeDocument/2006/relationships">
+  <p:cSld>
+    <p:bg>
+      <p:bgPr>
+        <a:solidFill>
+          <a:srgbClr val="FFFFFF"/>
+        </a:solidFill>
+        <a:effectLst/>
+      </p:bgPr>
+    </p:bg>
+    <p:spTree>
+      <p:nvGrpSpPr>
+        <p:cNvPr id="1" name=""/>
+        <p:cNvGrpSpPr/>
+        <p:nvPr/>
+      </p:nvGrpSpPr>
+      <p:grpSpPr/>
+      <p:sp>
+        <p:nvSpPr>
+          <p:cNvPr id="2" name="Rectangle 1"/>
+          <p:cNvSpPr/>
+          <p:nvPr/>
+        </p:nvSpPr>
+        <p:spPr>
+          <a:xfrm>
+            <a:off x="0" y="0"/>
+            <a:ext cx="12191695" cy="1170432"/>
+          </a:xfrm>
+          <a:prstGeom prst="rect">
+            <a:avLst/>
+          </a:prstGeom>
+          <a:solidFill>
+            <a:srgbClr val="095292"/>
+          </a:solidFill>
+          <a:ln>
+            <a:noFill/>
+          </a:ln>
+        </p:spPr>
+        <p:style>
+          <a:lnRef idx="1">
+            <a:schemeClr val="accent1"/>
+          </a:lnRef>
+          <a:fillRef idx="3">
+            <a:schemeClr val="accent1"/>
+          </a:fillRef>
+          <a:effectRef idx="2">
+            <a:schemeClr val="accent1"/>
+          </a:effectRef>
+          <a:fontRef idx="minor">
+            <a:schemeClr val="lt1"/>
+          </a:fontRef>
+        </p:style>
+        <p:txBody>
+          <a:bodyPr rtlCol="0" anchor="ctr"/>
+          <a:lstStyle/>
+          <a:p>
+            <a:pPr algn="ctr"/>
+          </a:p>
+        </p:txBody>
+      </p:sp>
+      <p:sp>
+        <p:nvSpPr>
+          <p:cNvPr id="3" name="Rectangle 2"/>
+          <p:cNvSpPr/>
+          <p:nvPr/>
+        </p:nvSpPr>
+        <p:spPr>
+          <a:xfrm>
+            <a:off x="0" y="1170432"/>
+            <a:ext cx="12191695" cy="41148"/>
+          </a:xfrm>
+          <a:prstGeom prst="rect">
+            <a:avLst/>
+          </a:prstGeom>
+          <a:solidFill>
+            <a:srgbClr val="FFD000"/>
+          </a:solidFill>
+          <a:ln>
+            <a:noFill/>
+          </a:ln>
+        </p:spPr>
+        <p:style>
+          <a:lnRef idx="1">
+            <a:schemeClr val="accent1"/>
+          </a:lnRef>
+          <a:fillRef idx="3">
+            <a:schemeClr val="accent1"/>
+          </a:fillRef>
+          <a:effectRef idx="2">
+            <a:schemeClr val="accent1"/>
+          </a:effectRef>
+          <a:fontRef idx="minor">
+            <a:schemeClr val="lt1"/>
+          </a:fontRef>
+        </p:style>
+        <p:txBody>
+          <a:bodyPr rtlCol="0" anchor="ctr"/>
+          <a:lstStyle/>
+          <a:p>
+            <a:pPr algn="ctr"/>
+          </a:p>
+        </p:txBody>
+      </p:sp>
+      <p:sp>
+        <p:nvSpPr>
+          <p:cNvPr id="4" name="TextBox 3"/>
           <p:cNvSpPr txBox="1"/>
           <p:nvPr/>
         </p:nvSpPr>
         <p:spPr>
           <a:xfrm>
-            <a:off x="457200" y="4754880"/>
-            <a:ext cx="11277295" cy="640080"/>
+            <a:off x="457200" y="164592"/>
+            <a:ext cx="11277295" cy="384048"/>
           </a:xfrm>
           <a:prstGeom prst="rect">
             <a:avLst/>
@@ -5411,15 +7269,1600 @@
           </a:bodyPr>
           <a:lstStyle/>
           <a:p>
+            <a:r>
+              <a:rPr sz="2600" b="1" i="0">
+                <a:solidFill>
+                  <a:srgbClr val="FFFFFF"/>
+                </a:solidFill>
+                <a:latin typeface="Calibri"/>
+              </a:rPr>
+              <a:t>Cómo se expone en 9 minutos</a:t>
+            </a:r>
+          </a:p>
+        </p:txBody>
+      </p:sp>
+      <p:sp>
+        <p:nvSpPr>
+          <p:cNvPr id="5" name="TextBox 4"/>
+          <p:cNvSpPr txBox="1"/>
+          <p:nvPr/>
+        </p:nvSpPr>
+        <p:spPr>
+          <a:xfrm>
+            <a:off x="457200" y="566928"/>
+            <a:ext cx="11277295" cy="411480"/>
+          </a:xfrm>
+          <a:prstGeom prst="rect">
+            <a:avLst/>
+          </a:prstGeom>
+          <a:noFill/>
+        </p:spPr>
+        <p:txBody>
+          <a:bodyPr wrap="square">
+            <a:spAutoFit/>
+          </a:bodyPr>
+          <a:lstStyle/>
+          <a:p>
+            <a:r>
+              <a:rPr sz="1400" b="0" i="0">
+                <a:solidFill>
+                  <a:srgbClr val="B8D8EE"/>
+                </a:solidFill>
+                <a:latin typeface="Calibri"/>
+              </a:rPr>
+              <a:t>Habla el vocero con la pantalla ya compartida · cronómetro en pantalla · se corta al llegar a cero</a:t>
+            </a:r>
+          </a:p>
+        </p:txBody>
+      </p:sp>
+      <p:sp>
+        <p:nvSpPr>
+          <p:cNvPr id="6" name="Rounded Rectangle 5"/>
+          <p:cNvSpPr/>
+          <p:nvPr/>
+        </p:nvSpPr>
+        <p:spPr>
+          <a:xfrm>
+            <a:off x="457200" y="1444752"/>
+            <a:ext cx="11277295" cy="745236"/>
+          </a:xfrm>
+          <a:prstGeom prst="roundRect">
+            <a:avLst>
+              <a:gd name="adj" fmla="val 12000"/>
+            </a:avLst>
+          </a:prstGeom>
+          <a:solidFill>
+            <a:srgbClr val="F2F2F2"/>
+          </a:solidFill>
+          <a:ln>
+            <a:noFill/>
+          </a:ln>
+        </p:spPr>
+        <p:style>
+          <a:lnRef idx="1">
+            <a:schemeClr val="accent1"/>
+          </a:lnRef>
+          <a:fillRef idx="3">
+            <a:schemeClr val="accent1"/>
+          </a:fillRef>
+          <a:effectRef idx="2">
+            <a:schemeClr val="accent1"/>
+          </a:effectRef>
+          <a:fontRef idx="minor">
+            <a:schemeClr val="lt1"/>
+          </a:fontRef>
+        </p:style>
+        <p:txBody>
+          <a:bodyPr rtlCol="0" anchor="ctr"/>
+          <a:lstStyle/>
+          <a:p>
             <a:pPr algn="ctr"/>
+          </a:p>
+        </p:txBody>
+      </p:sp>
+      <p:sp>
+        <p:nvSpPr>
+          <p:cNvPr id="7" name="Rounded Rectangle 6"/>
+          <p:cNvSpPr/>
+          <p:nvPr/>
+        </p:nvSpPr>
+        <p:spPr>
+          <a:xfrm>
+            <a:off x="594360" y="1597914"/>
+            <a:ext cx="438912" cy="438912"/>
+          </a:xfrm>
+          <a:prstGeom prst="roundRect">
+            <a:avLst>
+              <a:gd name="adj" fmla="val 12000"/>
+            </a:avLst>
+          </a:prstGeom>
+          <a:solidFill>
+            <a:srgbClr val="095292"/>
+          </a:solidFill>
+          <a:ln>
+            <a:noFill/>
+          </a:ln>
+        </p:spPr>
+        <p:style>
+          <a:lnRef idx="1">
+            <a:schemeClr val="accent1"/>
+          </a:lnRef>
+          <a:fillRef idx="3">
+            <a:schemeClr val="accent1"/>
+          </a:fillRef>
+          <a:effectRef idx="2">
+            <a:schemeClr val="accent1"/>
+          </a:effectRef>
+          <a:fontRef idx="minor">
+            <a:schemeClr val="lt1"/>
+          </a:fontRef>
+        </p:style>
+        <p:txBody>
+          <a:bodyPr rtlCol="0" anchor="ctr"/>
+          <a:lstStyle/>
+          <a:p>
+            <a:pPr algn="ctr"/>
+          </a:p>
+        </p:txBody>
+      </p:sp>
+      <p:sp>
+        <p:nvSpPr>
+          <p:cNvPr id="8" name="TextBox 7"/>
+          <p:cNvSpPr txBox="1"/>
+          <p:nvPr/>
+        </p:nvSpPr>
+        <p:spPr>
+          <a:xfrm>
+            <a:off x="594360" y="1597914"/>
+            <a:ext cx="438912" cy="438912"/>
+          </a:xfrm>
+          <a:prstGeom prst="rect">
+            <a:avLst/>
+          </a:prstGeom>
+          <a:noFill/>
+        </p:spPr>
+        <p:txBody>
+          <a:bodyPr wrap="square" anchor="ctr"/>
+          <a:lstStyle/>
+          <a:p>
+            <a:pPr algn="ctr"/>
+            <a:r>
+              <a:rPr sz="1600" b="1" i="0">
+                <a:solidFill>
+                  <a:srgbClr val="FFFFFF"/>
+                </a:solidFill>
+                <a:latin typeface="Calibri"/>
+              </a:rPr>
+              <a:t>1</a:t>
+            </a:r>
+          </a:p>
+        </p:txBody>
+      </p:sp>
+      <p:sp>
+        <p:nvSpPr>
+          <p:cNvPr id="9" name="TextBox 8"/>
+          <p:cNvSpPr txBox="1"/>
+          <p:nvPr/>
+        </p:nvSpPr>
+        <p:spPr>
+          <a:xfrm>
+            <a:off x="1188720" y="1536192"/>
+            <a:ext cx="10271455" cy="580644"/>
+          </a:xfrm>
+          <a:prstGeom prst="rect">
+            <a:avLst/>
+          </a:prstGeom>
+          <a:noFill/>
+        </p:spPr>
+        <p:txBody>
+          <a:bodyPr wrap="square" anchor="ctr"/>
+          <a:lstStyle/>
+          <a:p>
+            <a:r>
+              <a:rPr sz="1500" b="1" i="0">
+                <a:solidFill>
+                  <a:srgbClr val="095292"/>
+                </a:solidFill>
+                <a:latin typeface="Calibri"/>
+              </a:rPr>
+              <a:t>Tramo 1 · 1 min</a:t>
+            </a:r>
+          </a:p>
+          <a:p>
+            <a:pPr>
+              <a:spcBef>
+                <a:spcPts val="200"/>
+              </a:spcBef>
+            </a:pPr>
+            <a:r>
+              <a:rPr sz="1300" b="0" i="0">
+                <a:solidFill>
+                  <a:srgbClr val="333333"/>
+                </a:solidFill>
+                <a:latin typeface="Calibri"/>
+              </a:rPr>
+              <a:t>El problema con su cifra. Arranca sin saludos.</a:t>
+            </a:r>
+          </a:p>
+        </p:txBody>
+      </p:sp>
+      <p:sp>
+        <p:nvSpPr>
+          <p:cNvPr id="10" name="Rounded Rectangle 9"/>
+          <p:cNvSpPr/>
+          <p:nvPr/>
+        </p:nvSpPr>
+        <p:spPr>
+          <a:xfrm>
+            <a:off x="457200" y="2281428"/>
+            <a:ext cx="11277295" cy="745236"/>
+          </a:xfrm>
+          <a:prstGeom prst="roundRect">
+            <a:avLst>
+              <a:gd name="adj" fmla="val 12000"/>
+            </a:avLst>
+          </a:prstGeom>
+          <a:solidFill>
+            <a:srgbClr val="E8F4FA"/>
+          </a:solidFill>
+          <a:ln>
+            <a:noFill/>
+          </a:ln>
+        </p:spPr>
+        <p:style>
+          <a:lnRef idx="1">
+            <a:schemeClr val="accent1"/>
+          </a:lnRef>
+          <a:fillRef idx="3">
+            <a:schemeClr val="accent1"/>
+          </a:fillRef>
+          <a:effectRef idx="2">
+            <a:schemeClr val="accent1"/>
+          </a:effectRef>
+          <a:fontRef idx="minor">
+            <a:schemeClr val="lt1"/>
+          </a:fontRef>
+        </p:style>
+        <p:txBody>
+          <a:bodyPr rtlCol="0" anchor="ctr"/>
+          <a:lstStyle/>
+          <a:p>
+            <a:pPr algn="ctr"/>
+          </a:p>
+        </p:txBody>
+      </p:sp>
+      <p:sp>
+        <p:nvSpPr>
+          <p:cNvPr id="11" name="Rounded Rectangle 10"/>
+          <p:cNvSpPr/>
+          <p:nvPr/>
+        </p:nvSpPr>
+        <p:spPr>
+          <a:xfrm>
+            <a:off x="594360" y="2434590"/>
+            <a:ext cx="438912" cy="438912"/>
+          </a:xfrm>
+          <a:prstGeom prst="roundRect">
+            <a:avLst>
+              <a:gd name="adj" fmla="val 12000"/>
+            </a:avLst>
+          </a:prstGeom>
+          <a:solidFill>
+            <a:srgbClr val="095292"/>
+          </a:solidFill>
+          <a:ln>
+            <a:noFill/>
+          </a:ln>
+        </p:spPr>
+        <p:style>
+          <a:lnRef idx="1">
+            <a:schemeClr val="accent1"/>
+          </a:lnRef>
+          <a:fillRef idx="3">
+            <a:schemeClr val="accent1"/>
+          </a:fillRef>
+          <a:effectRef idx="2">
+            <a:schemeClr val="accent1"/>
+          </a:effectRef>
+          <a:fontRef idx="minor">
+            <a:schemeClr val="lt1"/>
+          </a:fontRef>
+        </p:style>
+        <p:txBody>
+          <a:bodyPr rtlCol="0" anchor="ctr"/>
+          <a:lstStyle/>
+          <a:p>
+            <a:pPr algn="ctr"/>
+          </a:p>
+        </p:txBody>
+      </p:sp>
+      <p:sp>
+        <p:nvSpPr>
+          <p:cNvPr id="12" name="TextBox 11"/>
+          <p:cNvSpPr txBox="1"/>
+          <p:nvPr/>
+        </p:nvSpPr>
+        <p:spPr>
+          <a:xfrm>
+            <a:off x="594360" y="2434590"/>
+            <a:ext cx="438912" cy="438912"/>
+          </a:xfrm>
+          <a:prstGeom prst="rect">
+            <a:avLst/>
+          </a:prstGeom>
+          <a:noFill/>
+        </p:spPr>
+        <p:txBody>
+          <a:bodyPr wrap="square" anchor="ctr"/>
+          <a:lstStyle/>
+          <a:p>
+            <a:pPr algn="ctr"/>
+            <a:r>
+              <a:rPr sz="1600" b="1" i="0">
+                <a:solidFill>
+                  <a:srgbClr val="FFFFFF"/>
+                </a:solidFill>
+                <a:latin typeface="Calibri"/>
+              </a:rPr>
+              <a:t>2</a:t>
+            </a:r>
+          </a:p>
+        </p:txBody>
+      </p:sp>
+      <p:sp>
+        <p:nvSpPr>
+          <p:cNvPr id="13" name="TextBox 12"/>
+          <p:cNvSpPr txBox="1"/>
+          <p:nvPr/>
+        </p:nvSpPr>
+        <p:spPr>
+          <a:xfrm>
+            <a:off x="1188720" y="2372868"/>
+            <a:ext cx="10271455" cy="580644"/>
+          </a:xfrm>
+          <a:prstGeom prst="rect">
+            <a:avLst/>
+          </a:prstGeom>
+          <a:noFill/>
+        </p:spPr>
+        <p:txBody>
+          <a:bodyPr wrap="square" anchor="ctr"/>
+          <a:lstStyle/>
+          <a:p>
+            <a:r>
+              <a:rPr sz="1500" b="1" i="0">
+                <a:solidFill>
+                  <a:srgbClr val="095292"/>
+                </a:solidFill>
+                <a:latin typeface="Calibri"/>
+              </a:rPr>
+              <a:t>Tramo 2 · 2 min</a:t>
+            </a:r>
+          </a:p>
+          <a:p>
+            <a:pPr>
+              <a:spcBef>
+                <a:spcPts val="200"/>
+              </a:spcBef>
+            </a:pPr>
+            <a:r>
+              <a:rPr sz="1300" b="0" i="0">
+                <a:solidFill>
+                  <a:srgbClr val="333333"/>
+                </a:solidFill>
+                <a:latin typeface="Calibri"/>
+              </a:rPr>
+              <a:t>Los afectados —uno que no es usuario— y la decisión con su sacrificio.</a:t>
+            </a:r>
+          </a:p>
+        </p:txBody>
+      </p:sp>
+      <p:sp>
+        <p:nvSpPr>
+          <p:cNvPr id="14" name="Rounded Rectangle 13"/>
+          <p:cNvSpPr/>
+          <p:nvPr/>
+        </p:nvSpPr>
+        <p:spPr>
+          <a:xfrm>
+            <a:off x="457200" y="3118104"/>
+            <a:ext cx="11277295" cy="745236"/>
+          </a:xfrm>
+          <a:prstGeom prst="roundRect">
+            <a:avLst>
+              <a:gd name="adj" fmla="val 12000"/>
+            </a:avLst>
+          </a:prstGeom>
+          <a:solidFill>
+            <a:srgbClr val="F2F2F2"/>
+          </a:solidFill>
+          <a:ln>
+            <a:noFill/>
+          </a:ln>
+        </p:spPr>
+        <p:style>
+          <a:lnRef idx="1">
+            <a:schemeClr val="accent1"/>
+          </a:lnRef>
+          <a:fillRef idx="3">
+            <a:schemeClr val="accent1"/>
+          </a:fillRef>
+          <a:effectRef idx="2">
+            <a:schemeClr val="accent1"/>
+          </a:effectRef>
+          <a:fontRef idx="minor">
+            <a:schemeClr val="lt1"/>
+          </a:fontRef>
+        </p:style>
+        <p:txBody>
+          <a:bodyPr rtlCol="0" anchor="ctr"/>
+          <a:lstStyle/>
+          <a:p>
+            <a:pPr algn="ctr"/>
+          </a:p>
+        </p:txBody>
+      </p:sp>
+      <p:sp>
+        <p:nvSpPr>
+          <p:cNvPr id="15" name="Rounded Rectangle 14"/>
+          <p:cNvSpPr/>
+          <p:nvPr/>
+        </p:nvSpPr>
+        <p:spPr>
+          <a:xfrm>
+            <a:off x="594360" y="3271266"/>
+            <a:ext cx="438912" cy="438912"/>
+          </a:xfrm>
+          <a:prstGeom prst="roundRect">
+            <a:avLst>
+              <a:gd name="adj" fmla="val 12000"/>
+            </a:avLst>
+          </a:prstGeom>
+          <a:solidFill>
+            <a:srgbClr val="095292"/>
+          </a:solidFill>
+          <a:ln>
+            <a:noFill/>
+          </a:ln>
+        </p:spPr>
+        <p:style>
+          <a:lnRef idx="1">
+            <a:schemeClr val="accent1"/>
+          </a:lnRef>
+          <a:fillRef idx="3">
+            <a:schemeClr val="accent1"/>
+          </a:fillRef>
+          <a:effectRef idx="2">
+            <a:schemeClr val="accent1"/>
+          </a:effectRef>
+          <a:fontRef idx="minor">
+            <a:schemeClr val="lt1"/>
+          </a:fontRef>
+        </p:style>
+        <p:txBody>
+          <a:bodyPr rtlCol="0" anchor="ctr"/>
+          <a:lstStyle/>
+          <a:p>
+            <a:pPr algn="ctr"/>
+          </a:p>
+        </p:txBody>
+      </p:sp>
+      <p:sp>
+        <p:nvSpPr>
+          <p:cNvPr id="16" name="TextBox 15"/>
+          <p:cNvSpPr txBox="1"/>
+          <p:nvPr/>
+        </p:nvSpPr>
+        <p:spPr>
+          <a:xfrm>
+            <a:off x="594360" y="3271266"/>
+            <a:ext cx="438912" cy="438912"/>
+          </a:xfrm>
+          <a:prstGeom prst="rect">
+            <a:avLst/>
+          </a:prstGeom>
+          <a:noFill/>
+        </p:spPr>
+        <p:txBody>
+          <a:bodyPr wrap="square" anchor="ctr"/>
+          <a:lstStyle/>
+          <a:p>
+            <a:pPr algn="ctr"/>
+            <a:r>
+              <a:rPr sz="1600" b="1" i="0">
+                <a:solidFill>
+                  <a:srgbClr val="FFFFFF"/>
+                </a:solidFill>
+                <a:latin typeface="Calibri"/>
+              </a:rPr>
+              <a:t>3</a:t>
+            </a:r>
+          </a:p>
+        </p:txBody>
+      </p:sp>
+      <p:sp>
+        <p:nvSpPr>
+          <p:cNvPr id="17" name="TextBox 16"/>
+          <p:cNvSpPr txBox="1"/>
+          <p:nvPr/>
+        </p:nvSpPr>
+        <p:spPr>
+          <a:xfrm>
+            <a:off x="1188720" y="3209544"/>
+            <a:ext cx="10271455" cy="580644"/>
+          </a:xfrm>
+          <a:prstGeom prst="rect">
+            <a:avLst/>
+          </a:prstGeom>
+          <a:noFill/>
+        </p:spPr>
+        <p:txBody>
+          <a:bodyPr wrap="square" anchor="ctr"/>
+          <a:lstStyle/>
+          <a:p>
+            <a:r>
+              <a:rPr sz="1500" b="1" i="0">
+                <a:solidFill>
+                  <a:srgbClr val="095292"/>
+                </a:solidFill>
+                <a:latin typeface="Calibri"/>
+              </a:rPr>
+              <a:t>Tramo 3 · 3 min</a:t>
+            </a:r>
+          </a:p>
+          <a:p>
+            <a:pPr>
+              <a:spcBef>
+                <a:spcPts val="200"/>
+              </a:spcBef>
+            </a:pPr>
+            <a:r>
+              <a:rPr sz="1300" b="0" i="0">
+                <a:solidFill>
+                  <a:srgbClr val="333333"/>
+                </a:solidFill>
+                <a:latin typeface="Calibri"/>
+              </a:rPr>
+              <a:t>El prototipo en vivo: tres pasos, una tarea cumpliéndose.</a:t>
+            </a:r>
+          </a:p>
+        </p:txBody>
+      </p:sp>
+      <p:sp>
+        <p:nvSpPr>
+          <p:cNvPr id="18" name="Rounded Rectangle 17"/>
+          <p:cNvSpPr/>
+          <p:nvPr/>
+        </p:nvSpPr>
+        <p:spPr>
+          <a:xfrm>
+            <a:off x="457200" y="3954780"/>
+            <a:ext cx="11277295" cy="745236"/>
+          </a:xfrm>
+          <a:prstGeom prst="roundRect">
+            <a:avLst>
+              <a:gd name="adj" fmla="val 12000"/>
+            </a:avLst>
+          </a:prstGeom>
+          <a:solidFill>
+            <a:srgbClr val="E8F4FA"/>
+          </a:solidFill>
+          <a:ln>
+            <a:noFill/>
+          </a:ln>
+        </p:spPr>
+        <p:style>
+          <a:lnRef idx="1">
+            <a:schemeClr val="accent1"/>
+          </a:lnRef>
+          <a:fillRef idx="3">
+            <a:schemeClr val="accent1"/>
+          </a:fillRef>
+          <a:effectRef idx="2">
+            <a:schemeClr val="accent1"/>
+          </a:effectRef>
+          <a:fontRef idx="minor">
+            <a:schemeClr val="lt1"/>
+          </a:fontRef>
+        </p:style>
+        <p:txBody>
+          <a:bodyPr rtlCol="0" anchor="ctr"/>
+          <a:lstStyle/>
+          <a:p>
+            <a:pPr algn="ctr"/>
+          </a:p>
+        </p:txBody>
+      </p:sp>
+      <p:sp>
+        <p:nvSpPr>
+          <p:cNvPr id="19" name="Rounded Rectangle 18"/>
+          <p:cNvSpPr/>
+          <p:nvPr/>
+        </p:nvSpPr>
+        <p:spPr>
+          <a:xfrm>
+            <a:off x="594360" y="4107942"/>
+            <a:ext cx="438912" cy="438912"/>
+          </a:xfrm>
+          <a:prstGeom prst="roundRect">
+            <a:avLst>
+              <a:gd name="adj" fmla="val 12000"/>
+            </a:avLst>
+          </a:prstGeom>
+          <a:solidFill>
+            <a:srgbClr val="095292"/>
+          </a:solidFill>
+          <a:ln>
+            <a:noFill/>
+          </a:ln>
+        </p:spPr>
+        <p:style>
+          <a:lnRef idx="1">
+            <a:schemeClr val="accent1"/>
+          </a:lnRef>
+          <a:fillRef idx="3">
+            <a:schemeClr val="accent1"/>
+          </a:fillRef>
+          <a:effectRef idx="2">
+            <a:schemeClr val="accent1"/>
+          </a:effectRef>
+          <a:fontRef idx="minor">
+            <a:schemeClr val="lt1"/>
+          </a:fontRef>
+        </p:style>
+        <p:txBody>
+          <a:bodyPr rtlCol="0" anchor="ctr"/>
+          <a:lstStyle/>
+          <a:p>
+            <a:pPr algn="ctr"/>
+          </a:p>
+        </p:txBody>
+      </p:sp>
+      <p:sp>
+        <p:nvSpPr>
+          <p:cNvPr id="20" name="TextBox 19"/>
+          <p:cNvSpPr txBox="1"/>
+          <p:nvPr/>
+        </p:nvSpPr>
+        <p:spPr>
+          <a:xfrm>
+            <a:off x="594360" y="4107942"/>
+            <a:ext cx="438912" cy="438912"/>
+          </a:xfrm>
+          <a:prstGeom prst="rect">
+            <a:avLst/>
+          </a:prstGeom>
+          <a:noFill/>
+        </p:spPr>
+        <p:txBody>
+          <a:bodyPr wrap="square" anchor="ctr"/>
+          <a:lstStyle/>
+          <a:p>
+            <a:pPr algn="ctr"/>
+            <a:r>
+              <a:rPr sz="1600" b="1" i="0">
+                <a:solidFill>
+                  <a:srgbClr val="FFFFFF"/>
+                </a:solidFill>
+                <a:latin typeface="Calibri"/>
+              </a:rPr>
+              <a:t>4</a:t>
+            </a:r>
+          </a:p>
+        </p:txBody>
+      </p:sp>
+      <p:sp>
+        <p:nvSpPr>
+          <p:cNvPr id="21" name="TextBox 20"/>
+          <p:cNvSpPr txBox="1"/>
+          <p:nvPr/>
+        </p:nvSpPr>
+        <p:spPr>
+          <a:xfrm>
+            <a:off x="1188720" y="4046220"/>
+            <a:ext cx="10271455" cy="580644"/>
+          </a:xfrm>
+          <a:prstGeom prst="rect">
+            <a:avLst/>
+          </a:prstGeom>
+          <a:noFill/>
+        </p:spPr>
+        <p:txBody>
+          <a:bodyPr wrap="square" anchor="ctr"/>
+          <a:lstStyle/>
+          <a:p>
+            <a:r>
+              <a:rPr sz="1500" b="1" i="0">
+                <a:solidFill>
+                  <a:srgbClr val="095292"/>
+                </a:solidFill>
+                <a:latin typeface="Calibri"/>
+              </a:rPr>
+              <a:t>Tramo 4 · 2 min</a:t>
+            </a:r>
+          </a:p>
+          <a:p>
+            <a:pPr>
+              <a:spcBef>
+                <a:spcPts val="200"/>
+              </a:spcBef>
+            </a:pPr>
+            <a:r>
+              <a:rPr sz="1300" b="0" i="0">
+                <a:solidFill>
+                  <a:srgbClr val="333333"/>
+                </a:solidFill>
+                <a:latin typeface="Calibri"/>
+              </a:rPr>
+              <a:t>Los hallazgos de la prueba, lo que se arregló y lo que no.</a:t>
+            </a:r>
+          </a:p>
+        </p:txBody>
+      </p:sp>
+      <p:sp>
+        <p:nvSpPr>
+          <p:cNvPr id="22" name="Rounded Rectangle 21"/>
+          <p:cNvSpPr/>
+          <p:nvPr/>
+        </p:nvSpPr>
+        <p:spPr>
+          <a:xfrm>
+            <a:off x="457200" y="4791456"/>
+            <a:ext cx="11277295" cy="745236"/>
+          </a:xfrm>
+          <a:prstGeom prst="roundRect">
+            <a:avLst>
+              <a:gd name="adj" fmla="val 12000"/>
+            </a:avLst>
+          </a:prstGeom>
+          <a:solidFill>
+            <a:srgbClr val="F2F2F2"/>
+          </a:solidFill>
+          <a:ln>
+            <a:noFill/>
+          </a:ln>
+        </p:spPr>
+        <p:style>
+          <a:lnRef idx="1">
+            <a:schemeClr val="accent1"/>
+          </a:lnRef>
+          <a:fillRef idx="3">
+            <a:schemeClr val="accent1"/>
+          </a:fillRef>
+          <a:effectRef idx="2">
+            <a:schemeClr val="accent1"/>
+          </a:effectRef>
+          <a:fontRef idx="minor">
+            <a:schemeClr val="lt1"/>
+          </a:fontRef>
+        </p:style>
+        <p:txBody>
+          <a:bodyPr rtlCol="0" anchor="ctr"/>
+          <a:lstStyle/>
+          <a:p>
+            <a:pPr algn="ctr"/>
+          </a:p>
+        </p:txBody>
+      </p:sp>
+      <p:sp>
+        <p:nvSpPr>
+          <p:cNvPr id="23" name="Rounded Rectangle 22"/>
+          <p:cNvSpPr/>
+          <p:nvPr/>
+        </p:nvSpPr>
+        <p:spPr>
+          <a:xfrm>
+            <a:off x="594360" y="4944618"/>
+            <a:ext cx="438912" cy="438912"/>
+          </a:xfrm>
+          <a:prstGeom prst="roundRect">
+            <a:avLst>
+              <a:gd name="adj" fmla="val 12000"/>
+            </a:avLst>
+          </a:prstGeom>
+          <a:solidFill>
+            <a:srgbClr val="095292"/>
+          </a:solidFill>
+          <a:ln>
+            <a:noFill/>
+          </a:ln>
+        </p:spPr>
+        <p:style>
+          <a:lnRef idx="1">
+            <a:schemeClr val="accent1"/>
+          </a:lnRef>
+          <a:fillRef idx="3">
+            <a:schemeClr val="accent1"/>
+          </a:fillRef>
+          <a:effectRef idx="2">
+            <a:schemeClr val="accent1"/>
+          </a:effectRef>
+          <a:fontRef idx="minor">
+            <a:schemeClr val="lt1"/>
+          </a:fontRef>
+        </p:style>
+        <p:txBody>
+          <a:bodyPr rtlCol="0" anchor="ctr"/>
+          <a:lstStyle/>
+          <a:p>
+            <a:pPr algn="ctr"/>
+          </a:p>
+        </p:txBody>
+      </p:sp>
+      <p:sp>
+        <p:nvSpPr>
+          <p:cNvPr id="24" name="TextBox 23"/>
+          <p:cNvSpPr txBox="1"/>
+          <p:nvPr/>
+        </p:nvSpPr>
+        <p:spPr>
+          <a:xfrm>
+            <a:off x="594360" y="4944618"/>
+            <a:ext cx="438912" cy="438912"/>
+          </a:xfrm>
+          <a:prstGeom prst="rect">
+            <a:avLst/>
+          </a:prstGeom>
+          <a:noFill/>
+        </p:spPr>
+        <p:txBody>
+          <a:bodyPr wrap="square" anchor="ctr"/>
+          <a:lstStyle/>
+          <a:p>
+            <a:pPr algn="ctr"/>
+            <a:r>
+              <a:rPr sz="1600" b="1" i="0">
+                <a:solidFill>
+                  <a:srgbClr val="FFFFFF"/>
+                </a:solidFill>
+                <a:latin typeface="Calibri"/>
+              </a:rPr>
+              <a:t>5</a:t>
+            </a:r>
+          </a:p>
+        </p:txBody>
+      </p:sp>
+      <p:sp>
+        <p:nvSpPr>
+          <p:cNvPr id="25" name="TextBox 24"/>
+          <p:cNvSpPr txBox="1"/>
+          <p:nvPr/>
+        </p:nvSpPr>
+        <p:spPr>
+          <a:xfrm>
+            <a:off x="1188720" y="4882896"/>
+            <a:ext cx="10271455" cy="580644"/>
+          </a:xfrm>
+          <a:prstGeom prst="rect">
+            <a:avLst/>
+          </a:prstGeom>
+          <a:noFill/>
+        </p:spPr>
+        <p:txBody>
+          <a:bodyPr wrap="square" anchor="ctr"/>
+          <a:lstStyle/>
+          <a:p>
+            <a:r>
+              <a:rPr sz="1500" b="1" i="0">
+                <a:solidFill>
+                  <a:srgbClr val="095292"/>
+                </a:solidFill>
+                <a:latin typeface="Calibri"/>
+              </a:rPr>
+              <a:t>Tramo 5 · 1 min</a:t>
+            </a:r>
+          </a:p>
+          <a:p>
+            <a:pPr>
+              <a:spcBef>
+                <a:spcPts val="200"/>
+              </a:spcBef>
+            </a:pPr>
+            <a:r>
+              <a:rPr sz="1300" b="0" i="0">
+                <a:solidFill>
+                  <a:srgbClr val="333333"/>
+                </a:solidFill>
+                <a:latin typeface="Calibri"/>
+              </a:rPr>
+              <a:t>Impacto positivo con su número, negativo con su mitigación, siguiente paso.</a:t>
+            </a:r>
+          </a:p>
+        </p:txBody>
+      </p:sp>
+      <p:sp>
+        <p:nvSpPr>
+          <p:cNvPr id="26" name="Rounded Rectangle 25"/>
+          <p:cNvSpPr/>
+          <p:nvPr/>
+        </p:nvSpPr>
+        <p:spPr>
+          <a:xfrm>
+            <a:off x="457200" y="5628132"/>
+            <a:ext cx="11277295" cy="745236"/>
+          </a:xfrm>
+          <a:prstGeom prst="roundRect">
+            <a:avLst>
+              <a:gd name="adj" fmla="val 12000"/>
+            </a:avLst>
+          </a:prstGeom>
+          <a:solidFill>
+            <a:srgbClr val="E8F4FA"/>
+          </a:solidFill>
+          <a:ln>
+            <a:noFill/>
+          </a:ln>
+        </p:spPr>
+        <p:style>
+          <a:lnRef idx="1">
+            <a:schemeClr val="accent1"/>
+          </a:lnRef>
+          <a:fillRef idx="3">
+            <a:schemeClr val="accent1"/>
+          </a:fillRef>
+          <a:effectRef idx="2">
+            <a:schemeClr val="accent1"/>
+          </a:effectRef>
+          <a:fontRef idx="minor">
+            <a:schemeClr val="lt1"/>
+          </a:fontRef>
+        </p:style>
+        <p:txBody>
+          <a:bodyPr rtlCol="0" anchor="ctr"/>
+          <a:lstStyle/>
+          <a:p>
+            <a:pPr algn="ctr"/>
+          </a:p>
+        </p:txBody>
+      </p:sp>
+      <p:sp>
+        <p:nvSpPr>
+          <p:cNvPr id="27" name="Rounded Rectangle 26"/>
+          <p:cNvSpPr/>
+          <p:nvPr/>
+        </p:nvSpPr>
+        <p:spPr>
+          <a:xfrm>
+            <a:off x="594360" y="5781294"/>
+            <a:ext cx="438912" cy="438912"/>
+          </a:xfrm>
+          <a:prstGeom prst="roundRect">
+            <a:avLst>
+              <a:gd name="adj" fmla="val 12000"/>
+            </a:avLst>
+          </a:prstGeom>
+          <a:solidFill>
+            <a:srgbClr val="095292"/>
+          </a:solidFill>
+          <a:ln>
+            <a:noFill/>
+          </a:ln>
+        </p:spPr>
+        <p:style>
+          <a:lnRef idx="1">
+            <a:schemeClr val="accent1"/>
+          </a:lnRef>
+          <a:fillRef idx="3">
+            <a:schemeClr val="accent1"/>
+          </a:fillRef>
+          <a:effectRef idx="2">
+            <a:schemeClr val="accent1"/>
+          </a:effectRef>
+          <a:fontRef idx="minor">
+            <a:schemeClr val="lt1"/>
+          </a:fontRef>
+        </p:style>
+        <p:txBody>
+          <a:bodyPr rtlCol="0" anchor="ctr"/>
+          <a:lstStyle/>
+          <a:p>
+            <a:pPr algn="ctr"/>
+          </a:p>
+        </p:txBody>
+      </p:sp>
+      <p:sp>
+        <p:nvSpPr>
+          <p:cNvPr id="28" name="TextBox 27"/>
+          <p:cNvSpPr txBox="1"/>
+          <p:nvPr/>
+        </p:nvSpPr>
+        <p:spPr>
+          <a:xfrm>
+            <a:off x="594360" y="5781294"/>
+            <a:ext cx="438912" cy="438912"/>
+          </a:xfrm>
+          <a:prstGeom prst="rect">
+            <a:avLst/>
+          </a:prstGeom>
+          <a:noFill/>
+        </p:spPr>
+        <p:txBody>
+          <a:bodyPr wrap="square" anchor="ctr"/>
+          <a:lstStyle/>
+          <a:p>
+            <a:pPr algn="ctr"/>
+            <a:r>
+              <a:rPr sz="1600" b="1" i="0">
+                <a:solidFill>
+                  <a:srgbClr val="FFFFFF"/>
+                </a:solidFill>
+                <a:latin typeface="Calibri"/>
+              </a:rPr>
+              <a:t>6</a:t>
+            </a:r>
+          </a:p>
+        </p:txBody>
+      </p:sp>
+      <p:sp>
+        <p:nvSpPr>
+          <p:cNvPr id="29" name="TextBox 28"/>
+          <p:cNvSpPr txBox="1"/>
+          <p:nvPr/>
+        </p:nvSpPr>
+        <p:spPr>
+          <a:xfrm>
+            <a:off x="1188720" y="5719572"/>
+            <a:ext cx="10271455" cy="580644"/>
+          </a:xfrm>
+          <a:prstGeom prst="rect">
+            <a:avLst/>
+          </a:prstGeom>
+          <a:noFill/>
+        </p:spPr>
+        <p:txBody>
+          <a:bodyPr wrap="square" anchor="ctr"/>
+          <a:lstStyle/>
+          <a:p>
+            <a:r>
+              <a:rPr sz="1500" b="1" i="0">
+                <a:solidFill>
+                  <a:srgbClr val="095292"/>
+                </a:solidFill>
+                <a:latin typeface="Calibri"/>
+              </a:rPr>
+              <a:t>Preguntas · 3 min</a:t>
+            </a:r>
+          </a:p>
+          <a:p>
+            <a:pPr>
+              <a:spcBef>
+                <a:spcPts val="200"/>
+              </a:spcBef>
+            </a:pPr>
+            <a:r>
+              <a:rPr sz="1300" b="0" i="0">
+                <a:solidFill>
+                  <a:srgbClr val="333333"/>
+                </a:solidFill>
+                <a:latin typeface="Calibri"/>
+              </a:rPr>
+              <a:t>Una del curso y una del docente. </a:t>
+            </a:r>
+            <a:r>
+              <a:rPr sz="1300" b="1" i="0">
+                <a:solidFill>
+                  <a:srgbClr val="333333"/>
+                </a:solidFill>
+                <a:latin typeface="Calibri"/>
+              </a:rPr>
+              <a:t>Responde quien tiene el tramo.</a:t>
+            </a:r>
+          </a:p>
+        </p:txBody>
+      </p:sp>
+      <p:sp>
+        <p:nvSpPr>
+          <p:cNvPr id="30" name="TextBox 29"/>
+          <p:cNvSpPr txBox="1"/>
+          <p:nvPr/>
+        </p:nvSpPr>
+        <p:spPr>
+          <a:xfrm>
+            <a:off x="11185855" y="6473952"/>
+            <a:ext cx="640080" cy="274320"/>
+          </a:xfrm>
+          <a:prstGeom prst="rect">
+            <a:avLst/>
+          </a:prstGeom>
+          <a:noFill/>
+        </p:spPr>
+        <p:txBody>
+          <a:bodyPr wrap="square">
+            <a:spAutoFit/>
+          </a:bodyPr>
+          <a:lstStyle/>
+          <a:p>
+            <a:pPr algn="r"/>
+            <a:r>
+              <a:rPr sz="1100" b="0" i="0">
+                <a:solidFill>
+                  <a:srgbClr val="666666"/>
+                </a:solidFill>
+                <a:latin typeface="Calibri"/>
+              </a:rPr>
+              <a:t>18</a:t>
+            </a:r>
+          </a:p>
+        </p:txBody>
+      </p:sp>
+    </p:spTree>
+  </p:cSld>
+  <p:clrMapOvr>
+    <a:masterClrMapping/>
+  </p:clrMapOvr>
+</p:sld>
+</file>
+
+<file path=ppt/slides/slide19.xml><?xml version="1.0" encoding="utf-8"?>
+<p:sld xmlns:a="http://schemas.openxmlformats.org/drawingml/2006/main" xmlns:p="http://schemas.openxmlformats.org/presentationml/2006/main" xmlns:r="http://schemas.openxmlformats.org/officeDocument/2006/relationships">
+  <p:cSld>
+    <p:bg>
+      <p:bgPr>
+        <a:solidFill>
+          <a:srgbClr val="FFFFFF"/>
+        </a:solidFill>
+        <a:effectLst/>
+      </p:bgPr>
+    </p:bg>
+    <p:spTree>
+      <p:nvGrpSpPr>
+        <p:cNvPr id="1" name=""/>
+        <p:cNvGrpSpPr/>
+        <p:nvPr/>
+      </p:nvGrpSpPr>
+      <p:grpSpPr/>
+      <p:sp>
+        <p:nvSpPr>
+          <p:cNvPr id="2" name="Rectangle 1"/>
+          <p:cNvSpPr/>
+          <p:nvPr/>
+        </p:nvSpPr>
+        <p:spPr>
+          <a:xfrm>
+            <a:off x="0" y="0"/>
+            <a:ext cx="12191695" cy="960120"/>
+          </a:xfrm>
+          <a:prstGeom prst="rect">
+            <a:avLst/>
+          </a:prstGeom>
+          <a:solidFill>
+            <a:srgbClr val="095292"/>
+          </a:solidFill>
+          <a:ln>
+            <a:noFill/>
+          </a:ln>
+        </p:spPr>
+        <p:style>
+          <a:lnRef idx="1">
+            <a:schemeClr val="accent1"/>
+          </a:lnRef>
+          <a:fillRef idx="3">
+            <a:schemeClr val="accent1"/>
+          </a:fillRef>
+          <a:effectRef idx="2">
+            <a:schemeClr val="accent1"/>
+          </a:effectRef>
+          <a:fontRef idx="minor">
+            <a:schemeClr val="lt1"/>
+          </a:fontRef>
+        </p:style>
+        <p:txBody>
+          <a:bodyPr rtlCol="0" anchor="ctr"/>
+          <a:lstStyle/>
+          <a:p>
+            <a:pPr algn="ctr"/>
+          </a:p>
+        </p:txBody>
+      </p:sp>
+      <p:sp>
+        <p:nvSpPr>
+          <p:cNvPr id="3" name="Rectangle 2"/>
+          <p:cNvSpPr/>
+          <p:nvPr/>
+        </p:nvSpPr>
+        <p:spPr>
+          <a:xfrm>
+            <a:off x="0" y="960120"/>
+            <a:ext cx="12191695" cy="41148"/>
+          </a:xfrm>
+          <a:prstGeom prst="rect">
+            <a:avLst/>
+          </a:prstGeom>
+          <a:solidFill>
+            <a:srgbClr val="FFD000"/>
+          </a:solidFill>
+          <a:ln>
+            <a:noFill/>
+          </a:ln>
+        </p:spPr>
+        <p:style>
+          <a:lnRef idx="1">
+            <a:schemeClr val="accent1"/>
+          </a:lnRef>
+          <a:fillRef idx="3">
+            <a:schemeClr val="accent1"/>
+          </a:fillRef>
+          <a:effectRef idx="2">
+            <a:schemeClr val="accent1"/>
+          </a:effectRef>
+          <a:fontRef idx="minor">
+            <a:schemeClr val="lt1"/>
+          </a:fontRef>
+        </p:style>
+        <p:txBody>
+          <a:bodyPr rtlCol="0" anchor="ctr"/>
+          <a:lstStyle/>
+          <a:p>
+            <a:pPr algn="ctr"/>
+          </a:p>
+        </p:txBody>
+      </p:sp>
+      <p:sp>
+        <p:nvSpPr>
+          <p:cNvPr id="4" name="TextBox 3"/>
+          <p:cNvSpPr txBox="1"/>
+          <p:nvPr/>
+        </p:nvSpPr>
+        <p:spPr>
+          <a:xfrm>
+            <a:off x="457200" y="164592"/>
+            <a:ext cx="11277295" cy="502920"/>
+          </a:xfrm>
+          <a:prstGeom prst="rect">
+            <a:avLst/>
+          </a:prstGeom>
+          <a:noFill/>
+        </p:spPr>
+        <p:txBody>
+          <a:bodyPr wrap="square">
+            <a:spAutoFit/>
+          </a:bodyPr>
+          <a:lstStyle/>
+          <a:p>
+            <a:r>
+              <a:rPr sz="2600" b="1" i="0">
+                <a:solidFill>
+                  <a:srgbClr val="FFFFFF"/>
+                </a:solidFill>
+                <a:latin typeface="Calibri"/>
+              </a:rPr>
+              <a:t>Para la Clase 16</a:t>
+            </a:r>
+          </a:p>
+        </p:txBody>
+      </p:sp>
+      <p:sp>
+        <p:nvSpPr>
+          <p:cNvPr id="5" name="TextBox 4"/>
+          <p:cNvSpPr txBox="1"/>
+          <p:nvPr/>
+        </p:nvSpPr>
+        <p:spPr>
+          <a:xfrm>
+            <a:off x="457200" y="1170432"/>
+            <a:ext cx="11277295" cy="5230368"/>
+          </a:xfrm>
+          <a:prstGeom prst="rect">
+            <a:avLst/>
+          </a:prstGeom>
+          <a:noFill/>
+        </p:spPr>
+        <p:txBody>
+          <a:bodyPr wrap="square">
+            <a:spAutoFit/>
+          </a:bodyPr>
+          <a:lstStyle/>
+          <a:p>
+            <a:pPr>
+              <a:spcAft>
+                <a:spcPts val="800"/>
+              </a:spcAft>
+            </a:pPr>
+            <a:r>
+              <a:rPr sz="2000" b="0" i="0">
+                <a:solidFill>
+                  <a:srgbClr val="333333"/>
+                </a:solidFill>
+                <a:latin typeface="Calibri"/>
+              </a:rPr>
+              <a:t>–   </a:t>
+            </a:r>
             <a:r>
               <a:rPr sz="2000" b="1" i="0">
                 <a:solidFill>
-                  <a:srgbClr val="269CCB"/>
-                </a:solidFill>
-                <a:latin typeface="Calibri"/>
-              </a:rPr>
-              <a:t>Hace quince sesiones era una ocurrencia; hoy es un proyecto sustentado</a:t>
+                  <a:srgbClr val="333333"/>
+                </a:solidFill>
+                <a:latin typeface="Calibri"/>
+              </a:rPr>
+              <a:t>Trabajo dirigido:</a:t>
+            </a:r>
+            <a:r>
+              <a:rPr sz="2000" b="0" i="0">
+                <a:solidFill>
+                  <a:srgbClr val="333333"/>
+                </a:solidFill>
+                <a:latin typeface="Calibri"/>
+              </a:rPr>
+              <a:t> Valoración de presentaciones — completar la ficha de valoración de los otros cuatro equipos en el muro, si no quedó terminada en clase.</a:t>
+            </a:r>
+          </a:p>
+          <a:p>
+            <a:pPr>
+              <a:spcAft>
+                <a:spcPts val="800"/>
+              </a:spcAft>
+            </a:pPr>
+            <a:r>
+              <a:rPr sz="2000" b="0" i="0">
+                <a:solidFill>
+                  <a:srgbClr val="333333"/>
+                </a:solidFill>
+                <a:latin typeface="Calibri"/>
+              </a:rPr>
+              <a:t>–   </a:t>
+            </a:r>
+            <a:r>
+              <a:rPr sz="2000" b="1" i="0">
+                <a:solidFill>
+                  <a:srgbClr val="333333"/>
+                </a:solidFill>
+                <a:latin typeface="Calibri"/>
+              </a:rPr>
+              <a:t>Trabajo independiente:</a:t>
+            </a:r>
+            <a:r>
+              <a:rPr sz="2000" b="0" i="0">
+                <a:solidFill>
+                  <a:srgbClr val="333333"/>
+                </a:solidFill>
+                <a:latin typeface="Calibri"/>
+              </a:rPr>
+              <a:t> Ajustes del informe final: </a:t>
+            </a:r>
+            <a:r>
+              <a:rPr sz="2000" b="1" i="0">
+                <a:solidFill>
+                  <a:srgbClr val="333333"/>
+                </a:solidFill>
+                <a:latin typeface="Calibri"/>
+              </a:rPr>
+              <a:t>reunir las doce secciones</a:t>
+            </a:r>
+            <a:r>
+              <a:rPr sz="2000" b="0" i="0">
+                <a:solidFill>
+                  <a:srgbClr val="333333"/>
+                </a:solidFill>
+                <a:latin typeface="Calibri"/>
+              </a:rPr>
+              <a:t> en un solo documento, tomando lo que ya está escrito desde la sesión 3, y </a:t>
+            </a:r>
+            <a:r>
+              <a:rPr sz="2000" b="1" i="0">
+                <a:solidFill>
+                  <a:srgbClr val="333333"/>
+                </a:solidFill>
+                <a:latin typeface="Calibri"/>
+              </a:rPr>
+              <a:t>escribir el resumen de media página</a:t>
+            </a:r>
+            <a:r>
+              <a:rPr sz="2000" b="0" i="0">
+                <a:solidFill>
+                  <a:srgbClr val="333333"/>
+                </a:solidFill>
+                <a:latin typeface="Calibri"/>
+              </a:rPr>
+              <a:t>, que es lo único nuevo. Y una tarea corta que vale mucho: </a:t>
+            </a:r>
+            <a:r>
+              <a:rPr sz="2000" b="1" i="0">
+                <a:solidFill>
+                  <a:srgbClr val="333333"/>
+                </a:solidFill>
+                <a:latin typeface="Calibri"/>
+              </a:rPr>
+              <a:t>anotar lo que el curso no entendió</a:t>
+            </a:r>
+            <a:r>
+              <a:rPr sz="2000" b="0" i="0">
+                <a:solidFill>
+                  <a:srgbClr val="333333"/>
+                </a:solidFill>
+                <a:latin typeface="Calibri"/>
+              </a:rPr>
+              <a:t> hoy de su proyecto.</a:t>
+            </a:r>
+          </a:p>
+          <a:p>
+            <a:pPr>
+              <a:spcAft>
+                <a:spcPts val="800"/>
+              </a:spcAft>
+            </a:pPr>
+            <a:r>
+              <a:rPr sz="2000" b="0" i="0">
+                <a:solidFill>
+                  <a:srgbClr val="333333"/>
+                </a:solidFill>
+                <a:latin typeface="Calibri"/>
+              </a:rPr>
+              <a:t>–   </a:t>
+            </a:r>
+            <a:r>
+              <a:rPr sz="2000" b="1" i="0">
+                <a:solidFill>
+                  <a:srgbClr val="333333"/>
+                </a:solidFill>
+                <a:latin typeface="Calibri"/>
+              </a:rPr>
+              <a:t>Clase 16 · Socialización y evaluación final del curso</a:t>
+            </a:r>
+            <a:r>
+              <a:rPr sz="2000" b="0" i="0">
+                <a:solidFill>
+                  <a:srgbClr val="333333"/>
+                </a:solidFill>
+                <a:latin typeface="Calibri"/>
+              </a:rPr>
+              <a:t> — es la última: se </a:t>
+            </a:r>
+            <a:r>
+              <a:rPr sz="2000" b="1" i="0">
+                <a:solidFill>
+                  <a:srgbClr val="333333"/>
+                </a:solidFill>
+                <a:latin typeface="Calibri"/>
+              </a:rPr>
+              <a:t>entrega el informe final (20 %)</a:t>
+            </a:r>
+            <a:r>
+              <a:rPr sz="2000" b="0" i="0">
+                <a:solidFill>
+                  <a:srgbClr val="333333"/>
+                </a:solidFill>
+                <a:latin typeface="Calibri"/>
+              </a:rPr>
+              <a:t>, se socializa la galería de proyectos del curso y se hace la </a:t>
+            </a:r>
+            <a:r>
+              <a:rPr sz="2000" b="1" i="0">
+                <a:solidFill>
+                  <a:srgbClr val="333333"/>
+                </a:solidFill>
+                <a:latin typeface="Calibri"/>
+              </a:rPr>
+              <a:t>autoevaluación y coevaluación</a:t>
+            </a:r>
+            <a:r>
+              <a:rPr sz="2000" b="0" i="0">
+                <a:solidFill>
+                  <a:srgbClr val="333333"/>
+                </a:solidFill>
+                <a:latin typeface="Calibri"/>
+              </a:rPr>
+              <a:t>.</a:t>
+            </a:r>
+          </a:p>
+          <a:p>
+            <a:pPr>
+              <a:spcAft>
+                <a:spcPts val="800"/>
+              </a:spcAft>
+            </a:pPr>
+            <a:r>
+              <a:rPr sz="2000" b="0" i="0">
+                <a:solidFill>
+                  <a:srgbClr val="333333"/>
+                </a:solidFill>
+                <a:latin typeface="Calibri"/>
+              </a:rPr>
+              <a:t>–   </a:t>
+            </a:r>
+            <a:r>
+              <a:rPr sz="2000" b="1" i="0">
+                <a:solidFill>
+                  <a:srgbClr val="333333"/>
+                </a:solidFill>
+                <a:latin typeface="Calibri"/>
+              </a:rPr>
+              <a:t>Aviso:</a:t>
+            </a:r>
+            <a:r>
+              <a:rPr sz="2000" b="0" i="0">
+                <a:solidFill>
+                  <a:srgbClr val="333333"/>
+                </a:solidFill>
+                <a:latin typeface="Calibri"/>
+              </a:rPr>
+              <a:t> El informe se entrega </a:t>
+            </a:r>
+            <a:r>
+              <a:rPr sz="2000" b="1" i="0">
+                <a:solidFill>
+                  <a:srgbClr val="333333"/>
+                </a:solidFill>
+                <a:latin typeface="Calibri"/>
+              </a:rPr>
+              <a:t>en la Clase 16, dentro de la clase</a:t>
+            </a:r>
+            <a:r>
+              <a:rPr sz="2000" b="0" i="0">
+                <a:solidFill>
+                  <a:srgbClr val="333333"/>
+                </a:solidFill>
+                <a:latin typeface="Calibri"/>
+              </a:rPr>
+              <a:t>: se revisa y se completa ahí mismo, con la lista de verificación. Lleguen con el documento armado —no con las secciones dispersas en cinco archivos— porque los 24 minutos de revisión no alcanzan para copiar y pegar el curso entero.</a:t>
+            </a:r>
+          </a:p>
+          <a:p>
+            <a:pPr>
+              <a:spcAft>
+                <a:spcPts val="800"/>
+              </a:spcAft>
+            </a:pPr>
+            <a:r>
+              <a:rPr sz="2000" b="0" i="0">
+                <a:solidFill>
+                  <a:srgbClr val="333333"/>
+                </a:solidFill>
+                <a:latin typeface="Calibri"/>
+              </a:rPr>
+              <a:t>–   </a:t>
+            </a:r>
+            <a:r>
+              <a:rPr sz="2000" b="1" i="0">
+                <a:solidFill>
+                  <a:srgbClr val="333333"/>
+                </a:solidFill>
+                <a:latin typeface="Calibri"/>
+              </a:rPr>
+              <a:t>Antes de salir:</a:t>
+            </a:r>
+            <a:r>
+              <a:rPr sz="2000" b="0" i="0">
+                <a:solidFill>
+                  <a:srgbClr val="333333"/>
+                </a:solidFill>
+                <a:latin typeface="Calibri"/>
+              </a:rPr>
+              <a:t> el enlace del documento del equipo en el chat, con permiso de lectura para el docente, y el nombre del vocero de hoy.</a:t>
+            </a:r>
+          </a:p>
+        </p:txBody>
+      </p:sp>
+      <p:sp>
+        <p:nvSpPr>
+          <p:cNvPr id="6" name="TextBox 5"/>
+          <p:cNvSpPr txBox="1"/>
+          <p:nvPr/>
+        </p:nvSpPr>
+        <p:spPr>
+          <a:xfrm>
+            <a:off x="11185855" y="6473952"/>
+            <a:ext cx="640080" cy="274320"/>
+          </a:xfrm>
+          <a:prstGeom prst="rect">
+            <a:avLst/>
+          </a:prstGeom>
+          <a:noFill/>
+        </p:spPr>
+        <p:txBody>
+          <a:bodyPr wrap="square">
+            <a:spAutoFit/>
+          </a:bodyPr>
+          <a:lstStyle/>
+          <a:p>
+            <a:pPr algn="r"/>
+            <a:r>
+              <a:rPr sz="1100" b="0" i="0">
+                <a:solidFill>
+                  <a:srgbClr val="666666"/>
+                </a:solidFill>
+                <a:latin typeface="Calibri"/>
+              </a:rPr>
+              <a:t>19</a:t>
             </a:r>
           </a:p>
         </p:txBody>
@@ -6218,6 +9661,222 @@
                 <a:latin typeface="Calibri"/>
               </a:rPr>
               <a:t>2</a:t>
+            </a:r>
+          </a:p>
+        </p:txBody>
+      </p:sp>
+    </p:spTree>
+  </p:cSld>
+  <p:clrMapOvr>
+    <a:masterClrMapping/>
+  </p:clrMapOvr>
+</p:sld>
+</file>
+
+<file path=ppt/slides/slide20.xml><?xml version="1.0" encoding="utf-8"?>
+<p:sld xmlns:a="http://schemas.openxmlformats.org/drawingml/2006/main" xmlns:p="http://schemas.openxmlformats.org/presentationml/2006/main" xmlns:r="http://schemas.openxmlformats.org/officeDocument/2006/relationships">
+  <p:cSld>
+    <p:bg>
+      <p:bgPr>
+        <a:solidFill>
+          <a:srgbClr val="FFFFFF"/>
+        </a:solidFill>
+        <a:effectLst/>
+      </p:bgPr>
+    </p:bg>
+    <p:spTree>
+      <p:nvGrpSpPr>
+        <p:cNvPr id="1" name=""/>
+        <p:cNvGrpSpPr/>
+        <p:nvPr/>
+      </p:nvGrpSpPr>
+      <p:grpSpPr/>
+      <p:sp>
+        <p:nvSpPr>
+          <p:cNvPr id="2" name="Rectangle 1"/>
+          <p:cNvSpPr/>
+          <p:nvPr/>
+        </p:nvSpPr>
+        <p:spPr>
+          <a:xfrm>
+            <a:off x="0" y="0"/>
+            <a:ext cx="12191695" cy="164592"/>
+          </a:xfrm>
+          <a:prstGeom prst="rect">
+            <a:avLst/>
+          </a:prstGeom>
+          <a:solidFill>
+            <a:srgbClr val="269CCB"/>
+          </a:solidFill>
+          <a:ln>
+            <a:noFill/>
+          </a:ln>
+        </p:spPr>
+        <p:style>
+          <a:lnRef idx="1">
+            <a:schemeClr val="accent1"/>
+          </a:lnRef>
+          <a:fillRef idx="3">
+            <a:schemeClr val="accent1"/>
+          </a:fillRef>
+          <a:effectRef idx="2">
+            <a:schemeClr val="accent1"/>
+          </a:effectRef>
+          <a:fontRef idx="minor">
+            <a:schemeClr val="lt1"/>
+          </a:fontRef>
+        </p:style>
+        <p:txBody>
+          <a:bodyPr rtlCol="0" anchor="ctr"/>
+          <a:lstStyle/>
+          <a:p>
+            <a:pPr algn="ctr"/>
+          </a:p>
+        </p:txBody>
+      </p:sp>
+      <p:pic>
+        <p:nvPicPr>
+          <p:cNvPr id="3" name="Picture 2" descr="logo_uniajc_color.png"/>
+          <p:cNvPicPr>
+            <a:picLocks noChangeAspect="1"/>
+          </p:cNvPicPr>
+          <p:nvPr/>
+        </p:nvPicPr>
+        <p:blipFill>
+          <a:blip r:embed="rId2"/>
+          <a:stretch>
+            <a:fillRect/>
+          </a:stretch>
+        </p:blipFill>
+        <p:spPr>
+          <a:xfrm>
+            <a:off x="10271455" y="5998464"/>
+            <a:ext cx="1463040" cy="643233"/>
+          </a:xfrm>
+          <a:prstGeom prst="rect">
+            <a:avLst/>
+          </a:prstGeom>
+        </p:spPr>
+      </p:pic>
+      <p:sp>
+        <p:nvSpPr>
+          <p:cNvPr id="4" name="TextBox 3"/>
+          <p:cNvSpPr txBox="1"/>
+          <p:nvPr/>
+        </p:nvSpPr>
+        <p:spPr>
+          <a:xfrm>
+            <a:off x="457200" y="1737360"/>
+            <a:ext cx="11277295" cy="1097280"/>
+          </a:xfrm>
+          <a:prstGeom prst="rect">
+            <a:avLst/>
+          </a:prstGeom>
+          <a:noFill/>
+        </p:spPr>
+        <p:txBody>
+          <a:bodyPr wrap="square" anchor="ctr"/>
+          <a:lstStyle/>
+          <a:p>
+            <a:pPr algn="ctr"/>
+            <a:r>
+              <a:rPr sz="3400" b="1" i="0">
+                <a:solidFill>
+                  <a:srgbClr val="095292"/>
+                </a:solidFill>
+                <a:latin typeface="Calibri"/>
+              </a:rPr>
+              <a:t>Nos vemos en la Clase 16 · la última</a:t>
+            </a:r>
+          </a:p>
+        </p:txBody>
+      </p:sp>
+      <p:sp>
+        <p:nvSpPr>
+          <p:cNvPr id="5" name="TextBox 4"/>
+          <p:cNvSpPr txBox="1"/>
+          <p:nvPr/>
+        </p:nvSpPr>
+        <p:spPr>
+          <a:xfrm>
+            <a:off x="457200" y="3017520"/>
+            <a:ext cx="11277295" cy="1645920"/>
+          </a:xfrm>
+          <a:prstGeom prst="rect">
+            <a:avLst/>
+          </a:prstGeom>
+          <a:noFill/>
+        </p:spPr>
+        <p:txBody>
+          <a:bodyPr wrap="square">
+            <a:spAutoFit/>
+          </a:bodyPr>
+          <a:lstStyle/>
+          <a:p>
+            <a:pPr algn="ctr">
+              <a:spcAft>
+                <a:spcPts val="600"/>
+              </a:spcAft>
+            </a:pPr>
+            <a:r>
+              <a:rPr sz="1600" b="0" i="0">
+                <a:solidFill>
+                  <a:srgbClr val="333333"/>
+                </a:solidFill>
+                <a:latin typeface="Calibri"/>
+              </a:rPr>
+              <a:t>Exposición final de proyectos · Clase 15</a:t>
+            </a:r>
+          </a:p>
+          <a:p>
+            <a:pPr algn="ctr">
+              <a:spcAft>
+                <a:spcPts val="600"/>
+              </a:spcAft>
+            </a:pPr>
+            <a:r>
+              <a:rPr sz="1600" b="0" i="0">
+                <a:solidFill>
+                  <a:srgbClr val="333333"/>
+                </a:solidFill>
+                <a:latin typeface="Calibri"/>
+              </a:rPr>
+              <a:t>FI300101 · UNIAJC · Ingeniería de Sistemas</a:t>
+            </a:r>
+          </a:p>
+        </p:txBody>
+      </p:sp>
+      <p:sp>
+        <p:nvSpPr>
+          <p:cNvPr id="6" name="TextBox 5"/>
+          <p:cNvSpPr txBox="1"/>
+          <p:nvPr/>
+        </p:nvSpPr>
+        <p:spPr>
+          <a:xfrm>
+            <a:off x="457200" y="4754880"/>
+            <a:ext cx="11277295" cy="640080"/>
+          </a:xfrm>
+          <a:prstGeom prst="rect">
+            <a:avLst/>
+          </a:prstGeom>
+          <a:noFill/>
+        </p:spPr>
+        <p:txBody>
+          <a:bodyPr wrap="square">
+            <a:spAutoFit/>
+          </a:bodyPr>
+          <a:lstStyle/>
+          <a:p>
+            <a:pPr algn="ctr"/>
+            <a:r>
+              <a:rPr sz="2000" b="1" i="0">
+                <a:solidFill>
+                  <a:srgbClr val="269CCB"/>
+                </a:solidFill>
+                <a:latin typeface="Calibri"/>
+              </a:rPr>
+              <a:t>Hace quince sesiones era una ocurrencia; hoy es un proyecto sustentado</a:t>
             </a:r>
           </a:p>
         </p:txBody>
@@ -10344,7 +14003,7 @@
         <p:spPr>
           <a:xfrm>
             <a:off x="0" y="0"/>
-            <a:ext cx="12191695" cy="1170432"/>
+            <a:ext cx="12191695" cy="960120"/>
           </a:xfrm>
           <a:prstGeom prst="rect">
             <a:avLst/>
@@ -10386,7 +14045,7 @@
         </p:nvSpPr>
         <p:spPr>
           <a:xfrm>
-            <a:off x="0" y="1170432"/>
+            <a:off x="0" y="960120"/>
             <a:ext cx="12191695" cy="41148"/>
           </a:xfrm>
           <a:prstGeom prst="rect">
@@ -10430,7 +14089,7 @@
         <p:spPr>
           <a:xfrm>
             <a:off x="457200" y="164592"/>
-            <a:ext cx="11277295" cy="384048"/>
+            <a:ext cx="11277295" cy="502920"/>
           </a:xfrm>
           <a:prstGeom prst="rect">
             <a:avLst/>
@@ -10450,7 +14109,7 @@
                 </a:solidFill>
                 <a:latin typeface="Calibri"/>
               </a:rPr>
-              <a:t>Taller de hoy: Exposición final del proyecto</a:t>
+              <a:t>Cómo se encuadra el día, y por qué el sorteo importa (1/2)</a:t>
             </a:r>
           </a:p>
         </p:txBody>
@@ -10463,8 +14122,8 @@
         </p:nvSpPr>
         <p:spPr>
           <a:xfrm>
-            <a:off x="457200" y="566928"/>
-            <a:ext cx="11277295" cy="411480"/>
+            <a:off x="457200" y="1170432"/>
+            <a:ext cx="11277295" cy="5230368"/>
           </a:xfrm>
           <a:prstGeom prst="rect">
             <a:avLst/>
@@ -10477,428 +14136,31 @@
           </a:bodyPr>
           <a:lstStyle/>
           <a:p>
-            <a:r>
-              <a:rPr sz="1400" b="0" i="0">
-                <a:solidFill>
-                  <a:srgbClr val="B8D8EE"/>
-                </a:solidFill>
-                <a:latin typeface="Calibri"/>
-              </a:rPr>
-              <a:t>60 min en equipos · 9 min de exposición + 3 de preguntas, por equipo · exposición de 9 min + ficha de valoración de los otros equipos</a:t>
-            </a:r>
-          </a:p>
-        </p:txBody>
-      </p:sp>
-      <p:sp>
-        <p:nvSpPr>
-          <p:cNvPr id="6" name="Rounded Rectangle 5"/>
-          <p:cNvSpPr/>
-          <p:nvPr/>
-        </p:nvSpPr>
-        <p:spPr>
-          <a:xfrm>
-            <a:off x="457200" y="1472184"/>
-            <a:ext cx="11277295" cy="566928"/>
-          </a:xfrm>
-          <a:prstGeom prst="roundRect">
-            <a:avLst>
-              <a:gd name="adj" fmla="val 12000"/>
-            </a:avLst>
-          </a:prstGeom>
-          <a:solidFill>
-            <a:srgbClr val="F2F2F2"/>
-          </a:solidFill>
-          <a:ln>
-            <a:noFill/>
-          </a:ln>
-        </p:spPr>
-        <p:style>
-          <a:lnRef idx="1">
-            <a:schemeClr val="accent1"/>
-          </a:lnRef>
-          <a:fillRef idx="3">
-            <a:schemeClr val="accent1"/>
-          </a:fillRef>
-          <a:effectRef idx="2">
-            <a:schemeClr val="accent1"/>
-          </a:effectRef>
-          <a:fontRef idx="minor">
-            <a:schemeClr val="lt1"/>
-          </a:fontRef>
-        </p:style>
-        <p:txBody>
-          <a:bodyPr rtlCol="0" anchor="ctr"/>
-          <a:lstStyle/>
-          <a:p>
-            <a:pPr algn="ctr"/>
-          </a:p>
-        </p:txBody>
-      </p:sp>
-      <p:sp>
-        <p:nvSpPr>
-          <p:cNvPr id="7" name="Rectangle 6"/>
-          <p:cNvSpPr/>
-          <p:nvPr/>
-        </p:nvSpPr>
-        <p:spPr>
-          <a:xfrm>
-            <a:off x="640080" y="1618487"/>
-            <a:ext cx="274320" cy="274320"/>
-          </a:xfrm>
-          <a:prstGeom prst="rect">
-            <a:avLst/>
-          </a:prstGeom>
-          <a:solidFill>
-            <a:srgbClr val="FFFFFF"/>
-          </a:solidFill>
-          <a:ln>
-            <a:solidFill>
-              <a:srgbClr val="333333"/>
-            </a:solidFill>
-          </a:ln>
-        </p:spPr>
-        <p:style>
-          <a:lnRef idx="1">
-            <a:schemeClr val="accent1"/>
-          </a:lnRef>
-          <a:fillRef idx="3">
-            <a:schemeClr val="accent1"/>
-          </a:fillRef>
-          <a:effectRef idx="2">
-            <a:schemeClr val="accent1"/>
-          </a:effectRef>
-          <a:fontRef idx="minor">
-            <a:schemeClr val="lt1"/>
-          </a:fontRef>
-        </p:style>
-        <p:txBody>
-          <a:bodyPr rtlCol="0" anchor="ctr"/>
-          <a:lstStyle/>
-          <a:p>
-            <a:pPr algn="ctr"/>
-          </a:p>
-        </p:txBody>
-      </p:sp>
-      <p:sp>
-        <p:nvSpPr>
-          <p:cNvPr id="8" name="Rectangle 7"/>
-          <p:cNvSpPr/>
-          <p:nvPr/>
-        </p:nvSpPr>
-        <p:spPr>
-          <a:xfrm>
-            <a:off x="640080" y="1618487"/>
-            <a:ext cx="73152" cy="274320"/>
-          </a:xfrm>
-          <a:prstGeom prst="rect">
-            <a:avLst/>
-          </a:prstGeom>
-          <a:solidFill>
-            <a:srgbClr val="269CCB"/>
-          </a:solidFill>
-          <a:ln>
-            <a:noFill/>
-          </a:ln>
-        </p:spPr>
-        <p:style>
-          <a:lnRef idx="1">
-            <a:schemeClr val="accent1"/>
-          </a:lnRef>
-          <a:fillRef idx="3">
-            <a:schemeClr val="accent1"/>
-          </a:fillRef>
-          <a:effectRef idx="2">
-            <a:schemeClr val="accent1"/>
-          </a:effectRef>
-          <a:fontRef idx="minor">
-            <a:schemeClr val="lt1"/>
-          </a:fontRef>
-        </p:style>
-        <p:txBody>
-          <a:bodyPr rtlCol="0" anchor="ctr"/>
-          <a:lstStyle/>
-          <a:p>
-            <a:pPr algn="ctr"/>
-          </a:p>
-        </p:txBody>
-      </p:sp>
-      <p:sp>
-        <p:nvSpPr>
-          <p:cNvPr id="9" name="TextBox 8"/>
-          <p:cNvSpPr txBox="1"/>
-          <p:nvPr/>
-        </p:nvSpPr>
-        <p:spPr>
-          <a:xfrm>
-            <a:off x="1097280" y="1563624"/>
-            <a:ext cx="10362895" cy="402336"/>
-          </a:xfrm>
-          <a:prstGeom prst="rect">
-            <a:avLst/>
-          </a:prstGeom>
-          <a:noFill/>
-        </p:spPr>
-        <p:txBody>
-          <a:bodyPr wrap="square" anchor="ctr"/>
-          <a:lstStyle/>
-          <a:p>
-            <a:r>
-              <a:rPr sz="1500" b="1" i="0">
-                <a:solidFill>
-                  <a:srgbClr val="333333"/>
-                </a:solidFill>
-                <a:latin typeface="Calibri"/>
-              </a:rPr>
-              <a:t>EL PROBLEMA CON SU CIFRA</a:t>
-            </a:r>
-            <a:r>
-              <a:rPr sz="1500" b="0" i="0">
-                <a:solidFill>
-                  <a:srgbClr val="333333"/>
-                </a:solidFill>
-                <a:latin typeface="Calibri"/>
-              </a:rPr>
-              <a:t> — Una frase y </a:t>
-            </a:r>
-            <a:r>
-              <a:rPr sz="1500" b="1" i="0">
-                <a:solidFill>
-                  <a:srgbClr val="333333"/>
-                </a:solidFill>
-                <a:latin typeface="Calibri"/>
-              </a:rPr>
-              <a:t>un número</a:t>
-            </a:r>
-            <a:r>
-              <a:rPr sz="1500" b="0" i="0">
-                <a:solidFill>
-                  <a:srgbClr val="333333"/>
-                </a:solidFill>
-                <a:latin typeface="Calibri"/>
-              </a:rPr>
-              <a:t>, con de dónde salió. </a:t>
-            </a:r>
-            <a:r>
-              <a:rPr sz="1500" b="1" i="0">
-                <a:solidFill>
-                  <a:srgbClr val="333333"/>
-                </a:solidFill>
-                <a:latin typeface="Calibri"/>
-              </a:rPr>
-              <a:t>Sin saludos ni presentaciones personales</a:t>
-            </a:r>
-            <a:r>
-              <a:rPr sz="1500" b="0" i="0">
-                <a:solidFill>
-                  <a:srgbClr val="333333"/>
-                </a:solidFill>
-                <a:latin typeface="Calibri"/>
-              </a:rPr>
-              <a:t>: el nombre del equipo está en la diapositiva.</a:t>
-            </a:r>
-          </a:p>
-        </p:txBody>
-      </p:sp>
-      <p:sp>
-        <p:nvSpPr>
-          <p:cNvPr id="10" name="Rounded Rectangle 9"/>
-          <p:cNvSpPr/>
-          <p:nvPr/>
-        </p:nvSpPr>
-        <p:spPr>
-          <a:xfrm>
-            <a:off x="457200" y="2148839"/>
-            <a:ext cx="11277295" cy="566928"/>
-          </a:xfrm>
-          <a:prstGeom prst="roundRect">
-            <a:avLst>
-              <a:gd name="adj" fmla="val 12000"/>
-            </a:avLst>
-          </a:prstGeom>
-          <a:solidFill>
-            <a:srgbClr val="F2F2F2"/>
-          </a:solidFill>
-          <a:ln>
-            <a:noFill/>
-          </a:ln>
-        </p:spPr>
-        <p:style>
-          <a:lnRef idx="1">
-            <a:schemeClr val="accent1"/>
-          </a:lnRef>
-          <a:fillRef idx="3">
-            <a:schemeClr val="accent1"/>
-          </a:fillRef>
-          <a:effectRef idx="2">
-            <a:schemeClr val="accent1"/>
-          </a:effectRef>
-          <a:fontRef idx="minor">
-            <a:schemeClr val="lt1"/>
-          </a:fontRef>
-        </p:style>
-        <p:txBody>
-          <a:bodyPr rtlCol="0" anchor="ctr"/>
-          <a:lstStyle/>
-          <a:p>
-            <a:pPr algn="ctr"/>
-          </a:p>
-        </p:txBody>
-      </p:sp>
-      <p:sp>
-        <p:nvSpPr>
-          <p:cNvPr id="11" name="Rectangle 10"/>
-          <p:cNvSpPr/>
-          <p:nvPr/>
-        </p:nvSpPr>
-        <p:spPr>
-          <a:xfrm>
-            <a:off x="640080" y="2295144"/>
-            <a:ext cx="274320" cy="274320"/>
-          </a:xfrm>
-          <a:prstGeom prst="rect">
-            <a:avLst/>
-          </a:prstGeom>
-          <a:solidFill>
-            <a:srgbClr val="FFFFFF"/>
-          </a:solidFill>
-          <a:ln>
-            <a:solidFill>
-              <a:srgbClr val="333333"/>
-            </a:solidFill>
-          </a:ln>
-        </p:spPr>
-        <p:style>
-          <a:lnRef idx="1">
-            <a:schemeClr val="accent1"/>
-          </a:lnRef>
-          <a:fillRef idx="3">
-            <a:schemeClr val="accent1"/>
-          </a:fillRef>
-          <a:effectRef idx="2">
-            <a:schemeClr val="accent1"/>
-          </a:effectRef>
-          <a:fontRef idx="minor">
-            <a:schemeClr val="lt1"/>
-          </a:fontRef>
-        </p:style>
-        <p:txBody>
-          <a:bodyPr rtlCol="0" anchor="ctr"/>
-          <a:lstStyle/>
-          <a:p>
-            <a:pPr algn="ctr"/>
-          </a:p>
-        </p:txBody>
-      </p:sp>
-      <p:sp>
-        <p:nvSpPr>
-          <p:cNvPr id="12" name="Rectangle 11"/>
-          <p:cNvSpPr/>
-          <p:nvPr/>
-        </p:nvSpPr>
-        <p:spPr>
-          <a:xfrm>
-            <a:off x="640080" y="2295144"/>
-            <a:ext cx="73152" cy="274320"/>
-          </a:xfrm>
-          <a:prstGeom prst="rect">
-            <a:avLst/>
-          </a:prstGeom>
-          <a:solidFill>
-            <a:srgbClr val="269CCB"/>
-          </a:solidFill>
-          <a:ln>
-            <a:noFill/>
-          </a:ln>
-        </p:spPr>
-        <p:style>
-          <a:lnRef idx="1">
-            <a:schemeClr val="accent1"/>
-          </a:lnRef>
-          <a:fillRef idx="3">
-            <a:schemeClr val="accent1"/>
-          </a:fillRef>
-          <a:effectRef idx="2">
-            <a:schemeClr val="accent1"/>
-          </a:effectRef>
-          <a:fontRef idx="minor">
-            <a:schemeClr val="lt1"/>
-          </a:fontRef>
-        </p:style>
-        <p:txBody>
-          <a:bodyPr rtlCol="0" anchor="ctr"/>
-          <a:lstStyle/>
-          <a:p>
-            <a:pPr algn="ctr"/>
-          </a:p>
-        </p:txBody>
-      </p:sp>
-      <p:sp>
-        <p:nvSpPr>
-          <p:cNvPr id="13" name="TextBox 12"/>
-          <p:cNvSpPr txBox="1"/>
-          <p:nvPr/>
-        </p:nvSpPr>
-        <p:spPr>
-          <a:xfrm>
-            <a:off x="1097280" y="2240279"/>
-            <a:ext cx="10362895" cy="402336"/>
-          </a:xfrm>
-          <a:prstGeom prst="rect">
-            <a:avLst/>
-          </a:prstGeom>
-          <a:noFill/>
-        </p:spPr>
-        <p:txBody>
-          <a:bodyPr wrap="square" anchor="ctr"/>
-          <a:lstStyle/>
-          <a:p>
-            <a:r>
-              <a:rPr sz="1500" b="1" i="0">
-                <a:solidFill>
-                  <a:srgbClr val="333333"/>
-                </a:solidFill>
-                <a:latin typeface="Calibri"/>
-              </a:rPr>
-              <a:t>LOS AFECTADOS Y LA DECISIÓN</a:t>
-            </a:r>
-            <a:r>
-              <a:rPr sz="1500" b="0" i="0">
-                <a:solidFill>
-                  <a:srgbClr val="333333"/>
-                </a:solidFill>
-                <a:latin typeface="Calibri"/>
-              </a:rPr>
-              <a:t> — Quiénes son los afectados —</a:t>
-            </a:r>
-            <a:r>
-              <a:rPr sz="1500" b="1" i="0">
-                <a:solidFill>
-                  <a:srgbClr val="333333"/>
-                </a:solidFill>
-                <a:latin typeface="Calibri"/>
-              </a:rPr>
-              <a:t>incluido uno que no es usuario</a:t>
-            </a:r>
-            <a:r>
-              <a:rPr sz="1500" b="0" i="0">
-                <a:solidFill>
-                  <a:srgbClr val="333333"/>
-                </a:solidFill>
-                <a:latin typeface="Calibri"/>
-              </a:rPr>
-              <a:t>— y qué alternativa se eligió, </a:t>
-            </a:r>
-            <a:r>
-              <a:rPr sz="1500" b="1" i="0">
-                <a:solidFill>
-                  <a:srgbClr val="333333"/>
-                </a:solidFill>
-                <a:latin typeface="Calibri"/>
-              </a:rPr>
-              <a:t>diciendo qué se sacrificó</a:t>
-            </a:r>
-            <a:r>
-              <a:rPr sz="1500" b="0" i="0">
+            <a:pPr>
+              <a:spcAft>
+                <a:spcPts val="800"/>
+              </a:spcAft>
+            </a:pPr>
+            <a:r>
+              <a:rPr sz="2000" b="0" i="0">
+                <a:solidFill>
+                  <a:srgbClr val="333333"/>
+                </a:solidFill>
+                <a:latin typeface="Calibri"/>
+              </a:rPr>
+              <a:t>–   La apertura de hoy tiene una función distinta a la de las otras sesiones: no introduce un tema, </a:t>
+            </a:r>
+            <a:r>
+              <a:rPr sz="2000" b="1" i="0">
+                <a:solidFill>
+                  <a:srgbClr val="333333"/>
+                </a:solidFill>
+                <a:latin typeface="Calibri"/>
+              </a:rPr>
+              <a:t>baja la ansiedad y fija las reglas</a:t>
+            </a:r>
+            <a:r>
+              <a:rPr sz="2000" b="0" i="0">
                 <a:solidFill>
                   <a:srgbClr val="333333"/>
                 </a:solidFill>
@@ -10907,623 +14169,111 @@
               <a:t>.</a:t>
             </a:r>
           </a:p>
-        </p:txBody>
-      </p:sp>
-      <p:sp>
-        <p:nvSpPr>
-          <p:cNvPr id="14" name="Rounded Rectangle 13"/>
-          <p:cNvSpPr/>
-          <p:nvPr/>
-        </p:nvSpPr>
-        <p:spPr>
-          <a:xfrm>
-            <a:off x="457200" y="2825496"/>
-            <a:ext cx="11277295" cy="566928"/>
-          </a:xfrm>
-          <a:prstGeom prst="roundRect">
-            <a:avLst>
-              <a:gd name="adj" fmla="val 12000"/>
-            </a:avLst>
-          </a:prstGeom>
-          <a:solidFill>
-            <a:srgbClr val="F2F2F2"/>
-          </a:solidFill>
-          <a:ln>
-            <a:noFill/>
-          </a:ln>
-        </p:spPr>
-        <p:style>
-          <a:lnRef idx="1">
-            <a:schemeClr val="accent1"/>
-          </a:lnRef>
-          <a:fillRef idx="3">
-            <a:schemeClr val="accent1"/>
-          </a:fillRef>
-          <a:effectRef idx="2">
-            <a:schemeClr val="accent1"/>
-          </a:effectRef>
-          <a:fontRef idx="minor">
-            <a:schemeClr val="lt1"/>
-          </a:fontRef>
-        </p:style>
-        <p:txBody>
-          <a:bodyPr rtlCol="0" anchor="ctr"/>
-          <a:lstStyle/>
-          <a:p>
-            <a:pPr algn="ctr"/>
-          </a:p>
-        </p:txBody>
-      </p:sp>
-      <p:sp>
-        <p:nvSpPr>
-          <p:cNvPr id="15" name="Rectangle 14"/>
-          <p:cNvSpPr/>
-          <p:nvPr/>
-        </p:nvSpPr>
-        <p:spPr>
-          <a:xfrm>
-            <a:off x="640080" y="2971800"/>
-            <a:ext cx="274320" cy="274320"/>
-          </a:xfrm>
-          <a:prstGeom prst="rect">
-            <a:avLst/>
-          </a:prstGeom>
-          <a:solidFill>
-            <a:srgbClr val="FFFFFF"/>
-          </a:solidFill>
-          <a:ln>
-            <a:solidFill>
-              <a:srgbClr val="333333"/>
-            </a:solidFill>
-          </a:ln>
-        </p:spPr>
-        <p:style>
-          <a:lnRef idx="1">
-            <a:schemeClr val="accent1"/>
-          </a:lnRef>
-          <a:fillRef idx="3">
-            <a:schemeClr val="accent1"/>
-          </a:fillRef>
-          <a:effectRef idx="2">
-            <a:schemeClr val="accent1"/>
-          </a:effectRef>
-          <a:fontRef idx="minor">
-            <a:schemeClr val="lt1"/>
-          </a:fontRef>
-        </p:style>
-        <p:txBody>
-          <a:bodyPr rtlCol="0" anchor="ctr"/>
-          <a:lstStyle/>
-          <a:p>
-            <a:pPr algn="ctr"/>
-          </a:p>
-        </p:txBody>
-      </p:sp>
-      <p:sp>
-        <p:nvSpPr>
-          <p:cNvPr id="16" name="Rectangle 15"/>
-          <p:cNvSpPr/>
-          <p:nvPr/>
-        </p:nvSpPr>
-        <p:spPr>
-          <a:xfrm>
-            <a:off x="640080" y="2971800"/>
-            <a:ext cx="73152" cy="274320"/>
-          </a:xfrm>
-          <a:prstGeom prst="rect">
-            <a:avLst/>
-          </a:prstGeom>
-          <a:solidFill>
-            <a:srgbClr val="269CCB"/>
-          </a:solidFill>
-          <a:ln>
-            <a:noFill/>
-          </a:ln>
-        </p:spPr>
-        <p:style>
-          <a:lnRef idx="1">
-            <a:schemeClr val="accent1"/>
-          </a:lnRef>
-          <a:fillRef idx="3">
-            <a:schemeClr val="accent1"/>
-          </a:fillRef>
-          <a:effectRef idx="2">
-            <a:schemeClr val="accent1"/>
-          </a:effectRef>
-          <a:fontRef idx="minor">
-            <a:schemeClr val="lt1"/>
-          </a:fontRef>
-        </p:style>
-        <p:txBody>
-          <a:bodyPr rtlCol="0" anchor="ctr"/>
-          <a:lstStyle/>
-          <a:p>
-            <a:pPr algn="ctr"/>
-          </a:p>
-        </p:txBody>
-      </p:sp>
-      <p:sp>
-        <p:nvSpPr>
-          <p:cNvPr id="17" name="TextBox 16"/>
-          <p:cNvSpPr txBox="1"/>
-          <p:nvPr/>
-        </p:nvSpPr>
-        <p:spPr>
-          <a:xfrm>
-            <a:off x="1097280" y="2916936"/>
-            <a:ext cx="10362895" cy="402336"/>
-          </a:xfrm>
-          <a:prstGeom prst="rect">
-            <a:avLst/>
-          </a:prstGeom>
-          <a:noFill/>
-        </p:spPr>
-        <p:txBody>
-          <a:bodyPr wrap="square" anchor="ctr"/>
-          <a:lstStyle/>
-          <a:p>
-            <a:r>
-              <a:rPr sz="1500" b="1" i="0">
-                <a:solidFill>
-                  <a:srgbClr val="333333"/>
-                </a:solidFill>
-                <a:latin typeface="Calibri"/>
-              </a:rPr>
-              <a:t>LA SOLUCIÓN Y EL PROTOTIPO EN VIVO</a:t>
-            </a:r>
-            <a:r>
-              <a:rPr sz="1500" b="0" i="0">
-                <a:solidFill>
-                  <a:srgbClr val="333333"/>
-                </a:solidFill>
-                <a:latin typeface="Calibri"/>
-              </a:rPr>
-              <a:t> — Un recorrido de </a:t>
-            </a:r>
-            <a:r>
-              <a:rPr sz="1500" b="1" i="0">
-                <a:solidFill>
-                  <a:srgbClr val="333333"/>
-                </a:solidFill>
-                <a:latin typeface="Calibri"/>
-              </a:rPr>
-              <a:t>tres pasos</a:t>
-            </a:r>
-            <a:r>
-              <a:rPr sz="1500" b="0" i="0">
-                <a:solidFill>
-                  <a:srgbClr val="333333"/>
-                </a:solidFill>
-                <a:latin typeface="Calibri"/>
-              </a:rPr>
-              <a:t> mostrando </a:t>
-            </a:r>
-            <a:r>
-              <a:rPr sz="1500" b="1" i="0">
-                <a:solidFill>
-                  <a:srgbClr val="333333"/>
-                </a:solidFill>
-                <a:latin typeface="Calibri"/>
-              </a:rPr>
-              <a:t>una tarea cumpliéndose</a:t>
-            </a:r>
-            <a:r>
-              <a:rPr sz="1500" b="0" i="0">
-                <a:solidFill>
-                  <a:srgbClr val="333333"/>
-                </a:solidFill>
-                <a:latin typeface="Calibri"/>
-              </a:rPr>
-              <a:t>. Narra una persona y maneja la pantalla otra.</a:t>
-            </a:r>
-          </a:p>
-        </p:txBody>
-      </p:sp>
-      <p:sp>
-        <p:nvSpPr>
-          <p:cNvPr id="18" name="Rounded Rectangle 17"/>
-          <p:cNvSpPr/>
-          <p:nvPr/>
-        </p:nvSpPr>
-        <p:spPr>
-          <a:xfrm>
-            <a:off x="457200" y="3502152"/>
-            <a:ext cx="11277295" cy="566928"/>
-          </a:xfrm>
-          <a:prstGeom prst="roundRect">
-            <a:avLst>
-              <a:gd name="adj" fmla="val 12000"/>
-            </a:avLst>
-          </a:prstGeom>
-          <a:solidFill>
-            <a:srgbClr val="F2F2F2"/>
-          </a:solidFill>
-          <a:ln>
-            <a:noFill/>
-          </a:ln>
-        </p:spPr>
-        <p:style>
-          <a:lnRef idx="1">
-            <a:schemeClr val="accent1"/>
-          </a:lnRef>
-          <a:fillRef idx="3">
-            <a:schemeClr val="accent1"/>
-          </a:fillRef>
-          <a:effectRef idx="2">
-            <a:schemeClr val="accent1"/>
-          </a:effectRef>
-          <a:fontRef idx="minor">
-            <a:schemeClr val="lt1"/>
-          </a:fontRef>
-        </p:style>
-        <p:txBody>
-          <a:bodyPr rtlCol="0" anchor="ctr"/>
-          <a:lstStyle/>
-          <a:p>
-            <a:pPr algn="ctr"/>
-          </a:p>
-        </p:txBody>
-      </p:sp>
-      <p:sp>
-        <p:nvSpPr>
-          <p:cNvPr id="19" name="Rectangle 18"/>
-          <p:cNvSpPr/>
-          <p:nvPr/>
-        </p:nvSpPr>
-        <p:spPr>
-          <a:xfrm>
-            <a:off x="640080" y="3648456"/>
-            <a:ext cx="274320" cy="274320"/>
-          </a:xfrm>
-          <a:prstGeom prst="rect">
-            <a:avLst/>
-          </a:prstGeom>
-          <a:solidFill>
-            <a:srgbClr val="FFFFFF"/>
-          </a:solidFill>
-          <a:ln>
-            <a:solidFill>
-              <a:srgbClr val="333333"/>
-            </a:solidFill>
-          </a:ln>
-        </p:spPr>
-        <p:style>
-          <a:lnRef idx="1">
-            <a:schemeClr val="accent1"/>
-          </a:lnRef>
-          <a:fillRef idx="3">
-            <a:schemeClr val="accent1"/>
-          </a:fillRef>
-          <a:effectRef idx="2">
-            <a:schemeClr val="accent1"/>
-          </a:effectRef>
-          <a:fontRef idx="minor">
-            <a:schemeClr val="lt1"/>
-          </a:fontRef>
-        </p:style>
-        <p:txBody>
-          <a:bodyPr rtlCol="0" anchor="ctr"/>
-          <a:lstStyle/>
-          <a:p>
-            <a:pPr algn="ctr"/>
-          </a:p>
-        </p:txBody>
-      </p:sp>
-      <p:sp>
-        <p:nvSpPr>
-          <p:cNvPr id="20" name="Rectangle 19"/>
-          <p:cNvSpPr/>
-          <p:nvPr/>
-        </p:nvSpPr>
-        <p:spPr>
-          <a:xfrm>
-            <a:off x="640080" y="3648456"/>
-            <a:ext cx="73152" cy="274320"/>
-          </a:xfrm>
-          <a:prstGeom prst="rect">
-            <a:avLst/>
-          </a:prstGeom>
-          <a:solidFill>
-            <a:srgbClr val="269CCB"/>
-          </a:solidFill>
-          <a:ln>
-            <a:noFill/>
-          </a:ln>
-        </p:spPr>
-        <p:style>
-          <a:lnRef idx="1">
-            <a:schemeClr val="accent1"/>
-          </a:lnRef>
-          <a:fillRef idx="3">
-            <a:schemeClr val="accent1"/>
-          </a:fillRef>
-          <a:effectRef idx="2">
-            <a:schemeClr val="accent1"/>
-          </a:effectRef>
-          <a:fontRef idx="minor">
-            <a:schemeClr val="lt1"/>
-          </a:fontRef>
-        </p:style>
-        <p:txBody>
-          <a:bodyPr rtlCol="0" anchor="ctr"/>
-          <a:lstStyle/>
-          <a:p>
-            <a:pPr algn="ctr"/>
-          </a:p>
-        </p:txBody>
-      </p:sp>
-      <p:sp>
-        <p:nvSpPr>
-          <p:cNvPr id="21" name="TextBox 20"/>
-          <p:cNvSpPr txBox="1"/>
-          <p:nvPr/>
-        </p:nvSpPr>
-        <p:spPr>
-          <a:xfrm>
-            <a:off x="1097280" y="3593592"/>
-            <a:ext cx="10362895" cy="402336"/>
-          </a:xfrm>
-          <a:prstGeom prst="rect">
-            <a:avLst/>
-          </a:prstGeom>
-          <a:noFill/>
-        </p:spPr>
-        <p:txBody>
-          <a:bodyPr wrap="square" anchor="ctr"/>
-          <a:lstStyle/>
-          <a:p>
-            <a:r>
-              <a:rPr sz="1500" b="1" i="0">
-                <a:solidFill>
-                  <a:srgbClr val="333333"/>
-                </a:solidFill>
-                <a:latin typeface="Calibri"/>
-              </a:rPr>
-              <a:t>LO QUE FALLÓ Y LO QUE APRENDIMOS</a:t>
-            </a:r>
-            <a:r>
-              <a:rPr sz="1500" b="0" i="0">
-                <a:solidFill>
-                  <a:srgbClr val="333333"/>
-                </a:solidFill>
-                <a:latin typeface="Calibri"/>
-              </a:rPr>
-              <a:t> — Los hallazgos con personas reales, qué se arregló y </a:t>
-            </a:r>
-            <a:r>
-              <a:rPr sz="1500" b="1" i="0">
-                <a:solidFill>
-                  <a:srgbClr val="333333"/>
-                </a:solidFill>
-                <a:latin typeface="Calibri"/>
-              </a:rPr>
-              <a:t>qué se decidió no arreglar</a:t>
-            </a:r>
-            <a:r>
-              <a:rPr sz="1500" b="0" i="0">
-                <a:solidFill>
-                  <a:srgbClr val="333333"/>
-                </a:solidFill>
-                <a:latin typeface="Calibri"/>
-              </a:rPr>
-              <a:t>, con el motivo.</a:t>
-            </a:r>
-          </a:p>
-        </p:txBody>
-      </p:sp>
-      <p:sp>
-        <p:nvSpPr>
-          <p:cNvPr id="22" name="Rounded Rectangle 21"/>
-          <p:cNvSpPr/>
-          <p:nvPr/>
-        </p:nvSpPr>
-        <p:spPr>
-          <a:xfrm>
-            <a:off x="457200" y="4178808"/>
-            <a:ext cx="11277295" cy="566928"/>
-          </a:xfrm>
-          <a:prstGeom prst="roundRect">
-            <a:avLst>
-              <a:gd name="adj" fmla="val 12000"/>
-            </a:avLst>
-          </a:prstGeom>
-          <a:solidFill>
-            <a:srgbClr val="F2F2F2"/>
-          </a:solidFill>
-          <a:ln>
-            <a:noFill/>
-          </a:ln>
-        </p:spPr>
-        <p:style>
-          <a:lnRef idx="1">
-            <a:schemeClr val="accent1"/>
-          </a:lnRef>
-          <a:fillRef idx="3">
-            <a:schemeClr val="accent1"/>
-          </a:fillRef>
-          <a:effectRef idx="2">
-            <a:schemeClr val="accent1"/>
-          </a:effectRef>
-          <a:fontRef idx="minor">
-            <a:schemeClr val="lt1"/>
-          </a:fontRef>
-        </p:style>
-        <p:txBody>
-          <a:bodyPr rtlCol="0" anchor="ctr"/>
-          <a:lstStyle/>
-          <a:p>
-            <a:pPr algn="ctr"/>
-          </a:p>
-        </p:txBody>
-      </p:sp>
-      <p:sp>
-        <p:nvSpPr>
-          <p:cNvPr id="23" name="Rectangle 22"/>
-          <p:cNvSpPr/>
-          <p:nvPr/>
-        </p:nvSpPr>
-        <p:spPr>
-          <a:xfrm>
-            <a:off x="640080" y="4325112"/>
-            <a:ext cx="274320" cy="274320"/>
-          </a:xfrm>
-          <a:prstGeom prst="rect">
-            <a:avLst/>
-          </a:prstGeom>
-          <a:solidFill>
-            <a:srgbClr val="FFFFFF"/>
-          </a:solidFill>
-          <a:ln>
-            <a:solidFill>
-              <a:srgbClr val="333333"/>
-            </a:solidFill>
-          </a:ln>
-        </p:spPr>
-        <p:style>
-          <a:lnRef idx="1">
-            <a:schemeClr val="accent1"/>
-          </a:lnRef>
-          <a:fillRef idx="3">
-            <a:schemeClr val="accent1"/>
-          </a:fillRef>
-          <a:effectRef idx="2">
-            <a:schemeClr val="accent1"/>
-          </a:effectRef>
-          <a:fontRef idx="minor">
-            <a:schemeClr val="lt1"/>
-          </a:fontRef>
-        </p:style>
-        <p:txBody>
-          <a:bodyPr rtlCol="0" anchor="ctr"/>
-          <a:lstStyle/>
-          <a:p>
-            <a:pPr algn="ctr"/>
-          </a:p>
-        </p:txBody>
-      </p:sp>
-      <p:sp>
-        <p:nvSpPr>
-          <p:cNvPr id="24" name="Rectangle 23"/>
-          <p:cNvSpPr/>
-          <p:nvPr/>
-        </p:nvSpPr>
-        <p:spPr>
-          <a:xfrm>
-            <a:off x="640080" y="4325112"/>
-            <a:ext cx="73152" cy="274320"/>
-          </a:xfrm>
-          <a:prstGeom prst="rect">
-            <a:avLst/>
-          </a:prstGeom>
-          <a:solidFill>
-            <a:srgbClr val="269CCB"/>
-          </a:solidFill>
-          <a:ln>
-            <a:noFill/>
-          </a:ln>
-        </p:spPr>
-        <p:style>
-          <a:lnRef idx="1">
-            <a:schemeClr val="accent1"/>
-          </a:lnRef>
-          <a:fillRef idx="3">
-            <a:schemeClr val="accent1"/>
-          </a:fillRef>
-          <a:effectRef idx="2">
-            <a:schemeClr val="accent1"/>
-          </a:effectRef>
-          <a:fontRef idx="minor">
-            <a:schemeClr val="lt1"/>
-          </a:fontRef>
-        </p:style>
-        <p:txBody>
-          <a:bodyPr rtlCol="0" anchor="ctr"/>
-          <a:lstStyle/>
-          <a:p>
-            <a:pPr algn="ctr"/>
-          </a:p>
-        </p:txBody>
-      </p:sp>
-      <p:sp>
-        <p:nvSpPr>
-          <p:cNvPr id="25" name="TextBox 24"/>
-          <p:cNvSpPr txBox="1"/>
-          <p:nvPr/>
-        </p:nvSpPr>
-        <p:spPr>
-          <a:xfrm>
-            <a:off x="1097280" y="4270248"/>
-            <a:ext cx="10362895" cy="402336"/>
-          </a:xfrm>
-          <a:prstGeom prst="rect">
-            <a:avLst/>
-          </a:prstGeom>
-          <a:noFill/>
-        </p:spPr>
-        <p:txBody>
-          <a:bodyPr wrap="square" anchor="ctr"/>
-          <a:lstStyle/>
-          <a:p>
-            <a:r>
-              <a:rPr sz="1500" b="1" i="0">
-                <a:solidFill>
-                  <a:srgbClr val="333333"/>
-                </a:solidFill>
-                <a:latin typeface="Calibri"/>
-              </a:rPr>
-              <a:t>IMPACTO Y SIGUIENTE PASO</a:t>
-            </a:r>
-            <a:r>
-              <a:rPr sz="1500" b="0" i="0">
-                <a:solidFill>
-                  <a:srgbClr val="333333"/>
-                </a:solidFill>
-                <a:latin typeface="Calibri"/>
-              </a:rPr>
-              <a:t> — El impacto positivo </a:t>
-            </a:r>
-            <a:r>
-              <a:rPr sz="1500" b="1" i="0">
-                <a:solidFill>
-                  <a:srgbClr val="333333"/>
-                </a:solidFill>
-                <a:latin typeface="Calibri"/>
-              </a:rPr>
-              <a:t>con su número</a:t>
-            </a:r>
-            <a:r>
-              <a:rPr sz="1500" b="0" i="0">
-                <a:solidFill>
-                  <a:srgbClr val="333333"/>
-                </a:solidFill>
-                <a:latin typeface="Calibri"/>
-              </a:rPr>
-              <a:t> y el negativo </a:t>
-            </a:r>
-            <a:r>
-              <a:rPr sz="1500" b="1" i="0">
-                <a:solidFill>
-                  <a:srgbClr val="333333"/>
-                </a:solidFill>
-                <a:latin typeface="Calibri"/>
-              </a:rPr>
-              <a:t>con su mitigación</a:t>
-            </a:r>
-            <a:r>
-              <a:rPr sz="1500" b="0" i="0">
-                <a:solidFill>
-                  <a:srgbClr val="333333"/>
-                </a:solidFill>
-                <a:latin typeface="Calibri"/>
-              </a:rPr>
-              <a:t>. Qué haría quien continúe el proyecto.</a:t>
-            </a:r>
-          </a:p>
-        </p:txBody>
-      </p:sp>
-      <p:sp>
-        <p:nvSpPr>
-          <p:cNvPr id="26" name="TextBox 25"/>
+          <a:p>
+            <a:pPr>
+              <a:spcAft>
+                <a:spcPts val="800"/>
+              </a:spcAft>
+            </a:pPr>
+            <a:r>
+              <a:rPr sz="2000" b="0" i="0">
+                <a:solidFill>
+                  <a:srgbClr val="333333"/>
+                </a:solidFill>
+                <a:latin typeface="Calibri"/>
+              </a:rPr>
+              <a:t>–   La pregunta de entrada —«¿cuál fue la decisión que más les costó tomar?»— se responde con una línea por equipo en el muro y sirve para dos cosas: los pone a hablar antes de exponer, y les recuerda que </a:t>
+            </a:r>
+            <a:r>
+              <a:rPr sz="2000" b="1" i="0">
+                <a:solidFill>
+                  <a:srgbClr val="333333"/>
+                </a:solidFill>
+                <a:latin typeface="Calibri"/>
+              </a:rPr>
+              <a:t>lo que se califica es la decisión, no el resultado</a:t>
+            </a:r>
+            <a:r>
+              <a:rPr sz="2000" b="0" i="0">
+                <a:solidFill>
+                  <a:srgbClr val="333333"/>
+                </a:solidFill>
+                <a:latin typeface="Calibri"/>
+              </a:rPr>
+              <a:t>.</a:t>
+            </a:r>
+          </a:p>
+          <a:p>
+            <a:pPr>
+              <a:spcAft>
+                <a:spcPts val="800"/>
+              </a:spcAft>
+            </a:pPr>
+            <a:r>
+              <a:rPr sz="2000" b="0" i="0">
+                <a:solidFill>
+                  <a:srgbClr val="333333"/>
+                </a:solidFill>
+                <a:latin typeface="Calibri"/>
+              </a:rPr>
+              <a:t>–   Muchos equipos llegan creyendo que van a ser juzgados por si su prototipo es bonito. </a:t>
+            </a:r>
+            <a:r>
+              <a:rPr sz="2000" b="1" i="0">
+                <a:solidFill>
+                  <a:srgbClr val="333333"/>
+                </a:solidFill>
+                <a:latin typeface="Calibri"/>
+              </a:rPr>
+              <a:t>El sorteo del orden se hace en vivo y en pantalla.</a:t>
+            </a:r>
+            <a:r>
+              <a:rPr sz="2000" b="0" i="0">
+                <a:solidFill>
+                  <a:srgbClr val="333333"/>
+                </a:solidFill>
+                <a:latin typeface="Calibri"/>
+              </a:rPr>
+              <a:t> No es teatro: si el orden se anuncia antes</a:t>
+            </a:r>
+          </a:p>
+          <a:p>
+            <a:pPr>
+              <a:spcAft>
+                <a:spcPts val="800"/>
+              </a:spcAft>
+            </a:pPr>
+            <a:r>
+              <a:rPr sz="2000" b="0" i="0">
+                <a:solidFill>
+                  <a:srgbClr val="333333"/>
+                </a:solidFill>
+                <a:latin typeface="Calibri"/>
+              </a:rPr>
+              <a:t>–   Los últimos equipos siguen preparando durante las primeras exposiciones y no escuchan.</a:t>
+            </a:r>
+          </a:p>
+          <a:p>
+            <a:pPr>
+              <a:spcAft>
+                <a:spcPts val="800"/>
+              </a:spcAft>
+            </a:pPr>
+            <a:r>
+              <a:rPr sz="2000" b="0" i="0">
+                <a:solidFill>
+                  <a:srgbClr val="333333"/>
+                </a:solidFill>
+                <a:latin typeface="Calibri"/>
+              </a:rPr>
+              <a:t>–   Sorteado al empezar, los cinco equipos tienen que estar listos desde el primer minuto y todos escuchan a todos.</a:t>
+            </a:r>
+          </a:p>
+        </p:txBody>
+      </p:sp>
+      <p:sp>
+        <p:nvSpPr>
+          <p:cNvPr id="6" name="TextBox 5"/>
           <p:cNvSpPr txBox="1"/>
           <p:nvPr/>
         </p:nvSpPr>

--- a/Introduccion a la Ingenieria/Clases/Clase 15 - Exposicion final de proyectos/Presentacion.pptx
+++ b/Introduccion a la Ingenieria/Clases/Clase 15 - Exposicion final de proyectos/Presentacion.pptx
@@ -3664,7 +3664,25 @@
                 </a:solidFill>
                 <a:latin typeface="Calibri"/>
               </a:rPr>
-              <a:t>–   Dígalo así.</a:t>
+              <a:t>–   Antes de la primera exposición, </a:t>
+            </a:r>
+            <a:r>
+              <a:rPr sz="2000" b="1" i="0">
+                <a:solidFill>
+                  <a:srgbClr val="333333"/>
+                </a:solidFill>
+                <a:latin typeface="Calibri"/>
+              </a:rPr>
+              <a:t>verifique en voz alta el plan B de los cinco equipos</a:t>
+            </a:r>
+            <a:r>
+              <a:rPr sz="2000" b="0" i="0">
+                <a:solidFill>
+                  <a:srgbClr val="333333"/>
+                </a:solidFill>
+                <a:latin typeface="Calibri"/>
+              </a:rPr>
+              <a:t>: PDF descargado y capturas en la carpeta.</a:t>
             </a:r>
           </a:p>
           <a:p>
@@ -3680,25 +3698,7 @@
                 </a:solidFill>
                 <a:latin typeface="Calibri"/>
               </a:rPr>
-              <a:t>–   Antes de la primera exposición, </a:t>
-            </a:r>
-            <a:r>
-              <a:rPr sz="2000" b="1" i="0">
-                <a:solidFill>
-                  <a:srgbClr val="333333"/>
-                </a:solidFill>
-                <a:latin typeface="Calibri"/>
-              </a:rPr>
-              <a:t>verifique en voz alta el plan B de los cinco equipos</a:t>
-            </a:r>
-            <a:r>
-              <a:rPr sz="2000" b="0" i="0">
-                <a:solidFill>
-                  <a:srgbClr val="333333"/>
-                </a:solidFill>
-                <a:latin typeface="Calibri"/>
-              </a:rPr>
-              <a:t>: PDF descargado y capturas en la carpeta.</a:t>
+              <a:t>–   Un equipo que no lo tenga y cuyo prototipo no cargue pierde el tramo de 25 puntos por algo que se prevenía en cinco minutos.</a:t>
             </a:r>
           </a:p>
           <a:p>
@@ -3714,15 +3714,17 @@
                 </a:solidFill>
                 <a:latin typeface="Calibri"/>
               </a:rPr>
-              <a:t>–   Toma dos minutos y cada semestre salva al menos un equipo.</a:t>
-            </a:r>
-          </a:p>
-          <a:p>
-            <a:pPr>
-              <a:spcAft>
-                <a:spcPts val="800"/>
-              </a:spcAft>
-            </a:pPr>
+              <a:t>–   Sobre el rol de quien no expone, hay que ser explícito porque de lo contrario nadie escucha: </a:t>
+            </a:r>
+            <a:r>
+              <a:rPr sz="2000" b="1" i="0">
+                <a:solidFill>
+                  <a:srgbClr val="333333"/>
+                </a:solidFill>
+                <a:latin typeface="Calibri"/>
+              </a:rPr>
+              <a:t>la ficha de valoración entre pares se califica</a:t>
+            </a:r>
             <a:r>
               <a:rPr sz="2000" b="0" i="0">
                 <a:solidFill>
@@ -3730,57 +3732,7 @@
                 </a:solidFill>
                 <a:latin typeface="Calibri"/>
               </a:rPr>
-              <a:t>–   Un equipo que no lo tenga y cuyo prototipo no cargue pierde el tramo de 25 puntos por algo que se prevenía en cinco minutos.</a:t>
-            </a:r>
-          </a:p>
-          <a:p>
-            <a:pPr>
-              <a:spcAft>
-                <a:spcPts val="800"/>
-              </a:spcAft>
-            </a:pPr>
-            <a:r>
-              <a:rPr sz="2000" b="0" i="0">
-                <a:solidFill>
-                  <a:srgbClr val="333333"/>
-                </a:solidFill>
-                <a:latin typeface="Calibri"/>
-              </a:rPr>
-              <a:t>–   Sobre el rol de quien no expone, hay que ser explícito porque de lo contrario nadie escucha: </a:t>
-            </a:r>
-            <a:r>
-              <a:rPr sz="2000" b="1" i="0">
-                <a:solidFill>
-                  <a:srgbClr val="333333"/>
-                </a:solidFill>
-                <a:latin typeface="Calibri"/>
-              </a:rPr>
-              <a:t>la ficha de valoración entre pares se califica</a:t>
-            </a:r>
-            <a:r>
-              <a:rPr sz="2000" b="0" i="0">
-                <a:solidFill>
-                  <a:srgbClr val="333333"/>
-                </a:solidFill>
-                <a:latin typeface="Calibri"/>
-              </a:rPr>
               <a:t>, dentro de la nota de exposiciones del corte.</a:t>
-            </a:r>
-          </a:p>
-          <a:p>
-            <a:pPr>
-              <a:spcAft>
-                <a:spcPts val="800"/>
-              </a:spcAft>
-            </a:pPr>
-            <a:r>
-              <a:rPr sz="2000" b="0" i="0">
-                <a:solidFill>
-                  <a:srgbClr val="333333"/>
-                </a:solidFill>
-                <a:latin typeface="Calibri"/>
-              </a:rPr>
-              <a:t>–   Una fila por equipo con lo más fuerte, lo que no quedó claro y una pregunta.</a:t>
             </a:r>
           </a:p>
           <a:p>
@@ -4100,7 +4052,25 @@
                 </a:solidFill>
                 <a:latin typeface="Calibri"/>
               </a:rPr>
-              <a:t>–   Tenga la tabla de cinco tramos por equipo abierta y anote el puntaje al terminar cada tramo, más una frase de por qué.</a:t>
+              <a:t>–   El segundo descuento es el que más enseña: destapa al equipo donde uno solo hizo el trabajo y los demás leyeron un guion. </a:t>
+            </a:r>
+            <a:r>
+              <a:rPr sz="2000" b="1" i="0">
+                <a:solidFill>
+                  <a:srgbClr val="333333"/>
+                </a:solidFill>
+                <a:latin typeface="Calibri"/>
+              </a:rPr>
+              <a:t>Sobre el corte a los nueve minutos:</a:t>
+            </a:r>
+            <a:r>
+              <a:rPr sz="2000" b="0" i="0">
+                <a:solidFill>
+                  <a:srgbClr val="333333"/>
+                </a:solidFill>
+                <a:latin typeface="Calibri"/>
+              </a:rPr>
+              <a:t> avise en el chat a los 8, y corte a los 9 aunque quede una frase a medias.</a:t>
             </a:r>
           </a:p>
           <a:p>
@@ -4116,57 +4086,7 @@
                 </a:solidFill>
                 <a:latin typeface="Calibri"/>
               </a:rPr>
-              <a:t>–   Esa frase es lo que después se devuelve como retroalimentación. **Los dos descuentos hay que aplicarlos</a:t>
-            </a:r>
-          </a:p>
-          <a:p>
-            <a:pPr>
-              <a:spcAft>
-                <a:spcPts val="800"/>
-              </a:spcAft>
-            </a:pPr>
-            <a:r>
-              <a:rPr sz="2000" b="0" i="0">
-                <a:solidFill>
-                  <a:srgbClr val="333333"/>
-                </a:solidFill>
-                <a:latin typeface="Calibri"/>
-              </a:rPr>
-              <a:t>–   Y anunciarlos antes.** Hasta 10 puntos si no todos los integrantes hablan —porque la exposición en equipo es lo que se está evaluando— y hasta 10 si nadie sabe responder una pregunta de su propio tramo.</a:t>
-            </a:r>
-          </a:p>
-          <a:p>
-            <a:pPr>
-              <a:spcAft>
-                <a:spcPts val="800"/>
-              </a:spcAft>
-            </a:pPr>
-            <a:r>
-              <a:rPr sz="2000" b="0" i="0">
-                <a:solidFill>
-                  <a:srgbClr val="333333"/>
-                </a:solidFill>
-                <a:latin typeface="Calibri"/>
-              </a:rPr>
-              <a:t>–   El segundo descuento es el que más enseña: destapa al equipo donde uno solo hizo el trabajo y los demás leyeron un guion. </a:t>
-            </a:r>
-            <a:r>
-              <a:rPr sz="2000" b="1" i="0">
-                <a:solidFill>
-                  <a:srgbClr val="333333"/>
-                </a:solidFill>
-                <a:latin typeface="Calibri"/>
-              </a:rPr>
-              <a:t>Sobre el corte a los nueve minutos:</a:t>
-            </a:r>
-            <a:r>
-              <a:rPr sz="2000" b="0" i="0">
-                <a:solidFill>
-                  <a:srgbClr val="333333"/>
-                </a:solidFill>
-                <a:latin typeface="Calibri"/>
-              </a:rPr>
-              <a:t> avise en el chat a los 8, y corte a los 9 aunque quede una frase a medias.</a:t>
+              <a:t>–   Es incómodo la primera vez y después el curso lo acepta como parte del juego.</a:t>
             </a:r>
           </a:p>
         </p:txBody>
@@ -4386,22 +4306,6 @@
                 </a:solidFill>
                 <a:latin typeface="Calibri"/>
               </a:rPr>
-              <a:t>–   Es incómodo la primera vez y después el curso lo acepta como parte del juego.</a:t>
-            </a:r>
-          </a:p>
-          <a:p>
-            <a:pPr>
-              <a:spcAft>
-                <a:spcPts val="800"/>
-              </a:spcAft>
-            </a:pPr>
-            <a:r>
-              <a:rPr sz="2000" b="0" i="0">
-                <a:solidFill>
-                  <a:srgbClr val="333333"/>
-                </a:solidFill>
-                <a:latin typeface="Calibri"/>
-              </a:rPr>
               <a:t>–   El argumento, si alguien reclama, es aritmético y no disciplinario: cinco equipos por 12 minutos son 60</a:t>
             </a:r>
           </a:p>
@@ -4756,7 +4660,7 @@
                 </a:solidFill>
                 <a:latin typeface="Calibri"/>
               </a:rPr>
-              <a:t>–   Por eso la regla es </a:t>
+              <a:t>–   Enseñe explícitamente que </a:t>
             </a:r>
             <a:r>
               <a:rPr sz="2000" b="1" i="0">
@@ -4765,7 +4669,7 @@
                 </a:solidFill>
                 <a:latin typeface="Calibri"/>
               </a:rPr>
-              <a:t>responde quien tiene el tramo</a:t>
+              <a:t>«no lo medimos» es una respuesta válida y buena</a:t>
             </a:r>
             <a:r>
               <a:rPr sz="2000" b="0" i="0">
@@ -4774,7 +4678,7 @@
                 </a:solidFill>
                 <a:latin typeface="Calibri"/>
               </a:rPr>
-              <a:t>, y hay que hacerla cumplir con firmeza —si el mismo integrante responde todo, redirija: «esa es del tramo 4, ¿quién lo presentó?»—.</a:t>
+              <a:t>.</a:t>
             </a:r>
           </a:p>
           <a:p>
@@ -4790,25 +4694,7 @@
                 </a:solidFill>
                 <a:latin typeface="Calibri"/>
               </a:rPr>
-              <a:t>–   Enseñe explícitamente que </a:t>
-            </a:r>
-            <a:r>
-              <a:rPr sz="2000" b="1" i="0">
-                <a:solidFill>
-                  <a:srgbClr val="333333"/>
-                </a:solidFill>
-                <a:latin typeface="Calibri"/>
-              </a:rPr>
-              <a:t>«no lo medimos» es una respuesta válida y buena</a:t>
-            </a:r>
-            <a:r>
-              <a:rPr sz="2000" b="0" i="0">
-                <a:solidFill>
-                  <a:srgbClr val="333333"/>
-                </a:solidFill>
-                <a:latin typeface="Calibri"/>
-              </a:rPr>
-              <a:t>.</a:t>
+              <a:t>–   Un estudiante de primer semestre cree que no saber es un fracaso, y por eso inventa cifras.</a:t>
             </a:r>
           </a:p>
           <a:p>
@@ -4824,7 +4710,25 @@
                 </a:solidFill>
                 <a:latin typeface="Calibri"/>
               </a:rPr>
-              <a:t>–   Un estudiante de primer semestre cree que no saber es un fracaso, y por eso inventa cifras.</a:t>
+              <a:t>–   Es la misma lección de la sesión 5 sobre datos con fuente y de la 11 sobre la IA que </a:t>
+            </a:r>
+            <a:r>
+              <a:rPr sz="2000" b="1" i="0">
+                <a:solidFill>
+                  <a:srgbClr val="333333"/>
+                </a:solidFill>
+                <a:latin typeface="Calibri"/>
+              </a:rPr>
+              <a:t>inventa con seguridad</a:t>
+            </a:r>
+            <a:r>
+              <a:rPr sz="2000" b="0" i="0">
+                <a:solidFill>
+                  <a:srgbClr val="333333"/>
+                </a:solidFill>
+                <a:latin typeface="Calibri"/>
+              </a:rPr>
+              <a:t>.</a:t>
             </a:r>
           </a:p>
           <a:p>
@@ -4840,7 +4744,7 @@
                 </a:solidFill>
                 <a:latin typeface="Calibri"/>
               </a:rPr>
-              <a:t>–   Es la misma lección de la sesión 5 sobre datos con fuente y de la 11 sobre la IA que </a:t>
+              <a:t>–   «No lo hicimos porque no nos alcanzó el tiempo» suena a incumplimiento; </a:t>
             </a:r>
             <a:r>
               <a:rPr sz="2000" b="1" i="0">
@@ -4849,7 +4753,7 @@
                 </a:solidFill>
                 <a:latin typeface="Calibri"/>
               </a:rPr>
-              <a:t>inventa con seguridad</a:t>
+              <a:t>«decidimos no hacerlo y sacrificamos esto a cambio»</a:t>
             </a:r>
             <a:r>
               <a:rPr sz="2000" b="0" i="0">
@@ -4858,7 +4762,7 @@
                 </a:solidFill>
                 <a:latin typeface="Calibri"/>
               </a:rPr>
-              <a:t>.</a:t>
+              <a:t> es exactamente el lenguaje del alcance mínimo de la sesión 8.</a:t>
             </a:r>
           </a:p>
           <a:p>
@@ -4874,41 +4778,7 @@
                 </a:solidFill>
                 <a:latin typeface="Calibri"/>
               </a:rPr>
-              <a:t>–   La segunda enseñanza es la diferencia entre excusa y decisión.</a:t>
-            </a:r>
-          </a:p>
-          <a:p>
-            <a:pPr>
-              <a:spcAft>
-                <a:spcPts val="800"/>
-              </a:spcAft>
-            </a:pPr>
-            <a:r>
-              <a:rPr sz="2000" b="0" i="0">
-                <a:solidFill>
-                  <a:srgbClr val="333333"/>
-                </a:solidFill>
-                <a:latin typeface="Calibri"/>
-              </a:rPr>
-              <a:t>–   «No lo hicimos porque no nos alcanzó el tiempo» suena a incumplimiento; </a:t>
-            </a:r>
-            <a:r>
-              <a:rPr sz="2000" b="1" i="0">
-                <a:solidFill>
-                  <a:srgbClr val="333333"/>
-                </a:solidFill>
-                <a:latin typeface="Calibri"/>
-              </a:rPr>
-              <a:t>«decidimos no hacerlo y sacrificamos esto a cambio»</a:t>
-            </a:r>
-            <a:r>
-              <a:rPr sz="2000" b="0" i="0">
-                <a:solidFill>
-                  <a:srgbClr val="333333"/>
-                </a:solidFill>
-                <a:latin typeface="Calibri"/>
-              </a:rPr>
-              <a:t> es exactamente el lenguaje del alcance mínimo de la sesión 8.</a:t>
+              <a:t>–   Los equipos ya tienen la decisión escrita desde entonces: solo hay que recordarles que la usen. **Reserve una pregunta suya para cada equipo</a:t>
             </a:r>
           </a:p>
         </p:txBody>
@@ -5128,22 +4998,6 @@
                 </a:solidFill>
                 <a:latin typeface="Calibri"/>
               </a:rPr>
-              <a:t>–   Los equipos ya tienen la decisión escrita desde entonces: solo hay que recordarles que la usen. **Reserve una pregunta suya para cada equipo</a:t>
-            </a:r>
-          </a:p>
-          <a:p>
-            <a:pPr>
-              <a:spcAft>
-                <a:spcPts val="800"/>
-              </a:spcAft>
-            </a:pPr>
-            <a:r>
-              <a:rPr sz="2000" b="0" i="0">
-                <a:solidFill>
-                  <a:srgbClr val="333333"/>
-                </a:solidFill>
-                <a:latin typeface="Calibri"/>
-              </a:rPr>
               <a:t>–   Y hágala útil.** Las tres que más rinden: «¿con quién lo probaron y qué hizo esa persona?» —destapa si hubo prueba real—</a:t>
             </a:r>
           </a:p>
@@ -5515,40 +5369,6 @@
               <a:t>–   Una pregunta repetida es un diagnóstico gratis.</a:t>
             </a:r>
           </a:p>
-          <a:p>
-            <a:pPr>
-              <a:spcAft>
-                <a:spcPts val="800"/>
-              </a:spcAft>
-            </a:pPr>
-            <a:r>
-              <a:rPr sz="2000" b="0" i="0">
-                <a:solidFill>
-                  <a:srgbClr val="333333"/>
-                </a:solidFill>
-                <a:latin typeface="Calibri"/>
-              </a:rPr>
-              <a:t>–   Devuelva </a:t>
-            </a:r>
-            <a:r>
-              <a:rPr sz="2000" b="1" i="0">
-                <a:solidFill>
-                  <a:srgbClr val="333333"/>
-                </a:solidFill>
-                <a:latin typeface="Calibri"/>
-              </a:rPr>
-              <a:t>una observación por equipo, dicha en público y en una frase</a:t>
-            </a:r>
-            <a:r>
-              <a:rPr sz="2000" b="0" i="0">
-                <a:solidFill>
-                  <a:srgbClr val="333333"/>
-                </a:solidFill>
-                <a:latin typeface="Calibri"/>
-              </a:rPr>
-              <a:t> —lo que más sumó y la única cosa que cambiaría—.</a:t>
-            </a:r>
-          </a:p>
         </p:txBody>
       </p:sp>
       <p:sp>
@@ -5766,7 +5586,7 @@
                 </a:solidFill>
                 <a:latin typeface="Calibri"/>
               </a:rPr>
-              <a:t>–   La retroalimentación detallada va después, por escrito, con las frases que anotó mientras calificaba.</a:t>
+              <a:t>–   En público, una sola cosa: es la misma regla de la Clase 12 sobre retroalimentación útil.</a:t>
             </a:r>
           </a:p>
           <a:p>
@@ -5782,7 +5602,7 @@
                 </a:solidFill>
                 <a:latin typeface="Calibri"/>
               </a:rPr>
-              <a:t>–   En público, una sola cosa: es la misma regla de la Clase 12 sobre retroalimentación útil.</a:t>
+              <a:t>–   Y cierre nombrando lo que efectivamente pasó, sin discurso: hace quince sesiones estos equipos tenían una ocurrencia</a:t>
             </a:r>
           </a:p>
           <a:p>
@@ -5798,15 +5618,17 @@
                 </a:solidFill>
                 <a:latin typeface="Calibri"/>
               </a:rPr>
-              <a:t>–   Y cierre nombrando lo que efectivamente pasó, sin discurso: hace quince sesiones estos equipos tenían una ocurrencia</a:t>
-            </a:r>
-          </a:p>
-          <a:p>
-            <a:pPr>
-              <a:spcAft>
-                <a:spcPts val="800"/>
-              </a:spcAft>
-            </a:pPr>
+              <a:t>–   Hoy sustentaron un problema con evidencia, una decisión con criterios, un prototipo probado con personas reales y un impacto con sus costos. </a:t>
+            </a:r>
+            <a:r>
+              <a:rPr sz="2000" b="1" i="0">
+                <a:solidFill>
+                  <a:srgbClr val="333333"/>
+                </a:solidFill>
+                <a:latin typeface="Calibri"/>
+              </a:rPr>
+              <a:t>Eso es el ciclo completo de un proyecto de ingeniería</a:t>
+            </a:r>
             <a:r>
               <a:rPr sz="2000" b="0" i="0">
                 <a:solidFill>
@@ -5814,41 +5636,7 @@
                 </a:solidFill>
                 <a:latin typeface="Calibri"/>
               </a:rPr>
-              <a:t>–   Hoy sustentaron un problema con evidencia, una decisión con criterios, un prototipo probado con personas reales y un impacto con sus costos. </a:t>
-            </a:r>
-            <a:r>
-              <a:rPr sz="2000" b="1" i="0">
-                <a:solidFill>
-                  <a:srgbClr val="333333"/>
-                </a:solidFill>
-                <a:latin typeface="Calibri"/>
-              </a:rPr>
-              <a:t>Eso es el ciclo completo de un proyecto de ingeniería</a:t>
-            </a:r>
-            <a:r>
-              <a:rPr sz="2000" b="0" i="0">
-                <a:solidFill>
-                  <a:srgbClr val="333333"/>
-                </a:solidFill>
-                <a:latin typeface="Calibri"/>
-              </a:rPr>
               <a:t>, y lo hicieron en primer semestre.</a:t>
-            </a:r>
-          </a:p>
-          <a:p>
-            <a:pPr>
-              <a:spcAft>
-                <a:spcPts val="800"/>
-              </a:spcAft>
-            </a:pPr>
-            <a:r>
-              <a:rPr sz="2000" b="0" i="0">
-                <a:solidFill>
-                  <a:srgbClr val="333333"/>
-                </a:solidFill>
-                <a:latin typeface="Calibri"/>
-              </a:rPr>
-              <a:t>–   Vale decirlo una vez, en serio y corto.</a:t>
             </a:r>
           </a:p>
         </p:txBody>
@@ -14253,22 +14041,6 @@
               <a:t>–   Los últimos equipos siguen preparando durante las primeras exposiciones y no escuchan.</a:t>
             </a:r>
           </a:p>
-          <a:p>
-            <a:pPr>
-              <a:spcAft>
-                <a:spcPts val="800"/>
-              </a:spcAft>
-            </a:pPr>
-            <a:r>
-              <a:rPr sz="2000" b="0" i="0">
-                <a:solidFill>
-                  <a:srgbClr val="333333"/>
-                </a:solidFill>
-                <a:latin typeface="Calibri"/>
-              </a:rPr>
-              <a:t>–   Sorteado al empezar, los cinco equipos tienen que estar listos desde el primer minuto y todos escuchan a todos.</a:t>
-            </a:r>
-          </a:p>
         </p:txBody>
       </p:sp>
       <p:sp>

--- a/Introduccion a la Ingenieria/Clases/Clase 15 - Exposicion final de proyectos/Presentacion.pptx
+++ b/Introduccion a la Ingenieria/Clases/Clase 15 - Exposicion final de proyectos/Presentacion.pptx
@@ -25,6 +25,8 @@
     <p:sldId id="273" r:id="rId24"/>
     <p:sldId id="274" r:id="rId25"/>
     <p:sldId id="275" r:id="rId26"/>
+    <p:sldId id="276" r:id="rId27"/>
+    <p:sldId id="277" r:id="rId28"/>
   </p:sldIdLst>
   <p:sldSz cx="12191695" cy="6858000" type="screen4x3"/>
   <p:notesSz cx="6858000" cy="9144000"/>
@@ -5711,7 +5713,7 @@
         <p:spPr>
           <a:xfrm>
             <a:off x="0" y="0"/>
-            <a:ext cx="12191695" cy="1170432"/>
+            <a:ext cx="12191695" cy="960120"/>
           </a:xfrm>
           <a:prstGeom prst="rect">
             <a:avLst/>
@@ -5753,7 +5755,7 @@
         </p:nvSpPr>
         <p:spPr>
           <a:xfrm>
-            <a:off x="0" y="1170432"/>
+            <a:off x="0" y="960120"/>
             <a:ext cx="12191695" cy="41148"/>
           </a:xfrm>
           <a:prstGeom prst="rect">
@@ -5797,7 +5799,7 @@
         <p:spPr>
           <a:xfrm>
             <a:off x="457200" y="164592"/>
-            <a:ext cx="11277295" cy="384048"/>
+            <a:ext cx="11277295" cy="502920"/>
           </a:xfrm>
           <a:prstGeom prst="rect">
             <a:avLst/>
@@ -5817,55 +5819,21 @@
                 </a:solidFill>
                 <a:latin typeface="Calibri"/>
               </a:rPr>
-              <a:t>Taller de hoy: Exposición final del proyecto</a:t>
-            </a:r>
-          </a:p>
-        </p:txBody>
-      </p:sp>
-      <p:sp>
-        <p:nvSpPr>
-          <p:cNvPr id="5" name="TextBox 4"/>
-          <p:cNvSpPr txBox="1"/>
-          <p:nvPr/>
-        </p:nvSpPr>
-        <p:spPr>
-          <a:xfrm>
-            <a:off x="457200" y="566928"/>
-            <a:ext cx="11277295" cy="411480"/>
-          </a:xfrm>
-          <a:prstGeom prst="rect">
-            <a:avLst/>
-          </a:prstGeom>
-          <a:noFill/>
-        </p:spPr>
-        <p:txBody>
-          <a:bodyPr wrap="square">
-            <a:spAutoFit/>
-          </a:bodyPr>
-          <a:lstStyle/>
-          <a:p>
-            <a:r>
-              <a:rPr sz="1400" b="0" i="0">
-                <a:solidFill>
-                  <a:srgbClr val="B8D8EE"/>
-                </a:solidFill>
-                <a:latin typeface="Calibri"/>
-              </a:rPr>
-              <a:t>60 min en equipos · 9 min de exposición + 3 de preguntas, por equipo · exposición de 9 min + ficha de valoración de los otros equipos</a:t>
-            </a:r>
-          </a:p>
-        </p:txBody>
-      </p:sp>
-      <p:sp>
-        <p:nvSpPr>
-          <p:cNvPr id="6" name="Rounded Rectangle 5"/>
+              <a:t>Plantilla del entregable: los 5 bloques</a:t>
+            </a:r>
+          </a:p>
+        </p:txBody>
+      </p:sp>
+      <p:sp>
+        <p:nvSpPr>
+          <p:cNvPr id="5" name="Rounded Rectangle 4"/>
           <p:cNvSpPr/>
           <p:nvPr/>
         </p:nvSpPr>
         <p:spPr>
           <a:xfrm>
-            <a:off x="457200" y="1472184"/>
-            <a:ext cx="11277295" cy="566928"/>
+            <a:off x="457200" y="1261872"/>
+            <a:ext cx="11277295" cy="5093208"/>
           </a:xfrm>
           <a:prstGeom prst="roundRect">
             <a:avLst>
@@ -5873,7 +5841,7 @@
             </a:avLst>
           </a:prstGeom>
           <a:solidFill>
-            <a:srgbClr val="F2F2F2"/>
+            <a:srgbClr val="1E2A38"/>
           </a:solidFill>
           <a:ln>
             <a:noFill/>
@@ -5903,25 +5871,23 @@
       </p:sp>
       <p:sp>
         <p:nvSpPr>
-          <p:cNvPr id="7" name="Rectangle 6"/>
+          <p:cNvPr id="6" name="Rectangle 5"/>
           <p:cNvSpPr/>
           <p:nvPr/>
         </p:nvSpPr>
         <p:spPr>
           <a:xfrm>
-            <a:off x="640080" y="1618487"/>
-            <a:ext cx="274320" cy="274320"/>
+            <a:off x="457200" y="1261872"/>
+            <a:ext cx="11277295" cy="320040"/>
           </a:xfrm>
           <a:prstGeom prst="rect">
             <a:avLst/>
           </a:prstGeom>
           <a:solidFill>
-            <a:srgbClr val="FFFFFF"/>
+            <a:srgbClr val="095292"/>
           </a:solidFill>
           <a:ln>
-            <a:solidFill>
-              <a:srgbClr val="333333"/>
-            </a:solidFill>
+            <a:noFill/>
           </a:ln>
         </p:spPr>
         <p:style>
@@ -5948,949 +5914,222 @@
       </p:sp>
       <p:sp>
         <p:nvSpPr>
-          <p:cNvPr id="8" name="Rectangle 7"/>
-          <p:cNvSpPr/>
-          <p:nvPr/>
-        </p:nvSpPr>
-        <p:spPr>
-          <a:xfrm>
-            <a:off x="640080" y="1618487"/>
-            <a:ext cx="73152" cy="274320"/>
-          </a:xfrm>
-          <a:prstGeom prst="rect">
-            <a:avLst/>
-          </a:prstGeom>
-          <a:solidFill>
-            <a:srgbClr val="269CCB"/>
-          </a:solidFill>
-          <a:ln>
-            <a:noFill/>
-          </a:ln>
-        </p:spPr>
-        <p:style>
-          <a:lnRef idx="1">
-            <a:schemeClr val="accent1"/>
-          </a:lnRef>
-          <a:fillRef idx="3">
-            <a:schemeClr val="accent1"/>
-          </a:fillRef>
-          <a:effectRef idx="2">
-            <a:schemeClr val="accent1"/>
-          </a:effectRef>
-          <a:fontRef idx="minor">
-            <a:schemeClr val="lt1"/>
-          </a:fontRef>
-        </p:style>
-        <p:txBody>
-          <a:bodyPr rtlCol="0" anchor="ctr"/>
-          <a:lstStyle/>
-          <a:p>
-            <a:pPr algn="ctr"/>
+          <p:cNvPr id="7" name="TextBox 6"/>
+          <p:cNvSpPr txBox="1"/>
+          <p:nvPr/>
+        </p:nvSpPr>
+        <p:spPr>
+          <a:xfrm>
+            <a:off x="685800" y="1307592"/>
+            <a:ext cx="10820095" cy="256032"/>
+          </a:xfrm>
+          <a:prstGeom prst="rect">
+            <a:avLst/>
+          </a:prstGeom>
+          <a:noFill/>
+        </p:spPr>
+        <p:txBody>
+          <a:bodyPr wrap="square" anchor="ctr"/>
+          <a:lstStyle/>
+          <a:p>
+            <a:r>
+              <a:rPr sz="1000" b="1" i="0">
+                <a:solidFill>
+                  <a:srgbClr val="269CCB"/>
+                </a:solidFill>
+                <a:latin typeface="Calibri"/>
+              </a:rPr>
+              <a:t>● ● ●</a:t>
+            </a:r>
+          </a:p>
+        </p:txBody>
+      </p:sp>
+      <p:sp>
+        <p:nvSpPr>
+          <p:cNvPr id="8" name="TextBox 7"/>
+          <p:cNvSpPr txBox="1"/>
+          <p:nvPr/>
+        </p:nvSpPr>
+        <p:spPr>
+          <a:xfrm>
+            <a:off x="777240" y="1719072"/>
+            <a:ext cx="10637215" cy="4453128"/>
+          </a:xfrm>
+          <a:prstGeom prst="rect">
+            <a:avLst/>
+          </a:prstGeom>
+          <a:noFill/>
+        </p:spPr>
+        <p:txBody>
+          <a:bodyPr wrap="square">
+            <a:spAutoFit/>
+          </a:bodyPr>
+          <a:lstStyle/>
+          <a:p>
+            <a:pPr>
+              <a:spcAft>
+                <a:spcPts val="400"/>
+              </a:spcAft>
+            </a:pPr>
+            <a:r>
+              <a:rPr sz="1400" b="0" i="0">
+                <a:solidFill>
+                  <a:srgbClr val="FFFFFF"/>
+                </a:solidFill>
+                <a:latin typeface="Calibri"/>
+              </a:rPr>
+              <a:t># Exposición final del proyecto</a:t>
+            </a:r>
+          </a:p>
+          <a:p>
+            <a:pPr>
+              <a:spcAft>
+                <a:spcPts val="400"/>
+              </a:spcAft>
+            </a:pPr>
+            <a:r>
+              <a:rPr sz="1400" b="0" i="0">
+                <a:solidFill>
+                  <a:srgbClr val="FFFFFF"/>
+                </a:solidFill>
+                <a:latin typeface="Calibri"/>
+              </a:rPr>
+              <a:t># Documento del equipo · un bloque por titulo, sin cambiar los nombres</a:t>
+            </a:r>
+          </a:p>
+          <a:p>
+            <a:pPr>
+              <a:spcAft>
+                <a:spcPts val="400"/>
+              </a:spcAft>
+            </a:pPr>
+            <a:r>
+              <a:rPr sz="1400" b="0" i="0">
+                <a:solidFill>
+                  <a:srgbClr val="FFFFFF"/>
+                </a:solidFill>
+                <a:latin typeface="Calibri"/>
+              </a:rPr>
+              <a:t/>
+            </a:r>
+          </a:p>
+          <a:p>
+            <a:pPr>
+              <a:spcAft>
+                <a:spcPts val="400"/>
+              </a:spcAft>
+            </a:pPr>
+            <a:r>
+              <a:rPr sz="1400" b="0" i="0">
+                <a:solidFill>
+                  <a:srgbClr val="FFFFFF"/>
+                </a:solidFill>
+                <a:latin typeface="Calibri"/>
+              </a:rPr>
+              <a:t>## 1. EL PROBLEMA CON SU CIFRA</a:t>
+            </a:r>
+          </a:p>
+          <a:p>
+            <a:pPr>
+              <a:spcAft>
+                <a:spcPts val="400"/>
+              </a:spcAft>
+            </a:pPr>
+            <a:r>
+              <a:rPr sz="1400" b="0" i="0">
+                <a:solidFill>
+                  <a:srgbClr val="FFFFFF"/>
+                </a:solidFill>
+                <a:latin typeface="Calibri"/>
+              </a:rPr>
+              <a:t>## 2. LOS AFECTADOS Y LA DECISIÓN</a:t>
+            </a:r>
+          </a:p>
+          <a:p>
+            <a:pPr>
+              <a:spcAft>
+                <a:spcPts val="400"/>
+              </a:spcAft>
+            </a:pPr>
+            <a:r>
+              <a:rPr sz="1400" b="0" i="0">
+                <a:solidFill>
+                  <a:srgbClr val="FFFFFF"/>
+                </a:solidFill>
+                <a:latin typeface="Calibri"/>
+              </a:rPr>
+              <a:t>## 3. LA SOLUCIÓN Y EL PROTOTIPO EN VIVO</a:t>
+            </a:r>
+          </a:p>
+          <a:p>
+            <a:pPr>
+              <a:spcAft>
+                <a:spcPts val="400"/>
+              </a:spcAft>
+            </a:pPr>
+            <a:r>
+              <a:rPr sz="1400" b="0" i="0">
+                <a:solidFill>
+                  <a:srgbClr val="FFFFFF"/>
+                </a:solidFill>
+                <a:latin typeface="Calibri"/>
+              </a:rPr>
+              <a:t>## 4. LO QUE FALLÓ Y LO QUE APRENDIMOS</a:t>
+            </a:r>
+          </a:p>
+          <a:p>
+            <a:pPr>
+              <a:spcAft>
+                <a:spcPts val="400"/>
+              </a:spcAft>
+            </a:pPr>
+            <a:r>
+              <a:rPr sz="1400" b="0" i="0">
+                <a:solidFill>
+                  <a:srgbClr val="FFFFFF"/>
+                </a:solidFill>
+                <a:latin typeface="Calibri"/>
+              </a:rPr>
+              <a:t>## 5. IMPACTO Y SIGUIENTE PASO</a:t>
+            </a:r>
+          </a:p>
+          <a:p>
+            <a:pPr>
+              <a:spcAft>
+                <a:spcPts val="400"/>
+              </a:spcAft>
+            </a:pPr>
+            <a:r>
+              <a:rPr sz="1400" b="0" i="0">
+                <a:solidFill>
+                  <a:srgbClr val="FFFFFF"/>
+                </a:solidFill>
+                <a:latin typeface="Calibri"/>
+              </a:rPr>
+              <a:t/>
+            </a:r>
+          </a:p>
+          <a:p>
+            <a:pPr>
+              <a:spcAft>
+                <a:spcPts val="400"/>
+              </a:spcAft>
+            </a:pPr>
+            <a:r>
+              <a:rPr sz="1400" b="0" i="0">
+                <a:solidFill>
+                  <a:srgbClr val="FFFFFF"/>
+                </a:solidFill>
+                <a:latin typeface="Calibri"/>
+              </a:rPr>
+              <a:t># Los titulos van TAL CUAL: son con los que se califica.</a:t>
+            </a:r>
           </a:p>
         </p:txBody>
       </p:sp>
       <p:sp>
         <p:nvSpPr>
           <p:cNvPr id="9" name="TextBox 8"/>
-          <p:cNvSpPr txBox="1"/>
-          <p:nvPr/>
-        </p:nvSpPr>
-        <p:spPr>
-          <a:xfrm>
-            <a:off x="1097280" y="1563624"/>
-            <a:ext cx="10362895" cy="402336"/>
-          </a:xfrm>
-          <a:prstGeom prst="rect">
-            <a:avLst/>
-          </a:prstGeom>
-          <a:noFill/>
-        </p:spPr>
-        <p:txBody>
-          <a:bodyPr wrap="square" anchor="ctr"/>
-          <a:lstStyle/>
-          <a:p>
-            <a:r>
-              <a:rPr sz="1500" b="1" i="0">
-                <a:solidFill>
-                  <a:srgbClr val="333333"/>
-                </a:solidFill>
-                <a:latin typeface="Calibri"/>
-              </a:rPr>
-              <a:t>EL PROBLEMA CON SU CIFRA</a:t>
-            </a:r>
-            <a:r>
-              <a:rPr sz="1500" b="0" i="0">
-                <a:solidFill>
-                  <a:srgbClr val="333333"/>
-                </a:solidFill>
-                <a:latin typeface="Calibri"/>
-              </a:rPr>
-              <a:t> — Una frase y </a:t>
-            </a:r>
-            <a:r>
-              <a:rPr sz="1500" b="1" i="0">
-                <a:solidFill>
-                  <a:srgbClr val="333333"/>
-                </a:solidFill>
-                <a:latin typeface="Calibri"/>
-              </a:rPr>
-              <a:t>un número</a:t>
-            </a:r>
-            <a:r>
-              <a:rPr sz="1500" b="0" i="0">
-                <a:solidFill>
-                  <a:srgbClr val="333333"/>
-                </a:solidFill>
-                <a:latin typeface="Calibri"/>
-              </a:rPr>
-              <a:t>, con de dónde salió. </a:t>
-            </a:r>
-            <a:r>
-              <a:rPr sz="1500" b="1" i="0">
-                <a:solidFill>
-                  <a:srgbClr val="333333"/>
-                </a:solidFill>
-                <a:latin typeface="Calibri"/>
-              </a:rPr>
-              <a:t>Sin saludos ni presentaciones personales</a:t>
-            </a:r>
-            <a:r>
-              <a:rPr sz="1500" b="0" i="0">
-                <a:solidFill>
-                  <a:srgbClr val="333333"/>
-                </a:solidFill>
-                <a:latin typeface="Calibri"/>
-              </a:rPr>
-              <a:t>: el nombre del equipo está en la diapositiva.</a:t>
-            </a:r>
-          </a:p>
-        </p:txBody>
-      </p:sp>
-      <p:sp>
-        <p:nvSpPr>
-          <p:cNvPr id="10" name="Rounded Rectangle 9"/>
-          <p:cNvSpPr/>
-          <p:nvPr/>
-        </p:nvSpPr>
-        <p:spPr>
-          <a:xfrm>
-            <a:off x="457200" y="2148839"/>
-            <a:ext cx="11277295" cy="566928"/>
-          </a:xfrm>
-          <a:prstGeom prst="roundRect">
-            <a:avLst>
-              <a:gd name="adj" fmla="val 12000"/>
-            </a:avLst>
-          </a:prstGeom>
-          <a:solidFill>
-            <a:srgbClr val="F2F2F2"/>
-          </a:solidFill>
-          <a:ln>
-            <a:noFill/>
-          </a:ln>
-        </p:spPr>
-        <p:style>
-          <a:lnRef idx="1">
-            <a:schemeClr val="accent1"/>
-          </a:lnRef>
-          <a:fillRef idx="3">
-            <a:schemeClr val="accent1"/>
-          </a:fillRef>
-          <a:effectRef idx="2">
-            <a:schemeClr val="accent1"/>
-          </a:effectRef>
-          <a:fontRef idx="minor">
-            <a:schemeClr val="lt1"/>
-          </a:fontRef>
-        </p:style>
-        <p:txBody>
-          <a:bodyPr rtlCol="0" anchor="ctr"/>
-          <a:lstStyle/>
-          <a:p>
-            <a:pPr algn="ctr"/>
-          </a:p>
-        </p:txBody>
-      </p:sp>
-      <p:sp>
-        <p:nvSpPr>
-          <p:cNvPr id="11" name="Rectangle 10"/>
-          <p:cNvSpPr/>
-          <p:nvPr/>
-        </p:nvSpPr>
-        <p:spPr>
-          <a:xfrm>
-            <a:off x="640080" y="2295144"/>
-            <a:ext cx="274320" cy="274320"/>
-          </a:xfrm>
-          <a:prstGeom prst="rect">
-            <a:avLst/>
-          </a:prstGeom>
-          <a:solidFill>
-            <a:srgbClr val="FFFFFF"/>
-          </a:solidFill>
-          <a:ln>
-            <a:solidFill>
-              <a:srgbClr val="333333"/>
-            </a:solidFill>
-          </a:ln>
-        </p:spPr>
-        <p:style>
-          <a:lnRef idx="1">
-            <a:schemeClr val="accent1"/>
-          </a:lnRef>
-          <a:fillRef idx="3">
-            <a:schemeClr val="accent1"/>
-          </a:fillRef>
-          <a:effectRef idx="2">
-            <a:schemeClr val="accent1"/>
-          </a:effectRef>
-          <a:fontRef idx="minor">
-            <a:schemeClr val="lt1"/>
-          </a:fontRef>
-        </p:style>
-        <p:txBody>
-          <a:bodyPr rtlCol="0" anchor="ctr"/>
-          <a:lstStyle/>
-          <a:p>
-            <a:pPr algn="ctr"/>
-          </a:p>
-        </p:txBody>
-      </p:sp>
-      <p:sp>
-        <p:nvSpPr>
-          <p:cNvPr id="12" name="Rectangle 11"/>
-          <p:cNvSpPr/>
-          <p:nvPr/>
-        </p:nvSpPr>
-        <p:spPr>
-          <a:xfrm>
-            <a:off x="640080" y="2295144"/>
-            <a:ext cx="73152" cy="274320"/>
-          </a:xfrm>
-          <a:prstGeom prst="rect">
-            <a:avLst/>
-          </a:prstGeom>
-          <a:solidFill>
-            <a:srgbClr val="269CCB"/>
-          </a:solidFill>
-          <a:ln>
-            <a:noFill/>
-          </a:ln>
-        </p:spPr>
-        <p:style>
-          <a:lnRef idx="1">
-            <a:schemeClr val="accent1"/>
-          </a:lnRef>
-          <a:fillRef idx="3">
-            <a:schemeClr val="accent1"/>
-          </a:fillRef>
-          <a:effectRef idx="2">
-            <a:schemeClr val="accent1"/>
-          </a:effectRef>
-          <a:fontRef idx="minor">
-            <a:schemeClr val="lt1"/>
-          </a:fontRef>
-        </p:style>
-        <p:txBody>
-          <a:bodyPr rtlCol="0" anchor="ctr"/>
-          <a:lstStyle/>
-          <a:p>
-            <a:pPr algn="ctr"/>
-          </a:p>
-        </p:txBody>
-      </p:sp>
-      <p:sp>
-        <p:nvSpPr>
-          <p:cNvPr id="13" name="TextBox 12"/>
-          <p:cNvSpPr txBox="1"/>
-          <p:nvPr/>
-        </p:nvSpPr>
-        <p:spPr>
-          <a:xfrm>
-            <a:off x="1097280" y="2240279"/>
-            <a:ext cx="10362895" cy="402336"/>
-          </a:xfrm>
-          <a:prstGeom prst="rect">
-            <a:avLst/>
-          </a:prstGeom>
-          <a:noFill/>
-        </p:spPr>
-        <p:txBody>
-          <a:bodyPr wrap="square" anchor="ctr"/>
-          <a:lstStyle/>
-          <a:p>
-            <a:r>
-              <a:rPr sz="1500" b="1" i="0">
-                <a:solidFill>
-                  <a:srgbClr val="333333"/>
-                </a:solidFill>
-                <a:latin typeface="Calibri"/>
-              </a:rPr>
-              <a:t>LOS AFECTADOS Y LA DECISIÓN</a:t>
-            </a:r>
-            <a:r>
-              <a:rPr sz="1500" b="0" i="0">
-                <a:solidFill>
-                  <a:srgbClr val="333333"/>
-                </a:solidFill>
-                <a:latin typeface="Calibri"/>
-              </a:rPr>
-              <a:t> — Quiénes son los afectados —</a:t>
-            </a:r>
-            <a:r>
-              <a:rPr sz="1500" b="1" i="0">
-                <a:solidFill>
-                  <a:srgbClr val="333333"/>
-                </a:solidFill>
-                <a:latin typeface="Calibri"/>
-              </a:rPr>
-              <a:t>incluido uno que no es usuario</a:t>
-            </a:r>
-            <a:r>
-              <a:rPr sz="1500" b="0" i="0">
-                <a:solidFill>
-                  <a:srgbClr val="333333"/>
-                </a:solidFill>
-                <a:latin typeface="Calibri"/>
-              </a:rPr>
-              <a:t>— y qué alternativa se eligió, </a:t>
-            </a:r>
-            <a:r>
-              <a:rPr sz="1500" b="1" i="0">
-                <a:solidFill>
-                  <a:srgbClr val="333333"/>
-                </a:solidFill>
-                <a:latin typeface="Calibri"/>
-              </a:rPr>
-              <a:t>diciendo qué se sacrificó</a:t>
-            </a:r>
-            <a:r>
-              <a:rPr sz="1500" b="0" i="0">
-                <a:solidFill>
-                  <a:srgbClr val="333333"/>
-                </a:solidFill>
-                <a:latin typeface="Calibri"/>
-              </a:rPr>
-              <a:t>.</a:t>
-            </a:r>
-          </a:p>
-        </p:txBody>
-      </p:sp>
-      <p:sp>
-        <p:nvSpPr>
-          <p:cNvPr id="14" name="Rounded Rectangle 13"/>
-          <p:cNvSpPr/>
-          <p:nvPr/>
-        </p:nvSpPr>
-        <p:spPr>
-          <a:xfrm>
-            <a:off x="457200" y="2825496"/>
-            <a:ext cx="11277295" cy="566928"/>
-          </a:xfrm>
-          <a:prstGeom prst="roundRect">
-            <a:avLst>
-              <a:gd name="adj" fmla="val 12000"/>
-            </a:avLst>
-          </a:prstGeom>
-          <a:solidFill>
-            <a:srgbClr val="F2F2F2"/>
-          </a:solidFill>
-          <a:ln>
-            <a:noFill/>
-          </a:ln>
-        </p:spPr>
-        <p:style>
-          <a:lnRef idx="1">
-            <a:schemeClr val="accent1"/>
-          </a:lnRef>
-          <a:fillRef idx="3">
-            <a:schemeClr val="accent1"/>
-          </a:fillRef>
-          <a:effectRef idx="2">
-            <a:schemeClr val="accent1"/>
-          </a:effectRef>
-          <a:fontRef idx="minor">
-            <a:schemeClr val="lt1"/>
-          </a:fontRef>
-        </p:style>
-        <p:txBody>
-          <a:bodyPr rtlCol="0" anchor="ctr"/>
-          <a:lstStyle/>
-          <a:p>
-            <a:pPr algn="ctr"/>
-          </a:p>
-        </p:txBody>
-      </p:sp>
-      <p:sp>
-        <p:nvSpPr>
-          <p:cNvPr id="15" name="Rectangle 14"/>
-          <p:cNvSpPr/>
-          <p:nvPr/>
-        </p:nvSpPr>
-        <p:spPr>
-          <a:xfrm>
-            <a:off x="640080" y="2971800"/>
-            <a:ext cx="274320" cy="274320"/>
-          </a:xfrm>
-          <a:prstGeom prst="rect">
-            <a:avLst/>
-          </a:prstGeom>
-          <a:solidFill>
-            <a:srgbClr val="FFFFFF"/>
-          </a:solidFill>
-          <a:ln>
-            <a:solidFill>
-              <a:srgbClr val="333333"/>
-            </a:solidFill>
-          </a:ln>
-        </p:spPr>
-        <p:style>
-          <a:lnRef idx="1">
-            <a:schemeClr val="accent1"/>
-          </a:lnRef>
-          <a:fillRef idx="3">
-            <a:schemeClr val="accent1"/>
-          </a:fillRef>
-          <a:effectRef idx="2">
-            <a:schemeClr val="accent1"/>
-          </a:effectRef>
-          <a:fontRef idx="minor">
-            <a:schemeClr val="lt1"/>
-          </a:fontRef>
-        </p:style>
-        <p:txBody>
-          <a:bodyPr rtlCol="0" anchor="ctr"/>
-          <a:lstStyle/>
-          <a:p>
-            <a:pPr algn="ctr"/>
-          </a:p>
-        </p:txBody>
-      </p:sp>
-      <p:sp>
-        <p:nvSpPr>
-          <p:cNvPr id="16" name="Rectangle 15"/>
-          <p:cNvSpPr/>
-          <p:nvPr/>
-        </p:nvSpPr>
-        <p:spPr>
-          <a:xfrm>
-            <a:off x="640080" y="2971800"/>
-            <a:ext cx="73152" cy="274320"/>
-          </a:xfrm>
-          <a:prstGeom prst="rect">
-            <a:avLst/>
-          </a:prstGeom>
-          <a:solidFill>
-            <a:srgbClr val="269CCB"/>
-          </a:solidFill>
-          <a:ln>
-            <a:noFill/>
-          </a:ln>
-        </p:spPr>
-        <p:style>
-          <a:lnRef idx="1">
-            <a:schemeClr val="accent1"/>
-          </a:lnRef>
-          <a:fillRef idx="3">
-            <a:schemeClr val="accent1"/>
-          </a:fillRef>
-          <a:effectRef idx="2">
-            <a:schemeClr val="accent1"/>
-          </a:effectRef>
-          <a:fontRef idx="minor">
-            <a:schemeClr val="lt1"/>
-          </a:fontRef>
-        </p:style>
-        <p:txBody>
-          <a:bodyPr rtlCol="0" anchor="ctr"/>
-          <a:lstStyle/>
-          <a:p>
-            <a:pPr algn="ctr"/>
-          </a:p>
-        </p:txBody>
-      </p:sp>
-      <p:sp>
-        <p:nvSpPr>
-          <p:cNvPr id="17" name="TextBox 16"/>
-          <p:cNvSpPr txBox="1"/>
-          <p:nvPr/>
-        </p:nvSpPr>
-        <p:spPr>
-          <a:xfrm>
-            <a:off x="1097280" y="2916936"/>
-            <a:ext cx="10362895" cy="402336"/>
-          </a:xfrm>
-          <a:prstGeom prst="rect">
-            <a:avLst/>
-          </a:prstGeom>
-          <a:noFill/>
-        </p:spPr>
-        <p:txBody>
-          <a:bodyPr wrap="square" anchor="ctr"/>
-          <a:lstStyle/>
-          <a:p>
-            <a:r>
-              <a:rPr sz="1500" b="1" i="0">
-                <a:solidFill>
-                  <a:srgbClr val="333333"/>
-                </a:solidFill>
-                <a:latin typeface="Calibri"/>
-              </a:rPr>
-              <a:t>LA SOLUCIÓN Y EL PROTOTIPO EN VIVO</a:t>
-            </a:r>
-            <a:r>
-              <a:rPr sz="1500" b="0" i="0">
-                <a:solidFill>
-                  <a:srgbClr val="333333"/>
-                </a:solidFill>
-                <a:latin typeface="Calibri"/>
-              </a:rPr>
-              <a:t> — Un recorrido de </a:t>
-            </a:r>
-            <a:r>
-              <a:rPr sz="1500" b="1" i="0">
-                <a:solidFill>
-                  <a:srgbClr val="333333"/>
-                </a:solidFill>
-                <a:latin typeface="Calibri"/>
-              </a:rPr>
-              <a:t>tres pasos</a:t>
-            </a:r>
-            <a:r>
-              <a:rPr sz="1500" b="0" i="0">
-                <a:solidFill>
-                  <a:srgbClr val="333333"/>
-                </a:solidFill>
-                <a:latin typeface="Calibri"/>
-              </a:rPr>
-              <a:t> mostrando </a:t>
-            </a:r>
-            <a:r>
-              <a:rPr sz="1500" b="1" i="0">
-                <a:solidFill>
-                  <a:srgbClr val="333333"/>
-                </a:solidFill>
-                <a:latin typeface="Calibri"/>
-              </a:rPr>
-              <a:t>una tarea cumpliéndose</a:t>
-            </a:r>
-            <a:r>
-              <a:rPr sz="1500" b="0" i="0">
-                <a:solidFill>
-                  <a:srgbClr val="333333"/>
-                </a:solidFill>
-                <a:latin typeface="Calibri"/>
-              </a:rPr>
-              <a:t>. Narra una persona y maneja la pantalla otra.</a:t>
-            </a:r>
-          </a:p>
-        </p:txBody>
-      </p:sp>
-      <p:sp>
-        <p:nvSpPr>
-          <p:cNvPr id="18" name="Rounded Rectangle 17"/>
-          <p:cNvSpPr/>
-          <p:nvPr/>
-        </p:nvSpPr>
-        <p:spPr>
-          <a:xfrm>
-            <a:off x="457200" y="3502152"/>
-            <a:ext cx="11277295" cy="566928"/>
-          </a:xfrm>
-          <a:prstGeom prst="roundRect">
-            <a:avLst>
-              <a:gd name="adj" fmla="val 12000"/>
-            </a:avLst>
-          </a:prstGeom>
-          <a:solidFill>
-            <a:srgbClr val="F2F2F2"/>
-          </a:solidFill>
-          <a:ln>
-            <a:noFill/>
-          </a:ln>
-        </p:spPr>
-        <p:style>
-          <a:lnRef idx="1">
-            <a:schemeClr val="accent1"/>
-          </a:lnRef>
-          <a:fillRef idx="3">
-            <a:schemeClr val="accent1"/>
-          </a:fillRef>
-          <a:effectRef idx="2">
-            <a:schemeClr val="accent1"/>
-          </a:effectRef>
-          <a:fontRef idx="minor">
-            <a:schemeClr val="lt1"/>
-          </a:fontRef>
-        </p:style>
-        <p:txBody>
-          <a:bodyPr rtlCol="0" anchor="ctr"/>
-          <a:lstStyle/>
-          <a:p>
-            <a:pPr algn="ctr"/>
-          </a:p>
-        </p:txBody>
-      </p:sp>
-      <p:sp>
-        <p:nvSpPr>
-          <p:cNvPr id="19" name="Rectangle 18"/>
-          <p:cNvSpPr/>
-          <p:nvPr/>
-        </p:nvSpPr>
-        <p:spPr>
-          <a:xfrm>
-            <a:off x="640080" y="3648456"/>
-            <a:ext cx="274320" cy="274320"/>
-          </a:xfrm>
-          <a:prstGeom prst="rect">
-            <a:avLst/>
-          </a:prstGeom>
-          <a:solidFill>
-            <a:srgbClr val="FFFFFF"/>
-          </a:solidFill>
-          <a:ln>
-            <a:solidFill>
-              <a:srgbClr val="333333"/>
-            </a:solidFill>
-          </a:ln>
-        </p:spPr>
-        <p:style>
-          <a:lnRef idx="1">
-            <a:schemeClr val="accent1"/>
-          </a:lnRef>
-          <a:fillRef idx="3">
-            <a:schemeClr val="accent1"/>
-          </a:fillRef>
-          <a:effectRef idx="2">
-            <a:schemeClr val="accent1"/>
-          </a:effectRef>
-          <a:fontRef idx="minor">
-            <a:schemeClr val="lt1"/>
-          </a:fontRef>
-        </p:style>
-        <p:txBody>
-          <a:bodyPr rtlCol="0" anchor="ctr"/>
-          <a:lstStyle/>
-          <a:p>
-            <a:pPr algn="ctr"/>
-          </a:p>
-        </p:txBody>
-      </p:sp>
-      <p:sp>
-        <p:nvSpPr>
-          <p:cNvPr id="20" name="Rectangle 19"/>
-          <p:cNvSpPr/>
-          <p:nvPr/>
-        </p:nvSpPr>
-        <p:spPr>
-          <a:xfrm>
-            <a:off x="640080" y="3648456"/>
-            <a:ext cx="73152" cy="274320"/>
-          </a:xfrm>
-          <a:prstGeom prst="rect">
-            <a:avLst/>
-          </a:prstGeom>
-          <a:solidFill>
-            <a:srgbClr val="269CCB"/>
-          </a:solidFill>
-          <a:ln>
-            <a:noFill/>
-          </a:ln>
-        </p:spPr>
-        <p:style>
-          <a:lnRef idx="1">
-            <a:schemeClr val="accent1"/>
-          </a:lnRef>
-          <a:fillRef idx="3">
-            <a:schemeClr val="accent1"/>
-          </a:fillRef>
-          <a:effectRef idx="2">
-            <a:schemeClr val="accent1"/>
-          </a:effectRef>
-          <a:fontRef idx="minor">
-            <a:schemeClr val="lt1"/>
-          </a:fontRef>
-        </p:style>
-        <p:txBody>
-          <a:bodyPr rtlCol="0" anchor="ctr"/>
-          <a:lstStyle/>
-          <a:p>
-            <a:pPr algn="ctr"/>
-          </a:p>
-        </p:txBody>
-      </p:sp>
-      <p:sp>
-        <p:nvSpPr>
-          <p:cNvPr id="21" name="TextBox 20"/>
-          <p:cNvSpPr txBox="1"/>
-          <p:nvPr/>
-        </p:nvSpPr>
-        <p:spPr>
-          <a:xfrm>
-            <a:off x="1097280" y="3593592"/>
-            <a:ext cx="10362895" cy="402336"/>
-          </a:xfrm>
-          <a:prstGeom prst="rect">
-            <a:avLst/>
-          </a:prstGeom>
-          <a:noFill/>
-        </p:spPr>
-        <p:txBody>
-          <a:bodyPr wrap="square" anchor="ctr"/>
-          <a:lstStyle/>
-          <a:p>
-            <a:r>
-              <a:rPr sz="1500" b="1" i="0">
-                <a:solidFill>
-                  <a:srgbClr val="333333"/>
-                </a:solidFill>
-                <a:latin typeface="Calibri"/>
-              </a:rPr>
-              <a:t>LO QUE FALLÓ Y LO QUE APRENDIMOS</a:t>
-            </a:r>
-            <a:r>
-              <a:rPr sz="1500" b="0" i="0">
-                <a:solidFill>
-                  <a:srgbClr val="333333"/>
-                </a:solidFill>
-                <a:latin typeface="Calibri"/>
-              </a:rPr>
-              <a:t> — Los hallazgos con personas reales, qué se arregló y </a:t>
-            </a:r>
-            <a:r>
-              <a:rPr sz="1500" b="1" i="0">
-                <a:solidFill>
-                  <a:srgbClr val="333333"/>
-                </a:solidFill>
-                <a:latin typeface="Calibri"/>
-              </a:rPr>
-              <a:t>qué se decidió no arreglar</a:t>
-            </a:r>
-            <a:r>
-              <a:rPr sz="1500" b="0" i="0">
-                <a:solidFill>
-                  <a:srgbClr val="333333"/>
-                </a:solidFill>
-                <a:latin typeface="Calibri"/>
-              </a:rPr>
-              <a:t>, con el motivo.</a:t>
-            </a:r>
-          </a:p>
-        </p:txBody>
-      </p:sp>
-      <p:sp>
-        <p:nvSpPr>
-          <p:cNvPr id="22" name="Rounded Rectangle 21"/>
-          <p:cNvSpPr/>
-          <p:nvPr/>
-        </p:nvSpPr>
-        <p:spPr>
-          <a:xfrm>
-            <a:off x="457200" y="4178808"/>
-            <a:ext cx="11277295" cy="566928"/>
-          </a:xfrm>
-          <a:prstGeom prst="roundRect">
-            <a:avLst>
-              <a:gd name="adj" fmla="val 12000"/>
-            </a:avLst>
-          </a:prstGeom>
-          <a:solidFill>
-            <a:srgbClr val="F2F2F2"/>
-          </a:solidFill>
-          <a:ln>
-            <a:noFill/>
-          </a:ln>
-        </p:spPr>
-        <p:style>
-          <a:lnRef idx="1">
-            <a:schemeClr val="accent1"/>
-          </a:lnRef>
-          <a:fillRef idx="3">
-            <a:schemeClr val="accent1"/>
-          </a:fillRef>
-          <a:effectRef idx="2">
-            <a:schemeClr val="accent1"/>
-          </a:effectRef>
-          <a:fontRef idx="minor">
-            <a:schemeClr val="lt1"/>
-          </a:fontRef>
-        </p:style>
-        <p:txBody>
-          <a:bodyPr rtlCol="0" anchor="ctr"/>
-          <a:lstStyle/>
-          <a:p>
-            <a:pPr algn="ctr"/>
-          </a:p>
-        </p:txBody>
-      </p:sp>
-      <p:sp>
-        <p:nvSpPr>
-          <p:cNvPr id="23" name="Rectangle 22"/>
-          <p:cNvSpPr/>
-          <p:nvPr/>
-        </p:nvSpPr>
-        <p:spPr>
-          <a:xfrm>
-            <a:off x="640080" y="4325112"/>
-            <a:ext cx="274320" cy="274320"/>
-          </a:xfrm>
-          <a:prstGeom prst="rect">
-            <a:avLst/>
-          </a:prstGeom>
-          <a:solidFill>
-            <a:srgbClr val="FFFFFF"/>
-          </a:solidFill>
-          <a:ln>
-            <a:solidFill>
-              <a:srgbClr val="333333"/>
-            </a:solidFill>
-          </a:ln>
-        </p:spPr>
-        <p:style>
-          <a:lnRef idx="1">
-            <a:schemeClr val="accent1"/>
-          </a:lnRef>
-          <a:fillRef idx="3">
-            <a:schemeClr val="accent1"/>
-          </a:fillRef>
-          <a:effectRef idx="2">
-            <a:schemeClr val="accent1"/>
-          </a:effectRef>
-          <a:fontRef idx="minor">
-            <a:schemeClr val="lt1"/>
-          </a:fontRef>
-        </p:style>
-        <p:txBody>
-          <a:bodyPr rtlCol="0" anchor="ctr"/>
-          <a:lstStyle/>
-          <a:p>
-            <a:pPr algn="ctr"/>
-          </a:p>
-        </p:txBody>
-      </p:sp>
-      <p:sp>
-        <p:nvSpPr>
-          <p:cNvPr id="24" name="Rectangle 23"/>
-          <p:cNvSpPr/>
-          <p:nvPr/>
-        </p:nvSpPr>
-        <p:spPr>
-          <a:xfrm>
-            <a:off x="640080" y="4325112"/>
-            <a:ext cx="73152" cy="274320"/>
-          </a:xfrm>
-          <a:prstGeom prst="rect">
-            <a:avLst/>
-          </a:prstGeom>
-          <a:solidFill>
-            <a:srgbClr val="269CCB"/>
-          </a:solidFill>
-          <a:ln>
-            <a:noFill/>
-          </a:ln>
-        </p:spPr>
-        <p:style>
-          <a:lnRef idx="1">
-            <a:schemeClr val="accent1"/>
-          </a:lnRef>
-          <a:fillRef idx="3">
-            <a:schemeClr val="accent1"/>
-          </a:fillRef>
-          <a:effectRef idx="2">
-            <a:schemeClr val="accent1"/>
-          </a:effectRef>
-          <a:fontRef idx="minor">
-            <a:schemeClr val="lt1"/>
-          </a:fontRef>
-        </p:style>
-        <p:txBody>
-          <a:bodyPr rtlCol="0" anchor="ctr"/>
-          <a:lstStyle/>
-          <a:p>
-            <a:pPr algn="ctr"/>
-          </a:p>
-        </p:txBody>
-      </p:sp>
-      <p:sp>
-        <p:nvSpPr>
-          <p:cNvPr id="25" name="TextBox 24"/>
-          <p:cNvSpPr txBox="1"/>
-          <p:nvPr/>
-        </p:nvSpPr>
-        <p:spPr>
-          <a:xfrm>
-            <a:off x="1097280" y="4270248"/>
-            <a:ext cx="10362895" cy="402336"/>
-          </a:xfrm>
-          <a:prstGeom prst="rect">
-            <a:avLst/>
-          </a:prstGeom>
-          <a:noFill/>
-        </p:spPr>
-        <p:txBody>
-          <a:bodyPr wrap="square" anchor="ctr"/>
-          <a:lstStyle/>
-          <a:p>
-            <a:r>
-              <a:rPr sz="1500" b="1" i="0">
-                <a:solidFill>
-                  <a:srgbClr val="333333"/>
-                </a:solidFill>
-                <a:latin typeface="Calibri"/>
-              </a:rPr>
-              <a:t>IMPACTO Y SIGUIENTE PASO</a:t>
-            </a:r>
-            <a:r>
-              <a:rPr sz="1500" b="0" i="0">
-                <a:solidFill>
-                  <a:srgbClr val="333333"/>
-                </a:solidFill>
-                <a:latin typeface="Calibri"/>
-              </a:rPr>
-              <a:t> — El impacto positivo </a:t>
-            </a:r>
-            <a:r>
-              <a:rPr sz="1500" b="1" i="0">
-                <a:solidFill>
-                  <a:srgbClr val="333333"/>
-                </a:solidFill>
-                <a:latin typeface="Calibri"/>
-              </a:rPr>
-              <a:t>con su número</a:t>
-            </a:r>
-            <a:r>
-              <a:rPr sz="1500" b="0" i="0">
-                <a:solidFill>
-                  <a:srgbClr val="333333"/>
-                </a:solidFill>
-                <a:latin typeface="Calibri"/>
-              </a:rPr>
-              <a:t> y el negativo </a:t>
-            </a:r>
-            <a:r>
-              <a:rPr sz="1500" b="1" i="0">
-                <a:solidFill>
-                  <a:srgbClr val="333333"/>
-                </a:solidFill>
-                <a:latin typeface="Calibri"/>
-              </a:rPr>
-              <a:t>con su mitigación</a:t>
-            </a:r>
-            <a:r>
-              <a:rPr sz="1500" b="0" i="0">
-                <a:solidFill>
-                  <a:srgbClr val="333333"/>
-                </a:solidFill>
-                <a:latin typeface="Calibri"/>
-              </a:rPr>
-              <a:t>. Qué haría quien continúe el proyecto.</a:t>
-            </a:r>
-          </a:p>
-        </p:txBody>
-      </p:sp>
-      <p:sp>
-        <p:nvSpPr>
-          <p:cNvPr id="26" name="TextBox 25"/>
           <p:cNvSpPr txBox="1"/>
           <p:nvPr/>
         </p:nvSpPr>
@@ -6958,7 +6197,7 @@
         <p:spPr>
           <a:xfrm>
             <a:off x="0" y="0"/>
-            <a:ext cx="12191695" cy="1170432"/>
+            <a:ext cx="12191695" cy="960120"/>
           </a:xfrm>
           <a:prstGeom prst="rect">
             <a:avLst/>
@@ -7000,7 +6239,7 @@
         </p:nvSpPr>
         <p:spPr>
           <a:xfrm>
-            <a:off x="0" y="1170432"/>
+            <a:off x="0" y="960120"/>
             <a:ext cx="12191695" cy="41148"/>
           </a:xfrm>
           <a:prstGeom prst="rect">
@@ -7044,7 +6283,7 @@
         <p:spPr>
           <a:xfrm>
             <a:off x="457200" y="164592"/>
-            <a:ext cx="11277295" cy="384048"/>
+            <a:ext cx="11277295" cy="502920"/>
           </a:xfrm>
           <a:prstGeom prst="rect">
             <a:avLst/>
@@ -7064,55 +6303,21 @@
                 </a:solidFill>
                 <a:latin typeface="Calibri"/>
               </a:rPr>
-              <a:t>Cómo se expone en 9 minutos</a:t>
-            </a:r>
-          </a:p>
-        </p:txBody>
-      </p:sp>
-      <p:sp>
-        <p:nvSpPr>
-          <p:cNvPr id="5" name="TextBox 4"/>
-          <p:cNvSpPr txBox="1"/>
-          <p:nvPr/>
-        </p:nvSpPr>
-        <p:spPr>
-          <a:xfrm>
-            <a:off x="457200" y="566928"/>
-            <a:ext cx="11277295" cy="411480"/>
-          </a:xfrm>
-          <a:prstGeom prst="rect">
-            <a:avLst/>
-          </a:prstGeom>
-          <a:noFill/>
-        </p:spPr>
-        <p:txBody>
-          <a:bodyPr wrap="square">
-            <a:spAutoFit/>
-          </a:bodyPr>
-          <a:lstStyle/>
-          <a:p>
-            <a:r>
-              <a:rPr sz="1400" b="0" i="0">
-                <a:solidFill>
-                  <a:srgbClr val="B8D8EE"/>
-                </a:solidFill>
-                <a:latin typeface="Calibri"/>
-              </a:rPr>
-              <a:t>Habla el vocero con la pantalla ya compartida · cronómetro en pantalla · se corta al llegar a cero</a:t>
-            </a:r>
-          </a:p>
-        </p:txBody>
-      </p:sp>
-      <p:sp>
-        <p:nvSpPr>
-          <p:cNvPr id="6" name="Rounded Rectangle 5"/>
+              <a:t>Guion de la exposicion, con tiempos</a:t>
+            </a:r>
+          </a:p>
+        </p:txBody>
+      </p:sp>
+      <p:sp>
+        <p:nvSpPr>
+          <p:cNvPr id="5" name="Rounded Rectangle 4"/>
           <p:cNvSpPr/>
           <p:nvPr/>
         </p:nvSpPr>
         <p:spPr>
           <a:xfrm>
-            <a:off x="457200" y="1444752"/>
-            <a:ext cx="11277295" cy="745236"/>
+            <a:off x="457200" y="1261872"/>
+            <a:ext cx="11277295" cy="5093208"/>
           </a:xfrm>
           <a:prstGeom prst="roundRect">
             <a:avLst>
@@ -7120,7 +6325,7 @@
             </a:avLst>
           </a:prstGeom>
           <a:solidFill>
-            <a:srgbClr val="F2F2F2"/>
+            <a:srgbClr val="1E2A38"/>
           </a:solidFill>
           <a:ln>
             <a:noFill/>
@@ -7150,19 +6355,17 @@
       </p:sp>
       <p:sp>
         <p:nvSpPr>
-          <p:cNvPr id="7" name="Rounded Rectangle 6"/>
+          <p:cNvPr id="6" name="Rectangle 5"/>
           <p:cNvSpPr/>
           <p:nvPr/>
         </p:nvSpPr>
         <p:spPr>
           <a:xfrm>
-            <a:off x="594360" y="1597914"/>
-            <a:ext cx="438912" cy="438912"/>
-          </a:xfrm>
-          <a:prstGeom prst="roundRect">
-            <a:avLst>
-              <a:gd name="adj" fmla="val 12000"/>
-            </a:avLst>
+            <a:off x="457200" y="1261872"/>
+            <a:ext cx="11277295" cy="320040"/>
+          </a:xfrm>
+          <a:prstGeom prst="rect">
+            <a:avLst/>
           </a:prstGeom>
           <a:solidFill>
             <a:srgbClr val="095292"/>
@@ -7195,14 +6398,46 @@
       </p:sp>
       <p:sp>
         <p:nvSpPr>
+          <p:cNvPr id="7" name="TextBox 6"/>
+          <p:cNvSpPr txBox="1"/>
+          <p:nvPr/>
+        </p:nvSpPr>
+        <p:spPr>
+          <a:xfrm>
+            <a:off x="685800" y="1307592"/>
+            <a:ext cx="10820095" cy="256032"/>
+          </a:xfrm>
+          <a:prstGeom prst="rect">
+            <a:avLst/>
+          </a:prstGeom>
+          <a:noFill/>
+        </p:spPr>
+        <p:txBody>
+          <a:bodyPr wrap="square" anchor="ctr"/>
+          <a:lstStyle/>
+          <a:p>
+            <a:r>
+              <a:rPr sz="1000" b="1" i="0">
+                <a:solidFill>
+                  <a:srgbClr val="269CCB"/>
+                </a:solidFill>
+                <a:latin typeface="Calibri"/>
+              </a:rPr>
+              <a:t>● ● ●</a:t>
+            </a:r>
+          </a:p>
+        </p:txBody>
+      </p:sp>
+      <p:sp>
+        <p:nvSpPr>
           <p:cNvPr id="8" name="TextBox 7"/>
           <p:cNvSpPr txBox="1"/>
           <p:nvPr/>
         </p:nvSpPr>
         <p:spPr>
           <a:xfrm>
-            <a:off x="594360" y="1597914"/>
-            <a:ext cx="438912" cy="438912"/>
+            <a:off x="777240" y="1719072"/>
+            <a:ext cx="10637215" cy="4453128"/>
           </a:xfrm>
           <a:prstGeom prst="rect">
             <a:avLst/>
@@ -7210,18 +6445,184 @@
           <a:noFill/>
         </p:spPr>
         <p:txBody>
-          <a:bodyPr wrap="square" anchor="ctr"/>
-          <a:lstStyle/>
-          <a:p>
-            <a:pPr algn="ctr"/>
-            <a:r>
-              <a:rPr sz="1600" b="1" i="0">
+          <a:bodyPr wrap="square">
+            <a:spAutoFit/>
+          </a:bodyPr>
+          <a:lstStyle/>
+          <a:p>
+            <a:pPr>
+              <a:spcAft>
+                <a:spcPts val="400"/>
+              </a:spcAft>
+            </a:pPr>
+            <a:r>
+              <a:rPr sz="1400" b="0" i="0">
                 <a:solidFill>
                   <a:srgbClr val="FFFFFF"/>
                 </a:solidFill>
                 <a:latin typeface="Calibri"/>
               </a:rPr>
-              <a:t>1</a:t>
+              <a:t># Exposicion de hoy · lo que se califica es el reparto, no el total</a:t>
+            </a:r>
+          </a:p>
+          <a:p>
+            <a:pPr>
+              <a:spcAft>
+                <a:spcPts val="400"/>
+              </a:spcAft>
+            </a:pPr>
+            <a:r>
+              <a:rPr sz="1400" b="0" i="0">
+                <a:solidFill>
+                  <a:srgbClr val="FFFFFF"/>
+                </a:solidFill>
+                <a:latin typeface="Calibri"/>
+              </a:rPr>
+              <a:t/>
+            </a:r>
+          </a:p>
+          <a:p>
+            <a:pPr>
+              <a:spcAft>
+                <a:spcPts val="400"/>
+              </a:spcAft>
+            </a:pPr>
+            <a:r>
+              <a:rPr sz="1400" b="0" i="0">
+                <a:solidFill>
+                  <a:srgbClr val="FFFFFF"/>
+                </a:solidFill>
+                <a:latin typeface="Calibri"/>
+              </a:rPr>
+              <a:t>Tramo 1 · 1 min                    El problema con su cifra. Arranca sin saludo</a:t>
+            </a:r>
+          </a:p>
+          <a:p>
+            <a:pPr>
+              <a:spcAft>
+                <a:spcPts val="400"/>
+              </a:spcAft>
+            </a:pPr>
+            <a:r>
+              <a:rPr sz="1400" b="0" i="0">
+                <a:solidFill>
+                  <a:srgbClr val="FFFFFF"/>
+                </a:solidFill>
+                <a:latin typeface="Calibri"/>
+              </a:rPr>
+              <a:t>Tramo 2 · 2 min                    Los afectados —uno que no es usuario— y la d</a:t>
+            </a:r>
+          </a:p>
+          <a:p>
+            <a:pPr>
+              <a:spcAft>
+                <a:spcPts val="400"/>
+              </a:spcAft>
+            </a:pPr>
+            <a:r>
+              <a:rPr sz="1400" b="0" i="0">
+                <a:solidFill>
+                  <a:srgbClr val="FFFFFF"/>
+                </a:solidFill>
+                <a:latin typeface="Calibri"/>
+              </a:rPr>
+              <a:t>Tramo 3 · 3 min                    El prototipo en vivo: tres pasos, una tarea </a:t>
+            </a:r>
+          </a:p>
+          <a:p>
+            <a:pPr>
+              <a:spcAft>
+                <a:spcPts val="400"/>
+              </a:spcAft>
+            </a:pPr>
+            <a:r>
+              <a:rPr sz="1400" b="0" i="0">
+                <a:solidFill>
+                  <a:srgbClr val="FFFFFF"/>
+                </a:solidFill>
+                <a:latin typeface="Calibri"/>
+              </a:rPr>
+              <a:t>Tramo 4 · 2 min                    Los hallazgos de la prueba, lo que se arregl</a:t>
+            </a:r>
+          </a:p>
+          <a:p>
+            <a:pPr>
+              <a:spcAft>
+                <a:spcPts val="400"/>
+              </a:spcAft>
+            </a:pPr>
+            <a:r>
+              <a:rPr sz="1400" b="0" i="0">
+                <a:solidFill>
+                  <a:srgbClr val="FFFFFF"/>
+                </a:solidFill>
+                <a:latin typeface="Calibri"/>
+              </a:rPr>
+              <a:t>Tramo 5 · 1 min                    Impacto positivo con su número, negativo con</a:t>
+            </a:r>
+          </a:p>
+          <a:p>
+            <a:pPr>
+              <a:spcAft>
+                <a:spcPts val="400"/>
+              </a:spcAft>
+            </a:pPr>
+            <a:r>
+              <a:rPr sz="1400" b="0" i="0">
+                <a:solidFill>
+                  <a:srgbClr val="FFFFFF"/>
+                </a:solidFill>
+                <a:latin typeface="Calibri"/>
+              </a:rPr>
+              <a:t>Preguntas · 3 min                  Una del curso y una del docente. **Responde </a:t>
+            </a:r>
+          </a:p>
+          <a:p>
+            <a:pPr>
+              <a:spcAft>
+                <a:spcPts val="400"/>
+              </a:spcAft>
+            </a:pPr>
+            <a:r>
+              <a:rPr sz="1400" b="0" i="0">
+                <a:solidFill>
+                  <a:srgbClr val="FFFFFF"/>
+                </a:solidFill>
+                <a:latin typeface="Calibri"/>
+              </a:rPr>
+              <a:t/>
+            </a:r>
+          </a:p>
+          <a:p>
+            <a:pPr>
+              <a:spcAft>
+                <a:spcPts val="400"/>
+              </a:spcAft>
+            </a:pPr>
+            <a:r>
+              <a:rPr sz="1400" b="0" i="0">
+                <a:solidFill>
+                  <a:srgbClr val="FFFFFF"/>
+                </a:solidFill>
+                <a:latin typeface="Calibri"/>
+              </a:rPr>
+              <a:t># El tramo marcado como obligatorio es el que el jurado califica:</a:t>
+            </a:r>
+          </a:p>
+          <a:p>
+            <a:pPr>
+              <a:spcAft>
+                <a:spcPts val="400"/>
+              </a:spcAft>
+            </a:pPr>
+            <a:r>
+              <a:rPr sz="1400" b="0" i="0">
+                <a:solidFill>
+                  <a:srgbClr val="FFFFFF"/>
+                </a:solidFill>
+                <a:latin typeface="Calibri"/>
+              </a:rPr>
+              <a:t># si el guion no esta cronometrado, es el que se queda sin tiempo.</a:t>
             </a:r>
           </a:p>
         </p:txBody>
@@ -7229,918 +6630,6 @@
       <p:sp>
         <p:nvSpPr>
           <p:cNvPr id="9" name="TextBox 8"/>
-          <p:cNvSpPr txBox="1"/>
-          <p:nvPr/>
-        </p:nvSpPr>
-        <p:spPr>
-          <a:xfrm>
-            <a:off x="1188720" y="1536192"/>
-            <a:ext cx="10271455" cy="580644"/>
-          </a:xfrm>
-          <a:prstGeom prst="rect">
-            <a:avLst/>
-          </a:prstGeom>
-          <a:noFill/>
-        </p:spPr>
-        <p:txBody>
-          <a:bodyPr wrap="square" anchor="ctr"/>
-          <a:lstStyle/>
-          <a:p>
-            <a:r>
-              <a:rPr sz="1500" b="1" i="0">
-                <a:solidFill>
-                  <a:srgbClr val="095292"/>
-                </a:solidFill>
-                <a:latin typeface="Calibri"/>
-              </a:rPr>
-              <a:t>Tramo 1 · 1 min</a:t>
-            </a:r>
-          </a:p>
-          <a:p>
-            <a:pPr>
-              <a:spcBef>
-                <a:spcPts val="200"/>
-              </a:spcBef>
-            </a:pPr>
-            <a:r>
-              <a:rPr sz="1300" b="0" i="0">
-                <a:solidFill>
-                  <a:srgbClr val="333333"/>
-                </a:solidFill>
-                <a:latin typeface="Calibri"/>
-              </a:rPr>
-              <a:t>El problema con su cifra. Arranca sin saludos.</a:t>
-            </a:r>
-          </a:p>
-        </p:txBody>
-      </p:sp>
-      <p:sp>
-        <p:nvSpPr>
-          <p:cNvPr id="10" name="Rounded Rectangle 9"/>
-          <p:cNvSpPr/>
-          <p:nvPr/>
-        </p:nvSpPr>
-        <p:spPr>
-          <a:xfrm>
-            <a:off x="457200" y="2281428"/>
-            <a:ext cx="11277295" cy="745236"/>
-          </a:xfrm>
-          <a:prstGeom prst="roundRect">
-            <a:avLst>
-              <a:gd name="adj" fmla="val 12000"/>
-            </a:avLst>
-          </a:prstGeom>
-          <a:solidFill>
-            <a:srgbClr val="E8F4FA"/>
-          </a:solidFill>
-          <a:ln>
-            <a:noFill/>
-          </a:ln>
-        </p:spPr>
-        <p:style>
-          <a:lnRef idx="1">
-            <a:schemeClr val="accent1"/>
-          </a:lnRef>
-          <a:fillRef idx="3">
-            <a:schemeClr val="accent1"/>
-          </a:fillRef>
-          <a:effectRef idx="2">
-            <a:schemeClr val="accent1"/>
-          </a:effectRef>
-          <a:fontRef idx="minor">
-            <a:schemeClr val="lt1"/>
-          </a:fontRef>
-        </p:style>
-        <p:txBody>
-          <a:bodyPr rtlCol="0" anchor="ctr"/>
-          <a:lstStyle/>
-          <a:p>
-            <a:pPr algn="ctr"/>
-          </a:p>
-        </p:txBody>
-      </p:sp>
-      <p:sp>
-        <p:nvSpPr>
-          <p:cNvPr id="11" name="Rounded Rectangle 10"/>
-          <p:cNvSpPr/>
-          <p:nvPr/>
-        </p:nvSpPr>
-        <p:spPr>
-          <a:xfrm>
-            <a:off x="594360" y="2434590"/>
-            <a:ext cx="438912" cy="438912"/>
-          </a:xfrm>
-          <a:prstGeom prst="roundRect">
-            <a:avLst>
-              <a:gd name="adj" fmla="val 12000"/>
-            </a:avLst>
-          </a:prstGeom>
-          <a:solidFill>
-            <a:srgbClr val="095292"/>
-          </a:solidFill>
-          <a:ln>
-            <a:noFill/>
-          </a:ln>
-        </p:spPr>
-        <p:style>
-          <a:lnRef idx="1">
-            <a:schemeClr val="accent1"/>
-          </a:lnRef>
-          <a:fillRef idx="3">
-            <a:schemeClr val="accent1"/>
-          </a:fillRef>
-          <a:effectRef idx="2">
-            <a:schemeClr val="accent1"/>
-          </a:effectRef>
-          <a:fontRef idx="minor">
-            <a:schemeClr val="lt1"/>
-          </a:fontRef>
-        </p:style>
-        <p:txBody>
-          <a:bodyPr rtlCol="0" anchor="ctr"/>
-          <a:lstStyle/>
-          <a:p>
-            <a:pPr algn="ctr"/>
-          </a:p>
-        </p:txBody>
-      </p:sp>
-      <p:sp>
-        <p:nvSpPr>
-          <p:cNvPr id="12" name="TextBox 11"/>
-          <p:cNvSpPr txBox="1"/>
-          <p:nvPr/>
-        </p:nvSpPr>
-        <p:spPr>
-          <a:xfrm>
-            <a:off x="594360" y="2434590"/>
-            <a:ext cx="438912" cy="438912"/>
-          </a:xfrm>
-          <a:prstGeom prst="rect">
-            <a:avLst/>
-          </a:prstGeom>
-          <a:noFill/>
-        </p:spPr>
-        <p:txBody>
-          <a:bodyPr wrap="square" anchor="ctr"/>
-          <a:lstStyle/>
-          <a:p>
-            <a:pPr algn="ctr"/>
-            <a:r>
-              <a:rPr sz="1600" b="1" i="0">
-                <a:solidFill>
-                  <a:srgbClr val="FFFFFF"/>
-                </a:solidFill>
-                <a:latin typeface="Calibri"/>
-              </a:rPr>
-              <a:t>2</a:t>
-            </a:r>
-          </a:p>
-        </p:txBody>
-      </p:sp>
-      <p:sp>
-        <p:nvSpPr>
-          <p:cNvPr id="13" name="TextBox 12"/>
-          <p:cNvSpPr txBox="1"/>
-          <p:nvPr/>
-        </p:nvSpPr>
-        <p:spPr>
-          <a:xfrm>
-            <a:off x="1188720" y="2372868"/>
-            <a:ext cx="10271455" cy="580644"/>
-          </a:xfrm>
-          <a:prstGeom prst="rect">
-            <a:avLst/>
-          </a:prstGeom>
-          <a:noFill/>
-        </p:spPr>
-        <p:txBody>
-          <a:bodyPr wrap="square" anchor="ctr"/>
-          <a:lstStyle/>
-          <a:p>
-            <a:r>
-              <a:rPr sz="1500" b="1" i="0">
-                <a:solidFill>
-                  <a:srgbClr val="095292"/>
-                </a:solidFill>
-                <a:latin typeface="Calibri"/>
-              </a:rPr>
-              <a:t>Tramo 2 · 2 min</a:t>
-            </a:r>
-          </a:p>
-          <a:p>
-            <a:pPr>
-              <a:spcBef>
-                <a:spcPts val="200"/>
-              </a:spcBef>
-            </a:pPr>
-            <a:r>
-              <a:rPr sz="1300" b="0" i="0">
-                <a:solidFill>
-                  <a:srgbClr val="333333"/>
-                </a:solidFill>
-                <a:latin typeface="Calibri"/>
-              </a:rPr>
-              <a:t>Los afectados —uno que no es usuario— y la decisión con su sacrificio.</a:t>
-            </a:r>
-          </a:p>
-        </p:txBody>
-      </p:sp>
-      <p:sp>
-        <p:nvSpPr>
-          <p:cNvPr id="14" name="Rounded Rectangle 13"/>
-          <p:cNvSpPr/>
-          <p:nvPr/>
-        </p:nvSpPr>
-        <p:spPr>
-          <a:xfrm>
-            <a:off x="457200" y="3118104"/>
-            <a:ext cx="11277295" cy="745236"/>
-          </a:xfrm>
-          <a:prstGeom prst="roundRect">
-            <a:avLst>
-              <a:gd name="adj" fmla="val 12000"/>
-            </a:avLst>
-          </a:prstGeom>
-          <a:solidFill>
-            <a:srgbClr val="F2F2F2"/>
-          </a:solidFill>
-          <a:ln>
-            <a:noFill/>
-          </a:ln>
-        </p:spPr>
-        <p:style>
-          <a:lnRef idx="1">
-            <a:schemeClr val="accent1"/>
-          </a:lnRef>
-          <a:fillRef idx="3">
-            <a:schemeClr val="accent1"/>
-          </a:fillRef>
-          <a:effectRef idx="2">
-            <a:schemeClr val="accent1"/>
-          </a:effectRef>
-          <a:fontRef idx="minor">
-            <a:schemeClr val="lt1"/>
-          </a:fontRef>
-        </p:style>
-        <p:txBody>
-          <a:bodyPr rtlCol="0" anchor="ctr"/>
-          <a:lstStyle/>
-          <a:p>
-            <a:pPr algn="ctr"/>
-          </a:p>
-        </p:txBody>
-      </p:sp>
-      <p:sp>
-        <p:nvSpPr>
-          <p:cNvPr id="15" name="Rounded Rectangle 14"/>
-          <p:cNvSpPr/>
-          <p:nvPr/>
-        </p:nvSpPr>
-        <p:spPr>
-          <a:xfrm>
-            <a:off x="594360" y="3271266"/>
-            <a:ext cx="438912" cy="438912"/>
-          </a:xfrm>
-          <a:prstGeom prst="roundRect">
-            <a:avLst>
-              <a:gd name="adj" fmla="val 12000"/>
-            </a:avLst>
-          </a:prstGeom>
-          <a:solidFill>
-            <a:srgbClr val="095292"/>
-          </a:solidFill>
-          <a:ln>
-            <a:noFill/>
-          </a:ln>
-        </p:spPr>
-        <p:style>
-          <a:lnRef idx="1">
-            <a:schemeClr val="accent1"/>
-          </a:lnRef>
-          <a:fillRef idx="3">
-            <a:schemeClr val="accent1"/>
-          </a:fillRef>
-          <a:effectRef idx="2">
-            <a:schemeClr val="accent1"/>
-          </a:effectRef>
-          <a:fontRef idx="minor">
-            <a:schemeClr val="lt1"/>
-          </a:fontRef>
-        </p:style>
-        <p:txBody>
-          <a:bodyPr rtlCol="0" anchor="ctr"/>
-          <a:lstStyle/>
-          <a:p>
-            <a:pPr algn="ctr"/>
-          </a:p>
-        </p:txBody>
-      </p:sp>
-      <p:sp>
-        <p:nvSpPr>
-          <p:cNvPr id="16" name="TextBox 15"/>
-          <p:cNvSpPr txBox="1"/>
-          <p:nvPr/>
-        </p:nvSpPr>
-        <p:spPr>
-          <a:xfrm>
-            <a:off x="594360" y="3271266"/>
-            <a:ext cx="438912" cy="438912"/>
-          </a:xfrm>
-          <a:prstGeom prst="rect">
-            <a:avLst/>
-          </a:prstGeom>
-          <a:noFill/>
-        </p:spPr>
-        <p:txBody>
-          <a:bodyPr wrap="square" anchor="ctr"/>
-          <a:lstStyle/>
-          <a:p>
-            <a:pPr algn="ctr"/>
-            <a:r>
-              <a:rPr sz="1600" b="1" i="0">
-                <a:solidFill>
-                  <a:srgbClr val="FFFFFF"/>
-                </a:solidFill>
-                <a:latin typeface="Calibri"/>
-              </a:rPr>
-              <a:t>3</a:t>
-            </a:r>
-          </a:p>
-        </p:txBody>
-      </p:sp>
-      <p:sp>
-        <p:nvSpPr>
-          <p:cNvPr id="17" name="TextBox 16"/>
-          <p:cNvSpPr txBox="1"/>
-          <p:nvPr/>
-        </p:nvSpPr>
-        <p:spPr>
-          <a:xfrm>
-            <a:off x="1188720" y="3209544"/>
-            <a:ext cx="10271455" cy="580644"/>
-          </a:xfrm>
-          <a:prstGeom prst="rect">
-            <a:avLst/>
-          </a:prstGeom>
-          <a:noFill/>
-        </p:spPr>
-        <p:txBody>
-          <a:bodyPr wrap="square" anchor="ctr"/>
-          <a:lstStyle/>
-          <a:p>
-            <a:r>
-              <a:rPr sz="1500" b="1" i="0">
-                <a:solidFill>
-                  <a:srgbClr val="095292"/>
-                </a:solidFill>
-                <a:latin typeface="Calibri"/>
-              </a:rPr>
-              <a:t>Tramo 3 · 3 min</a:t>
-            </a:r>
-          </a:p>
-          <a:p>
-            <a:pPr>
-              <a:spcBef>
-                <a:spcPts val="200"/>
-              </a:spcBef>
-            </a:pPr>
-            <a:r>
-              <a:rPr sz="1300" b="0" i="0">
-                <a:solidFill>
-                  <a:srgbClr val="333333"/>
-                </a:solidFill>
-                <a:latin typeface="Calibri"/>
-              </a:rPr>
-              <a:t>El prototipo en vivo: tres pasos, una tarea cumpliéndose.</a:t>
-            </a:r>
-          </a:p>
-        </p:txBody>
-      </p:sp>
-      <p:sp>
-        <p:nvSpPr>
-          <p:cNvPr id="18" name="Rounded Rectangle 17"/>
-          <p:cNvSpPr/>
-          <p:nvPr/>
-        </p:nvSpPr>
-        <p:spPr>
-          <a:xfrm>
-            <a:off x="457200" y="3954780"/>
-            <a:ext cx="11277295" cy="745236"/>
-          </a:xfrm>
-          <a:prstGeom prst="roundRect">
-            <a:avLst>
-              <a:gd name="adj" fmla="val 12000"/>
-            </a:avLst>
-          </a:prstGeom>
-          <a:solidFill>
-            <a:srgbClr val="E8F4FA"/>
-          </a:solidFill>
-          <a:ln>
-            <a:noFill/>
-          </a:ln>
-        </p:spPr>
-        <p:style>
-          <a:lnRef idx="1">
-            <a:schemeClr val="accent1"/>
-          </a:lnRef>
-          <a:fillRef idx="3">
-            <a:schemeClr val="accent1"/>
-          </a:fillRef>
-          <a:effectRef idx="2">
-            <a:schemeClr val="accent1"/>
-          </a:effectRef>
-          <a:fontRef idx="minor">
-            <a:schemeClr val="lt1"/>
-          </a:fontRef>
-        </p:style>
-        <p:txBody>
-          <a:bodyPr rtlCol="0" anchor="ctr"/>
-          <a:lstStyle/>
-          <a:p>
-            <a:pPr algn="ctr"/>
-          </a:p>
-        </p:txBody>
-      </p:sp>
-      <p:sp>
-        <p:nvSpPr>
-          <p:cNvPr id="19" name="Rounded Rectangle 18"/>
-          <p:cNvSpPr/>
-          <p:nvPr/>
-        </p:nvSpPr>
-        <p:spPr>
-          <a:xfrm>
-            <a:off x="594360" y="4107942"/>
-            <a:ext cx="438912" cy="438912"/>
-          </a:xfrm>
-          <a:prstGeom prst="roundRect">
-            <a:avLst>
-              <a:gd name="adj" fmla="val 12000"/>
-            </a:avLst>
-          </a:prstGeom>
-          <a:solidFill>
-            <a:srgbClr val="095292"/>
-          </a:solidFill>
-          <a:ln>
-            <a:noFill/>
-          </a:ln>
-        </p:spPr>
-        <p:style>
-          <a:lnRef idx="1">
-            <a:schemeClr val="accent1"/>
-          </a:lnRef>
-          <a:fillRef idx="3">
-            <a:schemeClr val="accent1"/>
-          </a:fillRef>
-          <a:effectRef idx="2">
-            <a:schemeClr val="accent1"/>
-          </a:effectRef>
-          <a:fontRef idx="minor">
-            <a:schemeClr val="lt1"/>
-          </a:fontRef>
-        </p:style>
-        <p:txBody>
-          <a:bodyPr rtlCol="0" anchor="ctr"/>
-          <a:lstStyle/>
-          <a:p>
-            <a:pPr algn="ctr"/>
-          </a:p>
-        </p:txBody>
-      </p:sp>
-      <p:sp>
-        <p:nvSpPr>
-          <p:cNvPr id="20" name="TextBox 19"/>
-          <p:cNvSpPr txBox="1"/>
-          <p:nvPr/>
-        </p:nvSpPr>
-        <p:spPr>
-          <a:xfrm>
-            <a:off x="594360" y="4107942"/>
-            <a:ext cx="438912" cy="438912"/>
-          </a:xfrm>
-          <a:prstGeom prst="rect">
-            <a:avLst/>
-          </a:prstGeom>
-          <a:noFill/>
-        </p:spPr>
-        <p:txBody>
-          <a:bodyPr wrap="square" anchor="ctr"/>
-          <a:lstStyle/>
-          <a:p>
-            <a:pPr algn="ctr"/>
-            <a:r>
-              <a:rPr sz="1600" b="1" i="0">
-                <a:solidFill>
-                  <a:srgbClr val="FFFFFF"/>
-                </a:solidFill>
-                <a:latin typeface="Calibri"/>
-              </a:rPr>
-              <a:t>4</a:t>
-            </a:r>
-          </a:p>
-        </p:txBody>
-      </p:sp>
-      <p:sp>
-        <p:nvSpPr>
-          <p:cNvPr id="21" name="TextBox 20"/>
-          <p:cNvSpPr txBox="1"/>
-          <p:nvPr/>
-        </p:nvSpPr>
-        <p:spPr>
-          <a:xfrm>
-            <a:off x="1188720" y="4046220"/>
-            <a:ext cx="10271455" cy="580644"/>
-          </a:xfrm>
-          <a:prstGeom prst="rect">
-            <a:avLst/>
-          </a:prstGeom>
-          <a:noFill/>
-        </p:spPr>
-        <p:txBody>
-          <a:bodyPr wrap="square" anchor="ctr"/>
-          <a:lstStyle/>
-          <a:p>
-            <a:r>
-              <a:rPr sz="1500" b="1" i="0">
-                <a:solidFill>
-                  <a:srgbClr val="095292"/>
-                </a:solidFill>
-                <a:latin typeface="Calibri"/>
-              </a:rPr>
-              <a:t>Tramo 4 · 2 min</a:t>
-            </a:r>
-          </a:p>
-          <a:p>
-            <a:pPr>
-              <a:spcBef>
-                <a:spcPts val="200"/>
-              </a:spcBef>
-            </a:pPr>
-            <a:r>
-              <a:rPr sz="1300" b="0" i="0">
-                <a:solidFill>
-                  <a:srgbClr val="333333"/>
-                </a:solidFill>
-                <a:latin typeface="Calibri"/>
-              </a:rPr>
-              <a:t>Los hallazgos de la prueba, lo que se arregló y lo que no.</a:t>
-            </a:r>
-          </a:p>
-        </p:txBody>
-      </p:sp>
-      <p:sp>
-        <p:nvSpPr>
-          <p:cNvPr id="22" name="Rounded Rectangle 21"/>
-          <p:cNvSpPr/>
-          <p:nvPr/>
-        </p:nvSpPr>
-        <p:spPr>
-          <a:xfrm>
-            <a:off x="457200" y="4791456"/>
-            <a:ext cx="11277295" cy="745236"/>
-          </a:xfrm>
-          <a:prstGeom prst="roundRect">
-            <a:avLst>
-              <a:gd name="adj" fmla="val 12000"/>
-            </a:avLst>
-          </a:prstGeom>
-          <a:solidFill>
-            <a:srgbClr val="F2F2F2"/>
-          </a:solidFill>
-          <a:ln>
-            <a:noFill/>
-          </a:ln>
-        </p:spPr>
-        <p:style>
-          <a:lnRef idx="1">
-            <a:schemeClr val="accent1"/>
-          </a:lnRef>
-          <a:fillRef idx="3">
-            <a:schemeClr val="accent1"/>
-          </a:fillRef>
-          <a:effectRef idx="2">
-            <a:schemeClr val="accent1"/>
-          </a:effectRef>
-          <a:fontRef idx="minor">
-            <a:schemeClr val="lt1"/>
-          </a:fontRef>
-        </p:style>
-        <p:txBody>
-          <a:bodyPr rtlCol="0" anchor="ctr"/>
-          <a:lstStyle/>
-          <a:p>
-            <a:pPr algn="ctr"/>
-          </a:p>
-        </p:txBody>
-      </p:sp>
-      <p:sp>
-        <p:nvSpPr>
-          <p:cNvPr id="23" name="Rounded Rectangle 22"/>
-          <p:cNvSpPr/>
-          <p:nvPr/>
-        </p:nvSpPr>
-        <p:spPr>
-          <a:xfrm>
-            <a:off x="594360" y="4944618"/>
-            <a:ext cx="438912" cy="438912"/>
-          </a:xfrm>
-          <a:prstGeom prst="roundRect">
-            <a:avLst>
-              <a:gd name="adj" fmla="val 12000"/>
-            </a:avLst>
-          </a:prstGeom>
-          <a:solidFill>
-            <a:srgbClr val="095292"/>
-          </a:solidFill>
-          <a:ln>
-            <a:noFill/>
-          </a:ln>
-        </p:spPr>
-        <p:style>
-          <a:lnRef idx="1">
-            <a:schemeClr val="accent1"/>
-          </a:lnRef>
-          <a:fillRef idx="3">
-            <a:schemeClr val="accent1"/>
-          </a:fillRef>
-          <a:effectRef idx="2">
-            <a:schemeClr val="accent1"/>
-          </a:effectRef>
-          <a:fontRef idx="minor">
-            <a:schemeClr val="lt1"/>
-          </a:fontRef>
-        </p:style>
-        <p:txBody>
-          <a:bodyPr rtlCol="0" anchor="ctr"/>
-          <a:lstStyle/>
-          <a:p>
-            <a:pPr algn="ctr"/>
-          </a:p>
-        </p:txBody>
-      </p:sp>
-      <p:sp>
-        <p:nvSpPr>
-          <p:cNvPr id="24" name="TextBox 23"/>
-          <p:cNvSpPr txBox="1"/>
-          <p:nvPr/>
-        </p:nvSpPr>
-        <p:spPr>
-          <a:xfrm>
-            <a:off x="594360" y="4944618"/>
-            <a:ext cx="438912" cy="438912"/>
-          </a:xfrm>
-          <a:prstGeom prst="rect">
-            <a:avLst/>
-          </a:prstGeom>
-          <a:noFill/>
-        </p:spPr>
-        <p:txBody>
-          <a:bodyPr wrap="square" anchor="ctr"/>
-          <a:lstStyle/>
-          <a:p>
-            <a:pPr algn="ctr"/>
-            <a:r>
-              <a:rPr sz="1600" b="1" i="0">
-                <a:solidFill>
-                  <a:srgbClr val="FFFFFF"/>
-                </a:solidFill>
-                <a:latin typeface="Calibri"/>
-              </a:rPr>
-              <a:t>5</a:t>
-            </a:r>
-          </a:p>
-        </p:txBody>
-      </p:sp>
-      <p:sp>
-        <p:nvSpPr>
-          <p:cNvPr id="25" name="TextBox 24"/>
-          <p:cNvSpPr txBox="1"/>
-          <p:nvPr/>
-        </p:nvSpPr>
-        <p:spPr>
-          <a:xfrm>
-            <a:off x="1188720" y="4882896"/>
-            <a:ext cx="10271455" cy="580644"/>
-          </a:xfrm>
-          <a:prstGeom prst="rect">
-            <a:avLst/>
-          </a:prstGeom>
-          <a:noFill/>
-        </p:spPr>
-        <p:txBody>
-          <a:bodyPr wrap="square" anchor="ctr"/>
-          <a:lstStyle/>
-          <a:p>
-            <a:r>
-              <a:rPr sz="1500" b="1" i="0">
-                <a:solidFill>
-                  <a:srgbClr val="095292"/>
-                </a:solidFill>
-                <a:latin typeface="Calibri"/>
-              </a:rPr>
-              <a:t>Tramo 5 · 1 min</a:t>
-            </a:r>
-          </a:p>
-          <a:p>
-            <a:pPr>
-              <a:spcBef>
-                <a:spcPts val="200"/>
-              </a:spcBef>
-            </a:pPr>
-            <a:r>
-              <a:rPr sz="1300" b="0" i="0">
-                <a:solidFill>
-                  <a:srgbClr val="333333"/>
-                </a:solidFill>
-                <a:latin typeface="Calibri"/>
-              </a:rPr>
-              <a:t>Impacto positivo con su número, negativo con su mitigación, siguiente paso.</a:t>
-            </a:r>
-          </a:p>
-        </p:txBody>
-      </p:sp>
-      <p:sp>
-        <p:nvSpPr>
-          <p:cNvPr id="26" name="Rounded Rectangle 25"/>
-          <p:cNvSpPr/>
-          <p:nvPr/>
-        </p:nvSpPr>
-        <p:spPr>
-          <a:xfrm>
-            <a:off x="457200" y="5628132"/>
-            <a:ext cx="11277295" cy="745236"/>
-          </a:xfrm>
-          <a:prstGeom prst="roundRect">
-            <a:avLst>
-              <a:gd name="adj" fmla="val 12000"/>
-            </a:avLst>
-          </a:prstGeom>
-          <a:solidFill>
-            <a:srgbClr val="E8F4FA"/>
-          </a:solidFill>
-          <a:ln>
-            <a:noFill/>
-          </a:ln>
-        </p:spPr>
-        <p:style>
-          <a:lnRef idx="1">
-            <a:schemeClr val="accent1"/>
-          </a:lnRef>
-          <a:fillRef idx="3">
-            <a:schemeClr val="accent1"/>
-          </a:fillRef>
-          <a:effectRef idx="2">
-            <a:schemeClr val="accent1"/>
-          </a:effectRef>
-          <a:fontRef idx="minor">
-            <a:schemeClr val="lt1"/>
-          </a:fontRef>
-        </p:style>
-        <p:txBody>
-          <a:bodyPr rtlCol="0" anchor="ctr"/>
-          <a:lstStyle/>
-          <a:p>
-            <a:pPr algn="ctr"/>
-          </a:p>
-        </p:txBody>
-      </p:sp>
-      <p:sp>
-        <p:nvSpPr>
-          <p:cNvPr id="27" name="Rounded Rectangle 26"/>
-          <p:cNvSpPr/>
-          <p:nvPr/>
-        </p:nvSpPr>
-        <p:spPr>
-          <a:xfrm>
-            <a:off x="594360" y="5781294"/>
-            <a:ext cx="438912" cy="438912"/>
-          </a:xfrm>
-          <a:prstGeom prst="roundRect">
-            <a:avLst>
-              <a:gd name="adj" fmla="val 12000"/>
-            </a:avLst>
-          </a:prstGeom>
-          <a:solidFill>
-            <a:srgbClr val="095292"/>
-          </a:solidFill>
-          <a:ln>
-            <a:noFill/>
-          </a:ln>
-        </p:spPr>
-        <p:style>
-          <a:lnRef idx="1">
-            <a:schemeClr val="accent1"/>
-          </a:lnRef>
-          <a:fillRef idx="3">
-            <a:schemeClr val="accent1"/>
-          </a:fillRef>
-          <a:effectRef idx="2">
-            <a:schemeClr val="accent1"/>
-          </a:effectRef>
-          <a:fontRef idx="minor">
-            <a:schemeClr val="lt1"/>
-          </a:fontRef>
-        </p:style>
-        <p:txBody>
-          <a:bodyPr rtlCol="0" anchor="ctr"/>
-          <a:lstStyle/>
-          <a:p>
-            <a:pPr algn="ctr"/>
-          </a:p>
-        </p:txBody>
-      </p:sp>
-      <p:sp>
-        <p:nvSpPr>
-          <p:cNvPr id="28" name="TextBox 27"/>
-          <p:cNvSpPr txBox="1"/>
-          <p:nvPr/>
-        </p:nvSpPr>
-        <p:spPr>
-          <a:xfrm>
-            <a:off x="594360" y="5781294"/>
-            <a:ext cx="438912" cy="438912"/>
-          </a:xfrm>
-          <a:prstGeom prst="rect">
-            <a:avLst/>
-          </a:prstGeom>
-          <a:noFill/>
-        </p:spPr>
-        <p:txBody>
-          <a:bodyPr wrap="square" anchor="ctr"/>
-          <a:lstStyle/>
-          <a:p>
-            <a:pPr algn="ctr"/>
-            <a:r>
-              <a:rPr sz="1600" b="1" i="0">
-                <a:solidFill>
-                  <a:srgbClr val="FFFFFF"/>
-                </a:solidFill>
-                <a:latin typeface="Calibri"/>
-              </a:rPr>
-              <a:t>6</a:t>
-            </a:r>
-          </a:p>
-        </p:txBody>
-      </p:sp>
-      <p:sp>
-        <p:nvSpPr>
-          <p:cNvPr id="29" name="TextBox 28"/>
-          <p:cNvSpPr txBox="1"/>
-          <p:nvPr/>
-        </p:nvSpPr>
-        <p:spPr>
-          <a:xfrm>
-            <a:off x="1188720" y="5719572"/>
-            <a:ext cx="10271455" cy="580644"/>
-          </a:xfrm>
-          <a:prstGeom prst="rect">
-            <a:avLst/>
-          </a:prstGeom>
-          <a:noFill/>
-        </p:spPr>
-        <p:txBody>
-          <a:bodyPr wrap="square" anchor="ctr"/>
-          <a:lstStyle/>
-          <a:p>
-            <a:r>
-              <a:rPr sz="1500" b="1" i="0">
-                <a:solidFill>
-                  <a:srgbClr val="095292"/>
-                </a:solidFill>
-                <a:latin typeface="Calibri"/>
-              </a:rPr>
-              <a:t>Preguntas · 3 min</a:t>
-            </a:r>
-          </a:p>
-          <a:p>
-            <a:pPr>
-              <a:spcBef>
-                <a:spcPts val="200"/>
-              </a:spcBef>
-            </a:pPr>
-            <a:r>
-              <a:rPr sz="1300" b="0" i="0">
-                <a:solidFill>
-                  <a:srgbClr val="333333"/>
-                </a:solidFill>
-                <a:latin typeface="Calibri"/>
-              </a:rPr>
-              <a:t>Una del curso y una del docente. </a:t>
-            </a:r>
-            <a:r>
-              <a:rPr sz="1300" b="1" i="0">
-                <a:solidFill>
-                  <a:srgbClr val="333333"/>
-                </a:solidFill>
-                <a:latin typeface="Calibri"/>
-              </a:rPr>
-              <a:t>Responde quien tiene el tramo.</a:t>
-            </a:r>
-          </a:p>
-        </p:txBody>
-      </p:sp>
-      <p:sp>
-        <p:nvSpPr>
-          <p:cNvPr id="30" name="TextBox 29"/>
           <p:cNvSpPr txBox="1"/>
           <p:nvPr/>
         </p:nvSpPr>
@@ -8208,7 +6697,7 @@
         <p:spPr>
           <a:xfrm>
             <a:off x="0" y="0"/>
-            <a:ext cx="12191695" cy="960120"/>
+            <a:ext cx="12191695" cy="1170432"/>
           </a:xfrm>
           <a:prstGeom prst="rect">
             <a:avLst/>
@@ -8250,7 +6739,7 @@
         </p:nvSpPr>
         <p:spPr>
           <a:xfrm>
-            <a:off x="0" y="960120"/>
+            <a:off x="0" y="1170432"/>
             <a:ext cx="12191695" cy="41148"/>
           </a:xfrm>
           <a:prstGeom prst="rect">
@@ -8294,7 +6783,7 @@
         <p:spPr>
           <a:xfrm>
             <a:off x="457200" y="164592"/>
-            <a:ext cx="11277295" cy="502920"/>
+            <a:ext cx="11277295" cy="384048"/>
           </a:xfrm>
           <a:prstGeom prst="rect">
             <a:avLst/>
@@ -8314,7 +6803,7 @@
                 </a:solidFill>
                 <a:latin typeface="Calibri"/>
               </a:rPr>
-              <a:t>Para la Clase 16</a:t>
+              <a:t>Taller de hoy: Exposición final del proyecto</a:t>
             </a:r>
           </a:p>
         </p:txBody>
@@ -8327,8 +6816,8 @@
         </p:nvSpPr>
         <p:spPr>
           <a:xfrm>
-            <a:off x="457200" y="1170432"/>
-            <a:ext cx="11277295" cy="5230368"/>
+            <a:off x="457200" y="566928"/>
+            <a:ext cx="11277295" cy="411480"/>
           </a:xfrm>
           <a:prstGeom prst="rect">
             <a:avLst/>
@@ -8341,189 +6830,428 @@
           </a:bodyPr>
           <a:lstStyle/>
           <a:p>
-            <a:pPr>
-              <a:spcAft>
-                <a:spcPts val="800"/>
-              </a:spcAft>
-            </a:pPr>
-            <a:r>
-              <a:rPr sz="2000" b="0" i="0">
-                <a:solidFill>
-                  <a:srgbClr val="333333"/>
-                </a:solidFill>
-                <a:latin typeface="Calibri"/>
-              </a:rPr>
-              <a:t>–   </a:t>
-            </a:r>
-            <a:r>
-              <a:rPr sz="2000" b="1" i="0">
-                <a:solidFill>
-                  <a:srgbClr val="333333"/>
-                </a:solidFill>
-                <a:latin typeface="Calibri"/>
-              </a:rPr>
-              <a:t>Trabajo dirigido:</a:t>
-            </a:r>
-            <a:r>
-              <a:rPr sz="2000" b="0" i="0">
-                <a:solidFill>
-                  <a:srgbClr val="333333"/>
-                </a:solidFill>
-                <a:latin typeface="Calibri"/>
-              </a:rPr>
-              <a:t> Valoración de presentaciones — completar la ficha de valoración de los otros cuatro equipos en el muro, si no quedó terminada en clase.</a:t>
-            </a:r>
-          </a:p>
-          <a:p>
-            <a:pPr>
-              <a:spcAft>
-                <a:spcPts val="800"/>
-              </a:spcAft>
-            </a:pPr>
-            <a:r>
-              <a:rPr sz="2000" b="0" i="0">
-                <a:solidFill>
-                  <a:srgbClr val="333333"/>
-                </a:solidFill>
-                <a:latin typeface="Calibri"/>
-              </a:rPr>
-              <a:t>–   </a:t>
-            </a:r>
-            <a:r>
-              <a:rPr sz="2000" b="1" i="0">
-                <a:solidFill>
-                  <a:srgbClr val="333333"/>
-                </a:solidFill>
-                <a:latin typeface="Calibri"/>
-              </a:rPr>
-              <a:t>Trabajo independiente:</a:t>
-            </a:r>
-            <a:r>
-              <a:rPr sz="2000" b="0" i="0">
-                <a:solidFill>
-                  <a:srgbClr val="333333"/>
-                </a:solidFill>
-                <a:latin typeface="Calibri"/>
-              </a:rPr>
-              <a:t> Ajustes del informe final: </a:t>
-            </a:r>
-            <a:r>
-              <a:rPr sz="2000" b="1" i="0">
-                <a:solidFill>
-                  <a:srgbClr val="333333"/>
-                </a:solidFill>
-                <a:latin typeface="Calibri"/>
-              </a:rPr>
-              <a:t>reunir las doce secciones</a:t>
-            </a:r>
-            <a:r>
-              <a:rPr sz="2000" b="0" i="0">
-                <a:solidFill>
-                  <a:srgbClr val="333333"/>
-                </a:solidFill>
-                <a:latin typeface="Calibri"/>
-              </a:rPr>
-              <a:t> en un solo documento, tomando lo que ya está escrito desde la sesión 3, y </a:t>
-            </a:r>
-            <a:r>
-              <a:rPr sz="2000" b="1" i="0">
-                <a:solidFill>
-                  <a:srgbClr val="333333"/>
-                </a:solidFill>
-                <a:latin typeface="Calibri"/>
-              </a:rPr>
-              <a:t>escribir el resumen de media página</a:t>
-            </a:r>
-            <a:r>
-              <a:rPr sz="2000" b="0" i="0">
-                <a:solidFill>
-                  <a:srgbClr val="333333"/>
-                </a:solidFill>
-                <a:latin typeface="Calibri"/>
-              </a:rPr>
-              <a:t>, que es lo único nuevo. Y una tarea corta que vale mucho: </a:t>
-            </a:r>
-            <a:r>
-              <a:rPr sz="2000" b="1" i="0">
-                <a:solidFill>
-                  <a:srgbClr val="333333"/>
-                </a:solidFill>
-                <a:latin typeface="Calibri"/>
-              </a:rPr>
-              <a:t>anotar lo que el curso no entendió</a:t>
-            </a:r>
-            <a:r>
-              <a:rPr sz="2000" b="0" i="0">
-                <a:solidFill>
-                  <a:srgbClr val="333333"/>
-                </a:solidFill>
-                <a:latin typeface="Calibri"/>
-              </a:rPr>
-              <a:t> hoy de su proyecto.</a:t>
-            </a:r>
-          </a:p>
-          <a:p>
-            <a:pPr>
-              <a:spcAft>
-                <a:spcPts val="800"/>
-              </a:spcAft>
-            </a:pPr>
-            <a:r>
-              <a:rPr sz="2000" b="0" i="0">
-                <a:solidFill>
-                  <a:srgbClr val="333333"/>
-                </a:solidFill>
-                <a:latin typeface="Calibri"/>
-              </a:rPr>
-              <a:t>–   </a:t>
-            </a:r>
-            <a:r>
-              <a:rPr sz="2000" b="1" i="0">
-                <a:solidFill>
-                  <a:srgbClr val="333333"/>
-                </a:solidFill>
-                <a:latin typeface="Calibri"/>
-              </a:rPr>
-              <a:t>Clase 16 · Socialización y evaluación final del curso</a:t>
-            </a:r>
-            <a:r>
-              <a:rPr sz="2000" b="0" i="0">
-                <a:solidFill>
-                  <a:srgbClr val="333333"/>
-                </a:solidFill>
-                <a:latin typeface="Calibri"/>
-              </a:rPr>
-              <a:t> — es la última: se </a:t>
-            </a:r>
-            <a:r>
-              <a:rPr sz="2000" b="1" i="0">
-                <a:solidFill>
-                  <a:srgbClr val="333333"/>
-                </a:solidFill>
-                <a:latin typeface="Calibri"/>
-              </a:rPr>
-              <a:t>entrega el informe final (20 %)</a:t>
-            </a:r>
-            <a:r>
-              <a:rPr sz="2000" b="0" i="0">
-                <a:solidFill>
-                  <a:srgbClr val="333333"/>
-                </a:solidFill>
-                <a:latin typeface="Calibri"/>
-              </a:rPr>
-              <a:t>, se socializa la galería de proyectos del curso y se hace la </a:t>
-            </a:r>
-            <a:r>
-              <a:rPr sz="2000" b="1" i="0">
-                <a:solidFill>
-                  <a:srgbClr val="333333"/>
-                </a:solidFill>
-                <a:latin typeface="Calibri"/>
-              </a:rPr>
-              <a:t>autoevaluación y coevaluación</a:t>
-            </a:r>
-            <a:r>
-              <a:rPr sz="2000" b="0" i="0">
+            <a:r>
+              <a:rPr sz="1400" b="0" i="0">
+                <a:solidFill>
+                  <a:srgbClr val="B8D8EE"/>
+                </a:solidFill>
+                <a:latin typeface="Calibri"/>
+              </a:rPr>
+              <a:t>60 min en equipos · 9 min de exposición + 3 de preguntas, por equipo · exposición de 9 min + ficha de valoración de los otros equipos</a:t>
+            </a:r>
+          </a:p>
+        </p:txBody>
+      </p:sp>
+      <p:sp>
+        <p:nvSpPr>
+          <p:cNvPr id="6" name="Rounded Rectangle 5"/>
+          <p:cNvSpPr/>
+          <p:nvPr/>
+        </p:nvSpPr>
+        <p:spPr>
+          <a:xfrm>
+            <a:off x="457200" y="1472184"/>
+            <a:ext cx="11277295" cy="566928"/>
+          </a:xfrm>
+          <a:prstGeom prst="roundRect">
+            <a:avLst>
+              <a:gd name="adj" fmla="val 12000"/>
+            </a:avLst>
+          </a:prstGeom>
+          <a:solidFill>
+            <a:srgbClr val="F2F2F2"/>
+          </a:solidFill>
+          <a:ln>
+            <a:noFill/>
+          </a:ln>
+        </p:spPr>
+        <p:style>
+          <a:lnRef idx="1">
+            <a:schemeClr val="accent1"/>
+          </a:lnRef>
+          <a:fillRef idx="3">
+            <a:schemeClr val="accent1"/>
+          </a:fillRef>
+          <a:effectRef idx="2">
+            <a:schemeClr val="accent1"/>
+          </a:effectRef>
+          <a:fontRef idx="minor">
+            <a:schemeClr val="lt1"/>
+          </a:fontRef>
+        </p:style>
+        <p:txBody>
+          <a:bodyPr rtlCol="0" anchor="ctr"/>
+          <a:lstStyle/>
+          <a:p>
+            <a:pPr algn="ctr"/>
+          </a:p>
+        </p:txBody>
+      </p:sp>
+      <p:sp>
+        <p:nvSpPr>
+          <p:cNvPr id="7" name="Rectangle 6"/>
+          <p:cNvSpPr/>
+          <p:nvPr/>
+        </p:nvSpPr>
+        <p:spPr>
+          <a:xfrm>
+            <a:off x="640080" y="1618487"/>
+            <a:ext cx="274320" cy="274320"/>
+          </a:xfrm>
+          <a:prstGeom prst="rect">
+            <a:avLst/>
+          </a:prstGeom>
+          <a:solidFill>
+            <a:srgbClr val="FFFFFF"/>
+          </a:solidFill>
+          <a:ln>
+            <a:solidFill>
+              <a:srgbClr val="333333"/>
+            </a:solidFill>
+          </a:ln>
+        </p:spPr>
+        <p:style>
+          <a:lnRef idx="1">
+            <a:schemeClr val="accent1"/>
+          </a:lnRef>
+          <a:fillRef idx="3">
+            <a:schemeClr val="accent1"/>
+          </a:fillRef>
+          <a:effectRef idx="2">
+            <a:schemeClr val="accent1"/>
+          </a:effectRef>
+          <a:fontRef idx="minor">
+            <a:schemeClr val="lt1"/>
+          </a:fontRef>
+        </p:style>
+        <p:txBody>
+          <a:bodyPr rtlCol="0" anchor="ctr"/>
+          <a:lstStyle/>
+          <a:p>
+            <a:pPr algn="ctr"/>
+          </a:p>
+        </p:txBody>
+      </p:sp>
+      <p:sp>
+        <p:nvSpPr>
+          <p:cNvPr id="8" name="Rectangle 7"/>
+          <p:cNvSpPr/>
+          <p:nvPr/>
+        </p:nvSpPr>
+        <p:spPr>
+          <a:xfrm>
+            <a:off x="640080" y="1618487"/>
+            <a:ext cx="73152" cy="274320"/>
+          </a:xfrm>
+          <a:prstGeom prst="rect">
+            <a:avLst/>
+          </a:prstGeom>
+          <a:solidFill>
+            <a:srgbClr val="269CCB"/>
+          </a:solidFill>
+          <a:ln>
+            <a:noFill/>
+          </a:ln>
+        </p:spPr>
+        <p:style>
+          <a:lnRef idx="1">
+            <a:schemeClr val="accent1"/>
+          </a:lnRef>
+          <a:fillRef idx="3">
+            <a:schemeClr val="accent1"/>
+          </a:fillRef>
+          <a:effectRef idx="2">
+            <a:schemeClr val="accent1"/>
+          </a:effectRef>
+          <a:fontRef idx="minor">
+            <a:schemeClr val="lt1"/>
+          </a:fontRef>
+        </p:style>
+        <p:txBody>
+          <a:bodyPr rtlCol="0" anchor="ctr"/>
+          <a:lstStyle/>
+          <a:p>
+            <a:pPr algn="ctr"/>
+          </a:p>
+        </p:txBody>
+      </p:sp>
+      <p:sp>
+        <p:nvSpPr>
+          <p:cNvPr id="9" name="TextBox 8"/>
+          <p:cNvSpPr txBox="1"/>
+          <p:nvPr/>
+        </p:nvSpPr>
+        <p:spPr>
+          <a:xfrm>
+            <a:off x="1097280" y="1563624"/>
+            <a:ext cx="10362895" cy="402336"/>
+          </a:xfrm>
+          <a:prstGeom prst="rect">
+            <a:avLst/>
+          </a:prstGeom>
+          <a:noFill/>
+        </p:spPr>
+        <p:txBody>
+          <a:bodyPr wrap="square" anchor="ctr"/>
+          <a:lstStyle/>
+          <a:p>
+            <a:r>
+              <a:rPr sz="1500" b="1" i="0">
+                <a:solidFill>
+                  <a:srgbClr val="333333"/>
+                </a:solidFill>
+                <a:latin typeface="Calibri"/>
+              </a:rPr>
+              <a:t>EL PROBLEMA CON SU CIFRA</a:t>
+            </a:r>
+            <a:r>
+              <a:rPr sz="1500" b="0" i="0">
+                <a:solidFill>
+                  <a:srgbClr val="333333"/>
+                </a:solidFill>
+                <a:latin typeface="Calibri"/>
+              </a:rPr>
+              <a:t> — Una frase y </a:t>
+            </a:r>
+            <a:r>
+              <a:rPr sz="1500" b="1" i="0">
+                <a:solidFill>
+                  <a:srgbClr val="333333"/>
+                </a:solidFill>
+                <a:latin typeface="Calibri"/>
+              </a:rPr>
+              <a:t>un número</a:t>
+            </a:r>
+            <a:r>
+              <a:rPr sz="1500" b="0" i="0">
+                <a:solidFill>
+                  <a:srgbClr val="333333"/>
+                </a:solidFill>
+                <a:latin typeface="Calibri"/>
+              </a:rPr>
+              <a:t>, con de dónde salió. </a:t>
+            </a:r>
+            <a:r>
+              <a:rPr sz="1500" b="1" i="0">
+                <a:solidFill>
+                  <a:srgbClr val="333333"/>
+                </a:solidFill>
+                <a:latin typeface="Calibri"/>
+              </a:rPr>
+              <a:t>Sin saludos ni presentaciones personales</a:t>
+            </a:r>
+            <a:r>
+              <a:rPr sz="1500" b="0" i="0">
+                <a:solidFill>
+                  <a:srgbClr val="333333"/>
+                </a:solidFill>
+                <a:latin typeface="Calibri"/>
+              </a:rPr>
+              <a:t>: el nombre del equipo está en la diapositiva.</a:t>
+            </a:r>
+          </a:p>
+        </p:txBody>
+      </p:sp>
+      <p:sp>
+        <p:nvSpPr>
+          <p:cNvPr id="10" name="Rounded Rectangle 9"/>
+          <p:cNvSpPr/>
+          <p:nvPr/>
+        </p:nvSpPr>
+        <p:spPr>
+          <a:xfrm>
+            <a:off x="457200" y="2148839"/>
+            <a:ext cx="11277295" cy="566928"/>
+          </a:xfrm>
+          <a:prstGeom prst="roundRect">
+            <a:avLst>
+              <a:gd name="adj" fmla="val 12000"/>
+            </a:avLst>
+          </a:prstGeom>
+          <a:solidFill>
+            <a:srgbClr val="F2F2F2"/>
+          </a:solidFill>
+          <a:ln>
+            <a:noFill/>
+          </a:ln>
+        </p:spPr>
+        <p:style>
+          <a:lnRef idx="1">
+            <a:schemeClr val="accent1"/>
+          </a:lnRef>
+          <a:fillRef idx="3">
+            <a:schemeClr val="accent1"/>
+          </a:fillRef>
+          <a:effectRef idx="2">
+            <a:schemeClr val="accent1"/>
+          </a:effectRef>
+          <a:fontRef idx="minor">
+            <a:schemeClr val="lt1"/>
+          </a:fontRef>
+        </p:style>
+        <p:txBody>
+          <a:bodyPr rtlCol="0" anchor="ctr"/>
+          <a:lstStyle/>
+          <a:p>
+            <a:pPr algn="ctr"/>
+          </a:p>
+        </p:txBody>
+      </p:sp>
+      <p:sp>
+        <p:nvSpPr>
+          <p:cNvPr id="11" name="Rectangle 10"/>
+          <p:cNvSpPr/>
+          <p:nvPr/>
+        </p:nvSpPr>
+        <p:spPr>
+          <a:xfrm>
+            <a:off x="640080" y="2295144"/>
+            <a:ext cx="274320" cy="274320"/>
+          </a:xfrm>
+          <a:prstGeom prst="rect">
+            <a:avLst/>
+          </a:prstGeom>
+          <a:solidFill>
+            <a:srgbClr val="FFFFFF"/>
+          </a:solidFill>
+          <a:ln>
+            <a:solidFill>
+              <a:srgbClr val="333333"/>
+            </a:solidFill>
+          </a:ln>
+        </p:spPr>
+        <p:style>
+          <a:lnRef idx="1">
+            <a:schemeClr val="accent1"/>
+          </a:lnRef>
+          <a:fillRef idx="3">
+            <a:schemeClr val="accent1"/>
+          </a:fillRef>
+          <a:effectRef idx="2">
+            <a:schemeClr val="accent1"/>
+          </a:effectRef>
+          <a:fontRef idx="minor">
+            <a:schemeClr val="lt1"/>
+          </a:fontRef>
+        </p:style>
+        <p:txBody>
+          <a:bodyPr rtlCol="0" anchor="ctr"/>
+          <a:lstStyle/>
+          <a:p>
+            <a:pPr algn="ctr"/>
+          </a:p>
+        </p:txBody>
+      </p:sp>
+      <p:sp>
+        <p:nvSpPr>
+          <p:cNvPr id="12" name="Rectangle 11"/>
+          <p:cNvSpPr/>
+          <p:nvPr/>
+        </p:nvSpPr>
+        <p:spPr>
+          <a:xfrm>
+            <a:off x="640080" y="2295144"/>
+            <a:ext cx="73152" cy="274320"/>
+          </a:xfrm>
+          <a:prstGeom prst="rect">
+            <a:avLst/>
+          </a:prstGeom>
+          <a:solidFill>
+            <a:srgbClr val="269CCB"/>
+          </a:solidFill>
+          <a:ln>
+            <a:noFill/>
+          </a:ln>
+        </p:spPr>
+        <p:style>
+          <a:lnRef idx="1">
+            <a:schemeClr val="accent1"/>
+          </a:lnRef>
+          <a:fillRef idx="3">
+            <a:schemeClr val="accent1"/>
+          </a:fillRef>
+          <a:effectRef idx="2">
+            <a:schemeClr val="accent1"/>
+          </a:effectRef>
+          <a:fontRef idx="minor">
+            <a:schemeClr val="lt1"/>
+          </a:fontRef>
+        </p:style>
+        <p:txBody>
+          <a:bodyPr rtlCol="0" anchor="ctr"/>
+          <a:lstStyle/>
+          <a:p>
+            <a:pPr algn="ctr"/>
+          </a:p>
+        </p:txBody>
+      </p:sp>
+      <p:sp>
+        <p:nvSpPr>
+          <p:cNvPr id="13" name="TextBox 12"/>
+          <p:cNvSpPr txBox="1"/>
+          <p:nvPr/>
+        </p:nvSpPr>
+        <p:spPr>
+          <a:xfrm>
+            <a:off x="1097280" y="2240279"/>
+            <a:ext cx="10362895" cy="402336"/>
+          </a:xfrm>
+          <a:prstGeom prst="rect">
+            <a:avLst/>
+          </a:prstGeom>
+          <a:noFill/>
+        </p:spPr>
+        <p:txBody>
+          <a:bodyPr wrap="square" anchor="ctr"/>
+          <a:lstStyle/>
+          <a:p>
+            <a:r>
+              <a:rPr sz="1500" b="1" i="0">
+                <a:solidFill>
+                  <a:srgbClr val="333333"/>
+                </a:solidFill>
+                <a:latin typeface="Calibri"/>
+              </a:rPr>
+              <a:t>LOS AFECTADOS Y LA DECISIÓN</a:t>
+            </a:r>
+            <a:r>
+              <a:rPr sz="1500" b="0" i="0">
+                <a:solidFill>
+                  <a:srgbClr val="333333"/>
+                </a:solidFill>
+                <a:latin typeface="Calibri"/>
+              </a:rPr>
+              <a:t> — Quiénes son los afectados —</a:t>
+            </a:r>
+            <a:r>
+              <a:rPr sz="1500" b="1" i="0">
+                <a:solidFill>
+                  <a:srgbClr val="333333"/>
+                </a:solidFill>
+                <a:latin typeface="Calibri"/>
+              </a:rPr>
+              <a:t>incluido uno que no es usuario</a:t>
+            </a:r>
+            <a:r>
+              <a:rPr sz="1500" b="0" i="0">
+                <a:solidFill>
+                  <a:srgbClr val="333333"/>
+                </a:solidFill>
+                <a:latin typeface="Calibri"/>
+              </a:rPr>
+              <a:t>— y qué alternativa se eligió, </a:t>
+            </a:r>
+            <a:r>
+              <a:rPr sz="1500" b="1" i="0">
+                <a:solidFill>
+                  <a:srgbClr val="333333"/>
+                </a:solidFill>
+                <a:latin typeface="Calibri"/>
+              </a:rPr>
+              <a:t>diciendo qué se sacrificó</a:t>
+            </a:r>
+            <a:r>
+              <a:rPr sz="1500" b="0" i="0">
                 <a:solidFill>
                   <a:srgbClr val="333333"/>
                 </a:solidFill>
@@ -8532,97 +7260,623 @@
               <a:t>.</a:t>
             </a:r>
           </a:p>
-          <a:p>
-            <a:pPr>
-              <a:spcAft>
-                <a:spcPts val="800"/>
-              </a:spcAft>
-            </a:pPr>
-            <a:r>
-              <a:rPr sz="2000" b="0" i="0">
-                <a:solidFill>
-                  <a:srgbClr val="333333"/>
-                </a:solidFill>
-                <a:latin typeface="Calibri"/>
-              </a:rPr>
-              <a:t>–   </a:t>
-            </a:r>
-            <a:r>
-              <a:rPr sz="2000" b="1" i="0">
-                <a:solidFill>
-                  <a:srgbClr val="333333"/>
-                </a:solidFill>
-                <a:latin typeface="Calibri"/>
-              </a:rPr>
-              <a:t>Aviso:</a:t>
-            </a:r>
-            <a:r>
-              <a:rPr sz="2000" b="0" i="0">
-                <a:solidFill>
-                  <a:srgbClr val="333333"/>
-                </a:solidFill>
-                <a:latin typeface="Calibri"/>
-              </a:rPr>
-              <a:t> El informe se entrega </a:t>
-            </a:r>
-            <a:r>
-              <a:rPr sz="2000" b="1" i="0">
-                <a:solidFill>
-                  <a:srgbClr val="333333"/>
-                </a:solidFill>
-                <a:latin typeface="Calibri"/>
-              </a:rPr>
-              <a:t>en la Clase 16, dentro de la clase</a:t>
-            </a:r>
-            <a:r>
-              <a:rPr sz="2000" b="0" i="0">
-                <a:solidFill>
-                  <a:srgbClr val="333333"/>
-                </a:solidFill>
-                <a:latin typeface="Calibri"/>
-              </a:rPr>
-              <a:t>: se revisa y se completa ahí mismo, con la lista de verificación. Lleguen con el documento armado —no con las secciones dispersas en cinco archivos— porque los 24 minutos de revisión no alcanzan para copiar y pegar el curso entero.</a:t>
-            </a:r>
-          </a:p>
-          <a:p>
-            <a:pPr>
-              <a:spcAft>
-                <a:spcPts val="800"/>
-              </a:spcAft>
-            </a:pPr>
-            <a:r>
-              <a:rPr sz="2000" b="0" i="0">
-                <a:solidFill>
-                  <a:srgbClr val="333333"/>
-                </a:solidFill>
-                <a:latin typeface="Calibri"/>
-              </a:rPr>
-              <a:t>–   </a:t>
-            </a:r>
-            <a:r>
-              <a:rPr sz="2000" b="1" i="0">
-                <a:solidFill>
-                  <a:srgbClr val="333333"/>
-                </a:solidFill>
-                <a:latin typeface="Calibri"/>
-              </a:rPr>
-              <a:t>Antes de salir:</a:t>
-            </a:r>
-            <a:r>
-              <a:rPr sz="2000" b="0" i="0">
-                <a:solidFill>
-                  <a:srgbClr val="333333"/>
-                </a:solidFill>
-                <a:latin typeface="Calibri"/>
-              </a:rPr>
-              <a:t> el enlace del documento del equipo en el chat, con permiso de lectura para el docente, y el nombre del vocero de hoy.</a:t>
-            </a:r>
-          </a:p>
-        </p:txBody>
-      </p:sp>
-      <p:sp>
-        <p:nvSpPr>
-          <p:cNvPr id="6" name="TextBox 5"/>
+        </p:txBody>
+      </p:sp>
+      <p:sp>
+        <p:nvSpPr>
+          <p:cNvPr id="14" name="Rounded Rectangle 13"/>
+          <p:cNvSpPr/>
+          <p:nvPr/>
+        </p:nvSpPr>
+        <p:spPr>
+          <a:xfrm>
+            <a:off x="457200" y="2825496"/>
+            <a:ext cx="11277295" cy="566928"/>
+          </a:xfrm>
+          <a:prstGeom prst="roundRect">
+            <a:avLst>
+              <a:gd name="adj" fmla="val 12000"/>
+            </a:avLst>
+          </a:prstGeom>
+          <a:solidFill>
+            <a:srgbClr val="F2F2F2"/>
+          </a:solidFill>
+          <a:ln>
+            <a:noFill/>
+          </a:ln>
+        </p:spPr>
+        <p:style>
+          <a:lnRef idx="1">
+            <a:schemeClr val="accent1"/>
+          </a:lnRef>
+          <a:fillRef idx="3">
+            <a:schemeClr val="accent1"/>
+          </a:fillRef>
+          <a:effectRef idx="2">
+            <a:schemeClr val="accent1"/>
+          </a:effectRef>
+          <a:fontRef idx="minor">
+            <a:schemeClr val="lt1"/>
+          </a:fontRef>
+        </p:style>
+        <p:txBody>
+          <a:bodyPr rtlCol="0" anchor="ctr"/>
+          <a:lstStyle/>
+          <a:p>
+            <a:pPr algn="ctr"/>
+          </a:p>
+        </p:txBody>
+      </p:sp>
+      <p:sp>
+        <p:nvSpPr>
+          <p:cNvPr id="15" name="Rectangle 14"/>
+          <p:cNvSpPr/>
+          <p:nvPr/>
+        </p:nvSpPr>
+        <p:spPr>
+          <a:xfrm>
+            <a:off x="640080" y="2971800"/>
+            <a:ext cx="274320" cy="274320"/>
+          </a:xfrm>
+          <a:prstGeom prst="rect">
+            <a:avLst/>
+          </a:prstGeom>
+          <a:solidFill>
+            <a:srgbClr val="FFFFFF"/>
+          </a:solidFill>
+          <a:ln>
+            <a:solidFill>
+              <a:srgbClr val="333333"/>
+            </a:solidFill>
+          </a:ln>
+        </p:spPr>
+        <p:style>
+          <a:lnRef idx="1">
+            <a:schemeClr val="accent1"/>
+          </a:lnRef>
+          <a:fillRef idx="3">
+            <a:schemeClr val="accent1"/>
+          </a:fillRef>
+          <a:effectRef idx="2">
+            <a:schemeClr val="accent1"/>
+          </a:effectRef>
+          <a:fontRef idx="minor">
+            <a:schemeClr val="lt1"/>
+          </a:fontRef>
+        </p:style>
+        <p:txBody>
+          <a:bodyPr rtlCol="0" anchor="ctr"/>
+          <a:lstStyle/>
+          <a:p>
+            <a:pPr algn="ctr"/>
+          </a:p>
+        </p:txBody>
+      </p:sp>
+      <p:sp>
+        <p:nvSpPr>
+          <p:cNvPr id="16" name="Rectangle 15"/>
+          <p:cNvSpPr/>
+          <p:nvPr/>
+        </p:nvSpPr>
+        <p:spPr>
+          <a:xfrm>
+            <a:off x="640080" y="2971800"/>
+            <a:ext cx="73152" cy="274320"/>
+          </a:xfrm>
+          <a:prstGeom prst="rect">
+            <a:avLst/>
+          </a:prstGeom>
+          <a:solidFill>
+            <a:srgbClr val="269CCB"/>
+          </a:solidFill>
+          <a:ln>
+            <a:noFill/>
+          </a:ln>
+        </p:spPr>
+        <p:style>
+          <a:lnRef idx="1">
+            <a:schemeClr val="accent1"/>
+          </a:lnRef>
+          <a:fillRef idx="3">
+            <a:schemeClr val="accent1"/>
+          </a:fillRef>
+          <a:effectRef idx="2">
+            <a:schemeClr val="accent1"/>
+          </a:effectRef>
+          <a:fontRef idx="minor">
+            <a:schemeClr val="lt1"/>
+          </a:fontRef>
+        </p:style>
+        <p:txBody>
+          <a:bodyPr rtlCol="0" anchor="ctr"/>
+          <a:lstStyle/>
+          <a:p>
+            <a:pPr algn="ctr"/>
+          </a:p>
+        </p:txBody>
+      </p:sp>
+      <p:sp>
+        <p:nvSpPr>
+          <p:cNvPr id="17" name="TextBox 16"/>
+          <p:cNvSpPr txBox="1"/>
+          <p:nvPr/>
+        </p:nvSpPr>
+        <p:spPr>
+          <a:xfrm>
+            <a:off x="1097280" y="2916936"/>
+            <a:ext cx="10362895" cy="402336"/>
+          </a:xfrm>
+          <a:prstGeom prst="rect">
+            <a:avLst/>
+          </a:prstGeom>
+          <a:noFill/>
+        </p:spPr>
+        <p:txBody>
+          <a:bodyPr wrap="square" anchor="ctr"/>
+          <a:lstStyle/>
+          <a:p>
+            <a:r>
+              <a:rPr sz="1500" b="1" i="0">
+                <a:solidFill>
+                  <a:srgbClr val="333333"/>
+                </a:solidFill>
+                <a:latin typeface="Calibri"/>
+              </a:rPr>
+              <a:t>LA SOLUCIÓN Y EL PROTOTIPO EN VIVO</a:t>
+            </a:r>
+            <a:r>
+              <a:rPr sz="1500" b="0" i="0">
+                <a:solidFill>
+                  <a:srgbClr val="333333"/>
+                </a:solidFill>
+                <a:latin typeface="Calibri"/>
+              </a:rPr>
+              <a:t> — Un recorrido de </a:t>
+            </a:r>
+            <a:r>
+              <a:rPr sz="1500" b="1" i="0">
+                <a:solidFill>
+                  <a:srgbClr val="333333"/>
+                </a:solidFill>
+                <a:latin typeface="Calibri"/>
+              </a:rPr>
+              <a:t>tres pasos</a:t>
+            </a:r>
+            <a:r>
+              <a:rPr sz="1500" b="0" i="0">
+                <a:solidFill>
+                  <a:srgbClr val="333333"/>
+                </a:solidFill>
+                <a:latin typeface="Calibri"/>
+              </a:rPr>
+              <a:t> mostrando </a:t>
+            </a:r>
+            <a:r>
+              <a:rPr sz="1500" b="1" i="0">
+                <a:solidFill>
+                  <a:srgbClr val="333333"/>
+                </a:solidFill>
+                <a:latin typeface="Calibri"/>
+              </a:rPr>
+              <a:t>una tarea cumpliéndose</a:t>
+            </a:r>
+            <a:r>
+              <a:rPr sz="1500" b="0" i="0">
+                <a:solidFill>
+                  <a:srgbClr val="333333"/>
+                </a:solidFill>
+                <a:latin typeface="Calibri"/>
+              </a:rPr>
+              <a:t>. Narra una persona y maneja la pantalla otra.</a:t>
+            </a:r>
+          </a:p>
+        </p:txBody>
+      </p:sp>
+      <p:sp>
+        <p:nvSpPr>
+          <p:cNvPr id="18" name="Rounded Rectangle 17"/>
+          <p:cNvSpPr/>
+          <p:nvPr/>
+        </p:nvSpPr>
+        <p:spPr>
+          <a:xfrm>
+            <a:off x="457200" y="3502152"/>
+            <a:ext cx="11277295" cy="566928"/>
+          </a:xfrm>
+          <a:prstGeom prst="roundRect">
+            <a:avLst>
+              <a:gd name="adj" fmla="val 12000"/>
+            </a:avLst>
+          </a:prstGeom>
+          <a:solidFill>
+            <a:srgbClr val="F2F2F2"/>
+          </a:solidFill>
+          <a:ln>
+            <a:noFill/>
+          </a:ln>
+        </p:spPr>
+        <p:style>
+          <a:lnRef idx="1">
+            <a:schemeClr val="accent1"/>
+          </a:lnRef>
+          <a:fillRef idx="3">
+            <a:schemeClr val="accent1"/>
+          </a:fillRef>
+          <a:effectRef idx="2">
+            <a:schemeClr val="accent1"/>
+          </a:effectRef>
+          <a:fontRef idx="minor">
+            <a:schemeClr val="lt1"/>
+          </a:fontRef>
+        </p:style>
+        <p:txBody>
+          <a:bodyPr rtlCol="0" anchor="ctr"/>
+          <a:lstStyle/>
+          <a:p>
+            <a:pPr algn="ctr"/>
+          </a:p>
+        </p:txBody>
+      </p:sp>
+      <p:sp>
+        <p:nvSpPr>
+          <p:cNvPr id="19" name="Rectangle 18"/>
+          <p:cNvSpPr/>
+          <p:nvPr/>
+        </p:nvSpPr>
+        <p:spPr>
+          <a:xfrm>
+            <a:off x="640080" y="3648456"/>
+            <a:ext cx="274320" cy="274320"/>
+          </a:xfrm>
+          <a:prstGeom prst="rect">
+            <a:avLst/>
+          </a:prstGeom>
+          <a:solidFill>
+            <a:srgbClr val="FFFFFF"/>
+          </a:solidFill>
+          <a:ln>
+            <a:solidFill>
+              <a:srgbClr val="333333"/>
+            </a:solidFill>
+          </a:ln>
+        </p:spPr>
+        <p:style>
+          <a:lnRef idx="1">
+            <a:schemeClr val="accent1"/>
+          </a:lnRef>
+          <a:fillRef idx="3">
+            <a:schemeClr val="accent1"/>
+          </a:fillRef>
+          <a:effectRef idx="2">
+            <a:schemeClr val="accent1"/>
+          </a:effectRef>
+          <a:fontRef idx="minor">
+            <a:schemeClr val="lt1"/>
+          </a:fontRef>
+        </p:style>
+        <p:txBody>
+          <a:bodyPr rtlCol="0" anchor="ctr"/>
+          <a:lstStyle/>
+          <a:p>
+            <a:pPr algn="ctr"/>
+          </a:p>
+        </p:txBody>
+      </p:sp>
+      <p:sp>
+        <p:nvSpPr>
+          <p:cNvPr id="20" name="Rectangle 19"/>
+          <p:cNvSpPr/>
+          <p:nvPr/>
+        </p:nvSpPr>
+        <p:spPr>
+          <a:xfrm>
+            <a:off x="640080" y="3648456"/>
+            <a:ext cx="73152" cy="274320"/>
+          </a:xfrm>
+          <a:prstGeom prst="rect">
+            <a:avLst/>
+          </a:prstGeom>
+          <a:solidFill>
+            <a:srgbClr val="269CCB"/>
+          </a:solidFill>
+          <a:ln>
+            <a:noFill/>
+          </a:ln>
+        </p:spPr>
+        <p:style>
+          <a:lnRef idx="1">
+            <a:schemeClr val="accent1"/>
+          </a:lnRef>
+          <a:fillRef idx="3">
+            <a:schemeClr val="accent1"/>
+          </a:fillRef>
+          <a:effectRef idx="2">
+            <a:schemeClr val="accent1"/>
+          </a:effectRef>
+          <a:fontRef idx="minor">
+            <a:schemeClr val="lt1"/>
+          </a:fontRef>
+        </p:style>
+        <p:txBody>
+          <a:bodyPr rtlCol="0" anchor="ctr"/>
+          <a:lstStyle/>
+          <a:p>
+            <a:pPr algn="ctr"/>
+          </a:p>
+        </p:txBody>
+      </p:sp>
+      <p:sp>
+        <p:nvSpPr>
+          <p:cNvPr id="21" name="TextBox 20"/>
+          <p:cNvSpPr txBox="1"/>
+          <p:nvPr/>
+        </p:nvSpPr>
+        <p:spPr>
+          <a:xfrm>
+            <a:off x="1097280" y="3593592"/>
+            <a:ext cx="10362895" cy="402336"/>
+          </a:xfrm>
+          <a:prstGeom prst="rect">
+            <a:avLst/>
+          </a:prstGeom>
+          <a:noFill/>
+        </p:spPr>
+        <p:txBody>
+          <a:bodyPr wrap="square" anchor="ctr"/>
+          <a:lstStyle/>
+          <a:p>
+            <a:r>
+              <a:rPr sz="1500" b="1" i="0">
+                <a:solidFill>
+                  <a:srgbClr val="333333"/>
+                </a:solidFill>
+                <a:latin typeface="Calibri"/>
+              </a:rPr>
+              <a:t>LO QUE FALLÓ Y LO QUE APRENDIMOS</a:t>
+            </a:r>
+            <a:r>
+              <a:rPr sz="1500" b="0" i="0">
+                <a:solidFill>
+                  <a:srgbClr val="333333"/>
+                </a:solidFill>
+                <a:latin typeface="Calibri"/>
+              </a:rPr>
+              <a:t> — Los hallazgos con personas reales, qué se arregló y </a:t>
+            </a:r>
+            <a:r>
+              <a:rPr sz="1500" b="1" i="0">
+                <a:solidFill>
+                  <a:srgbClr val="333333"/>
+                </a:solidFill>
+                <a:latin typeface="Calibri"/>
+              </a:rPr>
+              <a:t>qué se decidió no arreglar</a:t>
+            </a:r>
+            <a:r>
+              <a:rPr sz="1500" b="0" i="0">
+                <a:solidFill>
+                  <a:srgbClr val="333333"/>
+                </a:solidFill>
+                <a:latin typeface="Calibri"/>
+              </a:rPr>
+              <a:t>, con el motivo.</a:t>
+            </a:r>
+          </a:p>
+        </p:txBody>
+      </p:sp>
+      <p:sp>
+        <p:nvSpPr>
+          <p:cNvPr id="22" name="Rounded Rectangle 21"/>
+          <p:cNvSpPr/>
+          <p:nvPr/>
+        </p:nvSpPr>
+        <p:spPr>
+          <a:xfrm>
+            <a:off x="457200" y="4178808"/>
+            <a:ext cx="11277295" cy="566928"/>
+          </a:xfrm>
+          <a:prstGeom prst="roundRect">
+            <a:avLst>
+              <a:gd name="adj" fmla="val 12000"/>
+            </a:avLst>
+          </a:prstGeom>
+          <a:solidFill>
+            <a:srgbClr val="F2F2F2"/>
+          </a:solidFill>
+          <a:ln>
+            <a:noFill/>
+          </a:ln>
+        </p:spPr>
+        <p:style>
+          <a:lnRef idx="1">
+            <a:schemeClr val="accent1"/>
+          </a:lnRef>
+          <a:fillRef idx="3">
+            <a:schemeClr val="accent1"/>
+          </a:fillRef>
+          <a:effectRef idx="2">
+            <a:schemeClr val="accent1"/>
+          </a:effectRef>
+          <a:fontRef idx="minor">
+            <a:schemeClr val="lt1"/>
+          </a:fontRef>
+        </p:style>
+        <p:txBody>
+          <a:bodyPr rtlCol="0" anchor="ctr"/>
+          <a:lstStyle/>
+          <a:p>
+            <a:pPr algn="ctr"/>
+          </a:p>
+        </p:txBody>
+      </p:sp>
+      <p:sp>
+        <p:nvSpPr>
+          <p:cNvPr id="23" name="Rectangle 22"/>
+          <p:cNvSpPr/>
+          <p:nvPr/>
+        </p:nvSpPr>
+        <p:spPr>
+          <a:xfrm>
+            <a:off x="640080" y="4325112"/>
+            <a:ext cx="274320" cy="274320"/>
+          </a:xfrm>
+          <a:prstGeom prst="rect">
+            <a:avLst/>
+          </a:prstGeom>
+          <a:solidFill>
+            <a:srgbClr val="FFFFFF"/>
+          </a:solidFill>
+          <a:ln>
+            <a:solidFill>
+              <a:srgbClr val="333333"/>
+            </a:solidFill>
+          </a:ln>
+        </p:spPr>
+        <p:style>
+          <a:lnRef idx="1">
+            <a:schemeClr val="accent1"/>
+          </a:lnRef>
+          <a:fillRef idx="3">
+            <a:schemeClr val="accent1"/>
+          </a:fillRef>
+          <a:effectRef idx="2">
+            <a:schemeClr val="accent1"/>
+          </a:effectRef>
+          <a:fontRef idx="minor">
+            <a:schemeClr val="lt1"/>
+          </a:fontRef>
+        </p:style>
+        <p:txBody>
+          <a:bodyPr rtlCol="0" anchor="ctr"/>
+          <a:lstStyle/>
+          <a:p>
+            <a:pPr algn="ctr"/>
+          </a:p>
+        </p:txBody>
+      </p:sp>
+      <p:sp>
+        <p:nvSpPr>
+          <p:cNvPr id="24" name="Rectangle 23"/>
+          <p:cNvSpPr/>
+          <p:nvPr/>
+        </p:nvSpPr>
+        <p:spPr>
+          <a:xfrm>
+            <a:off x="640080" y="4325112"/>
+            <a:ext cx="73152" cy="274320"/>
+          </a:xfrm>
+          <a:prstGeom prst="rect">
+            <a:avLst/>
+          </a:prstGeom>
+          <a:solidFill>
+            <a:srgbClr val="269CCB"/>
+          </a:solidFill>
+          <a:ln>
+            <a:noFill/>
+          </a:ln>
+        </p:spPr>
+        <p:style>
+          <a:lnRef idx="1">
+            <a:schemeClr val="accent1"/>
+          </a:lnRef>
+          <a:fillRef idx="3">
+            <a:schemeClr val="accent1"/>
+          </a:fillRef>
+          <a:effectRef idx="2">
+            <a:schemeClr val="accent1"/>
+          </a:effectRef>
+          <a:fontRef idx="minor">
+            <a:schemeClr val="lt1"/>
+          </a:fontRef>
+        </p:style>
+        <p:txBody>
+          <a:bodyPr rtlCol="0" anchor="ctr"/>
+          <a:lstStyle/>
+          <a:p>
+            <a:pPr algn="ctr"/>
+          </a:p>
+        </p:txBody>
+      </p:sp>
+      <p:sp>
+        <p:nvSpPr>
+          <p:cNvPr id="25" name="TextBox 24"/>
+          <p:cNvSpPr txBox="1"/>
+          <p:nvPr/>
+        </p:nvSpPr>
+        <p:spPr>
+          <a:xfrm>
+            <a:off x="1097280" y="4270248"/>
+            <a:ext cx="10362895" cy="402336"/>
+          </a:xfrm>
+          <a:prstGeom prst="rect">
+            <a:avLst/>
+          </a:prstGeom>
+          <a:noFill/>
+        </p:spPr>
+        <p:txBody>
+          <a:bodyPr wrap="square" anchor="ctr"/>
+          <a:lstStyle/>
+          <a:p>
+            <a:r>
+              <a:rPr sz="1500" b="1" i="0">
+                <a:solidFill>
+                  <a:srgbClr val="333333"/>
+                </a:solidFill>
+                <a:latin typeface="Calibri"/>
+              </a:rPr>
+              <a:t>IMPACTO Y SIGUIENTE PASO</a:t>
+            </a:r>
+            <a:r>
+              <a:rPr sz="1500" b="0" i="0">
+                <a:solidFill>
+                  <a:srgbClr val="333333"/>
+                </a:solidFill>
+                <a:latin typeface="Calibri"/>
+              </a:rPr>
+              <a:t> — El impacto positivo </a:t>
+            </a:r>
+            <a:r>
+              <a:rPr sz="1500" b="1" i="0">
+                <a:solidFill>
+                  <a:srgbClr val="333333"/>
+                </a:solidFill>
+                <a:latin typeface="Calibri"/>
+              </a:rPr>
+              <a:t>con su número</a:t>
+            </a:r>
+            <a:r>
+              <a:rPr sz="1500" b="0" i="0">
+                <a:solidFill>
+                  <a:srgbClr val="333333"/>
+                </a:solidFill>
+                <a:latin typeface="Calibri"/>
+              </a:rPr>
+              <a:t> y el negativo </a:t>
+            </a:r>
+            <a:r>
+              <a:rPr sz="1500" b="1" i="0">
+                <a:solidFill>
+                  <a:srgbClr val="333333"/>
+                </a:solidFill>
+                <a:latin typeface="Calibri"/>
+              </a:rPr>
+              <a:t>con su mitigación</a:t>
+            </a:r>
+            <a:r>
+              <a:rPr sz="1500" b="0" i="0">
+                <a:solidFill>
+                  <a:srgbClr val="333333"/>
+                </a:solidFill>
+                <a:latin typeface="Calibri"/>
+              </a:rPr>
+              <a:t>. Qué haría quien continúe el proyecto.</a:t>
+            </a:r>
+          </a:p>
+        </p:txBody>
+      </p:sp>
+      <p:sp>
+        <p:nvSpPr>
+          <p:cNvPr id="26" name="TextBox 25"/>
           <p:cNvSpPr txBox="1"/>
           <p:nvPr/>
         </p:nvSpPr>
@@ -9462,6 +8716,1738 @@
 </file>
 
 <file path=ppt/slides/slide20.xml><?xml version="1.0" encoding="utf-8"?>
+<p:sld xmlns:a="http://schemas.openxmlformats.org/drawingml/2006/main" xmlns:p="http://schemas.openxmlformats.org/presentationml/2006/main" xmlns:r="http://schemas.openxmlformats.org/officeDocument/2006/relationships">
+  <p:cSld>
+    <p:bg>
+      <p:bgPr>
+        <a:solidFill>
+          <a:srgbClr val="FFFFFF"/>
+        </a:solidFill>
+        <a:effectLst/>
+      </p:bgPr>
+    </p:bg>
+    <p:spTree>
+      <p:nvGrpSpPr>
+        <p:cNvPr id="1" name=""/>
+        <p:cNvGrpSpPr/>
+        <p:nvPr/>
+      </p:nvGrpSpPr>
+      <p:grpSpPr/>
+      <p:sp>
+        <p:nvSpPr>
+          <p:cNvPr id="2" name="Rectangle 1"/>
+          <p:cNvSpPr/>
+          <p:nvPr/>
+        </p:nvSpPr>
+        <p:spPr>
+          <a:xfrm>
+            <a:off x="0" y="0"/>
+            <a:ext cx="12191695" cy="1170432"/>
+          </a:xfrm>
+          <a:prstGeom prst="rect">
+            <a:avLst/>
+          </a:prstGeom>
+          <a:solidFill>
+            <a:srgbClr val="095292"/>
+          </a:solidFill>
+          <a:ln>
+            <a:noFill/>
+          </a:ln>
+        </p:spPr>
+        <p:style>
+          <a:lnRef idx="1">
+            <a:schemeClr val="accent1"/>
+          </a:lnRef>
+          <a:fillRef idx="3">
+            <a:schemeClr val="accent1"/>
+          </a:fillRef>
+          <a:effectRef idx="2">
+            <a:schemeClr val="accent1"/>
+          </a:effectRef>
+          <a:fontRef idx="minor">
+            <a:schemeClr val="lt1"/>
+          </a:fontRef>
+        </p:style>
+        <p:txBody>
+          <a:bodyPr rtlCol="0" anchor="ctr"/>
+          <a:lstStyle/>
+          <a:p>
+            <a:pPr algn="ctr"/>
+          </a:p>
+        </p:txBody>
+      </p:sp>
+      <p:sp>
+        <p:nvSpPr>
+          <p:cNvPr id="3" name="Rectangle 2"/>
+          <p:cNvSpPr/>
+          <p:nvPr/>
+        </p:nvSpPr>
+        <p:spPr>
+          <a:xfrm>
+            <a:off x="0" y="1170432"/>
+            <a:ext cx="12191695" cy="41148"/>
+          </a:xfrm>
+          <a:prstGeom prst="rect">
+            <a:avLst/>
+          </a:prstGeom>
+          <a:solidFill>
+            <a:srgbClr val="FFD000"/>
+          </a:solidFill>
+          <a:ln>
+            <a:noFill/>
+          </a:ln>
+        </p:spPr>
+        <p:style>
+          <a:lnRef idx="1">
+            <a:schemeClr val="accent1"/>
+          </a:lnRef>
+          <a:fillRef idx="3">
+            <a:schemeClr val="accent1"/>
+          </a:fillRef>
+          <a:effectRef idx="2">
+            <a:schemeClr val="accent1"/>
+          </a:effectRef>
+          <a:fontRef idx="minor">
+            <a:schemeClr val="lt1"/>
+          </a:fontRef>
+        </p:style>
+        <p:txBody>
+          <a:bodyPr rtlCol="0" anchor="ctr"/>
+          <a:lstStyle/>
+          <a:p>
+            <a:pPr algn="ctr"/>
+          </a:p>
+        </p:txBody>
+      </p:sp>
+      <p:sp>
+        <p:nvSpPr>
+          <p:cNvPr id="4" name="TextBox 3"/>
+          <p:cNvSpPr txBox="1"/>
+          <p:nvPr/>
+        </p:nvSpPr>
+        <p:spPr>
+          <a:xfrm>
+            <a:off x="457200" y="164592"/>
+            <a:ext cx="11277295" cy="384048"/>
+          </a:xfrm>
+          <a:prstGeom prst="rect">
+            <a:avLst/>
+          </a:prstGeom>
+          <a:noFill/>
+        </p:spPr>
+        <p:txBody>
+          <a:bodyPr wrap="square">
+            <a:spAutoFit/>
+          </a:bodyPr>
+          <a:lstStyle/>
+          <a:p>
+            <a:r>
+              <a:rPr sz="2600" b="1" i="0">
+                <a:solidFill>
+                  <a:srgbClr val="FFFFFF"/>
+                </a:solidFill>
+                <a:latin typeface="Calibri"/>
+              </a:rPr>
+              <a:t>Cómo se expone en 9 minutos</a:t>
+            </a:r>
+          </a:p>
+        </p:txBody>
+      </p:sp>
+      <p:sp>
+        <p:nvSpPr>
+          <p:cNvPr id="5" name="TextBox 4"/>
+          <p:cNvSpPr txBox="1"/>
+          <p:nvPr/>
+        </p:nvSpPr>
+        <p:spPr>
+          <a:xfrm>
+            <a:off x="457200" y="566928"/>
+            <a:ext cx="11277295" cy="411480"/>
+          </a:xfrm>
+          <a:prstGeom prst="rect">
+            <a:avLst/>
+          </a:prstGeom>
+          <a:noFill/>
+        </p:spPr>
+        <p:txBody>
+          <a:bodyPr wrap="square">
+            <a:spAutoFit/>
+          </a:bodyPr>
+          <a:lstStyle/>
+          <a:p>
+            <a:r>
+              <a:rPr sz="1400" b="0" i="0">
+                <a:solidFill>
+                  <a:srgbClr val="B8D8EE"/>
+                </a:solidFill>
+                <a:latin typeface="Calibri"/>
+              </a:rPr>
+              <a:t>Habla el vocero con la pantalla ya compartida · cronómetro en pantalla · se corta al llegar a cero</a:t>
+            </a:r>
+          </a:p>
+        </p:txBody>
+      </p:sp>
+      <p:sp>
+        <p:nvSpPr>
+          <p:cNvPr id="6" name="Rounded Rectangle 5"/>
+          <p:cNvSpPr/>
+          <p:nvPr/>
+        </p:nvSpPr>
+        <p:spPr>
+          <a:xfrm>
+            <a:off x="457200" y="1444752"/>
+            <a:ext cx="11277295" cy="745236"/>
+          </a:xfrm>
+          <a:prstGeom prst="roundRect">
+            <a:avLst>
+              <a:gd name="adj" fmla="val 12000"/>
+            </a:avLst>
+          </a:prstGeom>
+          <a:solidFill>
+            <a:srgbClr val="F2F2F2"/>
+          </a:solidFill>
+          <a:ln>
+            <a:noFill/>
+          </a:ln>
+        </p:spPr>
+        <p:style>
+          <a:lnRef idx="1">
+            <a:schemeClr val="accent1"/>
+          </a:lnRef>
+          <a:fillRef idx="3">
+            <a:schemeClr val="accent1"/>
+          </a:fillRef>
+          <a:effectRef idx="2">
+            <a:schemeClr val="accent1"/>
+          </a:effectRef>
+          <a:fontRef idx="minor">
+            <a:schemeClr val="lt1"/>
+          </a:fontRef>
+        </p:style>
+        <p:txBody>
+          <a:bodyPr rtlCol="0" anchor="ctr"/>
+          <a:lstStyle/>
+          <a:p>
+            <a:pPr algn="ctr"/>
+          </a:p>
+        </p:txBody>
+      </p:sp>
+      <p:sp>
+        <p:nvSpPr>
+          <p:cNvPr id="7" name="Rounded Rectangle 6"/>
+          <p:cNvSpPr/>
+          <p:nvPr/>
+        </p:nvSpPr>
+        <p:spPr>
+          <a:xfrm>
+            <a:off x="594360" y="1597914"/>
+            <a:ext cx="438912" cy="438912"/>
+          </a:xfrm>
+          <a:prstGeom prst="roundRect">
+            <a:avLst>
+              <a:gd name="adj" fmla="val 12000"/>
+            </a:avLst>
+          </a:prstGeom>
+          <a:solidFill>
+            <a:srgbClr val="095292"/>
+          </a:solidFill>
+          <a:ln>
+            <a:noFill/>
+          </a:ln>
+        </p:spPr>
+        <p:style>
+          <a:lnRef idx="1">
+            <a:schemeClr val="accent1"/>
+          </a:lnRef>
+          <a:fillRef idx="3">
+            <a:schemeClr val="accent1"/>
+          </a:fillRef>
+          <a:effectRef idx="2">
+            <a:schemeClr val="accent1"/>
+          </a:effectRef>
+          <a:fontRef idx="minor">
+            <a:schemeClr val="lt1"/>
+          </a:fontRef>
+        </p:style>
+        <p:txBody>
+          <a:bodyPr rtlCol="0" anchor="ctr"/>
+          <a:lstStyle/>
+          <a:p>
+            <a:pPr algn="ctr"/>
+          </a:p>
+        </p:txBody>
+      </p:sp>
+      <p:sp>
+        <p:nvSpPr>
+          <p:cNvPr id="8" name="TextBox 7"/>
+          <p:cNvSpPr txBox="1"/>
+          <p:nvPr/>
+        </p:nvSpPr>
+        <p:spPr>
+          <a:xfrm>
+            <a:off x="594360" y="1597914"/>
+            <a:ext cx="438912" cy="438912"/>
+          </a:xfrm>
+          <a:prstGeom prst="rect">
+            <a:avLst/>
+          </a:prstGeom>
+          <a:noFill/>
+        </p:spPr>
+        <p:txBody>
+          <a:bodyPr wrap="square" anchor="ctr"/>
+          <a:lstStyle/>
+          <a:p>
+            <a:pPr algn="ctr"/>
+            <a:r>
+              <a:rPr sz="1600" b="1" i="0">
+                <a:solidFill>
+                  <a:srgbClr val="FFFFFF"/>
+                </a:solidFill>
+                <a:latin typeface="Calibri"/>
+              </a:rPr>
+              <a:t>1</a:t>
+            </a:r>
+          </a:p>
+        </p:txBody>
+      </p:sp>
+      <p:sp>
+        <p:nvSpPr>
+          <p:cNvPr id="9" name="TextBox 8"/>
+          <p:cNvSpPr txBox="1"/>
+          <p:nvPr/>
+        </p:nvSpPr>
+        <p:spPr>
+          <a:xfrm>
+            <a:off x="1188720" y="1536192"/>
+            <a:ext cx="10271455" cy="580644"/>
+          </a:xfrm>
+          <a:prstGeom prst="rect">
+            <a:avLst/>
+          </a:prstGeom>
+          <a:noFill/>
+        </p:spPr>
+        <p:txBody>
+          <a:bodyPr wrap="square" anchor="ctr"/>
+          <a:lstStyle/>
+          <a:p>
+            <a:r>
+              <a:rPr sz="1500" b="1" i="0">
+                <a:solidFill>
+                  <a:srgbClr val="095292"/>
+                </a:solidFill>
+                <a:latin typeface="Calibri"/>
+              </a:rPr>
+              <a:t>Tramo 1 · 1 min</a:t>
+            </a:r>
+          </a:p>
+          <a:p>
+            <a:pPr>
+              <a:spcBef>
+                <a:spcPts val="200"/>
+              </a:spcBef>
+            </a:pPr>
+            <a:r>
+              <a:rPr sz="1300" b="0" i="0">
+                <a:solidFill>
+                  <a:srgbClr val="333333"/>
+                </a:solidFill>
+                <a:latin typeface="Calibri"/>
+              </a:rPr>
+              <a:t>El problema con su cifra. Arranca sin saludos.</a:t>
+            </a:r>
+          </a:p>
+        </p:txBody>
+      </p:sp>
+      <p:sp>
+        <p:nvSpPr>
+          <p:cNvPr id="10" name="Rounded Rectangle 9"/>
+          <p:cNvSpPr/>
+          <p:nvPr/>
+        </p:nvSpPr>
+        <p:spPr>
+          <a:xfrm>
+            <a:off x="457200" y="2281428"/>
+            <a:ext cx="11277295" cy="745236"/>
+          </a:xfrm>
+          <a:prstGeom prst="roundRect">
+            <a:avLst>
+              <a:gd name="adj" fmla="val 12000"/>
+            </a:avLst>
+          </a:prstGeom>
+          <a:solidFill>
+            <a:srgbClr val="E8F4FA"/>
+          </a:solidFill>
+          <a:ln>
+            <a:noFill/>
+          </a:ln>
+        </p:spPr>
+        <p:style>
+          <a:lnRef idx="1">
+            <a:schemeClr val="accent1"/>
+          </a:lnRef>
+          <a:fillRef idx="3">
+            <a:schemeClr val="accent1"/>
+          </a:fillRef>
+          <a:effectRef idx="2">
+            <a:schemeClr val="accent1"/>
+          </a:effectRef>
+          <a:fontRef idx="minor">
+            <a:schemeClr val="lt1"/>
+          </a:fontRef>
+        </p:style>
+        <p:txBody>
+          <a:bodyPr rtlCol="0" anchor="ctr"/>
+          <a:lstStyle/>
+          <a:p>
+            <a:pPr algn="ctr"/>
+          </a:p>
+        </p:txBody>
+      </p:sp>
+      <p:sp>
+        <p:nvSpPr>
+          <p:cNvPr id="11" name="Rounded Rectangle 10"/>
+          <p:cNvSpPr/>
+          <p:nvPr/>
+        </p:nvSpPr>
+        <p:spPr>
+          <a:xfrm>
+            <a:off x="594360" y="2434590"/>
+            <a:ext cx="438912" cy="438912"/>
+          </a:xfrm>
+          <a:prstGeom prst="roundRect">
+            <a:avLst>
+              <a:gd name="adj" fmla="val 12000"/>
+            </a:avLst>
+          </a:prstGeom>
+          <a:solidFill>
+            <a:srgbClr val="095292"/>
+          </a:solidFill>
+          <a:ln>
+            <a:noFill/>
+          </a:ln>
+        </p:spPr>
+        <p:style>
+          <a:lnRef idx="1">
+            <a:schemeClr val="accent1"/>
+          </a:lnRef>
+          <a:fillRef idx="3">
+            <a:schemeClr val="accent1"/>
+          </a:fillRef>
+          <a:effectRef idx="2">
+            <a:schemeClr val="accent1"/>
+          </a:effectRef>
+          <a:fontRef idx="minor">
+            <a:schemeClr val="lt1"/>
+          </a:fontRef>
+        </p:style>
+        <p:txBody>
+          <a:bodyPr rtlCol="0" anchor="ctr"/>
+          <a:lstStyle/>
+          <a:p>
+            <a:pPr algn="ctr"/>
+          </a:p>
+        </p:txBody>
+      </p:sp>
+      <p:sp>
+        <p:nvSpPr>
+          <p:cNvPr id="12" name="TextBox 11"/>
+          <p:cNvSpPr txBox="1"/>
+          <p:nvPr/>
+        </p:nvSpPr>
+        <p:spPr>
+          <a:xfrm>
+            <a:off x="594360" y="2434590"/>
+            <a:ext cx="438912" cy="438912"/>
+          </a:xfrm>
+          <a:prstGeom prst="rect">
+            <a:avLst/>
+          </a:prstGeom>
+          <a:noFill/>
+        </p:spPr>
+        <p:txBody>
+          <a:bodyPr wrap="square" anchor="ctr"/>
+          <a:lstStyle/>
+          <a:p>
+            <a:pPr algn="ctr"/>
+            <a:r>
+              <a:rPr sz="1600" b="1" i="0">
+                <a:solidFill>
+                  <a:srgbClr val="FFFFFF"/>
+                </a:solidFill>
+                <a:latin typeface="Calibri"/>
+              </a:rPr>
+              <a:t>2</a:t>
+            </a:r>
+          </a:p>
+        </p:txBody>
+      </p:sp>
+      <p:sp>
+        <p:nvSpPr>
+          <p:cNvPr id="13" name="TextBox 12"/>
+          <p:cNvSpPr txBox="1"/>
+          <p:nvPr/>
+        </p:nvSpPr>
+        <p:spPr>
+          <a:xfrm>
+            <a:off x="1188720" y="2372868"/>
+            <a:ext cx="10271455" cy="580644"/>
+          </a:xfrm>
+          <a:prstGeom prst="rect">
+            <a:avLst/>
+          </a:prstGeom>
+          <a:noFill/>
+        </p:spPr>
+        <p:txBody>
+          <a:bodyPr wrap="square" anchor="ctr"/>
+          <a:lstStyle/>
+          <a:p>
+            <a:r>
+              <a:rPr sz="1500" b="1" i="0">
+                <a:solidFill>
+                  <a:srgbClr val="095292"/>
+                </a:solidFill>
+                <a:latin typeface="Calibri"/>
+              </a:rPr>
+              <a:t>Tramo 2 · 2 min</a:t>
+            </a:r>
+          </a:p>
+          <a:p>
+            <a:pPr>
+              <a:spcBef>
+                <a:spcPts val="200"/>
+              </a:spcBef>
+            </a:pPr>
+            <a:r>
+              <a:rPr sz="1300" b="0" i="0">
+                <a:solidFill>
+                  <a:srgbClr val="333333"/>
+                </a:solidFill>
+                <a:latin typeface="Calibri"/>
+              </a:rPr>
+              <a:t>Los afectados —uno que no es usuario— y la decisión con su sacrificio.</a:t>
+            </a:r>
+          </a:p>
+        </p:txBody>
+      </p:sp>
+      <p:sp>
+        <p:nvSpPr>
+          <p:cNvPr id="14" name="Rounded Rectangle 13"/>
+          <p:cNvSpPr/>
+          <p:nvPr/>
+        </p:nvSpPr>
+        <p:spPr>
+          <a:xfrm>
+            <a:off x="457200" y="3118104"/>
+            <a:ext cx="11277295" cy="745236"/>
+          </a:xfrm>
+          <a:prstGeom prst="roundRect">
+            <a:avLst>
+              <a:gd name="adj" fmla="val 12000"/>
+            </a:avLst>
+          </a:prstGeom>
+          <a:solidFill>
+            <a:srgbClr val="F2F2F2"/>
+          </a:solidFill>
+          <a:ln>
+            <a:noFill/>
+          </a:ln>
+        </p:spPr>
+        <p:style>
+          <a:lnRef idx="1">
+            <a:schemeClr val="accent1"/>
+          </a:lnRef>
+          <a:fillRef idx="3">
+            <a:schemeClr val="accent1"/>
+          </a:fillRef>
+          <a:effectRef idx="2">
+            <a:schemeClr val="accent1"/>
+          </a:effectRef>
+          <a:fontRef idx="minor">
+            <a:schemeClr val="lt1"/>
+          </a:fontRef>
+        </p:style>
+        <p:txBody>
+          <a:bodyPr rtlCol="0" anchor="ctr"/>
+          <a:lstStyle/>
+          <a:p>
+            <a:pPr algn="ctr"/>
+          </a:p>
+        </p:txBody>
+      </p:sp>
+      <p:sp>
+        <p:nvSpPr>
+          <p:cNvPr id="15" name="Rounded Rectangle 14"/>
+          <p:cNvSpPr/>
+          <p:nvPr/>
+        </p:nvSpPr>
+        <p:spPr>
+          <a:xfrm>
+            <a:off x="594360" y="3271266"/>
+            <a:ext cx="438912" cy="438912"/>
+          </a:xfrm>
+          <a:prstGeom prst="roundRect">
+            <a:avLst>
+              <a:gd name="adj" fmla="val 12000"/>
+            </a:avLst>
+          </a:prstGeom>
+          <a:solidFill>
+            <a:srgbClr val="095292"/>
+          </a:solidFill>
+          <a:ln>
+            <a:noFill/>
+          </a:ln>
+        </p:spPr>
+        <p:style>
+          <a:lnRef idx="1">
+            <a:schemeClr val="accent1"/>
+          </a:lnRef>
+          <a:fillRef idx="3">
+            <a:schemeClr val="accent1"/>
+          </a:fillRef>
+          <a:effectRef idx="2">
+            <a:schemeClr val="accent1"/>
+          </a:effectRef>
+          <a:fontRef idx="minor">
+            <a:schemeClr val="lt1"/>
+          </a:fontRef>
+        </p:style>
+        <p:txBody>
+          <a:bodyPr rtlCol="0" anchor="ctr"/>
+          <a:lstStyle/>
+          <a:p>
+            <a:pPr algn="ctr"/>
+          </a:p>
+        </p:txBody>
+      </p:sp>
+      <p:sp>
+        <p:nvSpPr>
+          <p:cNvPr id="16" name="TextBox 15"/>
+          <p:cNvSpPr txBox="1"/>
+          <p:nvPr/>
+        </p:nvSpPr>
+        <p:spPr>
+          <a:xfrm>
+            <a:off x="594360" y="3271266"/>
+            <a:ext cx="438912" cy="438912"/>
+          </a:xfrm>
+          <a:prstGeom prst="rect">
+            <a:avLst/>
+          </a:prstGeom>
+          <a:noFill/>
+        </p:spPr>
+        <p:txBody>
+          <a:bodyPr wrap="square" anchor="ctr"/>
+          <a:lstStyle/>
+          <a:p>
+            <a:pPr algn="ctr"/>
+            <a:r>
+              <a:rPr sz="1600" b="1" i="0">
+                <a:solidFill>
+                  <a:srgbClr val="FFFFFF"/>
+                </a:solidFill>
+                <a:latin typeface="Calibri"/>
+              </a:rPr>
+              <a:t>3</a:t>
+            </a:r>
+          </a:p>
+        </p:txBody>
+      </p:sp>
+      <p:sp>
+        <p:nvSpPr>
+          <p:cNvPr id="17" name="TextBox 16"/>
+          <p:cNvSpPr txBox="1"/>
+          <p:nvPr/>
+        </p:nvSpPr>
+        <p:spPr>
+          <a:xfrm>
+            <a:off x="1188720" y="3209544"/>
+            <a:ext cx="10271455" cy="580644"/>
+          </a:xfrm>
+          <a:prstGeom prst="rect">
+            <a:avLst/>
+          </a:prstGeom>
+          <a:noFill/>
+        </p:spPr>
+        <p:txBody>
+          <a:bodyPr wrap="square" anchor="ctr"/>
+          <a:lstStyle/>
+          <a:p>
+            <a:r>
+              <a:rPr sz="1500" b="1" i="0">
+                <a:solidFill>
+                  <a:srgbClr val="095292"/>
+                </a:solidFill>
+                <a:latin typeface="Calibri"/>
+              </a:rPr>
+              <a:t>Tramo 3 · 3 min</a:t>
+            </a:r>
+          </a:p>
+          <a:p>
+            <a:pPr>
+              <a:spcBef>
+                <a:spcPts val="200"/>
+              </a:spcBef>
+            </a:pPr>
+            <a:r>
+              <a:rPr sz="1300" b="0" i="0">
+                <a:solidFill>
+                  <a:srgbClr val="333333"/>
+                </a:solidFill>
+                <a:latin typeface="Calibri"/>
+              </a:rPr>
+              <a:t>El prototipo en vivo: tres pasos, una tarea cumpliéndose.</a:t>
+            </a:r>
+          </a:p>
+        </p:txBody>
+      </p:sp>
+      <p:sp>
+        <p:nvSpPr>
+          <p:cNvPr id="18" name="Rounded Rectangle 17"/>
+          <p:cNvSpPr/>
+          <p:nvPr/>
+        </p:nvSpPr>
+        <p:spPr>
+          <a:xfrm>
+            <a:off x="457200" y="3954780"/>
+            <a:ext cx="11277295" cy="745236"/>
+          </a:xfrm>
+          <a:prstGeom prst="roundRect">
+            <a:avLst>
+              <a:gd name="adj" fmla="val 12000"/>
+            </a:avLst>
+          </a:prstGeom>
+          <a:solidFill>
+            <a:srgbClr val="E8F4FA"/>
+          </a:solidFill>
+          <a:ln>
+            <a:noFill/>
+          </a:ln>
+        </p:spPr>
+        <p:style>
+          <a:lnRef idx="1">
+            <a:schemeClr val="accent1"/>
+          </a:lnRef>
+          <a:fillRef idx="3">
+            <a:schemeClr val="accent1"/>
+          </a:fillRef>
+          <a:effectRef idx="2">
+            <a:schemeClr val="accent1"/>
+          </a:effectRef>
+          <a:fontRef idx="minor">
+            <a:schemeClr val="lt1"/>
+          </a:fontRef>
+        </p:style>
+        <p:txBody>
+          <a:bodyPr rtlCol="0" anchor="ctr"/>
+          <a:lstStyle/>
+          <a:p>
+            <a:pPr algn="ctr"/>
+          </a:p>
+        </p:txBody>
+      </p:sp>
+      <p:sp>
+        <p:nvSpPr>
+          <p:cNvPr id="19" name="Rounded Rectangle 18"/>
+          <p:cNvSpPr/>
+          <p:nvPr/>
+        </p:nvSpPr>
+        <p:spPr>
+          <a:xfrm>
+            <a:off x="594360" y="4107942"/>
+            <a:ext cx="438912" cy="438912"/>
+          </a:xfrm>
+          <a:prstGeom prst="roundRect">
+            <a:avLst>
+              <a:gd name="adj" fmla="val 12000"/>
+            </a:avLst>
+          </a:prstGeom>
+          <a:solidFill>
+            <a:srgbClr val="095292"/>
+          </a:solidFill>
+          <a:ln>
+            <a:noFill/>
+          </a:ln>
+        </p:spPr>
+        <p:style>
+          <a:lnRef idx="1">
+            <a:schemeClr val="accent1"/>
+          </a:lnRef>
+          <a:fillRef idx="3">
+            <a:schemeClr val="accent1"/>
+          </a:fillRef>
+          <a:effectRef idx="2">
+            <a:schemeClr val="accent1"/>
+          </a:effectRef>
+          <a:fontRef idx="minor">
+            <a:schemeClr val="lt1"/>
+          </a:fontRef>
+        </p:style>
+        <p:txBody>
+          <a:bodyPr rtlCol="0" anchor="ctr"/>
+          <a:lstStyle/>
+          <a:p>
+            <a:pPr algn="ctr"/>
+          </a:p>
+        </p:txBody>
+      </p:sp>
+      <p:sp>
+        <p:nvSpPr>
+          <p:cNvPr id="20" name="TextBox 19"/>
+          <p:cNvSpPr txBox="1"/>
+          <p:nvPr/>
+        </p:nvSpPr>
+        <p:spPr>
+          <a:xfrm>
+            <a:off x="594360" y="4107942"/>
+            <a:ext cx="438912" cy="438912"/>
+          </a:xfrm>
+          <a:prstGeom prst="rect">
+            <a:avLst/>
+          </a:prstGeom>
+          <a:noFill/>
+        </p:spPr>
+        <p:txBody>
+          <a:bodyPr wrap="square" anchor="ctr"/>
+          <a:lstStyle/>
+          <a:p>
+            <a:pPr algn="ctr"/>
+            <a:r>
+              <a:rPr sz="1600" b="1" i="0">
+                <a:solidFill>
+                  <a:srgbClr val="FFFFFF"/>
+                </a:solidFill>
+                <a:latin typeface="Calibri"/>
+              </a:rPr>
+              <a:t>4</a:t>
+            </a:r>
+          </a:p>
+        </p:txBody>
+      </p:sp>
+      <p:sp>
+        <p:nvSpPr>
+          <p:cNvPr id="21" name="TextBox 20"/>
+          <p:cNvSpPr txBox="1"/>
+          <p:nvPr/>
+        </p:nvSpPr>
+        <p:spPr>
+          <a:xfrm>
+            <a:off x="1188720" y="4046220"/>
+            <a:ext cx="10271455" cy="580644"/>
+          </a:xfrm>
+          <a:prstGeom prst="rect">
+            <a:avLst/>
+          </a:prstGeom>
+          <a:noFill/>
+        </p:spPr>
+        <p:txBody>
+          <a:bodyPr wrap="square" anchor="ctr"/>
+          <a:lstStyle/>
+          <a:p>
+            <a:r>
+              <a:rPr sz="1500" b="1" i="0">
+                <a:solidFill>
+                  <a:srgbClr val="095292"/>
+                </a:solidFill>
+                <a:latin typeface="Calibri"/>
+              </a:rPr>
+              <a:t>Tramo 4 · 2 min</a:t>
+            </a:r>
+          </a:p>
+          <a:p>
+            <a:pPr>
+              <a:spcBef>
+                <a:spcPts val="200"/>
+              </a:spcBef>
+            </a:pPr>
+            <a:r>
+              <a:rPr sz="1300" b="0" i="0">
+                <a:solidFill>
+                  <a:srgbClr val="333333"/>
+                </a:solidFill>
+                <a:latin typeface="Calibri"/>
+              </a:rPr>
+              <a:t>Los hallazgos de la prueba, lo que se arregló y lo que no.</a:t>
+            </a:r>
+          </a:p>
+        </p:txBody>
+      </p:sp>
+      <p:sp>
+        <p:nvSpPr>
+          <p:cNvPr id="22" name="Rounded Rectangle 21"/>
+          <p:cNvSpPr/>
+          <p:nvPr/>
+        </p:nvSpPr>
+        <p:spPr>
+          <a:xfrm>
+            <a:off x="457200" y="4791456"/>
+            <a:ext cx="11277295" cy="745236"/>
+          </a:xfrm>
+          <a:prstGeom prst="roundRect">
+            <a:avLst>
+              <a:gd name="adj" fmla="val 12000"/>
+            </a:avLst>
+          </a:prstGeom>
+          <a:solidFill>
+            <a:srgbClr val="F2F2F2"/>
+          </a:solidFill>
+          <a:ln>
+            <a:noFill/>
+          </a:ln>
+        </p:spPr>
+        <p:style>
+          <a:lnRef idx="1">
+            <a:schemeClr val="accent1"/>
+          </a:lnRef>
+          <a:fillRef idx="3">
+            <a:schemeClr val="accent1"/>
+          </a:fillRef>
+          <a:effectRef idx="2">
+            <a:schemeClr val="accent1"/>
+          </a:effectRef>
+          <a:fontRef idx="minor">
+            <a:schemeClr val="lt1"/>
+          </a:fontRef>
+        </p:style>
+        <p:txBody>
+          <a:bodyPr rtlCol="0" anchor="ctr"/>
+          <a:lstStyle/>
+          <a:p>
+            <a:pPr algn="ctr"/>
+          </a:p>
+        </p:txBody>
+      </p:sp>
+      <p:sp>
+        <p:nvSpPr>
+          <p:cNvPr id="23" name="Rounded Rectangle 22"/>
+          <p:cNvSpPr/>
+          <p:nvPr/>
+        </p:nvSpPr>
+        <p:spPr>
+          <a:xfrm>
+            <a:off x="594360" y="4944618"/>
+            <a:ext cx="438912" cy="438912"/>
+          </a:xfrm>
+          <a:prstGeom prst="roundRect">
+            <a:avLst>
+              <a:gd name="adj" fmla="val 12000"/>
+            </a:avLst>
+          </a:prstGeom>
+          <a:solidFill>
+            <a:srgbClr val="095292"/>
+          </a:solidFill>
+          <a:ln>
+            <a:noFill/>
+          </a:ln>
+        </p:spPr>
+        <p:style>
+          <a:lnRef idx="1">
+            <a:schemeClr val="accent1"/>
+          </a:lnRef>
+          <a:fillRef idx="3">
+            <a:schemeClr val="accent1"/>
+          </a:fillRef>
+          <a:effectRef idx="2">
+            <a:schemeClr val="accent1"/>
+          </a:effectRef>
+          <a:fontRef idx="minor">
+            <a:schemeClr val="lt1"/>
+          </a:fontRef>
+        </p:style>
+        <p:txBody>
+          <a:bodyPr rtlCol="0" anchor="ctr"/>
+          <a:lstStyle/>
+          <a:p>
+            <a:pPr algn="ctr"/>
+          </a:p>
+        </p:txBody>
+      </p:sp>
+      <p:sp>
+        <p:nvSpPr>
+          <p:cNvPr id="24" name="TextBox 23"/>
+          <p:cNvSpPr txBox="1"/>
+          <p:nvPr/>
+        </p:nvSpPr>
+        <p:spPr>
+          <a:xfrm>
+            <a:off x="594360" y="4944618"/>
+            <a:ext cx="438912" cy="438912"/>
+          </a:xfrm>
+          <a:prstGeom prst="rect">
+            <a:avLst/>
+          </a:prstGeom>
+          <a:noFill/>
+        </p:spPr>
+        <p:txBody>
+          <a:bodyPr wrap="square" anchor="ctr"/>
+          <a:lstStyle/>
+          <a:p>
+            <a:pPr algn="ctr"/>
+            <a:r>
+              <a:rPr sz="1600" b="1" i="0">
+                <a:solidFill>
+                  <a:srgbClr val="FFFFFF"/>
+                </a:solidFill>
+                <a:latin typeface="Calibri"/>
+              </a:rPr>
+              <a:t>5</a:t>
+            </a:r>
+          </a:p>
+        </p:txBody>
+      </p:sp>
+      <p:sp>
+        <p:nvSpPr>
+          <p:cNvPr id="25" name="TextBox 24"/>
+          <p:cNvSpPr txBox="1"/>
+          <p:nvPr/>
+        </p:nvSpPr>
+        <p:spPr>
+          <a:xfrm>
+            <a:off x="1188720" y="4882896"/>
+            <a:ext cx="10271455" cy="580644"/>
+          </a:xfrm>
+          <a:prstGeom prst="rect">
+            <a:avLst/>
+          </a:prstGeom>
+          <a:noFill/>
+        </p:spPr>
+        <p:txBody>
+          <a:bodyPr wrap="square" anchor="ctr"/>
+          <a:lstStyle/>
+          <a:p>
+            <a:r>
+              <a:rPr sz="1500" b="1" i="0">
+                <a:solidFill>
+                  <a:srgbClr val="095292"/>
+                </a:solidFill>
+                <a:latin typeface="Calibri"/>
+              </a:rPr>
+              <a:t>Tramo 5 · 1 min</a:t>
+            </a:r>
+          </a:p>
+          <a:p>
+            <a:pPr>
+              <a:spcBef>
+                <a:spcPts val="200"/>
+              </a:spcBef>
+            </a:pPr>
+            <a:r>
+              <a:rPr sz="1300" b="0" i="0">
+                <a:solidFill>
+                  <a:srgbClr val="333333"/>
+                </a:solidFill>
+                <a:latin typeface="Calibri"/>
+              </a:rPr>
+              <a:t>Impacto positivo con su número, negativo con su mitigación, siguiente paso.</a:t>
+            </a:r>
+          </a:p>
+        </p:txBody>
+      </p:sp>
+      <p:sp>
+        <p:nvSpPr>
+          <p:cNvPr id="26" name="Rounded Rectangle 25"/>
+          <p:cNvSpPr/>
+          <p:nvPr/>
+        </p:nvSpPr>
+        <p:spPr>
+          <a:xfrm>
+            <a:off x="457200" y="5628132"/>
+            <a:ext cx="11277295" cy="745236"/>
+          </a:xfrm>
+          <a:prstGeom prst="roundRect">
+            <a:avLst>
+              <a:gd name="adj" fmla="val 12000"/>
+            </a:avLst>
+          </a:prstGeom>
+          <a:solidFill>
+            <a:srgbClr val="E8F4FA"/>
+          </a:solidFill>
+          <a:ln>
+            <a:noFill/>
+          </a:ln>
+        </p:spPr>
+        <p:style>
+          <a:lnRef idx="1">
+            <a:schemeClr val="accent1"/>
+          </a:lnRef>
+          <a:fillRef idx="3">
+            <a:schemeClr val="accent1"/>
+          </a:fillRef>
+          <a:effectRef idx="2">
+            <a:schemeClr val="accent1"/>
+          </a:effectRef>
+          <a:fontRef idx="minor">
+            <a:schemeClr val="lt1"/>
+          </a:fontRef>
+        </p:style>
+        <p:txBody>
+          <a:bodyPr rtlCol="0" anchor="ctr"/>
+          <a:lstStyle/>
+          <a:p>
+            <a:pPr algn="ctr"/>
+          </a:p>
+        </p:txBody>
+      </p:sp>
+      <p:sp>
+        <p:nvSpPr>
+          <p:cNvPr id="27" name="Rounded Rectangle 26"/>
+          <p:cNvSpPr/>
+          <p:nvPr/>
+        </p:nvSpPr>
+        <p:spPr>
+          <a:xfrm>
+            <a:off x="594360" y="5781294"/>
+            <a:ext cx="438912" cy="438912"/>
+          </a:xfrm>
+          <a:prstGeom prst="roundRect">
+            <a:avLst>
+              <a:gd name="adj" fmla="val 12000"/>
+            </a:avLst>
+          </a:prstGeom>
+          <a:solidFill>
+            <a:srgbClr val="095292"/>
+          </a:solidFill>
+          <a:ln>
+            <a:noFill/>
+          </a:ln>
+        </p:spPr>
+        <p:style>
+          <a:lnRef idx="1">
+            <a:schemeClr val="accent1"/>
+          </a:lnRef>
+          <a:fillRef idx="3">
+            <a:schemeClr val="accent1"/>
+          </a:fillRef>
+          <a:effectRef idx="2">
+            <a:schemeClr val="accent1"/>
+          </a:effectRef>
+          <a:fontRef idx="minor">
+            <a:schemeClr val="lt1"/>
+          </a:fontRef>
+        </p:style>
+        <p:txBody>
+          <a:bodyPr rtlCol="0" anchor="ctr"/>
+          <a:lstStyle/>
+          <a:p>
+            <a:pPr algn="ctr"/>
+          </a:p>
+        </p:txBody>
+      </p:sp>
+      <p:sp>
+        <p:nvSpPr>
+          <p:cNvPr id="28" name="TextBox 27"/>
+          <p:cNvSpPr txBox="1"/>
+          <p:nvPr/>
+        </p:nvSpPr>
+        <p:spPr>
+          <a:xfrm>
+            <a:off x="594360" y="5781294"/>
+            <a:ext cx="438912" cy="438912"/>
+          </a:xfrm>
+          <a:prstGeom prst="rect">
+            <a:avLst/>
+          </a:prstGeom>
+          <a:noFill/>
+        </p:spPr>
+        <p:txBody>
+          <a:bodyPr wrap="square" anchor="ctr"/>
+          <a:lstStyle/>
+          <a:p>
+            <a:pPr algn="ctr"/>
+            <a:r>
+              <a:rPr sz="1600" b="1" i="0">
+                <a:solidFill>
+                  <a:srgbClr val="FFFFFF"/>
+                </a:solidFill>
+                <a:latin typeface="Calibri"/>
+              </a:rPr>
+              <a:t>6</a:t>
+            </a:r>
+          </a:p>
+        </p:txBody>
+      </p:sp>
+      <p:sp>
+        <p:nvSpPr>
+          <p:cNvPr id="29" name="TextBox 28"/>
+          <p:cNvSpPr txBox="1"/>
+          <p:nvPr/>
+        </p:nvSpPr>
+        <p:spPr>
+          <a:xfrm>
+            <a:off x="1188720" y="5719572"/>
+            <a:ext cx="10271455" cy="580644"/>
+          </a:xfrm>
+          <a:prstGeom prst="rect">
+            <a:avLst/>
+          </a:prstGeom>
+          <a:noFill/>
+        </p:spPr>
+        <p:txBody>
+          <a:bodyPr wrap="square" anchor="ctr"/>
+          <a:lstStyle/>
+          <a:p>
+            <a:r>
+              <a:rPr sz="1500" b="1" i="0">
+                <a:solidFill>
+                  <a:srgbClr val="095292"/>
+                </a:solidFill>
+                <a:latin typeface="Calibri"/>
+              </a:rPr>
+              <a:t>Preguntas · 3 min</a:t>
+            </a:r>
+          </a:p>
+          <a:p>
+            <a:pPr>
+              <a:spcBef>
+                <a:spcPts val="200"/>
+              </a:spcBef>
+            </a:pPr>
+            <a:r>
+              <a:rPr sz="1300" b="0" i="0">
+                <a:solidFill>
+                  <a:srgbClr val="333333"/>
+                </a:solidFill>
+                <a:latin typeface="Calibri"/>
+              </a:rPr>
+              <a:t>Una del curso y una del docente. </a:t>
+            </a:r>
+            <a:r>
+              <a:rPr sz="1300" b="1" i="0">
+                <a:solidFill>
+                  <a:srgbClr val="333333"/>
+                </a:solidFill>
+                <a:latin typeface="Calibri"/>
+              </a:rPr>
+              <a:t>Responde quien tiene el tramo.</a:t>
+            </a:r>
+          </a:p>
+        </p:txBody>
+      </p:sp>
+      <p:sp>
+        <p:nvSpPr>
+          <p:cNvPr id="30" name="TextBox 29"/>
+          <p:cNvSpPr txBox="1"/>
+          <p:nvPr/>
+        </p:nvSpPr>
+        <p:spPr>
+          <a:xfrm>
+            <a:off x="11185855" y="6473952"/>
+            <a:ext cx="640080" cy="274320"/>
+          </a:xfrm>
+          <a:prstGeom prst="rect">
+            <a:avLst/>
+          </a:prstGeom>
+          <a:noFill/>
+        </p:spPr>
+        <p:txBody>
+          <a:bodyPr wrap="square">
+            <a:spAutoFit/>
+          </a:bodyPr>
+          <a:lstStyle/>
+          <a:p>
+            <a:pPr algn="r"/>
+            <a:r>
+              <a:rPr sz="1100" b="0" i="0">
+                <a:solidFill>
+                  <a:srgbClr val="666666"/>
+                </a:solidFill>
+                <a:latin typeface="Calibri"/>
+              </a:rPr>
+              <a:t>20</a:t>
+            </a:r>
+          </a:p>
+        </p:txBody>
+      </p:sp>
+    </p:spTree>
+  </p:cSld>
+  <p:clrMapOvr>
+    <a:masterClrMapping/>
+  </p:clrMapOvr>
+</p:sld>
+</file>
+
+<file path=ppt/slides/slide21.xml><?xml version="1.0" encoding="utf-8"?>
+<p:sld xmlns:a="http://schemas.openxmlformats.org/drawingml/2006/main" xmlns:p="http://schemas.openxmlformats.org/presentationml/2006/main" xmlns:r="http://schemas.openxmlformats.org/officeDocument/2006/relationships">
+  <p:cSld>
+    <p:bg>
+      <p:bgPr>
+        <a:solidFill>
+          <a:srgbClr val="FFFFFF"/>
+        </a:solidFill>
+        <a:effectLst/>
+      </p:bgPr>
+    </p:bg>
+    <p:spTree>
+      <p:nvGrpSpPr>
+        <p:cNvPr id="1" name=""/>
+        <p:cNvGrpSpPr/>
+        <p:nvPr/>
+      </p:nvGrpSpPr>
+      <p:grpSpPr/>
+      <p:sp>
+        <p:nvSpPr>
+          <p:cNvPr id="2" name="Rectangle 1"/>
+          <p:cNvSpPr/>
+          <p:nvPr/>
+        </p:nvSpPr>
+        <p:spPr>
+          <a:xfrm>
+            <a:off x="0" y="0"/>
+            <a:ext cx="12191695" cy="960120"/>
+          </a:xfrm>
+          <a:prstGeom prst="rect">
+            <a:avLst/>
+          </a:prstGeom>
+          <a:solidFill>
+            <a:srgbClr val="095292"/>
+          </a:solidFill>
+          <a:ln>
+            <a:noFill/>
+          </a:ln>
+        </p:spPr>
+        <p:style>
+          <a:lnRef idx="1">
+            <a:schemeClr val="accent1"/>
+          </a:lnRef>
+          <a:fillRef idx="3">
+            <a:schemeClr val="accent1"/>
+          </a:fillRef>
+          <a:effectRef idx="2">
+            <a:schemeClr val="accent1"/>
+          </a:effectRef>
+          <a:fontRef idx="minor">
+            <a:schemeClr val="lt1"/>
+          </a:fontRef>
+        </p:style>
+        <p:txBody>
+          <a:bodyPr rtlCol="0" anchor="ctr"/>
+          <a:lstStyle/>
+          <a:p>
+            <a:pPr algn="ctr"/>
+          </a:p>
+        </p:txBody>
+      </p:sp>
+      <p:sp>
+        <p:nvSpPr>
+          <p:cNvPr id="3" name="Rectangle 2"/>
+          <p:cNvSpPr/>
+          <p:nvPr/>
+        </p:nvSpPr>
+        <p:spPr>
+          <a:xfrm>
+            <a:off x="0" y="960120"/>
+            <a:ext cx="12191695" cy="41148"/>
+          </a:xfrm>
+          <a:prstGeom prst="rect">
+            <a:avLst/>
+          </a:prstGeom>
+          <a:solidFill>
+            <a:srgbClr val="FFD000"/>
+          </a:solidFill>
+          <a:ln>
+            <a:noFill/>
+          </a:ln>
+        </p:spPr>
+        <p:style>
+          <a:lnRef idx="1">
+            <a:schemeClr val="accent1"/>
+          </a:lnRef>
+          <a:fillRef idx="3">
+            <a:schemeClr val="accent1"/>
+          </a:fillRef>
+          <a:effectRef idx="2">
+            <a:schemeClr val="accent1"/>
+          </a:effectRef>
+          <a:fontRef idx="minor">
+            <a:schemeClr val="lt1"/>
+          </a:fontRef>
+        </p:style>
+        <p:txBody>
+          <a:bodyPr rtlCol="0" anchor="ctr"/>
+          <a:lstStyle/>
+          <a:p>
+            <a:pPr algn="ctr"/>
+          </a:p>
+        </p:txBody>
+      </p:sp>
+      <p:sp>
+        <p:nvSpPr>
+          <p:cNvPr id="4" name="TextBox 3"/>
+          <p:cNvSpPr txBox="1"/>
+          <p:nvPr/>
+        </p:nvSpPr>
+        <p:spPr>
+          <a:xfrm>
+            <a:off x="457200" y="164592"/>
+            <a:ext cx="11277295" cy="502920"/>
+          </a:xfrm>
+          <a:prstGeom prst="rect">
+            <a:avLst/>
+          </a:prstGeom>
+          <a:noFill/>
+        </p:spPr>
+        <p:txBody>
+          <a:bodyPr wrap="square">
+            <a:spAutoFit/>
+          </a:bodyPr>
+          <a:lstStyle/>
+          <a:p>
+            <a:r>
+              <a:rPr sz="2600" b="1" i="0">
+                <a:solidFill>
+                  <a:srgbClr val="FFFFFF"/>
+                </a:solidFill>
+                <a:latin typeface="Calibri"/>
+              </a:rPr>
+              <a:t>Para la Clase 16</a:t>
+            </a:r>
+          </a:p>
+        </p:txBody>
+      </p:sp>
+      <p:sp>
+        <p:nvSpPr>
+          <p:cNvPr id="5" name="TextBox 4"/>
+          <p:cNvSpPr txBox="1"/>
+          <p:nvPr/>
+        </p:nvSpPr>
+        <p:spPr>
+          <a:xfrm>
+            <a:off x="457200" y="1170432"/>
+            <a:ext cx="11277295" cy="5230368"/>
+          </a:xfrm>
+          <a:prstGeom prst="rect">
+            <a:avLst/>
+          </a:prstGeom>
+          <a:noFill/>
+        </p:spPr>
+        <p:txBody>
+          <a:bodyPr wrap="square">
+            <a:spAutoFit/>
+          </a:bodyPr>
+          <a:lstStyle/>
+          <a:p>
+            <a:pPr>
+              <a:spcAft>
+                <a:spcPts val="800"/>
+              </a:spcAft>
+            </a:pPr>
+            <a:r>
+              <a:rPr sz="2000" b="0" i="0">
+                <a:solidFill>
+                  <a:srgbClr val="333333"/>
+                </a:solidFill>
+                <a:latin typeface="Calibri"/>
+              </a:rPr>
+              <a:t>–   </a:t>
+            </a:r>
+            <a:r>
+              <a:rPr sz="2000" b="1" i="0">
+                <a:solidFill>
+                  <a:srgbClr val="333333"/>
+                </a:solidFill>
+                <a:latin typeface="Calibri"/>
+              </a:rPr>
+              <a:t>Trabajo dirigido:</a:t>
+            </a:r>
+            <a:r>
+              <a:rPr sz="2000" b="0" i="0">
+                <a:solidFill>
+                  <a:srgbClr val="333333"/>
+                </a:solidFill>
+                <a:latin typeface="Calibri"/>
+              </a:rPr>
+              <a:t> Valoración de presentaciones — completar la ficha de valoración de los otros cuatro equipos en el muro, si no quedó terminada en clase.</a:t>
+            </a:r>
+          </a:p>
+          <a:p>
+            <a:pPr>
+              <a:spcAft>
+                <a:spcPts val="800"/>
+              </a:spcAft>
+            </a:pPr>
+            <a:r>
+              <a:rPr sz="2000" b="0" i="0">
+                <a:solidFill>
+                  <a:srgbClr val="333333"/>
+                </a:solidFill>
+                <a:latin typeface="Calibri"/>
+              </a:rPr>
+              <a:t>–   </a:t>
+            </a:r>
+            <a:r>
+              <a:rPr sz="2000" b="1" i="0">
+                <a:solidFill>
+                  <a:srgbClr val="333333"/>
+                </a:solidFill>
+                <a:latin typeface="Calibri"/>
+              </a:rPr>
+              <a:t>Trabajo independiente:</a:t>
+            </a:r>
+            <a:r>
+              <a:rPr sz="2000" b="0" i="0">
+                <a:solidFill>
+                  <a:srgbClr val="333333"/>
+                </a:solidFill>
+                <a:latin typeface="Calibri"/>
+              </a:rPr>
+              <a:t> Ajustes del informe final: </a:t>
+            </a:r>
+            <a:r>
+              <a:rPr sz="2000" b="1" i="0">
+                <a:solidFill>
+                  <a:srgbClr val="333333"/>
+                </a:solidFill>
+                <a:latin typeface="Calibri"/>
+              </a:rPr>
+              <a:t>reunir las doce secciones</a:t>
+            </a:r>
+            <a:r>
+              <a:rPr sz="2000" b="0" i="0">
+                <a:solidFill>
+                  <a:srgbClr val="333333"/>
+                </a:solidFill>
+                <a:latin typeface="Calibri"/>
+              </a:rPr>
+              <a:t> en un solo documento, tomando lo que ya está escrito desde la sesión 3, y </a:t>
+            </a:r>
+            <a:r>
+              <a:rPr sz="2000" b="1" i="0">
+                <a:solidFill>
+                  <a:srgbClr val="333333"/>
+                </a:solidFill>
+                <a:latin typeface="Calibri"/>
+              </a:rPr>
+              <a:t>escribir el resumen de media página</a:t>
+            </a:r>
+            <a:r>
+              <a:rPr sz="2000" b="0" i="0">
+                <a:solidFill>
+                  <a:srgbClr val="333333"/>
+                </a:solidFill>
+                <a:latin typeface="Calibri"/>
+              </a:rPr>
+              <a:t>, que es lo único nuevo. Y una tarea corta que vale mucho: </a:t>
+            </a:r>
+            <a:r>
+              <a:rPr sz="2000" b="1" i="0">
+                <a:solidFill>
+                  <a:srgbClr val="333333"/>
+                </a:solidFill>
+                <a:latin typeface="Calibri"/>
+              </a:rPr>
+              <a:t>anotar lo que el curso no entendió</a:t>
+            </a:r>
+            <a:r>
+              <a:rPr sz="2000" b="0" i="0">
+                <a:solidFill>
+                  <a:srgbClr val="333333"/>
+                </a:solidFill>
+                <a:latin typeface="Calibri"/>
+              </a:rPr>
+              <a:t> hoy de su proyecto.</a:t>
+            </a:r>
+          </a:p>
+          <a:p>
+            <a:pPr>
+              <a:spcAft>
+                <a:spcPts val="800"/>
+              </a:spcAft>
+            </a:pPr>
+            <a:r>
+              <a:rPr sz="2000" b="0" i="0">
+                <a:solidFill>
+                  <a:srgbClr val="333333"/>
+                </a:solidFill>
+                <a:latin typeface="Calibri"/>
+              </a:rPr>
+              <a:t>–   </a:t>
+            </a:r>
+            <a:r>
+              <a:rPr sz="2000" b="1" i="0">
+                <a:solidFill>
+                  <a:srgbClr val="333333"/>
+                </a:solidFill>
+                <a:latin typeface="Calibri"/>
+              </a:rPr>
+              <a:t>Clase 16 · Socialización y evaluación final del curso</a:t>
+            </a:r>
+            <a:r>
+              <a:rPr sz="2000" b="0" i="0">
+                <a:solidFill>
+                  <a:srgbClr val="333333"/>
+                </a:solidFill>
+                <a:latin typeface="Calibri"/>
+              </a:rPr>
+              <a:t> — es la última: se </a:t>
+            </a:r>
+            <a:r>
+              <a:rPr sz="2000" b="1" i="0">
+                <a:solidFill>
+                  <a:srgbClr val="333333"/>
+                </a:solidFill>
+                <a:latin typeface="Calibri"/>
+              </a:rPr>
+              <a:t>entrega el informe final (20 %)</a:t>
+            </a:r>
+            <a:r>
+              <a:rPr sz="2000" b="0" i="0">
+                <a:solidFill>
+                  <a:srgbClr val="333333"/>
+                </a:solidFill>
+                <a:latin typeface="Calibri"/>
+              </a:rPr>
+              <a:t>, se socializa la galería de proyectos del curso y se hace la </a:t>
+            </a:r>
+            <a:r>
+              <a:rPr sz="2000" b="1" i="0">
+                <a:solidFill>
+                  <a:srgbClr val="333333"/>
+                </a:solidFill>
+                <a:latin typeface="Calibri"/>
+              </a:rPr>
+              <a:t>autoevaluación y coevaluación</a:t>
+            </a:r>
+            <a:r>
+              <a:rPr sz="2000" b="0" i="0">
+                <a:solidFill>
+                  <a:srgbClr val="333333"/>
+                </a:solidFill>
+                <a:latin typeface="Calibri"/>
+              </a:rPr>
+              <a:t>.</a:t>
+            </a:r>
+          </a:p>
+          <a:p>
+            <a:pPr>
+              <a:spcAft>
+                <a:spcPts val="800"/>
+              </a:spcAft>
+            </a:pPr>
+            <a:r>
+              <a:rPr sz="2000" b="0" i="0">
+                <a:solidFill>
+                  <a:srgbClr val="333333"/>
+                </a:solidFill>
+                <a:latin typeface="Calibri"/>
+              </a:rPr>
+              <a:t>–   </a:t>
+            </a:r>
+            <a:r>
+              <a:rPr sz="2000" b="1" i="0">
+                <a:solidFill>
+                  <a:srgbClr val="333333"/>
+                </a:solidFill>
+                <a:latin typeface="Calibri"/>
+              </a:rPr>
+              <a:t>Aviso:</a:t>
+            </a:r>
+            <a:r>
+              <a:rPr sz="2000" b="0" i="0">
+                <a:solidFill>
+                  <a:srgbClr val="333333"/>
+                </a:solidFill>
+                <a:latin typeface="Calibri"/>
+              </a:rPr>
+              <a:t> El informe se entrega </a:t>
+            </a:r>
+            <a:r>
+              <a:rPr sz="2000" b="1" i="0">
+                <a:solidFill>
+                  <a:srgbClr val="333333"/>
+                </a:solidFill>
+                <a:latin typeface="Calibri"/>
+              </a:rPr>
+              <a:t>en la Clase 16, dentro de la clase</a:t>
+            </a:r>
+            <a:r>
+              <a:rPr sz="2000" b="0" i="0">
+                <a:solidFill>
+                  <a:srgbClr val="333333"/>
+                </a:solidFill>
+                <a:latin typeface="Calibri"/>
+              </a:rPr>
+              <a:t>: se revisa y se completa ahí mismo, con la lista de verificación. Lleguen con el documento armado —no con las secciones dispersas en cinco archivos— porque los 24 minutos de revisión no alcanzan para copiar y pegar el curso entero.</a:t>
+            </a:r>
+          </a:p>
+          <a:p>
+            <a:pPr>
+              <a:spcAft>
+                <a:spcPts val="800"/>
+              </a:spcAft>
+            </a:pPr>
+            <a:r>
+              <a:rPr sz="2000" b="0" i="0">
+                <a:solidFill>
+                  <a:srgbClr val="333333"/>
+                </a:solidFill>
+                <a:latin typeface="Calibri"/>
+              </a:rPr>
+              <a:t>–   </a:t>
+            </a:r>
+            <a:r>
+              <a:rPr sz="2000" b="1" i="0">
+                <a:solidFill>
+                  <a:srgbClr val="333333"/>
+                </a:solidFill>
+                <a:latin typeface="Calibri"/>
+              </a:rPr>
+              <a:t>Antes de salir:</a:t>
+            </a:r>
+            <a:r>
+              <a:rPr sz="2000" b="0" i="0">
+                <a:solidFill>
+                  <a:srgbClr val="333333"/>
+                </a:solidFill>
+                <a:latin typeface="Calibri"/>
+              </a:rPr>
+              <a:t> el enlace del documento del equipo en el chat, con permiso de lectura para el docente, y el nombre del vocero de hoy.</a:t>
+            </a:r>
+          </a:p>
+        </p:txBody>
+      </p:sp>
+      <p:sp>
+        <p:nvSpPr>
+          <p:cNvPr id="6" name="TextBox 5"/>
+          <p:cNvSpPr txBox="1"/>
+          <p:nvPr/>
+        </p:nvSpPr>
+        <p:spPr>
+          <a:xfrm>
+            <a:off x="11185855" y="6473952"/>
+            <a:ext cx="640080" cy="274320"/>
+          </a:xfrm>
+          <a:prstGeom prst="rect">
+            <a:avLst/>
+          </a:prstGeom>
+          <a:noFill/>
+        </p:spPr>
+        <p:txBody>
+          <a:bodyPr wrap="square">
+            <a:spAutoFit/>
+          </a:bodyPr>
+          <a:lstStyle/>
+          <a:p>
+            <a:pPr algn="r"/>
+            <a:r>
+              <a:rPr sz="1100" b="0" i="0">
+                <a:solidFill>
+                  <a:srgbClr val="666666"/>
+                </a:solidFill>
+                <a:latin typeface="Calibri"/>
+              </a:rPr>
+              <a:t>21</a:t>
+            </a:r>
+          </a:p>
+        </p:txBody>
+      </p:sp>
+    </p:spTree>
+  </p:cSld>
+  <p:clrMapOvr>
+    <a:masterClrMapping/>
+  </p:clrMapOvr>
+</p:sld>
+</file>
+
+<file path=ppt/slides/slide22.xml><?xml version="1.0" encoding="utf-8"?>
 <p:sld xmlns:a="http://schemas.openxmlformats.org/drawingml/2006/main" xmlns:p="http://schemas.openxmlformats.org/presentationml/2006/main" xmlns:r="http://schemas.openxmlformats.org/officeDocument/2006/relationships">
   <p:cSld>
     <p:bg>

--- a/Introduccion a la Ingenieria/Clases/Clase 15 - Exposicion final de proyectos/Presentacion.pptx
+++ b/Introduccion a la Ingenieria/Clases/Clase 15 - Exposicion final de proyectos/Presentacion.pptx
@@ -15,9 +15,6 @@
     <p:sldId id="263" r:id="rId14"/>
     <p:sldId id="264" r:id="rId16"/>
     <p:sldId id="265" r:id="rId17"/>
-    <p:sldId id="266" r:id="rId18"/>
-    <p:sldId id="267" r:id="rId19"/>
-    <p:sldId id="268" r:id="rId20"/>
   </p:sldIdLst>
   <p:sldSz cx="12191695" cy="6858000" type="screen4x3"/>
   <p:notesSz cx="6858000" cy="9144000"/>
@@ -4388,2985 +4385,6 @@
 </file>
 
 <file path=ppt/slides/slide10.xml><?xml version="1.0" encoding="utf-8"?>
-<p:sld xmlns:a="http://schemas.openxmlformats.org/drawingml/2006/main" xmlns:p="http://schemas.openxmlformats.org/presentationml/2006/main" xmlns:r="http://schemas.openxmlformats.org/officeDocument/2006/relationships">
-  <p:cSld>
-    <p:bg>
-      <p:bgPr>
-        <a:solidFill>
-          <a:srgbClr val="FFFFFF"/>
-        </a:solidFill>
-        <a:effectLst/>
-      </p:bgPr>
-    </p:bg>
-    <p:spTree>
-      <p:nvGrpSpPr>
-        <p:cNvPr id="1" name=""/>
-        <p:cNvGrpSpPr/>
-        <p:nvPr/>
-      </p:nvGrpSpPr>
-      <p:grpSpPr/>
-      <p:sp>
-        <p:nvSpPr>
-          <p:cNvPr id="2" name="Rectangle 1"/>
-          <p:cNvSpPr/>
-          <p:nvPr/>
-        </p:nvSpPr>
-        <p:spPr>
-          <a:xfrm>
-            <a:off x="0" y="0"/>
-            <a:ext cx="12191695" cy="1170432"/>
-          </a:xfrm>
-          <a:prstGeom prst="rect">
-            <a:avLst/>
-          </a:prstGeom>
-          <a:solidFill>
-            <a:srgbClr val="095292"/>
-          </a:solidFill>
-          <a:ln>
-            <a:noFill/>
-          </a:ln>
-        </p:spPr>
-        <p:style>
-          <a:lnRef idx="1">
-            <a:schemeClr val="accent1"/>
-          </a:lnRef>
-          <a:fillRef idx="3">
-            <a:schemeClr val="accent1"/>
-          </a:fillRef>
-          <a:effectRef idx="2">
-            <a:schemeClr val="accent1"/>
-          </a:effectRef>
-          <a:fontRef idx="minor">
-            <a:schemeClr val="lt1"/>
-          </a:fontRef>
-        </p:style>
-        <p:txBody>
-          <a:bodyPr rtlCol="0" anchor="ctr"/>
-          <a:lstStyle/>
-          <a:p>
-            <a:pPr algn="ctr"/>
-          </a:p>
-        </p:txBody>
-      </p:sp>
-      <p:sp>
-        <p:nvSpPr>
-          <p:cNvPr id="3" name="Rectangle 2"/>
-          <p:cNvSpPr/>
-          <p:nvPr/>
-        </p:nvSpPr>
-        <p:spPr>
-          <a:xfrm>
-            <a:off x="0" y="1170432"/>
-            <a:ext cx="12191695" cy="41148"/>
-          </a:xfrm>
-          <a:prstGeom prst="rect">
-            <a:avLst/>
-          </a:prstGeom>
-          <a:solidFill>
-            <a:srgbClr val="FFD000"/>
-          </a:solidFill>
-          <a:ln>
-            <a:noFill/>
-          </a:ln>
-        </p:spPr>
-        <p:style>
-          <a:lnRef idx="1">
-            <a:schemeClr val="accent1"/>
-          </a:lnRef>
-          <a:fillRef idx="3">
-            <a:schemeClr val="accent1"/>
-          </a:fillRef>
-          <a:effectRef idx="2">
-            <a:schemeClr val="accent1"/>
-          </a:effectRef>
-          <a:fontRef idx="minor">
-            <a:schemeClr val="lt1"/>
-          </a:fontRef>
-        </p:style>
-        <p:txBody>
-          <a:bodyPr rtlCol="0" anchor="ctr"/>
-          <a:lstStyle/>
-          <a:p>
-            <a:pPr algn="ctr"/>
-          </a:p>
-        </p:txBody>
-      </p:sp>
-      <p:sp>
-        <p:nvSpPr>
-          <p:cNvPr id="4" name="TextBox 3"/>
-          <p:cNvSpPr txBox="1"/>
-          <p:nvPr/>
-        </p:nvSpPr>
-        <p:spPr>
-          <a:xfrm>
-            <a:off x="457200" y="164592"/>
-            <a:ext cx="11277295" cy="384048"/>
-          </a:xfrm>
-          <a:prstGeom prst="rect">
-            <a:avLst/>
-          </a:prstGeom>
-          <a:noFill/>
-        </p:spPr>
-        <p:txBody>
-          <a:bodyPr wrap="square">
-            <a:spAutoFit/>
-          </a:bodyPr>
-          <a:lstStyle/>
-          <a:p>
-            <a:r>
-              <a:rPr sz="2600" b="1" i="0">
-                <a:solidFill>
-                  <a:srgbClr val="FFFFFF"/>
-                </a:solidFill>
-                <a:latin typeface="Calibri"/>
-              </a:rPr>
-              <a:t>Taller de hoy: Exposición final del proyecto</a:t>
-            </a:r>
-          </a:p>
-        </p:txBody>
-      </p:sp>
-      <p:sp>
-        <p:nvSpPr>
-          <p:cNvPr id="5" name="TextBox 4"/>
-          <p:cNvSpPr txBox="1"/>
-          <p:nvPr/>
-        </p:nvSpPr>
-        <p:spPr>
-          <a:xfrm>
-            <a:off x="457200" y="566928"/>
-            <a:ext cx="11277295" cy="411480"/>
-          </a:xfrm>
-          <a:prstGeom prst="rect">
-            <a:avLst/>
-          </a:prstGeom>
-          <a:noFill/>
-        </p:spPr>
-        <p:txBody>
-          <a:bodyPr wrap="square">
-            <a:spAutoFit/>
-          </a:bodyPr>
-          <a:lstStyle/>
-          <a:p>
-            <a:r>
-              <a:rPr sz="1400" b="0" i="0">
-                <a:solidFill>
-                  <a:srgbClr val="B8D8EE"/>
-                </a:solidFill>
-                <a:latin typeface="Calibri"/>
-              </a:rPr>
-              <a:t>60 min en equipos · 9 min de exposición + 3 de preguntas, por equipo · exposición de 9 min + ficha de valoración de los otros equipos</a:t>
-            </a:r>
-          </a:p>
-        </p:txBody>
-      </p:sp>
-      <p:sp>
-        <p:nvSpPr>
-          <p:cNvPr id="6" name="Rounded Rectangle 5"/>
-          <p:cNvSpPr/>
-          <p:nvPr/>
-        </p:nvSpPr>
-        <p:spPr>
-          <a:xfrm>
-            <a:off x="457200" y="1472184"/>
-            <a:ext cx="11277295" cy="566928"/>
-          </a:xfrm>
-          <a:prstGeom prst="roundRect">
-            <a:avLst>
-              <a:gd name="adj" fmla="val 12000"/>
-            </a:avLst>
-          </a:prstGeom>
-          <a:solidFill>
-            <a:srgbClr val="F2F2F2"/>
-          </a:solidFill>
-          <a:ln>
-            <a:noFill/>
-          </a:ln>
-        </p:spPr>
-        <p:style>
-          <a:lnRef idx="1">
-            <a:schemeClr val="accent1"/>
-          </a:lnRef>
-          <a:fillRef idx="3">
-            <a:schemeClr val="accent1"/>
-          </a:fillRef>
-          <a:effectRef idx="2">
-            <a:schemeClr val="accent1"/>
-          </a:effectRef>
-          <a:fontRef idx="minor">
-            <a:schemeClr val="lt1"/>
-          </a:fontRef>
-        </p:style>
-        <p:txBody>
-          <a:bodyPr rtlCol="0" anchor="ctr"/>
-          <a:lstStyle/>
-          <a:p>
-            <a:pPr algn="ctr"/>
-          </a:p>
-        </p:txBody>
-      </p:sp>
-      <p:sp>
-        <p:nvSpPr>
-          <p:cNvPr id="7" name="Rectangle 6"/>
-          <p:cNvSpPr/>
-          <p:nvPr/>
-        </p:nvSpPr>
-        <p:spPr>
-          <a:xfrm>
-            <a:off x="640080" y="1618487"/>
-            <a:ext cx="274320" cy="274320"/>
-          </a:xfrm>
-          <a:prstGeom prst="rect">
-            <a:avLst/>
-          </a:prstGeom>
-          <a:solidFill>
-            <a:srgbClr val="FFFFFF"/>
-          </a:solidFill>
-          <a:ln>
-            <a:solidFill>
-              <a:srgbClr val="333333"/>
-            </a:solidFill>
-          </a:ln>
-        </p:spPr>
-        <p:style>
-          <a:lnRef idx="1">
-            <a:schemeClr val="accent1"/>
-          </a:lnRef>
-          <a:fillRef idx="3">
-            <a:schemeClr val="accent1"/>
-          </a:fillRef>
-          <a:effectRef idx="2">
-            <a:schemeClr val="accent1"/>
-          </a:effectRef>
-          <a:fontRef idx="minor">
-            <a:schemeClr val="lt1"/>
-          </a:fontRef>
-        </p:style>
-        <p:txBody>
-          <a:bodyPr rtlCol="0" anchor="ctr"/>
-          <a:lstStyle/>
-          <a:p>
-            <a:pPr algn="ctr"/>
-          </a:p>
-        </p:txBody>
-      </p:sp>
-      <p:sp>
-        <p:nvSpPr>
-          <p:cNvPr id="8" name="Rectangle 7"/>
-          <p:cNvSpPr/>
-          <p:nvPr/>
-        </p:nvSpPr>
-        <p:spPr>
-          <a:xfrm>
-            <a:off x="640080" y="1618487"/>
-            <a:ext cx="73152" cy="274320"/>
-          </a:xfrm>
-          <a:prstGeom prst="rect">
-            <a:avLst/>
-          </a:prstGeom>
-          <a:solidFill>
-            <a:srgbClr val="269CCB"/>
-          </a:solidFill>
-          <a:ln>
-            <a:noFill/>
-          </a:ln>
-        </p:spPr>
-        <p:style>
-          <a:lnRef idx="1">
-            <a:schemeClr val="accent1"/>
-          </a:lnRef>
-          <a:fillRef idx="3">
-            <a:schemeClr val="accent1"/>
-          </a:fillRef>
-          <a:effectRef idx="2">
-            <a:schemeClr val="accent1"/>
-          </a:effectRef>
-          <a:fontRef idx="minor">
-            <a:schemeClr val="lt1"/>
-          </a:fontRef>
-        </p:style>
-        <p:txBody>
-          <a:bodyPr rtlCol="0" anchor="ctr"/>
-          <a:lstStyle/>
-          <a:p>
-            <a:pPr algn="ctr"/>
-          </a:p>
-        </p:txBody>
-      </p:sp>
-      <p:sp>
-        <p:nvSpPr>
-          <p:cNvPr id="9" name="TextBox 8"/>
-          <p:cNvSpPr txBox="1"/>
-          <p:nvPr/>
-        </p:nvSpPr>
-        <p:spPr>
-          <a:xfrm>
-            <a:off x="1097280" y="1563624"/>
-            <a:ext cx="10362895" cy="402336"/>
-          </a:xfrm>
-          <a:prstGeom prst="rect">
-            <a:avLst/>
-          </a:prstGeom>
-          <a:noFill/>
-        </p:spPr>
-        <p:txBody>
-          <a:bodyPr wrap="square" anchor="ctr"/>
-          <a:lstStyle/>
-          <a:p>
-            <a:r>
-              <a:rPr sz="1500" b="1" i="0">
-                <a:solidFill>
-                  <a:srgbClr val="333333"/>
-                </a:solidFill>
-                <a:latin typeface="Calibri"/>
-              </a:rPr>
-              <a:t>EL PROBLEMA CON SU CIFRA</a:t>
-            </a:r>
-            <a:r>
-              <a:rPr sz="1500" b="0" i="0">
-                <a:solidFill>
-                  <a:srgbClr val="333333"/>
-                </a:solidFill>
-                <a:latin typeface="Calibri"/>
-              </a:rPr>
-              <a:t> — Una frase y </a:t>
-            </a:r>
-            <a:r>
-              <a:rPr sz="1500" b="1" i="0">
-                <a:solidFill>
-                  <a:srgbClr val="333333"/>
-                </a:solidFill>
-                <a:latin typeface="Calibri"/>
-              </a:rPr>
-              <a:t>un número</a:t>
-            </a:r>
-            <a:r>
-              <a:rPr sz="1500" b="0" i="0">
-                <a:solidFill>
-                  <a:srgbClr val="333333"/>
-                </a:solidFill>
-                <a:latin typeface="Calibri"/>
-              </a:rPr>
-              <a:t>, con de dónde salió. </a:t>
-            </a:r>
-            <a:r>
-              <a:rPr sz="1500" b="1" i="0">
-                <a:solidFill>
-                  <a:srgbClr val="333333"/>
-                </a:solidFill>
-                <a:latin typeface="Calibri"/>
-              </a:rPr>
-              <a:t>Sin saludos ni presentaciones personales</a:t>
-            </a:r>
-            <a:r>
-              <a:rPr sz="1500" b="0" i="0">
-                <a:solidFill>
-                  <a:srgbClr val="333333"/>
-                </a:solidFill>
-                <a:latin typeface="Calibri"/>
-              </a:rPr>
-              <a:t>: el nombre del equipo está en la diapositiva.</a:t>
-            </a:r>
-          </a:p>
-        </p:txBody>
-      </p:sp>
-      <p:sp>
-        <p:nvSpPr>
-          <p:cNvPr id="10" name="Rounded Rectangle 9"/>
-          <p:cNvSpPr/>
-          <p:nvPr/>
-        </p:nvSpPr>
-        <p:spPr>
-          <a:xfrm>
-            <a:off x="457200" y="2148839"/>
-            <a:ext cx="11277295" cy="566928"/>
-          </a:xfrm>
-          <a:prstGeom prst="roundRect">
-            <a:avLst>
-              <a:gd name="adj" fmla="val 12000"/>
-            </a:avLst>
-          </a:prstGeom>
-          <a:solidFill>
-            <a:srgbClr val="F2F2F2"/>
-          </a:solidFill>
-          <a:ln>
-            <a:noFill/>
-          </a:ln>
-        </p:spPr>
-        <p:style>
-          <a:lnRef idx="1">
-            <a:schemeClr val="accent1"/>
-          </a:lnRef>
-          <a:fillRef idx="3">
-            <a:schemeClr val="accent1"/>
-          </a:fillRef>
-          <a:effectRef idx="2">
-            <a:schemeClr val="accent1"/>
-          </a:effectRef>
-          <a:fontRef idx="minor">
-            <a:schemeClr val="lt1"/>
-          </a:fontRef>
-        </p:style>
-        <p:txBody>
-          <a:bodyPr rtlCol="0" anchor="ctr"/>
-          <a:lstStyle/>
-          <a:p>
-            <a:pPr algn="ctr"/>
-          </a:p>
-        </p:txBody>
-      </p:sp>
-      <p:sp>
-        <p:nvSpPr>
-          <p:cNvPr id="11" name="Rectangle 10"/>
-          <p:cNvSpPr/>
-          <p:nvPr/>
-        </p:nvSpPr>
-        <p:spPr>
-          <a:xfrm>
-            <a:off x="640080" y="2295144"/>
-            <a:ext cx="274320" cy="274320"/>
-          </a:xfrm>
-          <a:prstGeom prst="rect">
-            <a:avLst/>
-          </a:prstGeom>
-          <a:solidFill>
-            <a:srgbClr val="FFFFFF"/>
-          </a:solidFill>
-          <a:ln>
-            <a:solidFill>
-              <a:srgbClr val="333333"/>
-            </a:solidFill>
-          </a:ln>
-        </p:spPr>
-        <p:style>
-          <a:lnRef idx="1">
-            <a:schemeClr val="accent1"/>
-          </a:lnRef>
-          <a:fillRef idx="3">
-            <a:schemeClr val="accent1"/>
-          </a:fillRef>
-          <a:effectRef idx="2">
-            <a:schemeClr val="accent1"/>
-          </a:effectRef>
-          <a:fontRef idx="minor">
-            <a:schemeClr val="lt1"/>
-          </a:fontRef>
-        </p:style>
-        <p:txBody>
-          <a:bodyPr rtlCol="0" anchor="ctr"/>
-          <a:lstStyle/>
-          <a:p>
-            <a:pPr algn="ctr"/>
-          </a:p>
-        </p:txBody>
-      </p:sp>
-      <p:sp>
-        <p:nvSpPr>
-          <p:cNvPr id="12" name="Rectangle 11"/>
-          <p:cNvSpPr/>
-          <p:nvPr/>
-        </p:nvSpPr>
-        <p:spPr>
-          <a:xfrm>
-            <a:off x="640080" y="2295144"/>
-            <a:ext cx="73152" cy="274320"/>
-          </a:xfrm>
-          <a:prstGeom prst="rect">
-            <a:avLst/>
-          </a:prstGeom>
-          <a:solidFill>
-            <a:srgbClr val="269CCB"/>
-          </a:solidFill>
-          <a:ln>
-            <a:noFill/>
-          </a:ln>
-        </p:spPr>
-        <p:style>
-          <a:lnRef idx="1">
-            <a:schemeClr val="accent1"/>
-          </a:lnRef>
-          <a:fillRef idx="3">
-            <a:schemeClr val="accent1"/>
-          </a:fillRef>
-          <a:effectRef idx="2">
-            <a:schemeClr val="accent1"/>
-          </a:effectRef>
-          <a:fontRef idx="minor">
-            <a:schemeClr val="lt1"/>
-          </a:fontRef>
-        </p:style>
-        <p:txBody>
-          <a:bodyPr rtlCol="0" anchor="ctr"/>
-          <a:lstStyle/>
-          <a:p>
-            <a:pPr algn="ctr"/>
-          </a:p>
-        </p:txBody>
-      </p:sp>
-      <p:sp>
-        <p:nvSpPr>
-          <p:cNvPr id="13" name="TextBox 12"/>
-          <p:cNvSpPr txBox="1"/>
-          <p:nvPr/>
-        </p:nvSpPr>
-        <p:spPr>
-          <a:xfrm>
-            <a:off x="1097280" y="2240279"/>
-            <a:ext cx="10362895" cy="402336"/>
-          </a:xfrm>
-          <a:prstGeom prst="rect">
-            <a:avLst/>
-          </a:prstGeom>
-          <a:noFill/>
-        </p:spPr>
-        <p:txBody>
-          <a:bodyPr wrap="square" anchor="ctr"/>
-          <a:lstStyle/>
-          <a:p>
-            <a:r>
-              <a:rPr sz="1500" b="1" i="0">
-                <a:solidFill>
-                  <a:srgbClr val="333333"/>
-                </a:solidFill>
-                <a:latin typeface="Calibri"/>
-              </a:rPr>
-              <a:t>LOS AFECTADOS Y LA DECISIÓN</a:t>
-            </a:r>
-            <a:r>
-              <a:rPr sz="1500" b="0" i="0">
-                <a:solidFill>
-                  <a:srgbClr val="333333"/>
-                </a:solidFill>
-                <a:latin typeface="Calibri"/>
-              </a:rPr>
-              <a:t> — Quiénes son los afectados —</a:t>
-            </a:r>
-            <a:r>
-              <a:rPr sz="1500" b="1" i="0">
-                <a:solidFill>
-                  <a:srgbClr val="333333"/>
-                </a:solidFill>
-                <a:latin typeface="Calibri"/>
-              </a:rPr>
-              <a:t>incluido uno que no es usuario</a:t>
-            </a:r>
-            <a:r>
-              <a:rPr sz="1500" b="0" i="0">
-                <a:solidFill>
-                  <a:srgbClr val="333333"/>
-                </a:solidFill>
-                <a:latin typeface="Calibri"/>
-              </a:rPr>
-              <a:t>— y qué alternativa se eligió, </a:t>
-            </a:r>
-            <a:r>
-              <a:rPr sz="1500" b="1" i="0">
-                <a:solidFill>
-                  <a:srgbClr val="333333"/>
-                </a:solidFill>
-                <a:latin typeface="Calibri"/>
-              </a:rPr>
-              <a:t>diciendo qué se sacrificó</a:t>
-            </a:r>
-            <a:r>
-              <a:rPr sz="1500" b="0" i="0">
-                <a:solidFill>
-                  <a:srgbClr val="333333"/>
-                </a:solidFill>
-                <a:latin typeface="Calibri"/>
-              </a:rPr>
-              <a:t>.</a:t>
-            </a:r>
-          </a:p>
-        </p:txBody>
-      </p:sp>
-      <p:sp>
-        <p:nvSpPr>
-          <p:cNvPr id="14" name="Rounded Rectangle 13"/>
-          <p:cNvSpPr/>
-          <p:nvPr/>
-        </p:nvSpPr>
-        <p:spPr>
-          <a:xfrm>
-            <a:off x="457200" y="2825496"/>
-            <a:ext cx="11277295" cy="566928"/>
-          </a:xfrm>
-          <a:prstGeom prst="roundRect">
-            <a:avLst>
-              <a:gd name="adj" fmla="val 12000"/>
-            </a:avLst>
-          </a:prstGeom>
-          <a:solidFill>
-            <a:srgbClr val="F2F2F2"/>
-          </a:solidFill>
-          <a:ln>
-            <a:noFill/>
-          </a:ln>
-        </p:spPr>
-        <p:style>
-          <a:lnRef idx="1">
-            <a:schemeClr val="accent1"/>
-          </a:lnRef>
-          <a:fillRef idx="3">
-            <a:schemeClr val="accent1"/>
-          </a:fillRef>
-          <a:effectRef idx="2">
-            <a:schemeClr val="accent1"/>
-          </a:effectRef>
-          <a:fontRef idx="minor">
-            <a:schemeClr val="lt1"/>
-          </a:fontRef>
-        </p:style>
-        <p:txBody>
-          <a:bodyPr rtlCol="0" anchor="ctr"/>
-          <a:lstStyle/>
-          <a:p>
-            <a:pPr algn="ctr"/>
-          </a:p>
-        </p:txBody>
-      </p:sp>
-      <p:sp>
-        <p:nvSpPr>
-          <p:cNvPr id="15" name="Rectangle 14"/>
-          <p:cNvSpPr/>
-          <p:nvPr/>
-        </p:nvSpPr>
-        <p:spPr>
-          <a:xfrm>
-            <a:off x="640080" y="2971800"/>
-            <a:ext cx="274320" cy="274320"/>
-          </a:xfrm>
-          <a:prstGeom prst="rect">
-            <a:avLst/>
-          </a:prstGeom>
-          <a:solidFill>
-            <a:srgbClr val="FFFFFF"/>
-          </a:solidFill>
-          <a:ln>
-            <a:solidFill>
-              <a:srgbClr val="333333"/>
-            </a:solidFill>
-          </a:ln>
-        </p:spPr>
-        <p:style>
-          <a:lnRef idx="1">
-            <a:schemeClr val="accent1"/>
-          </a:lnRef>
-          <a:fillRef idx="3">
-            <a:schemeClr val="accent1"/>
-          </a:fillRef>
-          <a:effectRef idx="2">
-            <a:schemeClr val="accent1"/>
-          </a:effectRef>
-          <a:fontRef idx="minor">
-            <a:schemeClr val="lt1"/>
-          </a:fontRef>
-        </p:style>
-        <p:txBody>
-          <a:bodyPr rtlCol="0" anchor="ctr"/>
-          <a:lstStyle/>
-          <a:p>
-            <a:pPr algn="ctr"/>
-          </a:p>
-        </p:txBody>
-      </p:sp>
-      <p:sp>
-        <p:nvSpPr>
-          <p:cNvPr id="16" name="Rectangle 15"/>
-          <p:cNvSpPr/>
-          <p:nvPr/>
-        </p:nvSpPr>
-        <p:spPr>
-          <a:xfrm>
-            <a:off x="640080" y="2971800"/>
-            <a:ext cx="73152" cy="274320"/>
-          </a:xfrm>
-          <a:prstGeom prst="rect">
-            <a:avLst/>
-          </a:prstGeom>
-          <a:solidFill>
-            <a:srgbClr val="269CCB"/>
-          </a:solidFill>
-          <a:ln>
-            <a:noFill/>
-          </a:ln>
-        </p:spPr>
-        <p:style>
-          <a:lnRef idx="1">
-            <a:schemeClr val="accent1"/>
-          </a:lnRef>
-          <a:fillRef idx="3">
-            <a:schemeClr val="accent1"/>
-          </a:fillRef>
-          <a:effectRef idx="2">
-            <a:schemeClr val="accent1"/>
-          </a:effectRef>
-          <a:fontRef idx="minor">
-            <a:schemeClr val="lt1"/>
-          </a:fontRef>
-        </p:style>
-        <p:txBody>
-          <a:bodyPr rtlCol="0" anchor="ctr"/>
-          <a:lstStyle/>
-          <a:p>
-            <a:pPr algn="ctr"/>
-          </a:p>
-        </p:txBody>
-      </p:sp>
-      <p:sp>
-        <p:nvSpPr>
-          <p:cNvPr id="17" name="TextBox 16"/>
-          <p:cNvSpPr txBox="1"/>
-          <p:nvPr/>
-        </p:nvSpPr>
-        <p:spPr>
-          <a:xfrm>
-            <a:off x="1097280" y="2916936"/>
-            <a:ext cx="10362895" cy="402336"/>
-          </a:xfrm>
-          <a:prstGeom prst="rect">
-            <a:avLst/>
-          </a:prstGeom>
-          <a:noFill/>
-        </p:spPr>
-        <p:txBody>
-          <a:bodyPr wrap="square" anchor="ctr"/>
-          <a:lstStyle/>
-          <a:p>
-            <a:r>
-              <a:rPr sz="1500" b="1" i="0">
-                <a:solidFill>
-                  <a:srgbClr val="333333"/>
-                </a:solidFill>
-                <a:latin typeface="Calibri"/>
-              </a:rPr>
-              <a:t>LA SOLUCIÓN Y EL PROTOTIPO EN VIVO</a:t>
-            </a:r>
-            <a:r>
-              <a:rPr sz="1500" b="0" i="0">
-                <a:solidFill>
-                  <a:srgbClr val="333333"/>
-                </a:solidFill>
-                <a:latin typeface="Calibri"/>
-              </a:rPr>
-              <a:t> — Un recorrido de </a:t>
-            </a:r>
-            <a:r>
-              <a:rPr sz="1500" b="1" i="0">
-                <a:solidFill>
-                  <a:srgbClr val="333333"/>
-                </a:solidFill>
-                <a:latin typeface="Calibri"/>
-              </a:rPr>
-              <a:t>tres pasos</a:t>
-            </a:r>
-            <a:r>
-              <a:rPr sz="1500" b="0" i="0">
-                <a:solidFill>
-                  <a:srgbClr val="333333"/>
-                </a:solidFill>
-                <a:latin typeface="Calibri"/>
-              </a:rPr>
-              <a:t> mostrando </a:t>
-            </a:r>
-            <a:r>
-              <a:rPr sz="1500" b="1" i="0">
-                <a:solidFill>
-                  <a:srgbClr val="333333"/>
-                </a:solidFill>
-                <a:latin typeface="Calibri"/>
-              </a:rPr>
-              <a:t>una tarea cumpliéndose</a:t>
-            </a:r>
-            <a:r>
-              <a:rPr sz="1500" b="0" i="0">
-                <a:solidFill>
-                  <a:srgbClr val="333333"/>
-                </a:solidFill>
-                <a:latin typeface="Calibri"/>
-              </a:rPr>
-              <a:t>. Narra una persona y maneja la pantalla otra.</a:t>
-            </a:r>
-          </a:p>
-        </p:txBody>
-      </p:sp>
-      <p:sp>
-        <p:nvSpPr>
-          <p:cNvPr id="18" name="Rounded Rectangle 17"/>
-          <p:cNvSpPr/>
-          <p:nvPr/>
-        </p:nvSpPr>
-        <p:spPr>
-          <a:xfrm>
-            <a:off x="457200" y="3502152"/>
-            <a:ext cx="11277295" cy="566928"/>
-          </a:xfrm>
-          <a:prstGeom prst="roundRect">
-            <a:avLst>
-              <a:gd name="adj" fmla="val 12000"/>
-            </a:avLst>
-          </a:prstGeom>
-          <a:solidFill>
-            <a:srgbClr val="F2F2F2"/>
-          </a:solidFill>
-          <a:ln>
-            <a:noFill/>
-          </a:ln>
-        </p:spPr>
-        <p:style>
-          <a:lnRef idx="1">
-            <a:schemeClr val="accent1"/>
-          </a:lnRef>
-          <a:fillRef idx="3">
-            <a:schemeClr val="accent1"/>
-          </a:fillRef>
-          <a:effectRef idx="2">
-            <a:schemeClr val="accent1"/>
-          </a:effectRef>
-          <a:fontRef idx="minor">
-            <a:schemeClr val="lt1"/>
-          </a:fontRef>
-        </p:style>
-        <p:txBody>
-          <a:bodyPr rtlCol="0" anchor="ctr"/>
-          <a:lstStyle/>
-          <a:p>
-            <a:pPr algn="ctr"/>
-          </a:p>
-        </p:txBody>
-      </p:sp>
-      <p:sp>
-        <p:nvSpPr>
-          <p:cNvPr id="19" name="Rectangle 18"/>
-          <p:cNvSpPr/>
-          <p:nvPr/>
-        </p:nvSpPr>
-        <p:spPr>
-          <a:xfrm>
-            <a:off x="640080" y="3648456"/>
-            <a:ext cx="274320" cy="274320"/>
-          </a:xfrm>
-          <a:prstGeom prst="rect">
-            <a:avLst/>
-          </a:prstGeom>
-          <a:solidFill>
-            <a:srgbClr val="FFFFFF"/>
-          </a:solidFill>
-          <a:ln>
-            <a:solidFill>
-              <a:srgbClr val="333333"/>
-            </a:solidFill>
-          </a:ln>
-        </p:spPr>
-        <p:style>
-          <a:lnRef idx="1">
-            <a:schemeClr val="accent1"/>
-          </a:lnRef>
-          <a:fillRef idx="3">
-            <a:schemeClr val="accent1"/>
-          </a:fillRef>
-          <a:effectRef idx="2">
-            <a:schemeClr val="accent1"/>
-          </a:effectRef>
-          <a:fontRef idx="minor">
-            <a:schemeClr val="lt1"/>
-          </a:fontRef>
-        </p:style>
-        <p:txBody>
-          <a:bodyPr rtlCol="0" anchor="ctr"/>
-          <a:lstStyle/>
-          <a:p>
-            <a:pPr algn="ctr"/>
-          </a:p>
-        </p:txBody>
-      </p:sp>
-      <p:sp>
-        <p:nvSpPr>
-          <p:cNvPr id="20" name="Rectangle 19"/>
-          <p:cNvSpPr/>
-          <p:nvPr/>
-        </p:nvSpPr>
-        <p:spPr>
-          <a:xfrm>
-            <a:off x="640080" y="3648456"/>
-            <a:ext cx="73152" cy="274320"/>
-          </a:xfrm>
-          <a:prstGeom prst="rect">
-            <a:avLst/>
-          </a:prstGeom>
-          <a:solidFill>
-            <a:srgbClr val="269CCB"/>
-          </a:solidFill>
-          <a:ln>
-            <a:noFill/>
-          </a:ln>
-        </p:spPr>
-        <p:style>
-          <a:lnRef idx="1">
-            <a:schemeClr val="accent1"/>
-          </a:lnRef>
-          <a:fillRef idx="3">
-            <a:schemeClr val="accent1"/>
-          </a:fillRef>
-          <a:effectRef idx="2">
-            <a:schemeClr val="accent1"/>
-          </a:effectRef>
-          <a:fontRef idx="minor">
-            <a:schemeClr val="lt1"/>
-          </a:fontRef>
-        </p:style>
-        <p:txBody>
-          <a:bodyPr rtlCol="0" anchor="ctr"/>
-          <a:lstStyle/>
-          <a:p>
-            <a:pPr algn="ctr"/>
-          </a:p>
-        </p:txBody>
-      </p:sp>
-      <p:sp>
-        <p:nvSpPr>
-          <p:cNvPr id="21" name="TextBox 20"/>
-          <p:cNvSpPr txBox="1"/>
-          <p:nvPr/>
-        </p:nvSpPr>
-        <p:spPr>
-          <a:xfrm>
-            <a:off x="1097280" y="3593592"/>
-            <a:ext cx="10362895" cy="402336"/>
-          </a:xfrm>
-          <a:prstGeom prst="rect">
-            <a:avLst/>
-          </a:prstGeom>
-          <a:noFill/>
-        </p:spPr>
-        <p:txBody>
-          <a:bodyPr wrap="square" anchor="ctr"/>
-          <a:lstStyle/>
-          <a:p>
-            <a:r>
-              <a:rPr sz="1500" b="1" i="0">
-                <a:solidFill>
-                  <a:srgbClr val="333333"/>
-                </a:solidFill>
-                <a:latin typeface="Calibri"/>
-              </a:rPr>
-              <a:t>LO QUE FALLÓ Y LO QUE APRENDIMOS</a:t>
-            </a:r>
-            <a:r>
-              <a:rPr sz="1500" b="0" i="0">
-                <a:solidFill>
-                  <a:srgbClr val="333333"/>
-                </a:solidFill>
-                <a:latin typeface="Calibri"/>
-              </a:rPr>
-              <a:t> — Los hallazgos con personas reales, qué se arregló y </a:t>
-            </a:r>
-            <a:r>
-              <a:rPr sz="1500" b="1" i="0">
-                <a:solidFill>
-                  <a:srgbClr val="333333"/>
-                </a:solidFill>
-                <a:latin typeface="Calibri"/>
-              </a:rPr>
-              <a:t>qué se decidió no arreglar</a:t>
-            </a:r>
-            <a:r>
-              <a:rPr sz="1500" b="0" i="0">
-                <a:solidFill>
-                  <a:srgbClr val="333333"/>
-                </a:solidFill>
-                <a:latin typeface="Calibri"/>
-              </a:rPr>
-              <a:t>, con el motivo.</a:t>
-            </a:r>
-          </a:p>
-        </p:txBody>
-      </p:sp>
-      <p:sp>
-        <p:nvSpPr>
-          <p:cNvPr id="22" name="Rounded Rectangle 21"/>
-          <p:cNvSpPr/>
-          <p:nvPr/>
-        </p:nvSpPr>
-        <p:spPr>
-          <a:xfrm>
-            <a:off x="457200" y="4178808"/>
-            <a:ext cx="11277295" cy="566928"/>
-          </a:xfrm>
-          <a:prstGeom prst="roundRect">
-            <a:avLst>
-              <a:gd name="adj" fmla="val 12000"/>
-            </a:avLst>
-          </a:prstGeom>
-          <a:solidFill>
-            <a:srgbClr val="F2F2F2"/>
-          </a:solidFill>
-          <a:ln>
-            <a:noFill/>
-          </a:ln>
-        </p:spPr>
-        <p:style>
-          <a:lnRef idx="1">
-            <a:schemeClr val="accent1"/>
-          </a:lnRef>
-          <a:fillRef idx="3">
-            <a:schemeClr val="accent1"/>
-          </a:fillRef>
-          <a:effectRef idx="2">
-            <a:schemeClr val="accent1"/>
-          </a:effectRef>
-          <a:fontRef idx="minor">
-            <a:schemeClr val="lt1"/>
-          </a:fontRef>
-        </p:style>
-        <p:txBody>
-          <a:bodyPr rtlCol="0" anchor="ctr"/>
-          <a:lstStyle/>
-          <a:p>
-            <a:pPr algn="ctr"/>
-          </a:p>
-        </p:txBody>
-      </p:sp>
-      <p:sp>
-        <p:nvSpPr>
-          <p:cNvPr id="23" name="Rectangle 22"/>
-          <p:cNvSpPr/>
-          <p:nvPr/>
-        </p:nvSpPr>
-        <p:spPr>
-          <a:xfrm>
-            <a:off x="640080" y="4325112"/>
-            <a:ext cx="274320" cy="274320"/>
-          </a:xfrm>
-          <a:prstGeom prst="rect">
-            <a:avLst/>
-          </a:prstGeom>
-          <a:solidFill>
-            <a:srgbClr val="FFFFFF"/>
-          </a:solidFill>
-          <a:ln>
-            <a:solidFill>
-              <a:srgbClr val="333333"/>
-            </a:solidFill>
-          </a:ln>
-        </p:spPr>
-        <p:style>
-          <a:lnRef idx="1">
-            <a:schemeClr val="accent1"/>
-          </a:lnRef>
-          <a:fillRef idx="3">
-            <a:schemeClr val="accent1"/>
-          </a:fillRef>
-          <a:effectRef idx="2">
-            <a:schemeClr val="accent1"/>
-          </a:effectRef>
-          <a:fontRef idx="minor">
-            <a:schemeClr val="lt1"/>
-          </a:fontRef>
-        </p:style>
-        <p:txBody>
-          <a:bodyPr rtlCol="0" anchor="ctr"/>
-          <a:lstStyle/>
-          <a:p>
-            <a:pPr algn="ctr"/>
-          </a:p>
-        </p:txBody>
-      </p:sp>
-      <p:sp>
-        <p:nvSpPr>
-          <p:cNvPr id="24" name="Rectangle 23"/>
-          <p:cNvSpPr/>
-          <p:nvPr/>
-        </p:nvSpPr>
-        <p:spPr>
-          <a:xfrm>
-            <a:off x="640080" y="4325112"/>
-            <a:ext cx="73152" cy="274320"/>
-          </a:xfrm>
-          <a:prstGeom prst="rect">
-            <a:avLst/>
-          </a:prstGeom>
-          <a:solidFill>
-            <a:srgbClr val="269CCB"/>
-          </a:solidFill>
-          <a:ln>
-            <a:noFill/>
-          </a:ln>
-        </p:spPr>
-        <p:style>
-          <a:lnRef idx="1">
-            <a:schemeClr val="accent1"/>
-          </a:lnRef>
-          <a:fillRef idx="3">
-            <a:schemeClr val="accent1"/>
-          </a:fillRef>
-          <a:effectRef idx="2">
-            <a:schemeClr val="accent1"/>
-          </a:effectRef>
-          <a:fontRef idx="minor">
-            <a:schemeClr val="lt1"/>
-          </a:fontRef>
-        </p:style>
-        <p:txBody>
-          <a:bodyPr rtlCol="0" anchor="ctr"/>
-          <a:lstStyle/>
-          <a:p>
-            <a:pPr algn="ctr"/>
-          </a:p>
-        </p:txBody>
-      </p:sp>
-      <p:sp>
-        <p:nvSpPr>
-          <p:cNvPr id="25" name="TextBox 24"/>
-          <p:cNvSpPr txBox="1"/>
-          <p:nvPr/>
-        </p:nvSpPr>
-        <p:spPr>
-          <a:xfrm>
-            <a:off x="1097280" y="4270248"/>
-            <a:ext cx="10362895" cy="402336"/>
-          </a:xfrm>
-          <a:prstGeom prst="rect">
-            <a:avLst/>
-          </a:prstGeom>
-          <a:noFill/>
-        </p:spPr>
-        <p:txBody>
-          <a:bodyPr wrap="square" anchor="ctr"/>
-          <a:lstStyle/>
-          <a:p>
-            <a:r>
-              <a:rPr sz="1500" b="1" i="0">
-                <a:solidFill>
-                  <a:srgbClr val="333333"/>
-                </a:solidFill>
-                <a:latin typeface="Calibri"/>
-              </a:rPr>
-              <a:t>IMPACTO Y SIGUIENTE PASO</a:t>
-            </a:r>
-            <a:r>
-              <a:rPr sz="1500" b="0" i="0">
-                <a:solidFill>
-                  <a:srgbClr val="333333"/>
-                </a:solidFill>
-                <a:latin typeface="Calibri"/>
-              </a:rPr>
-              <a:t> — El impacto positivo </a:t>
-            </a:r>
-            <a:r>
-              <a:rPr sz="1500" b="1" i="0">
-                <a:solidFill>
-                  <a:srgbClr val="333333"/>
-                </a:solidFill>
-                <a:latin typeface="Calibri"/>
-              </a:rPr>
-              <a:t>con su número</a:t>
-            </a:r>
-            <a:r>
-              <a:rPr sz="1500" b="0" i="0">
-                <a:solidFill>
-                  <a:srgbClr val="333333"/>
-                </a:solidFill>
-                <a:latin typeface="Calibri"/>
-              </a:rPr>
-              <a:t> y el negativo </a:t>
-            </a:r>
-            <a:r>
-              <a:rPr sz="1500" b="1" i="0">
-                <a:solidFill>
-                  <a:srgbClr val="333333"/>
-                </a:solidFill>
-                <a:latin typeface="Calibri"/>
-              </a:rPr>
-              <a:t>con su mitigación</a:t>
-            </a:r>
-            <a:r>
-              <a:rPr sz="1500" b="0" i="0">
-                <a:solidFill>
-                  <a:srgbClr val="333333"/>
-                </a:solidFill>
-                <a:latin typeface="Calibri"/>
-              </a:rPr>
-              <a:t>. Qué haría quien continúe el proyecto.</a:t>
-            </a:r>
-          </a:p>
-        </p:txBody>
-      </p:sp>
-      <p:sp>
-        <p:nvSpPr>
-          <p:cNvPr id="26" name="TextBox 25"/>
-          <p:cNvSpPr txBox="1"/>
-          <p:nvPr/>
-        </p:nvSpPr>
-        <p:spPr>
-          <a:xfrm>
-            <a:off x="11185855" y="6473952"/>
-            <a:ext cx="640080" cy="274320"/>
-          </a:xfrm>
-          <a:prstGeom prst="rect">
-            <a:avLst/>
-          </a:prstGeom>
-          <a:noFill/>
-        </p:spPr>
-        <p:txBody>
-          <a:bodyPr wrap="square">
-            <a:spAutoFit/>
-          </a:bodyPr>
-          <a:lstStyle/>
-          <a:p>
-            <a:pPr algn="r"/>
-            <a:r>
-              <a:rPr sz="1100" b="0" i="0">
-                <a:solidFill>
-                  <a:srgbClr val="666666"/>
-                </a:solidFill>
-                <a:latin typeface="Calibri"/>
-              </a:rPr>
-              <a:t>10</a:t>
-            </a:r>
-          </a:p>
-        </p:txBody>
-      </p:sp>
-    </p:spTree>
-  </p:cSld>
-  <p:clrMapOvr>
-    <a:masterClrMapping/>
-  </p:clrMapOvr>
-</p:sld>
-</file>
-
-<file path=ppt/slides/slide11.xml><?xml version="1.0" encoding="utf-8"?>
-<p:sld xmlns:a="http://schemas.openxmlformats.org/drawingml/2006/main" xmlns:p="http://schemas.openxmlformats.org/presentationml/2006/main" xmlns:r="http://schemas.openxmlformats.org/officeDocument/2006/relationships">
-  <p:cSld>
-    <p:bg>
-      <p:bgPr>
-        <a:solidFill>
-          <a:srgbClr val="FFFFFF"/>
-        </a:solidFill>
-        <a:effectLst/>
-      </p:bgPr>
-    </p:bg>
-    <p:spTree>
-      <p:nvGrpSpPr>
-        <p:cNvPr id="1" name=""/>
-        <p:cNvGrpSpPr/>
-        <p:nvPr/>
-      </p:nvGrpSpPr>
-      <p:grpSpPr/>
-      <p:sp>
-        <p:nvSpPr>
-          <p:cNvPr id="2" name="Rectangle 1"/>
-          <p:cNvSpPr/>
-          <p:nvPr/>
-        </p:nvSpPr>
-        <p:spPr>
-          <a:xfrm>
-            <a:off x="0" y="0"/>
-            <a:ext cx="12191695" cy="1170432"/>
-          </a:xfrm>
-          <a:prstGeom prst="rect">
-            <a:avLst/>
-          </a:prstGeom>
-          <a:solidFill>
-            <a:srgbClr val="095292"/>
-          </a:solidFill>
-          <a:ln>
-            <a:noFill/>
-          </a:ln>
-        </p:spPr>
-        <p:style>
-          <a:lnRef idx="1">
-            <a:schemeClr val="accent1"/>
-          </a:lnRef>
-          <a:fillRef idx="3">
-            <a:schemeClr val="accent1"/>
-          </a:fillRef>
-          <a:effectRef idx="2">
-            <a:schemeClr val="accent1"/>
-          </a:effectRef>
-          <a:fontRef idx="minor">
-            <a:schemeClr val="lt1"/>
-          </a:fontRef>
-        </p:style>
-        <p:txBody>
-          <a:bodyPr rtlCol="0" anchor="ctr"/>
-          <a:lstStyle/>
-          <a:p>
-            <a:pPr algn="ctr"/>
-          </a:p>
-        </p:txBody>
-      </p:sp>
-      <p:sp>
-        <p:nvSpPr>
-          <p:cNvPr id="3" name="Rectangle 2"/>
-          <p:cNvSpPr/>
-          <p:nvPr/>
-        </p:nvSpPr>
-        <p:spPr>
-          <a:xfrm>
-            <a:off x="0" y="1170432"/>
-            <a:ext cx="12191695" cy="41148"/>
-          </a:xfrm>
-          <a:prstGeom prst="rect">
-            <a:avLst/>
-          </a:prstGeom>
-          <a:solidFill>
-            <a:srgbClr val="FFD000"/>
-          </a:solidFill>
-          <a:ln>
-            <a:noFill/>
-          </a:ln>
-        </p:spPr>
-        <p:style>
-          <a:lnRef idx="1">
-            <a:schemeClr val="accent1"/>
-          </a:lnRef>
-          <a:fillRef idx="3">
-            <a:schemeClr val="accent1"/>
-          </a:fillRef>
-          <a:effectRef idx="2">
-            <a:schemeClr val="accent1"/>
-          </a:effectRef>
-          <a:fontRef idx="minor">
-            <a:schemeClr val="lt1"/>
-          </a:fontRef>
-        </p:style>
-        <p:txBody>
-          <a:bodyPr rtlCol="0" anchor="ctr"/>
-          <a:lstStyle/>
-          <a:p>
-            <a:pPr algn="ctr"/>
-          </a:p>
-        </p:txBody>
-      </p:sp>
-      <p:sp>
-        <p:nvSpPr>
-          <p:cNvPr id="4" name="TextBox 3"/>
-          <p:cNvSpPr txBox="1"/>
-          <p:nvPr/>
-        </p:nvSpPr>
-        <p:spPr>
-          <a:xfrm>
-            <a:off x="457200" y="164592"/>
-            <a:ext cx="11277295" cy="384048"/>
-          </a:xfrm>
-          <a:prstGeom prst="rect">
-            <a:avLst/>
-          </a:prstGeom>
-          <a:noFill/>
-        </p:spPr>
-        <p:txBody>
-          <a:bodyPr wrap="square">
-            <a:spAutoFit/>
-          </a:bodyPr>
-          <a:lstStyle/>
-          <a:p>
-            <a:r>
-              <a:rPr sz="2600" b="1" i="0">
-                <a:solidFill>
-                  <a:srgbClr val="FFFFFF"/>
-                </a:solidFill>
-                <a:latin typeface="Calibri"/>
-              </a:rPr>
-              <a:t>Cómo se expone en 9 minutos</a:t>
-            </a:r>
-          </a:p>
-        </p:txBody>
-      </p:sp>
-      <p:sp>
-        <p:nvSpPr>
-          <p:cNvPr id="5" name="TextBox 4"/>
-          <p:cNvSpPr txBox="1"/>
-          <p:nvPr/>
-        </p:nvSpPr>
-        <p:spPr>
-          <a:xfrm>
-            <a:off x="457200" y="566928"/>
-            <a:ext cx="11277295" cy="411480"/>
-          </a:xfrm>
-          <a:prstGeom prst="rect">
-            <a:avLst/>
-          </a:prstGeom>
-          <a:noFill/>
-        </p:spPr>
-        <p:txBody>
-          <a:bodyPr wrap="square">
-            <a:spAutoFit/>
-          </a:bodyPr>
-          <a:lstStyle/>
-          <a:p>
-            <a:r>
-              <a:rPr sz="1400" b="0" i="0">
-                <a:solidFill>
-                  <a:srgbClr val="B8D8EE"/>
-                </a:solidFill>
-                <a:latin typeface="Calibri"/>
-              </a:rPr>
-              <a:t>Habla el vocero con la pantalla ya compartida · cronómetro en pantalla · se corta al llegar a cero</a:t>
-            </a:r>
-          </a:p>
-        </p:txBody>
-      </p:sp>
-      <p:sp>
-        <p:nvSpPr>
-          <p:cNvPr id="6" name="Rounded Rectangle 5"/>
-          <p:cNvSpPr/>
-          <p:nvPr/>
-        </p:nvSpPr>
-        <p:spPr>
-          <a:xfrm>
-            <a:off x="457200" y="1444752"/>
-            <a:ext cx="11277295" cy="745236"/>
-          </a:xfrm>
-          <a:prstGeom prst="roundRect">
-            <a:avLst>
-              <a:gd name="adj" fmla="val 12000"/>
-            </a:avLst>
-          </a:prstGeom>
-          <a:solidFill>
-            <a:srgbClr val="F2F2F2"/>
-          </a:solidFill>
-          <a:ln>
-            <a:noFill/>
-          </a:ln>
-        </p:spPr>
-        <p:style>
-          <a:lnRef idx="1">
-            <a:schemeClr val="accent1"/>
-          </a:lnRef>
-          <a:fillRef idx="3">
-            <a:schemeClr val="accent1"/>
-          </a:fillRef>
-          <a:effectRef idx="2">
-            <a:schemeClr val="accent1"/>
-          </a:effectRef>
-          <a:fontRef idx="minor">
-            <a:schemeClr val="lt1"/>
-          </a:fontRef>
-        </p:style>
-        <p:txBody>
-          <a:bodyPr rtlCol="0" anchor="ctr"/>
-          <a:lstStyle/>
-          <a:p>
-            <a:pPr algn="ctr"/>
-          </a:p>
-        </p:txBody>
-      </p:sp>
-      <p:sp>
-        <p:nvSpPr>
-          <p:cNvPr id="7" name="Rounded Rectangle 6"/>
-          <p:cNvSpPr/>
-          <p:nvPr/>
-        </p:nvSpPr>
-        <p:spPr>
-          <a:xfrm>
-            <a:off x="594360" y="1597914"/>
-            <a:ext cx="438912" cy="438912"/>
-          </a:xfrm>
-          <a:prstGeom prst="roundRect">
-            <a:avLst>
-              <a:gd name="adj" fmla="val 12000"/>
-            </a:avLst>
-          </a:prstGeom>
-          <a:solidFill>
-            <a:srgbClr val="095292"/>
-          </a:solidFill>
-          <a:ln>
-            <a:noFill/>
-          </a:ln>
-        </p:spPr>
-        <p:style>
-          <a:lnRef idx="1">
-            <a:schemeClr val="accent1"/>
-          </a:lnRef>
-          <a:fillRef idx="3">
-            <a:schemeClr val="accent1"/>
-          </a:fillRef>
-          <a:effectRef idx="2">
-            <a:schemeClr val="accent1"/>
-          </a:effectRef>
-          <a:fontRef idx="minor">
-            <a:schemeClr val="lt1"/>
-          </a:fontRef>
-        </p:style>
-        <p:txBody>
-          <a:bodyPr rtlCol="0" anchor="ctr"/>
-          <a:lstStyle/>
-          <a:p>
-            <a:pPr algn="ctr"/>
-          </a:p>
-        </p:txBody>
-      </p:sp>
-      <p:sp>
-        <p:nvSpPr>
-          <p:cNvPr id="8" name="TextBox 7"/>
-          <p:cNvSpPr txBox="1"/>
-          <p:nvPr/>
-        </p:nvSpPr>
-        <p:spPr>
-          <a:xfrm>
-            <a:off x="594360" y="1597914"/>
-            <a:ext cx="438912" cy="438912"/>
-          </a:xfrm>
-          <a:prstGeom prst="rect">
-            <a:avLst/>
-          </a:prstGeom>
-          <a:noFill/>
-        </p:spPr>
-        <p:txBody>
-          <a:bodyPr wrap="square" anchor="ctr"/>
-          <a:lstStyle/>
-          <a:p>
-            <a:pPr algn="ctr"/>
-            <a:r>
-              <a:rPr sz="1600" b="1" i="0">
-                <a:solidFill>
-                  <a:srgbClr val="FFFFFF"/>
-                </a:solidFill>
-                <a:latin typeface="Calibri"/>
-              </a:rPr>
-              <a:t>1</a:t>
-            </a:r>
-          </a:p>
-        </p:txBody>
-      </p:sp>
-      <p:sp>
-        <p:nvSpPr>
-          <p:cNvPr id="9" name="TextBox 8"/>
-          <p:cNvSpPr txBox="1"/>
-          <p:nvPr/>
-        </p:nvSpPr>
-        <p:spPr>
-          <a:xfrm>
-            <a:off x="1188720" y="1536192"/>
-            <a:ext cx="10271455" cy="580644"/>
-          </a:xfrm>
-          <a:prstGeom prst="rect">
-            <a:avLst/>
-          </a:prstGeom>
-          <a:noFill/>
-        </p:spPr>
-        <p:txBody>
-          <a:bodyPr wrap="square" anchor="ctr"/>
-          <a:lstStyle/>
-          <a:p>
-            <a:r>
-              <a:rPr sz="1500" b="1" i="0">
-                <a:solidFill>
-                  <a:srgbClr val="095292"/>
-                </a:solidFill>
-                <a:latin typeface="Calibri"/>
-              </a:rPr>
-              <a:t>Tramo 1 · 1 min</a:t>
-            </a:r>
-          </a:p>
-          <a:p>
-            <a:pPr>
-              <a:spcBef>
-                <a:spcPts val="200"/>
-              </a:spcBef>
-            </a:pPr>
-            <a:r>
-              <a:rPr sz="1300" b="0" i="0">
-                <a:solidFill>
-                  <a:srgbClr val="333333"/>
-                </a:solidFill>
-                <a:latin typeface="Calibri"/>
-              </a:rPr>
-              <a:t>El problema con su cifra. Arranca sin saludos.</a:t>
-            </a:r>
-          </a:p>
-        </p:txBody>
-      </p:sp>
-      <p:sp>
-        <p:nvSpPr>
-          <p:cNvPr id="10" name="Rounded Rectangle 9"/>
-          <p:cNvSpPr/>
-          <p:nvPr/>
-        </p:nvSpPr>
-        <p:spPr>
-          <a:xfrm>
-            <a:off x="457200" y="2281428"/>
-            <a:ext cx="11277295" cy="745236"/>
-          </a:xfrm>
-          <a:prstGeom prst="roundRect">
-            <a:avLst>
-              <a:gd name="adj" fmla="val 12000"/>
-            </a:avLst>
-          </a:prstGeom>
-          <a:solidFill>
-            <a:srgbClr val="E8F4FA"/>
-          </a:solidFill>
-          <a:ln>
-            <a:noFill/>
-          </a:ln>
-        </p:spPr>
-        <p:style>
-          <a:lnRef idx="1">
-            <a:schemeClr val="accent1"/>
-          </a:lnRef>
-          <a:fillRef idx="3">
-            <a:schemeClr val="accent1"/>
-          </a:fillRef>
-          <a:effectRef idx="2">
-            <a:schemeClr val="accent1"/>
-          </a:effectRef>
-          <a:fontRef idx="minor">
-            <a:schemeClr val="lt1"/>
-          </a:fontRef>
-        </p:style>
-        <p:txBody>
-          <a:bodyPr rtlCol="0" anchor="ctr"/>
-          <a:lstStyle/>
-          <a:p>
-            <a:pPr algn="ctr"/>
-          </a:p>
-        </p:txBody>
-      </p:sp>
-      <p:sp>
-        <p:nvSpPr>
-          <p:cNvPr id="11" name="Rounded Rectangle 10"/>
-          <p:cNvSpPr/>
-          <p:nvPr/>
-        </p:nvSpPr>
-        <p:spPr>
-          <a:xfrm>
-            <a:off x="594360" y="2434590"/>
-            <a:ext cx="438912" cy="438912"/>
-          </a:xfrm>
-          <a:prstGeom prst="roundRect">
-            <a:avLst>
-              <a:gd name="adj" fmla="val 12000"/>
-            </a:avLst>
-          </a:prstGeom>
-          <a:solidFill>
-            <a:srgbClr val="095292"/>
-          </a:solidFill>
-          <a:ln>
-            <a:noFill/>
-          </a:ln>
-        </p:spPr>
-        <p:style>
-          <a:lnRef idx="1">
-            <a:schemeClr val="accent1"/>
-          </a:lnRef>
-          <a:fillRef idx="3">
-            <a:schemeClr val="accent1"/>
-          </a:fillRef>
-          <a:effectRef idx="2">
-            <a:schemeClr val="accent1"/>
-          </a:effectRef>
-          <a:fontRef idx="minor">
-            <a:schemeClr val="lt1"/>
-          </a:fontRef>
-        </p:style>
-        <p:txBody>
-          <a:bodyPr rtlCol="0" anchor="ctr"/>
-          <a:lstStyle/>
-          <a:p>
-            <a:pPr algn="ctr"/>
-          </a:p>
-        </p:txBody>
-      </p:sp>
-      <p:sp>
-        <p:nvSpPr>
-          <p:cNvPr id="12" name="TextBox 11"/>
-          <p:cNvSpPr txBox="1"/>
-          <p:nvPr/>
-        </p:nvSpPr>
-        <p:spPr>
-          <a:xfrm>
-            <a:off x="594360" y="2434590"/>
-            <a:ext cx="438912" cy="438912"/>
-          </a:xfrm>
-          <a:prstGeom prst="rect">
-            <a:avLst/>
-          </a:prstGeom>
-          <a:noFill/>
-        </p:spPr>
-        <p:txBody>
-          <a:bodyPr wrap="square" anchor="ctr"/>
-          <a:lstStyle/>
-          <a:p>
-            <a:pPr algn="ctr"/>
-            <a:r>
-              <a:rPr sz="1600" b="1" i="0">
-                <a:solidFill>
-                  <a:srgbClr val="FFFFFF"/>
-                </a:solidFill>
-                <a:latin typeface="Calibri"/>
-              </a:rPr>
-              <a:t>2</a:t>
-            </a:r>
-          </a:p>
-        </p:txBody>
-      </p:sp>
-      <p:sp>
-        <p:nvSpPr>
-          <p:cNvPr id="13" name="TextBox 12"/>
-          <p:cNvSpPr txBox="1"/>
-          <p:nvPr/>
-        </p:nvSpPr>
-        <p:spPr>
-          <a:xfrm>
-            <a:off x="1188720" y="2372868"/>
-            <a:ext cx="10271455" cy="580644"/>
-          </a:xfrm>
-          <a:prstGeom prst="rect">
-            <a:avLst/>
-          </a:prstGeom>
-          <a:noFill/>
-        </p:spPr>
-        <p:txBody>
-          <a:bodyPr wrap="square" anchor="ctr"/>
-          <a:lstStyle/>
-          <a:p>
-            <a:r>
-              <a:rPr sz="1500" b="1" i="0">
-                <a:solidFill>
-                  <a:srgbClr val="095292"/>
-                </a:solidFill>
-                <a:latin typeface="Calibri"/>
-              </a:rPr>
-              <a:t>Tramo 2 · 2 min</a:t>
-            </a:r>
-          </a:p>
-          <a:p>
-            <a:pPr>
-              <a:spcBef>
-                <a:spcPts val="200"/>
-              </a:spcBef>
-            </a:pPr>
-            <a:r>
-              <a:rPr sz="1300" b="0" i="0">
-                <a:solidFill>
-                  <a:srgbClr val="333333"/>
-                </a:solidFill>
-                <a:latin typeface="Calibri"/>
-              </a:rPr>
-              <a:t>Los afectados —uno que no es usuario— y la decisión con su sacrificio.</a:t>
-            </a:r>
-          </a:p>
-        </p:txBody>
-      </p:sp>
-      <p:sp>
-        <p:nvSpPr>
-          <p:cNvPr id="14" name="Rounded Rectangle 13"/>
-          <p:cNvSpPr/>
-          <p:nvPr/>
-        </p:nvSpPr>
-        <p:spPr>
-          <a:xfrm>
-            <a:off x="457200" y="3118104"/>
-            <a:ext cx="11277295" cy="745236"/>
-          </a:xfrm>
-          <a:prstGeom prst="roundRect">
-            <a:avLst>
-              <a:gd name="adj" fmla="val 12000"/>
-            </a:avLst>
-          </a:prstGeom>
-          <a:solidFill>
-            <a:srgbClr val="F2F2F2"/>
-          </a:solidFill>
-          <a:ln>
-            <a:noFill/>
-          </a:ln>
-        </p:spPr>
-        <p:style>
-          <a:lnRef idx="1">
-            <a:schemeClr val="accent1"/>
-          </a:lnRef>
-          <a:fillRef idx="3">
-            <a:schemeClr val="accent1"/>
-          </a:fillRef>
-          <a:effectRef idx="2">
-            <a:schemeClr val="accent1"/>
-          </a:effectRef>
-          <a:fontRef idx="minor">
-            <a:schemeClr val="lt1"/>
-          </a:fontRef>
-        </p:style>
-        <p:txBody>
-          <a:bodyPr rtlCol="0" anchor="ctr"/>
-          <a:lstStyle/>
-          <a:p>
-            <a:pPr algn="ctr"/>
-          </a:p>
-        </p:txBody>
-      </p:sp>
-      <p:sp>
-        <p:nvSpPr>
-          <p:cNvPr id="15" name="Rounded Rectangle 14"/>
-          <p:cNvSpPr/>
-          <p:nvPr/>
-        </p:nvSpPr>
-        <p:spPr>
-          <a:xfrm>
-            <a:off x="594360" y="3271266"/>
-            <a:ext cx="438912" cy="438912"/>
-          </a:xfrm>
-          <a:prstGeom prst="roundRect">
-            <a:avLst>
-              <a:gd name="adj" fmla="val 12000"/>
-            </a:avLst>
-          </a:prstGeom>
-          <a:solidFill>
-            <a:srgbClr val="095292"/>
-          </a:solidFill>
-          <a:ln>
-            <a:noFill/>
-          </a:ln>
-        </p:spPr>
-        <p:style>
-          <a:lnRef idx="1">
-            <a:schemeClr val="accent1"/>
-          </a:lnRef>
-          <a:fillRef idx="3">
-            <a:schemeClr val="accent1"/>
-          </a:fillRef>
-          <a:effectRef idx="2">
-            <a:schemeClr val="accent1"/>
-          </a:effectRef>
-          <a:fontRef idx="minor">
-            <a:schemeClr val="lt1"/>
-          </a:fontRef>
-        </p:style>
-        <p:txBody>
-          <a:bodyPr rtlCol="0" anchor="ctr"/>
-          <a:lstStyle/>
-          <a:p>
-            <a:pPr algn="ctr"/>
-          </a:p>
-        </p:txBody>
-      </p:sp>
-      <p:sp>
-        <p:nvSpPr>
-          <p:cNvPr id="16" name="TextBox 15"/>
-          <p:cNvSpPr txBox="1"/>
-          <p:nvPr/>
-        </p:nvSpPr>
-        <p:spPr>
-          <a:xfrm>
-            <a:off x="594360" y="3271266"/>
-            <a:ext cx="438912" cy="438912"/>
-          </a:xfrm>
-          <a:prstGeom prst="rect">
-            <a:avLst/>
-          </a:prstGeom>
-          <a:noFill/>
-        </p:spPr>
-        <p:txBody>
-          <a:bodyPr wrap="square" anchor="ctr"/>
-          <a:lstStyle/>
-          <a:p>
-            <a:pPr algn="ctr"/>
-            <a:r>
-              <a:rPr sz="1600" b="1" i="0">
-                <a:solidFill>
-                  <a:srgbClr val="FFFFFF"/>
-                </a:solidFill>
-                <a:latin typeface="Calibri"/>
-              </a:rPr>
-              <a:t>3</a:t>
-            </a:r>
-          </a:p>
-        </p:txBody>
-      </p:sp>
-      <p:sp>
-        <p:nvSpPr>
-          <p:cNvPr id="17" name="TextBox 16"/>
-          <p:cNvSpPr txBox="1"/>
-          <p:nvPr/>
-        </p:nvSpPr>
-        <p:spPr>
-          <a:xfrm>
-            <a:off x="1188720" y="3209544"/>
-            <a:ext cx="10271455" cy="580644"/>
-          </a:xfrm>
-          <a:prstGeom prst="rect">
-            <a:avLst/>
-          </a:prstGeom>
-          <a:noFill/>
-        </p:spPr>
-        <p:txBody>
-          <a:bodyPr wrap="square" anchor="ctr"/>
-          <a:lstStyle/>
-          <a:p>
-            <a:r>
-              <a:rPr sz="1500" b="1" i="0">
-                <a:solidFill>
-                  <a:srgbClr val="095292"/>
-                </a:solidFill>
-                <a:latin typeface="Calibri"/>
-              </a:rPr>
-              <a:t>Tramo 3 · 3 min</a:t>
-            </a:r>
-          </a:p>
-          <a:p>
-            <a:pPr>
-              <a:spcBef>
-                <a:spcPts val="200"/>
-              </a:spcBef>
-            </a:pPr>
-            <a:r>
-              <a:rPr sz="1300" b="0" i="0">
-                <a:solidFill>
-                  <a:srgbClr val="333333"/>
-                </a:solidFill>
-                <a:latin typeface="Calibri"/>
-              </a:rPr>
-              <a:t>El prototipo en vivo: tres pasos, una tarea cumpliéndose.</a:t>
-            </a:r>
-          </a:p>
-        </p:txBody>
-      </p:sp>
-      <p:sp>
-        <p:nvSpPr>
-          <p:cNvPr id="18" name="Rounded Rectangle 17"/>
-          <p:cNvSpPr/>
-          <p:nvPr/>
-        </p:nvSpPr>
-        <p:spPr>
-          <a:xfrm>
-            <a:off x="457200" y="3954780"/>
-            <a:ext cx="11277295" cy="745236"/>
-          </a:xfrm>
-          <a:prstGeom prst="roundRect">
-            <a:avLst>
-              <a:gd name="adj" fmla="val 12000"/>
-            </a:avLst>
-          </a:prstGeom>
-          <a:solidFill>
-            <a:srgbClr val="E8F4FA"/>
-          </a:solidFill>
-          <a:ln>
-            <a:noFill/>
-          </a:ln>
-        </p:spPr>
-        <p:style>
-          <a:lnRef idx="1">
-            <a:schemeClr val="accent1"/>
-          </a:lnRef>
-          <a:fillRef idx="3">
-            <a:schemeClr val="accent1"/>
-          </a:fillRef>
-          <a:effectRef idx="2">
-            <a:schemeClr val="accent1"/>
-          </a:effectRef>
-          <a:fontRef idx="minor">
-            <a:schemeClr val="lt1"/>
-          </a:fontRef>
-        </p:style>
-        <p:txBody>
-          <a:bodyPr rtlCol="0" anchor="ctr"/>
-          <a:lstStyle/>
-          <a:p>
-            <a:pPr algn="ctr"/>
-          </a:p>
-        </p:txBody>
-      </p:sp>
-      <p:sp>
-        <p:nvSpPr>
-          <p:cNvPr id="19" name="Rounded Rectangle 18"/>
-          <p:cNvSpPr/>
-          <p:nvPr/>
-        </p:nvSpPr>
-        <p:spPr>
-          <a:xfrm>
-            <a:off x="594360" y="4107942"/>
-            <a:ext cx="438912" cy="438912"/>
-          </a:xfrm>
-          <a:prstGeom prst="roundRect">
-            <a:avLst>
-              <a:gd name="adj" fmla="val 12000"/>
-            </a:avLst>
-          </a:prstGeom>
-          <a:solidFill>
-            <a:srgbClr val="095292"/>
-          </a:solidFill>
-          <a:ln>
-            <a:noFill/>
-          </a:ln>
-        </p:spPr>
-        <p:style>
-          <a:lnRef idx="1">
-            <a:schemeClr val="accent1"/>
-          </a:lnRef>
-          <a:fillRef idx="3">
-            <a:schemeClr val="accent1"/>
-          </a:fillRef>
-          <a:effectRef idx="2">
-            <a:schemeClr val="accent1"/>
-          </a:effectRef>
-          <a:fontRef idx="minor">
-            <a:schemeClr val="lt1"/>
-          </a:fontRef>
-        </p:style>
-        <p:txBody>
-          <a:bodyPr rtlCol="0" anchor="ctr"/>
-          <a:lstStyle/>
-          <a:p>
-            <a:pPr algn="ctr"/>
-          </a:p>
-        </p:txBody>
-      </p:sp>
-      <p:sp>
-        <p:nvSpPr>
-          <p:cNvPr id="20" name="TextBox 19"/>
-          <p:cNvSpPr txBox="1"/>
-          <p:nvPr/>
-        </p:nvSpPr>
-        <p:spPr>
-          <a:xfrm>
-            <a:off x="594360" y="4107942"/>
-            <a:ext cx="438912" cy="438912"/>
-          </a:xfrm>
-          <a:prstGeom prst="rect">
-            <a:avLst/>
-          </a:prstGeom>
-          <a:noFill/>
-        </p:spPr>
-        <p:txBody>
-          <a:bodyPr wrap="square" anchor="ctr"/>
-          <a:lstStyle/>
-          <a:p>
-            <a:pPr algn="ctr"/>
-            <a:r>
-              <a:rPr sz="1600" b="1" i="0">
-                <a:solidFill>
-                  <a:srgbClr val="FFFFFF"/>
-                </a:solidFill>
-                <a:latin typeface="Calibri"/>
-              </a:rPr>
-              <a:t>4</a:t>
-            </a:r>
-          </a:p>
-        </p:txBody>
-      </p:sp>
-      <p:sp>
-        <p:nvSpPr>
-          <p:cNvPr id="21" name="TextBox 20"/>
-          <p:cNvSpPr txBox="1"/>
-          <p:nvPr/>
-        </p:nvSpPr>
-        <p:spPr>
-          <a:xfrm>
-            <a:off x="1188720" y="4046220"/>
-            <a:ext cx="10271455" cy="580644"/>
-          </a:xfrm>
-          <a:prstGeom prst="rect">
-            <a:avLst/>
-          </a:prstGeom>
-          <a:noFill/>
-        </p:spPr>
-        <p:txBody>
-          <a:bodyPr wrap="square" anchor="ctr"/>
-          <a:lstStyle/>
-          <a:p>
-            <a:r>
-              <a:rPr sz="1500" b="1" i="0">
-                <a:solidFill>
-                  <a:srgbClr val="095292"/>
-                </a:solidFill>
-                <a:latin typeface="Calibri"/>
-              </a:rPr>
-              <a:t>Tramo 4 · 2 min</a:t>
-            </a:r>
-          </a:p>
-          <a:p>
-            <a:pPr>
-              <a:spcBef>
-                <a:spcPts val="200"/>
-              </a:spcBef>
-            </a:pPr>
-            <a:r>
-              <a:rPr sz="1300" b="0" i="0">
-                <a:solidFill>
-                  <a:srgbClr val="333333"/>
-                </a:solidFill>
-                <a:latin typeface="Calibri"/>
-              </a:rPr>
-              <a:t>Los hallazgos de la prueba, lo que se arregló y lo que no.</a:t>
-            </a:r>
-          </a:p>
-        </p:txBody>
-      </p:sp>
-      <p:sp>
-        <p:nvSpPr>
-          <p:cNvPr id="22" name="Rounded Rectangle 21"/>
-          <p:cNvSpPr/>
-          <p:nvPr/>
-        </p:nvSpPr>
-        <p:spPr>
-          <a:xfrm>
-            <a:off x="457200" y="4791456"/>
-            <a:ext cx="11277295" cy="745236"/>
-          </a:xfrm>
-          <a:prstGeom prst="roundRect">
-            <a:avLst>
-              <a:gd name="adj" fmla="val 12000"/>
-            </a:avLst>
-          </a:prstGeom>
-          <a:solidFill>
-            <a:srgbClr val="F2F2F2"/>
-          </a:solidFill>
-          <a:ln>
-            <a:noFill/>
-          </a:ln>
-        </p:spPr>
-        <p:style>
-          <a:lnRef idx="1">
-            <a:schemeClr val="accent1"/>
-          </a:lnRef>
-          <a:fillRef idx="3">
-            <a:schemeClr val="accent1"/>
-          </a:fillRef>
-          <a:effectRef idx="2">
-            <a:schemeClr val="accent1"/>
-          </a:effectRef>
-          <a:fontRef idx="minor">
-            <a:schemeClr val="lt1"/>
-          </a:fontRef>
-        </p:style>
-        <p:txBody>
-          <a:bodyPr rtlCol="0" anchor="ctr"/>
-          <a:lstStyle/>
-          <a:p>
-            <a:pPr algn="ctr"/>
-          </a:p>
-        </p:txBody>
-      </p:sp>
-      <p:sp>
-        <p:nvSpPr>
-          <p:cNvPr id="23" name="Rounded Rectangle 22"/>
-          <p:cNvSpPr/>
-          <p:nvPr/>
-        </p:nvSpPr>
-        <p:spPr>
-          <a:xfrm>
-            <a:off x="594360" y="4944618"/>
-            <a:ext cx="438912" cy="438912"/>
-          </a:xfrm>
-          <a:prstGeom prst="roundRect">
-            <a:avLst>
-              <a:gd name="adj" fmla="val 12000"/>
-            </a:avLst>
-          </a:prstGeom>
-          <a:solidFill>
-            <a:srgbClr val="095292"/>
-          </a:solidFill>
-          <a:ln>
-            <a:noFill/>
-          </a:ln>
-        </p:spPr>
-        <p:style>
-          <a:lnRef idx="1">
-            <a:schemeClr val="accent1"/>
-          </a:lnRef>
-          <a:fillRef idx="3">
-            <a:schemeClr val="accent1"/>
-          </a:fillRef>
-          <a:effectRef idx="2">
-            <a:schemeClr val="accent1"/>
-          </a:effectRef>
-          <a:fontRef idx="minor">
-            <a:schemeClr val="lt1"/>
-          </a:fontRef>
-        </p:style>
-        <p:txBody>
-          <a:bodyPr rtlCol="0" anchor="ctr"/>
-          <a:lstStyle/>
-          <a:p>
-            <a:pPr algn="ctr"/>
-          </a:p>
-        </p:txBody>
-      </p:sp>
-      <p:sp>
-        <p:nvSpPr>
-          <p:cNvPr id="24" name="TextBox 23"/>
-          <p:cNvSpPr txBox="1"/>
-          <p:nvPr/>
-        </p:nvSpPr>
-        <p:spPr>
-          <a:xfrm>
-            <a:off x="594360" y="4944618"/>
-            <a:ext cx="438912" cy="438912"/>
-          </a:xfrm>
-          <a:prstGeom prst="rect">
-            <a:avLst/>
-          </a:prstGeom>
-          <a:noFill/>
-        </p:spPr>
-        <p:txBody>
-          <a:bodyPr wrap="square" anchor="ctr"/>
-          <a:lstStyle/>
-          <a:p>
-            <a:pPr algn="ctr"/>
-            <a:r>
-              <a:rPr sz="1600" b="1" i="0">
-                <a:solidFill>
-                  <a:srgbClr val="FFFFFF"/>
-                </a:solidFill>
-                <a:latin typeface="Calibri"/>
-              </a:rPr>
-              <a:t>5</a:t>
-            </a:r>
-          </a:p>
-        </p:txBody>
-      </p:sp>
-      <p:sp>
-        <p:nvSpPr>
-          <p:cNvPr id="25" name="TextBox 24"/>
-          <p:cNvSpPr txBox="1"/>
-          <p:nvPr/>
-        </p:nvSpPr>
-        <p:spPr>
-          <a:xfrm>
-            <a:off x="1188720" y="4882896"/>
-            <a:ext cx="10271455" cy="580644"/>
-          </a:xfrm>
-          <a:prstGeom prst="rect">
-            <a:avLst/>
-          </a:prstGeom>
-          <a:noFill/>
-        </p:spPr>
-        <p:txBody>
-          <a:bodyPr wrap="square" anchor="ctr"/>
-          <a:lstStyle/>
-          <a:p>
-            <a:r>
-              <a:rPr sz="1500" b="1" i="0">
-                <a:solidFill>
-                  <a:srgbClr val="095292"/>
-                </a:solidFill>
-                <a:latin typeface="Calibri"/>
-              </a:rPr>
-              <a:t>Tramo 5 · 1 min</a:t>
-            </a:r>
-          </a:p>
-          <a:p>
-            <a:pPr>
-              <a:spcBef>
-                <a:spcPts val="200"/>
-              </a:spcBef>
-            </a:pPr>
-            <a:r>
-              <a:rPr sz="1300" b="0" i="0">
-                <a:solidFill>
-                  <a:srgbClr val="333333"/>
-                </a:solidFill>
-                <a:latin typeface="Calibri"/>
-              </a:rPr>
-              <a:t>Impacto positivo con su número, negativo con su mitigación, siguiente paso.</a:t>
-            </a:r>
-          </a:p>
-        </p:txBody>
-      </p:sp>
-      <p:sp>
-        <p:nvSpPr>
-          <p:cNvPr id="26" name="Rounded Rectangle 25"/>
-          <p:cNvSpPr/>
-          <p:nvPr/>
-        </p:nvSpPr>
-        <p:spPr>
-          <a:xfrm>
-            <a:off x="457200" y="5628132"/>
-            <a:ext cx="11277295" cy="745236"/>
-          </a:xfrm>
-          <a:prstGeom prst="roundRect">
-            <a:avLst>
-              <a:gd name="adj" fmla="val 12000"/>
-            </a:avLst>
-          </a:prstGeom>
-          <a:solidFill>
-            <a:srgbClr val="E8F4FA"/>
-          </a:solidFill>
-          <a:ln>
-            <a:noFill/>
-          </a:ln>
-        </p:spPr>
-        <p:style>
-          <a:lnRef idx="1">
-            <a:schemeClr val="accent1"/>
-          </a:lnRef>
-          <a:fillRef idx="3">
-            <a:schemeClr val="accent1"/>
-          </a:fillRef>
-          <a:effectRef idx="2">
-            <a:schemeClr val="accent1"/>
-          </a:effectRef>
-          <a:fontRef idx="minor">
-            <a:schemeClr val="lt1"/>
-          </a:fontRef>
-        </p:style>
-        <p:txBody>
-          <a:bodyPr rtlCol="0" anchor="ctr"/>
-          <a:lstStyle/>
-          <a:p>
-            <a:pPr algn="ctr"/>
-          </a:p>
-        </p:txBody>
-      </p:sp>
-      <p:sp>
-        <p:nvSpPr>
-          <p:cNvPr id="27" name="Rounded Rectangle 26"/>
-          <p:cNvSpPr/>
-          <p:nvPr/>
-        </p:nvSpPr>
-        <p:spPr>
-          <a:xfrm>
-            <a:off x="594360" y="5781294"/>
-            <a:ext cx="438912" cy="438912"/>
-          </a:xfrm>
-          <a:prstGeom prst="roundRect">
-            <a:avLst>
-              <a:gd name="adj" fmla="val 12000"/>
-            </a:avLst>
-          </a:prstGeom>
-          <a:solidFill>
-            <a:srgbClr val="095292"/>
-          </a:solidFill>
-          <a:ln>
-            <a:noFill/>
-          </a:ln>
-        </p:spPr>
-        <p:style>
-          <a:lnRef idx="1">
-            <a:schemeClr val="accent1"/>
-          </a:lnRef>
-          <a:fillRef idx="3">
-            <a:schemeClr val="accent1"/>
-          </a:fillRef>
-          <a:effectRef idx="2">
-            <a:schemeClr val="accent1"/>
-          </a:effectRef>
-          <a:fontRef idx="minor">
-            <a:schemeClr val="lt1"/>
-          </a:fontRef>
-        </p:style>
-        <p:txBody>
-          <a:bodyPr rtlCol="0" anchor="ctr"/>
-          <a:lstStyle/>
-          <a:p>
-            <a:pPr algn="ctr"/>
-          </a:p>
-        </p:txBody>
-      </p:sp>
-      <p:sp>
-        <p:nvSpPr>
-          <p:cNvPr id="28" name="TextBox 27"/>
-          <p:cNvSpPr txBox="1"/>
-          <p:nvPr/>
-        </p:nvSpPr>
-        <p:spPr>
-          <a:xfrm>
-            <a:off x="594360" y="5781294"/>
-            <a:ext cx="438912" cy="438912"/>
-          </a:xfrm>
-          <a:prstGeom prst="rect">
-            <a:avLst/>
-          </a:prstGeom>
-          <a:noFill/>
-        </p:spPr>
-        <p:txBody>
-          <a:bodyPr wrap="square" anchor="ctr"/>
-          <a:lstStyle/>
-          <a:p>
-            <a:pPr algn="ctr"/>
-            <a:r>
-              <a:rPr sz="1600" b="1" i="0">
-                <a:solidFill>
-                  <a:srgbClr val="FFFFFF"/>
-                </a:solidFill>
-                <a:latin typeface="Calibri"/>
-              </a:rPr>
-              <a:t>6</a:t>
-            </a:r>
-          </a:p>
-        </p:txBody>
-      </p:sp>
-      <p:sp>
-        <p:nvSpPr>
-          <p:cNvPr id="29" name="TextBox 28"/>
-          <p:cNvSpPr txBox="1"/>
-          <p:nvPr/>
-        </p:nvSpPr>
-        <p:spPr>
-          <a:xfrm>
-            <a:off x="1188720" y="5719572"/>
-            <a:ext cx="10271455" cy="580644"/>
-          </a:xfrm>
-          <a:prstGeom prst="rect">
-            <a:avLst/>
-          </a:prstGeom>
-          <a:noFill/>
-        </p:spPr>
-        <p:txBody>
-          <a:bodyPr wrap="square" anchor="ctr"/>
-          <a:lstStyle/>
-          <a:p>
-            <a:r>
-              <a:rPr sz="1500" b="1" i="0">
-                <a:solidFill>
-                  <a:srgbClr val="095292"/>
-                </a:solidFill>
-                <a:latin typeface="Calibri"/>
-              </a:rPr>
-              <a:t>Preguntas · 3 min</a:t>
-            </a:r>
-          </a:p>
-          <a:p>
-            <a:pPr>
-              <a:spcBef>
-                <a:spcPts val="200"/>
-              </a:spcBef>
-            </a:pPr>
-            <a:r>
-              <a:rPr sz="1300" b="0" i="0">
-                <a:solidFill>
-                  <a:srgbClr val="333333"/>
-                </a:solidFill>
-                <a:latin typeface="Calibri"/>
-              </a:rPr>
-              <a:t>Una del curso y una del docente. </a:t>
-            </a:r>
-            <a:r>
-              <a:rPr sz="1300" b="1" i="0">
-                <a:solidFill>
-                  <a:srgbClr val="333333"/>
-                </a:solidFill>
-                <a:latin typeface="Calibri"/>
-              </a:rPr>
-              <a:t>Responde quien tiene el tramo.</a:t>
-            </a:r>
-          </a:p>
-        </p:txBody>
-      </p:sp>
-      <p:sp>
-        <p:nvSpPr>
-          <p:cNvPr id="30" name="TextBox 29"/>
-          <p:cNvSpPr txBox="1"/>
-          <p:nvPr/>
-        </p:nvSpPr>
-        <p:spPr>
-          <a:xfrm>
-            <a:off x="11185855" y="6473952"/>
-            <a:ext cx="640080" cy="274320"/>
-          </a:xfrm>
-          <a:prstGeom prst="rect">
-            <a:avLst/>
-          </a:prstGeom>
-          <a:noFill/>
-        </p:spPr>
-        <p:txBody>
-          <a:bodyPr wrap="square">
-            <a:spAutoFit/>
-          </a:bodyPr>
-          <a:lstStyle/>
-          <a:p>
-            <a:pPr algn="r"/>
-            <a:r>
-              <a:rPr sz="1100" b="0" i="0">
-                <a:solidFill>
-                  <a:srgbClr val="666666"/>
-                </a:solidFill>
-                <a:latin typeface="Calibri"/>
-              </a:rPr>
-              <a:t>11</a:t>
-            </a:r>
-          </a:p>
-        </p:txBody>
-      </p:sp>
-    </p:spTree>
-  </p:cSld>
-  <p:clrMapOvr>
-    <a:masterClrMapping/>
-  </p:clrMapOvr>
-</p:sld>
-</file>
-
-<file path=ppt/slides/slide12.xml><?xml version="1.0" encoding="utf-8"?>
-<p:sld xmlns:a="http://schemas.openxmlformats.org/drawingml/2006/main" xmlns:p="http://schemas.openxmlformats.org/presentationml/2006/main" xmlns:r="http://schemas.openxmlformats.org/officeDocument/2006/relationships">
-  <p:cSld>
-    <p:bg>
-      <p:bgPr>
-        <a:solidFill>
-          <a:srgbClr val="FFFFFF"/>
-        </a:solidFill>
-        <a:effectLst/>
-      </p:bgPr>
-    </p:bg>
-    <p:spTree>
-      <p:nvGrpSpPr>
-        <p:cNvPr id="1" name=""/>
-        <p:cNvGrpSpPr/>
-        <p:nvPr/>
-      </p:nvGrpSpPr>
-      <p:grpSpPr/>
-      <p:sp>
-        <p:nvSpPr>
-          <p:cNvPr id="2" name="Rectangle 1"/>
-          <p:cNvSpPr/>
-          <p:nvPr/>
-        </p:nvSpPr>
-        <p:spPr>
-          <a:xfrm>
-            <a:off x="0" y="0"/>
-            <a:ext cx="12191695" cy="960120"/>
-          </a:xfrm>
-          <a:prstGeom prst="rect">
-            <a:avLst/>
-          </a:prstGeom>
-          <a:solidFill>
-            <a:srgbClr val="095292"/>
-          </a:solidFill>
-          <a:ln>
-            <a:noFill/>
-          </a:ln>
-        </p:spPr>
-        <p:style>
-          <a:lnRef idx="1">
-            <a:schemeClr val="accent1"/>
-          </a:lnRef>
-          <a:fillRef idx="3">
-            <a:schemeClr val="accent1"/>
-          </a:fillRef>
-          <a:effectRef idx="2">
-            <a:schemeClr val="accent1"/>
-          </a:effectRef>
-          <a:fontRef idx="minor">
-            <a:schemeClr val="lt1"/>
-          </a:fontRef>
-        </p:style>
-        <p:txBody>
-          <a:bodyPr rtlCol="0" anchor="ctr"/>
-          <a:lstStyle/>
-          <a:p>
-            <a:pPr algn="ctr"/>
-          </a:p>
-        </p:txBody>
-      </p:sp>
-      <p:sp>
-        <p:nvSpPr>
-          <p:cNvPr id="3" name="Rectangle 2"/>
-          <p:cNvSpPr/>
-          <p:nvPr/>
-        </p:nvSpPr>
-        <p:spPr>
-          <a:xfrm>
-            <a:off x="0" y="960120"/>
-            <a:ext cx="12191695" cy="41148"/>
-          </a:xfrm>
-          <a:prstGeom prst="rect">
-            <a:avLst/>
-          </a:prstGeom>
-          <a:solidFill>
-            <a:srgbClr val="FFD000"/>
-          </a:solidFill>
-          <a:ln>
-            <a:noFill/>
-          </a:ln>
-        </p:spPr>
-        <p:style>
-          <a:lnRef idx="1">
-            <a:schemeClr val="accent1"/>
-          </a:lnRef>
-          <a:fillRef idx="3">
-            <a:schemeClr val="accent1"/>
-          </a:fillRef>
-          <a:effectRef idx="2">
-            <a:schemeClr val="accent1"/>
-          </a:effectRef>
-          <a:fontRef idx="minor">
-            <a:schemeClr val="lt1"/>
-          </a:fontRef>
-        </p:style>
-        <p:txBody>
-          <a:bodyPr rtlCol="0" anchor="ctr"/>
-          <a:lstStyle/>
-          <a:p>
-            <a:pPr algn="ctr"/>
-          </a:p>
-        </p:txBody>
-      </p:sp>
-      <p:sp>
-        <p:nvSpPr>
-          <p:cNvPr id="4" name="TextBox 3"/>
-          <p:cNvSpPr txBox="1"/>
-          <p:nvPr/>
-        </p:nvSpPr>
-        <p:spPr>
-          <a:xfrm>
-            <a:off x="457200" y="164592"/>
-            <a:ext cx="11277295" cy="502920"/>
-          </a:xfrm>
-          <a:prstGeom prst="rect">
-            <a:avLst/>
-          </a:prstGeom>
-          <a:noFill/>
-        </p:spPr>
-        <p:txBody>
-          <a:bodyPr wrap="square">
-            <a:spAutoFit/>
-          </a:bodyPr>
-          <a:lstStyle/>
-          <a:p>
-            <a:r>
-              <a:rPr sz="2600" b="1" i="0">
-                <a:solidFill>
-                  <a:srgbClr val="FFFFFF"/>
-                </a:solidFill>
-                <a:latin typeface="Calibri"/>
-              </a:rPr>
-              <a:t>Para la Clase 16</a:t>
-            </a:r>
-          </a:p>
-        </p:txBody>
-      </p:sp>
-      <p:sp>
-        <p:nvSpPr>
-          <p:cNvPr id="5" name="TextBox 4"/>
-          <p:cNvSpPr txBox="1"/>
-          <p:nvPr/>
-        </p:nvSpPr>
-        <p:spPr>
-          <a:xfrm>
-            <a:off x="457200" y="1170432"/>
-            <a:ext cx="11277295" cy="5230368"/>
-          </a:xfrm>
-          <a:prstGeom prst="rect">
-            <a:avLst/>
-          </a:prstGeom>
-          <a:noFill/>
-        </p:spPr>
-        <p:txBody>
-          <a:bodyPr wrap="square">
-            <a:spAutoFit/>
-          </a:bodyPr>
-          <a:lstStyle/>
-          <a:p>
-            <a:pPr>
-              <a:spcAft>
-                <a:spcPts val="800"/>
-              </a:spcAft>
-            </a:pPr>
-            <a:r>
-              <a:rPr sz="2000" b="0" i="0">
-                <a:solidFill>
-                  <a:srgbClr val="333333"/>
-                </a:solidFill>
-                <a:latin typeface="Calibri"/>
-              </a:rPr>
-              <a:t>–   </a:t>
-            </a:r>
-            <a:r>
-              <a:rPr sz="2000" b="1" i="0">
-                <a:solidFill>
-                  <a:srgbClr val="333333"/>
-                </a:solidFill>
-                <a:latin typeface="Calibri"/>
-              </a:rPr>
-              <a:t>Trabajo dirigido:</a:t>
-            </a:r>
-            <a:r>
-              <a:rPr sz="2000" b="0" i="0">
-                <a:solidFill>
-                  <a:srgbClr val="333333"/>
-                </a:solidFill>
-                <a:latin typeface="Calibri"/>
-              </a:rPr>
-              <a:t> Valoración de presentaciones — completar la ficha de valoración de los otros cuatro equipos en el muro, si no quedó terminada en clase.</a:t>
-            </a:r>
-          </a:p>
-          <a:p>
-            <a:pPr>
-              <a:spcAft>
-                <a:spcPts val="800"/>
-              </a:spcAft>
-            </a:pPr>
-            <a:r>
-              <a:rPr sz="2000" b="0" i="0">
-                <a:solidFill>
-                  <a:srgbClr val="333333"/>
-                </a:solidFill>
-                <a:latin typeface="Calibri"/>
-              </a:rPr>
-              <a:t>–   </a:t>
-            </a:r>
-            <a:r>
-              <a:rPr sz="2000" b="1" i="0">
-                <a:solidFill>
-                  <a:srgbClr val="333333"/>
-                </a:solidFill>
-                <a:latin typeface="Calibri"/>
-              </a:rPr>
-              <a:t>Trabajo independiente:</a:t>
-            </a:r>
-            <a:r>
-              <a:rPr sz="2000" b="0" i="0">
-                <a:solidFill>
-                  <a:srgbClr val="333333"/>
-                </a:solidFill>
-                <a:latin typeface="Calibri"/>
-              </a:rPr>
-              <a:t> Ajustes del informe final: </a:t>
-            </a:r>
-            <a:r>
-              <a:rPr sz="2000" b="1" i="0">
-                <a:solidFill>
-                  <a:srgbClr val="333333"/>
-                </a:solidFill>
-                <a:latin typeface="Calibri"/>
-              </a:rPr>
-              <a:t>reunir las doce secciones</a:t>
-            </a:r>
-            <a:r>
-              <a:rPr sz="2000" b="0" i="0">
-                <a:solidFill>
-                  <a:srgbClr val="333333"/>
-                </a:solidFill>
-                <a:latin typeface="Calibri"/>
-              </a:rPr>
-              <a:t> en un solo documento, tomando lo que ya está escrito desde la sesión 3, y </a:t>
-            </a:r>
-            <a:r>
-              <a:rPr sz="2000" b="1" i="0">
-                <a:solidFill>
-                  <a:srgbClr val="333333"/>
-                </a:solidFill>
-                <a:latin typeface="Calibri"/>
-              </a:rPr>
-              <a:t>escribir el resumen de media página</a:t>
-            </a:r>
-            <a:r>
-              <a:rPr sz="2000" b="0" i="0">
-                <a:solidFill>
-                  <a:srgbClr val="333333"/>
-                </a:solidFill>
-                <a:latin typeface="Calibri"/>
-              </a:rPr>
-              <a:t>, que es lo único nuevo. Y una tarea corta que vale mucho: </a:t>
-            </a:r>
-            <a:r>
-              <a:rPr sz="2000" b="1" i="0">
-                <a:solidFill>
-                  <a:srgbClr val="333333"/>
-                </a:solidFill>
-                <a:latin typeface="Calibri"/>
-              </a:rPr>
-              <a:t>anotar lo que el curso no entendió</a:t>
-            </a:r>
-            <a:r>
-              <a:rPr sz="2000" b="0" i="0">
-                <a:solidFill>
-                  <a:srgbClr val="333333"/>
-                </a:solidFill>
-                <a:latin typeface="Calibri"/>
-              </a:rPr>
-              <a:t> hoy de su proyecto.</a:t>
-            </a:r>
-          </a:p>
-          <a:p>
-            <a:pPr>
-              <a:spcAft>
-                <a:spcPts val="800"/>
-              </a:spcAft>
-            </a:pPr>
-            <a:r>
-              <a:rPr sz="2000" b="0" i="0">
-                <a:solidFill>
-                  <a:srgbClr val="333333"/>
-                </a:solidFill>
-                <a:latin typeface="Calibri"/>
-              </a:rPr>
-              <a:t>–   </a:t>
-            </a:r>
-            <a:r>
-              <a:rPr sz="2000" b="1" i="0">
-                <a:solidFill>
-                  <a:srgbClr val="333333"/>
-                </a:solidFill>
-                <a:latin typeface="Calibri"/>
-              </a:rPr>
-              <a:t>Clase 16 · Socialización y evaluación final del curso</a:t>
-            </a:r>
-            <a:r>
-              <a:rPr sz="2000" b="0" i="0">
-                <a:solidFill>
-                  <a:srgbClr val="333333"/>
-                </a:solidFill>
-                <a:latin typeface="Calibri"/>
-              </a:rPr>
-              <a:t> — es la última: se </a:t>
-            </a:r>
-            <a:r>
-              <a:rPr sz="2000" b="1" i="0">
-                <a:solidFill>
-                  <a:srgbClr val="333333"/>
-                </a:solidFill>
-                <a:latin typeface="Calibri"/>
-              </a:rPr>
-              <a:t>entrega el informe final (20 %)</a:t>
-            </a:r>
-            <a:r>
-              <a:rPr sz="2000" b="0" i="0">
-                <a:solidFill>
-                  <a:srgbClr val="333333"/>
-                </a:solidFill>
-                <a:latin typeface="Calibri"/>
-              </a:rPr>
-              <a:t>, se socializa la galería de proyectos del curso y se hace la </a:t>
-            </a:r>
-            <a:r>
-              <a:rPr sz="2000" b="1" i="0">
-                <a:solidFill>
-                  <a:srgbClr val="333333"/>
-                </a:solidFill>
-                <a:latin typeface="Calibri"/>
-              </a:rPr>
-              <a:t>autoevaluación y coevaluación</a:t>
-            </a:r>
-            <a:r>
-              <a:rPr sz="2000" b="0" i="0">
-                <a:solidFill>
-                  <a:srgbClr val="333333"/>
-                </a:solidFill>
-                <a:latin typeface="Calibri"/>
-              </a:rPr>
-              <a:t>.</a:t>
-            </a:r>
-          </a:p>
-          <a:p>
-            <a:pPr>
-              <a:spcAft>
-                <a:spcPts val="800"/>
-              </a:spcAft>
-            </a:pPr>
-            <a:r>
-              <a:rPr sz="2000" b="0" i="0">
-                <a:solidFill>
-                  <a:srgbClr val="333333"/>
-                </a:solidFill>
-                <a:latin typeface="Calibri"/>
-              </a:rPr>
-              <a:t>–   </a:t>
-            </a:r>
-            <a:r>
-              <a:rPr sz="2000" b="1" i="0">
-                <a:solidFill>
-                  <a:srgbClr val="333333"/>
-                </a:solidFill>
-                <a:latin typeface="Calibri"/>
-              </a:rPr>
-              <a:t>Aviso:</a:t>
-            </a:r>
-            <a:r>
-              <a:rPr sz="2000" b="0" i="0">
-                <a:solidFill>
-                  <a:srgbClr val="333333"/>
-                </a:solidFill>
-                <a:latin typeface="Calibri"/>
-              </a:rPr>
-              <a:t> El informe se entrega </a:t>
-            </a:r>
-            <a:r>
-              <a:rPr sz="2000" b="1" i="0">
-                <a:solidFill>
-                  <a:srgbClr val="333333"/>
-                </a:solidFill>
-                <a:latin typeface="Calibri"/>
-              </a:rPr>
-              <a:t>en la Clase 16, dentro de la clase</a:t>
-            </a:r>
-            <a:r>
-              <a:rPr sz="2000" b="0" i="0">
-                <a:solidFill>
-                  <a:srgbClr val="333333"/>
-                </a:solidFill>
-                <a:latin typeface="Calibri"/>
-              </a:rPr>
-              <a:t>: se revisa y se completa ahí mismo, con la lista de verificación. Lleguen con el documento armado —no con las secciones dispersas en cinco archivos— porque los 24 minutos de revisión no alcanzan para copiar y pegar el curso entero.</a:t>
-            </a:r>
-          </a:p>
-          <a:p>
-            <a:pPr>
-              <a:spcAft>
-                <a:spcPts val="800"/>
-              </a:spcAft>
-            </a:pPr>
-            <a:r>
-              <a:rPr sz="2000" b="0" i="0">
-                <a:solidFill>
-                  <a:srgbClr val="333333"/>
-                </a:solidFill>
-                <a:latin typeface="Calibri"/>
-              </a:rPr>
-              <a:t>–   </a:t>
-            </a:r>
-            <a:r>
-              <a:rPr sz="2000" b="1" i="0">
-                <a:solidFill>
-                  <a:srgbClr val="333333"/>
-                </a:solidFill>
-                <a:latin typeface="Calibri"/>
-              </a:rPr>
-              <a:t>Antes de salir:</a:t>
-            </a:r>
-            <a:r>
-              <a:rPr sz="2000" b="0" i="0">
-                <a:solidFill>
-                  <a:srgbClr val="333333"/>
-                </a:solidFill>
-                <a:latin typeface="Calibri"/>
-              </a:rPr>
-              <a:t> el enlace del documento del equipo en el chat, con permiso de lectura para el docente, y el nombre del vocero de hoy.</a:t>
-            </a:r>
-          </a:p>
-        </p:txBody>
-      </p:sp>
-      <p:sp>
-        <p:nvSpPr>
-          <p:cNvPr id="6" name="TextBox 5"/>
-          <p:cNvSpPr txBox="1"/>
-          <p:nvPr/>
-        </p:nvSpPr>
-        <p:spPr>
-          <a:xfrm>
-            <a:off x="11185855" y="6473952"/>
-            <a:ext cx="640080" cy="274320"/>
-          </a:xfrm>
-          <a:prstGeom prst="rect">
-            <a:avLst/>
-          </a:prstGeom>
-          <a:noFill/>
-        </p:spPr>
-        <p:txBody>
-          <a:bodyPr wrap="square">
-            <a:spAutoFit/>
-          </a:bodyPr>
-          <a:lstStyle/>
-          <a:p>
-            <a:pPr algn="r"/>
-            <a:r>
-              <a:rPr sz="1100" b="0" i="0">
-                <a:solidFill>
-                  <a:srgbClr val="666666"/>
-                </a:solidFill>
-                <a:latin typeface="Calibri"/>
-              </a:rPr>
-              <a:t>12</a:t>
-            </a:r>
-          </a:p>
-        </p:txBody>
-      </p:sp>
-    </p:spTree>
-  </p:cSld>
-  <p:clrMapOvr>
-    <a:masterClrMapping/>
-  </p:clrMapOvr>
-</p:sld>
-</file>
-
-<file path=ppt/slides/slide13.xml><?xml version="1.0" encoding="utf-8"?>
 <p:sld xmlns:a="http://schemas.openxmlformats.org/drawingml/2006/main" xmlns:p="http://schemas.openxmlformats.org/presentationml/2006/main" xmlns:r="http://schemas.openxmlformats.org/officeDocument/2006/relationships">
   <p:cSld>
     <p:bg>

--- a/Introduccion a la Ingenieria/Clases/Clase 15 - Exposicion final de proyectos/Presentacion.pptx
+++ b/Introduccion a la Ingenieria/Clases/Clase 15 - Exposicion final de proyectos/Presentacion.pptx
@@ -12,9 +12,8 @@
     <p:sldId id="260" r:id="rId11"/>
     <p:sldId id="261" r:id="rId12"/>
     <p:sldId id="262" r:id="rId13"/>
-    <p:sldId id="263" r:id="rId14"/>
+    <p:sldId id="263" r:id="rId15"/>
     <p:sldId id="264" r:id="rId16"/>
-    <p:sldId id="265" r:id="rId17"/>
   </p:sldIdLst>
   <p:sldSz cx="12191695" cy="6858000" type="screen4x3"/>
   <p:notesSz cx="6858000" cy="9144000"/>
@@ -769,37 +768,37 @@
           <a:lstStyle/>
           <a:p>
             <a:r>
-              <a:t>CÓMO SE CALIFICA CADA TRAMO, SIN DISCUTIR CON EL RELOJ</a:t>
+              <a:t>LAS PREGUNTAS: LOS TRES MINUTOS QUE DESTAPAN EL TRABAJO REAL</a:t>
             </a:r>
           </a:p>
           <a:p/>
           <a:p>
             <a:r>
-              <a:t>La rúbrica se proyecta al empezar y hay que dejarla visible: calificar con criterios publicados evita la discusión posterior y, sobre todo, le dice al que expone qué es lo importante. Los pesos no son arbitrarios — el tramo 3 vale más porque es la evidencia de que hicieron algo, y el tramo 4 vale 20 porque es lo que distingue un proyecto de una idea.</a:t>
+              <a:t>Los tres minutos de preguntas no son un trámite: son la parte de la sesión donde se ve quién entendió el proyecto. Por eso la regla es responde quien tiene el tramo, y hay que hacerla cumplir con firmeza —si el mismo integrante responde todo, redirija: «esa es del tramo 4, ¿quién lo presentó?»—.</a:t>
             </a:r>
           </a:p>
           <a:p/>
           <a:p>
             <a:r>
-              <a:t>Califique mientras escucha, no después. Con cinco equipos seguidos, la memoria mezcla las exposiciones y termina premiando al último. Tenga la tabla de cinco tramos por equipo abierta y anote el puntaje al terminar cada tramo, más una frase de por qué. Esa frase es lo que después se devuelve como retroalimentación.</a:t>
+              <a:t>Enseñe explícitamente que «no lo medimos» es una respuesta válida y buena. Un estudiante de primer semestre cree que no saber es un fracaso, y por eso inventa cifras. Hay que decirle lo contrario: lo que hunde una sustentación es afirmar con seguridad algo que no se verificó, porque una sola cifra inventada vuelve dudoso todo lo demás. Es la misma lección de la sesión 5 sobre datos con fuente y de la 11 sobre la IA que inventa con seguridad.</a:t>
             </a:r>
           </a:p>
           <a:p/>
           <a:p>
             <a:r>
-              <a:t>Los dos descuentos hay que aplicarlos, y anunciarlos antes. Hasta 10 puntos si no todos los integrantes hablan —porque la exposición en equipo es lo que se está evaluando— y hasta 10 si nadie sabe responder una pregunta de su propio tramo. El segundo descuento es el que más enseña: destapa al equipo donde uno solo hizo el trabajo y los demás leyeron un guion.</a:t>
+              <a:t>La segunda enseñanza es la diferencia entre excusa y decisión. «No lo hicimos porque no nos alcanzó el tiempo» suena a incumplimiento; «decidimos no hacerlo y sacrificamos esto a cambio» es exactamente el lenguaje del alcance mínimo de la sesión 8. Los equipos ya tienen la decisión escrita desde entonces: solo hay que recordarles que la usen.</a:t>
             </a:r>
           </a:p>
           <a:p/>
           <a:p>
             <a:r>
-              <a:t>Sobre el corte a los nueve minutos: avise en el chat a los 8, y corte a los 9 aunque quede una frase a medias. Es incómodo la primera vez y después el curso lo acepta como parte del juego. El argumento, si alguien reclama, es aritmético y no disciplinario: cinco equipos por 12 minutos son 60, y el tiempo que un equipo se pasa lo pierde el último. No descuente puntos adicionales por pasarse: el corte ya es el castigo, porque los tramos que faltaban valen cero.</a:t>
+              <a:t>Reserve una pregunta suya para cada equipo, y hágala útil. Las tres que más rinden: «¿con quién lo probaron y qué hizo esa persona?» —destapa si hubo prueba real—, «¿qué pasa con alguien que no tiene datos móviles?» —destapa si pensaron en los afectados no usuarios— y «si tuvieran una semana más, ¿qué harían primero?» —destapa si tienen criterio de prioridad o solo una lista de deseos—.</a:t>
             </a:r>
           </a:p>
           <a:p/>
           <a:p>
             <a:r>
-              <a:t>Un criterio de calificación que conviene tener claro de antemano: un equipo que cuenta un fracaso con honestidad saca más que uno que presenta todo perfecto. No es generosidad: en un prototipo de primer semestre, «todo funcionó a la primera» significa casi siempre que no se probó con nadie. Si un equipo no reporta ningún hallazgo en el tramo 4, la pregunta obligatoria es «¿con quién lo probaron y qué hizo esa persona?».</a:t>
+              <a:t>Cuide el tiempo de las respuestas: tres minutos alcanzan para dos o tres preguntas si las respuestas duran treinta segundos. Una respuesta de dos minutos se come las preguntas de los demás, y hay que interrumpirla con cortesía.</a:t>
             </a:r>
           </a:p>
         </p:txBody>
@@ -825,106 +824,6 @@
 </file>
 
 <file path=ppt/notesSlides/notesSlide5.xml><?xml version="1.0" encoding="utf-8"?>
-<p:notes xmlns:a="http://schemas.openxmlformats.org/drawingml/2006/main" xmlns:p="http://schemas.openxmlformats.org/presentationml/2006/main" xmlns:r="http://schemas.openxmlformats.org/officeDocument/2006/relationships">
-  <p:cSld>
-    <p:spTree>
-      <p:nvGrpSpPr>
-        <p:cNvPr id="1" name=""/>
-        <p:cNvGrpSpPr/>
-        <p:nvPr/>
-      </p:nvGrpSpPr>
-      <p:grpSpPr>
-        <a:xfrm>
-          <a:off x="0" y="0"/>
-          <a:ext cx="0" cy="0"/>
-          <a:chOff x="0" y="0"/>
-          <a:chExt cx="0" cy="0"/>
-        </a:xfrm>
-      </p:grpSpPr>
-      <p:sp>
-        <p:nvSpPr>
-          <p:cNvPr id="2" name="Slide Image Placeholder 1"/>
-          <p:cNvSpPr>
-            <a:spLocks noGrp="1"/>
-          </p:cNvSpPr>
-          <p:nvPr>
-            <p:ph type="sldImg" idx="2"/>
-          </p:nvPr>
-        </p:nvSpPr>
-        <p:spPr/>
-      </p:sp>
-      <p:sp>
-        <p:nvSpPr>
-          <p:cNvPr id="3" name="Notes Placeholder 2"/>
-          <p:cNvSpPr>
-            <a:spLocks noGrp="1"/>
-          </p:cNvSpPr>
-          <p:nvPr>
-            <p:ph type="body" idx="3" sz="quarter"/>
-          </p:nvPr>
-        </p:nvSpPr>
-        <p:spPr/>
-        <p:txBody>
-          <a:bodyPr/>
-          <a:lstStyle/>
-          <a:p>
-            <a:r>
-              <a:t>LAS PREGUNTAS: LOS TRES MINUTOS QUE DESTAPAN EL TRABAJO REAL</a:t>
-            </a:r>
-          </a:p>
-          <a:p/>
-          <a:p>
-            <a:r>
-              <a:t>Los tres minutos de preguntas no son un trámite: son la parte de la sesión donde se ve quién entendió el proyecto. Por eso la regla es responde quien tiene el tramo, y hay que hacerla cumplir con firmeza —si el mismo integrante responde todo, redirija: «esa es del tramo 4, ¿quién lo presentó?»—.</a:t>
-            </a:r>
-          </a:p>
-          <a:p/>
-          <a:p>
-            <a:r>
-              <a:t>Enseñe explícitamente que «no lo medimos» es una respuesta válida y buena. Un estudiante de primer semestre cree que no saber es un fracaso, y por eso inventa cifras. Hay que decirle lo contrario: lo que hunde una sustentación es afirmar con seguridad algo que no se verificó, porque una sola cifra inventada vuelve dudoso todo lo demás. Es la misma lección de la sesión 5 sobre datos con fuente y de la 11 sobre la IA que inventa con seguridad.</a:t>
-            </a:r>
-          </a:p>
-          <a:p/>
-          <a:p>
-            <a:r>
-              <a:t>La segunda enseñanza es la diferencia entre excusa y decisión. «No lo hicimos porque no nos alcanzó el tiempo» suena a incumplimiento; «decidimos no hacerlo y sacrificamos esto a cambio» es exactamente el lenguaje del alcance mínimo de la sesión 8. Los equipos ya tienen la decisión escrita desde entonces: solo hay que recordarles que la usen.</a:t>
-            </a:r>
-          </a:p>
-          <a:p/>
-          <a:p>
-            <a:r>
-              <a:t>Reserve una pregunta suya para cada equipo, y hágala útil. Las tres que más rinden: «¿con quién lo probaron y qué hizo esa persona?» —destapa si hubo prueba real—, «¿qué pasa con alguien que no tiene datos móviles?» —destapa si pensaron en los afectados no usuarios— y «si tuvieran una semana más, ¿qué harían primero?» —destapa si tienen criterio de prioridad o solo una lista de deseos—.</a:t>
-            </a:r>
-          </a:p>
-          <a:p/>
-          <a:p>
-            <a:r>
-              <a:t>Cuide el tiempo de las respuestas: tres minutos alcanzan para dos o tres preguntas si las respuestas duran treinta segundos. Una respuesta de dos minutos se come las preguntas de los demás, y hay que interrumpirla con cortesía.</a:t>
-            </a:r>
-          </a:p>
-        </p:txBody>
-      </p:sp>
-      <p:sp>
-        <p:nvSpPr>
-          <p:cNvPr id="4" name="Slide Number Placeholder 3"/>
-          <p:cNvSpPr>
-            <a:spLocks noGrp="1"/>
-          </p:cNvSpPr>
-          <p:nvPr>
-            <p:ph type="sldNum" idx="5" sz="quarter"/>
-          </p:nvPr>
-        </p:nvSpPr>
-        <p:spPr/>
-      </p:sp>
-    </p:spTree>
-  </p:cSld>
-  <p:clrMapOvr>
-    <a:masterClrMapping/>
-  </p:clrMapOvr>
-</p:notes>
-</file>
-
-<file path=ppt/notesSlides/notesSlide6.xml><?xml version="1.0" encoding="utf-8"?>
 <p:notes xmlns:a="http://schemas.openxmlformats.org/drawingml/2006/main" xmlns:p="http://schemas.openxmlformats.org/presentationml/2006/main" xmlns:r="http://schemas.openxmlformats.org/officeDocument/2006/relationships">
   <p:cSld>
     <p:spTree>
@@ -4384,222 +4283,6 @@
 </p:sld>
 </file>
 
-<file path=ppt/slides/slide10.xml><?xml version="1.0" encoding="utf-8"?>
-<p:sld xmlns:a="http://schemas.openxmlformats.org/drawingml/2006/main" xmlns:p="http://schemas.openxmlformats.org/presentationml/2006/main" xmlns:r="http://schemas.openxmlformats.org/officeDocument/2006/relationships">
-  <p:cSld>
-    <p:bg>
-      <p:bgPr>
-        <a:solidFill>
-          <a:srgbClr val="FFFFFF"/>
-        </a:solidFill>
-        <a:effectLst/>
-      </p:bgPr>
-    </p:bg>
-    <p:spTree>
-      <p:nvGrpSpPr>
-        <p:cNvPr id="1" name=""/>
-        <p:cNvGrpSpPr/>
-        <p:nvPr/>
-      </p:nvGrpSpPr>
-      <p:grpSpPr/>
-      <p:sp>
-        <p:nvSpPr>
-          <p:cNvPr id="2" name="Rectangle 1"/>
-          <p:cNvSpPr/>
-          <p:nvPr/>
-        </p:nvSpPr>
-        <p:spPr>
-          <a:xfrm>
-            <a:off x="0" y="0"/>
-            <a:ext cx="12191695" cy="164592"/>
-          </a:xfrm>
-          <a:prstGeom prst="rect">
-            <a:avLst/>
-          </a:prstGeom>
-          <a:solidFill>
-            <a:srgbClr val="269CCB"/>
-          </a:solidFill>
-          <a:ln>
-            <a:noFill/>
-          </a:ln>
-        </p:spPr>
-        <p:style>
-          <a:lnRef idx="1">
-            <a:schemeClr val="accent1"/>
-          </a:lnRef>
-          <a:fillRef idx="3">
-            <a:schemeClr val="accent1"/>
-          </a:fillRef>
-          <a:effectRef idx="2">
-            <a:schemeClr val="accent1"/>
-          </a:effectRef>
-          <a:fontRef idx="minor">
-            <a:schemeClr val="lt1"/>
-          </a:fontRef>
-        </p:style>
-        <p:txBody>
-          <a:bodyPr rtlCol="0" anchor="ctr"/>
-          <a:lstStyle/>
-          <a:p>
-            <a:pPr algn="ctr"/>
-          </a:p>
-        </p:txBody>
-      </p:sp>
-      <p:pic>
-        <p:nvPicPr>
-          <p:cNvPr id="3" name="Picture 2" descr="logo_uniajc_color.png"/>
-          <p:cNvPicPr>
-            <a:picLocks noChangeAspect="1"/>
-          </p:cNvPicPr>
-          <p:nvPr/>
-        </p:nvPicPr>
-        <p:blipFill>
-          <a:blip r:embed="rId2"/>
-          <a:stretch>
-            <a:fillRect/>
-          </a:stretch>
-        </p:blipFill>
-        <p:spPr>
-          <a:xfrm>
-            <a:off x="10271455" y="5998464"/>
-            <a:ext cx="1463040" cy="643233"/>
-          </a:xfrm>
-          <a:prstGeom prst="rect">
-            <a:avLst/>
-          </a:prstGeom>
-        </p:spPr>
-      </p:pic>
-      <p:sp>
-        <p:nvSpPr>
-          <p:cNvPr id="4" name="TextBox 3"/>
-          <p:cNvSpPr txBox="1"/>
-          <p:nvPr/>
-        </p:nvSpPr>
-        <p:spPr>
-          <a:xfrm>
-            <a:off x="457200" y="1737360"/>
-            <a:ext cx="11277295" cy="1097280"/>
-          </a:xfrm>
-          <a:prstGeom prst="rect">
-            <a:avLst/>
-          </a:prstGeom>
-          <a:noFill/>
-        </p:spPr>
-        <p:txBody>
-          <a:bodyPr wrap="square" anchor="ctr"/>
-          <a:lstStyle/>
-          <a:p>
-            <a:pPr algn="ctr"/>
-            <a:r>
-              <a:rPr sz="3400" b="1" i="0">
-                <a:solidFill>
-                  <a:srgbClr val="095292"/>
-                </a:solidFill>
-                <a:latin typeface="Calibri"/>
-              </a:rPr>
-              <a:t>Nos vemos en la Clase 16 · la última</a:t>
-            </a:r>
-          </a:p>
-        </p:txBody>
-      </p:sp>
-      <p:sp>
-        <p:nvSpPr>
-          <p:cNvPr id="5" name="TextBox 4"/>
-          <p:cNvSpPr txBox="1"/>
-          <p:nvPr/>
-        </p:nvSpPr>
-        <p:spPr>
-          <a:xfrm>
-            <a:off x="457200" y="3017520"/>
-            <a:ext cx="11277295" cy="1645920"/>
-          </a:xfrm>
-          <a:prstGeom prst="rect">
-            <a:avLst/>
-          </a:prstGeom>
-          <a:noFill/>
-        </p:spPr>
-        <p:txBody>
-          <a:bodyPr wrap="square">
-            <a:spAutoFit/>
-          </a:bodyPr>
-          <a:lstStyle/>
-          <a:p>
-            <a:pPr algn="ctr">
-              <a:spcAft>
-                <a:spcPts val="600"/>
-              </a:spcAft>
-            </a:pPr>
-            <a:r>
-              <a:rPr sz="1600" b="0" i="0">
-                <a:solidFill>
-                  <a:srgbClr val="333333"/>
-                </a:solidFill>
-                <a:latin typeface="Calibri"/>
-              </a:rPr>
-              <a:t>Exposición final de proyectos · Clase 15</a:t>
-            </a:r>
-          </a:p>
-          <a:p>
-            <a:pPr algn="ctr">
-              <a:spcAft>
-                <a:spcPts val="600"/>
-              </a:spcAft>
-            </a:pPr>
-            <a:r>
-              <a:rPr sz="1600" b="0" i="0">
-                <a:solidFill>
-                  <a:srgbClr val="333333"/>
-                </a:solidFill>
-                <a:latin typeface="Calibri"/>
-              </a:rPr>
-              <a:t>FI300101 · UNIAJC · Ingeniería de Sistemas</a:t>
-            </a:r>
-          </a:p>
-        </p:txBody>
-      </p:sp>
-      <p:sp>
-        <p:nvSpPr>
-          <p:cNvPr id="6" name="TextBox 5"/>
-          <p:cNvSpPr txBox="1"/>
-          <p:nvPr/>
-        </p:nvSpPr>
-        <p:spPr>
-          <a:xfrm>
-            <a:off x="457200" y="4754880"/>
-            <a:ext cx="11277295" cy="640080"/>
-          </a:xfrm>
-          <a:prstGeom prst="rect">
-            <a:avLst/>
-          </a:prstGeom>
-          <a:noFill/>
-        </p:spPr>
-        <p:txBody>
-          <a:bodyPr wrap="square">
-            <a:spAutoFit/>
-          </a:bodyPr>
-          <a:lstStyle/>
-          <a:p>
-            <a:pPr algn="ctr"/>
-            <a:r>
-              <a:rPr sz="2000" b="1" i="0">
-                <a:solidFill>
-                  <a:srgbClr val="269CCB"/>
-                </a:solidFill>
-                <a:latin typeface="Calibri"/>
-              </a:rPr>
-              <a:t>Hace quince sesiones era una ocurrencia; hoy es un proyecto sustentado</a:t>
-            </a:r>
-          </a:p>
-        </p:txBody>
-      </p:sp>
-    </p:spTree>
-  </p:cSld>
-  <p:clrMapOvr>
-    <a:masterClrMapping/>
-  </p:clrMapOvr>
-</p:sld>
-</file>
-
 <file path=ppt/slides/slide2.xml><?xml version="1.0" encoding="utf-8"?>
 <p:sld xmlns:a="http://schemas.openxmlformats.org/drawingml/2006/main" xmlns:p="http://schemas.openxmlformats.org/presentationml/2006/main" xmlns:r="http://schemas.openxmlformats.org/officeDocument/2006/relationships">
   <p:cSld>
@@ -4767,7 +4450,7 @@
                 </a:solidFill>
                 <a:latin typeface="Calibri"/>
               </a:rPr>
-              <a:t>Hoy la clase la dan los estudiantes. El docente cronometra, pregunta y califica</a:t>
+              <a:t>Hoy la clase la dan los estudiantes. El docente cronometra y pregunta</a:t>
             </a:r>
           </a:p>
         </p:txBody>
@@ -5332,7 +5015,7 @@
                 </a:solidFill>
                 <a:latin typeface="Calibri"/>
               </a:rPr>
-              <a:t> también se califican, y </a:t>
+              <a:t> también son parte de la exposición, y </a:t>
             </a:r>
             <a:r>
               <a:rPr sz="1100" b="1" i="1">
@@ -6059,7 +5742,7 @@
         <p:spPr>
           <a:xfrm>
             <a:off x="0" y="0"/>
-            <a:ext cx="12191695" cy="960120"/>
+            <a:ext cx="12191695" cy="1170432"/>
           </a:xfrm>
           <a:prstGeom prst="rect">
             <a:avLst/>
@@ -6101,7 +5784,7 @@
         </p:nvSpPr>
         <p:spPr>
           <a:xfrm>
-            <a:off x="0" y="960120"/>
+            <a:off x="0" y="1170432"/>
             <a:ext cx="12191695" cy="41148"/>
           </a:xfrm>
           <a:prstGeom prst="rect">
@@ -6145,7 +5828,7 @@
         <p:spPr>
           <a:xfrm>
             <a:off x="457200" y="164592"/>
-            <a:ext cx="11277295" cy="502920"/>
+            <a:ext cx="11277295" cy="384048"/>
           </a:xfrm>
           <a:prstGeom prst="rect">
             <a:avLst/>
@@ -6165,555 +5848,21 @@
                 </a:solidFill>
                 <a:latin typeface="Calibri"/>
               </a:rPr>
-              <a:t>Con qué se califica hoy</a:t>
-            </a:r>
-          </a:p>
-        </p:txBody>
-      </p:sp>
-      <p:graphicFrame>
-        <p:nvGraphicFramePr>
-          <p:cNvPr id="5" name="Table 4"/>
-          <p:cNvGraphicFramePr>
-            <a:graphicFrameLocks noGrp="1"/>
-          </p:cNvGraphicFramePr>
-          <p:nvPr/>
-        </p:nvGraphicFramePr>
-        <p:xfrm>
-          <a:off x="457200" y="1216152"/>
-          <a:ext cx="8412480" cy="2304288"/>
-        </p:xfrm>
-        <a:graphic>
-          <a:graphicData uri="http://schemas.openxmlformats.org/drawingml/2006/table">
-            <a:tbl>
-              <a:tblPr firstRow="1" bandRow="1">
-                <a:tableStyleId>{5C22544A-7EE6-4342-B048-85BDC9FD1C3A}</a:tableStyleId>
-              </a:tblPr>
-              <a:tblGrid>
-                <a:gridCol w="2651760"/>
-                <a:gridCol w="4937760"/>
-                <a:gridCol w="822960"/>
-              </a:tblGrid>
-              <a:tr h="384048">
-                <a:tc>
-                  <a:txBody>
-                    <a:bodyPr/>
-                    <a:lstStyle/>
-                    <a:p>
-                      <a:r>
-                        <a:rPr sz="1200" b="1" i="0">
-                          <a:solidFill>
-                            <a:srgbClr val="FFFFFF"/>
-                          </a:solidFill>
-                          <a:latin typeface="Calibri"/>
-                        </a:rPr>
-                        <a:t>Tramo de la exposición</a:t>
-                      </a:r>
-                    </a:p>
-                  </a:txBody>
-                  <a:tcPr>
-                    <a:solidFill>
-                      <a:srgbClr val="095292"/>
-                    </a:solidFill>
-                  </a:tcPr>
-                </a:tc>
-                <a:tc>
-                  <a:txBody>
-                    <a:bodyPr/>
-                    <a:lstStyle/>
-                    <a:p>
-                      <a:r>
-                        <a:rPr sz="1200" b="1" i="0">
-                          <a:solidFill>
-                            <a:srgbClr val="FFFFFF"/>
-                          </a:solidFill>
-                          <a:latin typeface="Calibri"/>
-                        </a:rPr>
-                        <a:t>Qué se busca</a:t>
-                      </a:r>
-                    </a:p>
-                  </a:txBody>
-                  <a:tcPr>
-                    <a:solidFill>
-                      <a:srgbClr val="095292"/>
-                    </a:solidFill>
-                  </a:tcPr>
-                </a:tc>
-                <a:tc>
-                  <a:txBody>
-                    <a:bodyPr/>
-                    <a:lstStyle/>
-                    <a:p>
-                      <a:r>
-                        <a:rPr sz="1200" b="1" i="0">
-                          <a:solidFill>
-                            <a:srgbClr val="FFFFFF"/>
-                          </a:solidFill>
-                          <a:latin typeface="Calibri"/>
-                        </a:rPr>
-                        <a:t>Pts</a:t>
-                      </a:r>
-                    </a:p>
-                  </a:txBody>
-                  <a:tcPr>
-                    <a:solidFill>
-                      <a:srgbClr val="095292"/>
-                    </a:solidFill>
-                  </a:tcPr>
-                </a:tc>
-              </a:tr>
-              <a:tr h="384048">
-                <a:tc>
-                  <a:txBody>
-                    <a:bodyPr/>
-                    <a:lstStyle/>
-                    <a:p>
-                      <a:r>
-                        <a:rPr sz="1100" b="0" i="0">
-                          <a:solidFill>
-                            <a:srgbClr val="333333"/>
-                          </a:solidFill>
-                          <a:latin typeface="Calibri"/>
-                        </a:rPr>
-                        <a:t>1 · El problema con su cifra</a:t>
-                      </a:r>
-                    </a:p>
-                  </a:txBody>
-                  <a:tcPr>
-                    <a:solidFill>
-                      <a:srgbClr val="FFFFFF"/>
-                    </a:solidFill>
-                  </a:tcPr>
-                </a:tc>
-                <a:tc>
-                  <a:txBody>
-                    <a:bodyPr/>
-                    <a:lstStyle/>
-                    <a:p>
-                      <a:r>
-                        <a:rPr sz="1100" b="0" i="0">
-                          <a:solidFill>
-                            <a:srgbClr val="333333"/>
-                          </a:solidFill>
-                          <a:latin typeface="Calibri"/>
-                        </a:rPr>
-                        <a:t>Arranca por el problema, no por presentaciones. Trae </a:t>
-                      </a:r>
-                      <a:r>
-                        <a:rPr sz="1100" b="1" i="0">
-                          <a:solidFill>
-                            <a:srgbClr val="333333"/>
-                          </a:solidFill>
-                          <a:latin typeface="Calibri"/>
-                        </a:rPr>
-                        <a:t>un número</a:t>
-                      </a:r>
-                      <a:r>
-                        <a:rPr sz="1100" b="0" i="0">
-                          <a:solidFill>
-                            <a:srgbClr val="333333"/>
-                          </a:solidFill>
-                          <a:latin typeface="Calibri"/>
-                        </a:rPr>
-                        <a:t> y de dónde salió.</a:t>
-                      </a:r>
-                    </a:p>
-                  </a:txBody>
-                  <a:tcPr>
-                    <a:solidFill>
-                      <a:srgbClr val="FFFFFF"/>
-                    </a:solidFill>
-                  </a:tcPr>
-                </a:tc>
-                <a:tc>
-                  <a:txBody>
-                    <a:bodyPr/>
-                    <a:lstStyle/>
-                    <a:p>
-                      <a:r>
-                        <a:rPr sz="1100" b="0" i="0">
-                          <a:solidFill>
-                            <a:srgbClr val="333333"/>
-                          </a:solidFill>
-                          <a:latin typeface="Calibri"/>
-                        </a:rPr>
-                        <a:t>20</a:t>
-                      </a:r>
-                    </a:p>
-                  </a:txBody>
-                  <a:tcPr>
-                    <a:solidFill>
-                      <a:srgbClr val="FFFFFF"/>
-                    </a:solidFill>
-                  </a:tcPr>
-                </a:tc>
-              </a:tr>
-              <a:tr h="384048">
-                <a:tc>
-                  <a:txBody>
-                    <a:bodyPr/>
-                    <a:lstStyle/>
-                    <a:p>
-                      <a:r>
-                        <a:rPr sz="1100" b="0" i="0">
-                          <a:solidFill>
-                            <a:srgbClr val="333333"/>
-                          </a:solidFill>
-                          <a:latin typeface="Calibri"/>
-                        </a:rPr>
-                        <a:t>2 · Los afectados y la decisión</a:t>
-                      </a:r>
-                    </a:p>
-                  </a:txBody>
-                  <a:tcPr>
-                    <a:solidFill>
-                      <a:srgbClr val="F2F2F2"/>
-                    </a:solidFill>
-                  </a:tcPr>
-                </a:tc>
-                <a:tc>
-                  <a:txBody>
-                    <a:bodyPr/>
-                    <a:lstStyle/>
-                    <a:p>
-                      <a:r>
-                        <a:rPr sz="1100" b="0" i="0">
-                          <a:solidFill>
-                            <a:srgbClr val="333333"/>
-                          </a:solidFill>
-                          <a:latin typeface="Calibri"/>
-                        </a:rPr>
-                        <a:t>Incluye un afectado que </a:t>
-                      </a:r>
-                      <a:r>
-                        <a:rPr sz="1100" b="1" i="0">
-                          <a:solidFill>
-                            <a:srgbClr val="333333"/>
-                          </a:solidFill>
-                          <a:latin typeface="Calibri"/>
-                        </a:rPr>
-                        <a:t>no es usuario</a:t>
-                      </a:r>
-                      <a:r>
-                        <a:rPr sz="1100" b="0" i="0">
-                          <a:solidFill>
-                            <a:srgbClr val="333333"/>
-                          </a:solidFill>
-                          <a:latin typeface="Calibri"/>
-                        </a:rPr>
-                        <a:t> y dice </a:t>
-                      </a:r>
-                      <a:r>
-                        <a:rPr sz="1100" b="1" i="0">
-                          <a:solidFill>
-                            <a:srgbClr val="333333"/>
-                          </a:solidFill>
-                          <a:latin typeface="Calibri"/>
-                        </a:rPr>
-                        <a:t>qué se sacrificó</a:t>
-                      </a:r>
-                      <a:r>
-                        <a:rPr sz="1100" b="0" i="0">
-                          <a:solidFill>
-                            <a:srgbClr val="333333"/>
-                          </a:solidFill>
-                          <a:latin typeface="Calibri"/>
-                        </a:rPr>
-                        <a:t> al decidir.</a:t>
-                      </a:r>
-                    </a:p>
-                  </a:txBody>
-                  <a:tcPr>
-                    <a:solidFill>
-                      <a:srgbClr val="F2F2F2"/>
-                    </a:solidFill>
-                  </a:tcPr>
-                </a:tc>
-                <a:tc>
-                  <a:txBody>
-                    <a:bodyPr/>
-                    <a:lstStyle/>
-                    <a:p>
-                      <a:r>
-                        <a:rPr sz="1100" b="0" i="0">
-                          <a:solidFill>
-                            <a:srgbClr val="333333"/>
-                          </a:solidFill>
-                          <a:latin typeface="Calibri"/>
-                        </a:rPr>
-                        <a:t>20</a:t>
-                      </a:r>
-                    </a:p>
-                  </a:txBody>
-                  <a:tcPr>
-                    <a:solidFill>
-                      <a:srgbClr val="F2F2F2"/>
-                    </a:solidFill>
-                  </a:tcPr>
-                </a:tc>
-              </a:tr>
-              <a:tr h="384048">
-                <a:tc>
-                  <a:txBody>
-                    <a:bodyPr/>
-                    <a:lstStyle/>
-                    <a:p>
-                      <a:r>
-                        <a:rPr sz="1100" b="0" i="0">
-                          <a:solidFill>
-                            <a:srgbClr val="333333"/>
-                          </a:solidFill>
-                          <a:latin typeface="Calibri"/>
-                        </a:rPr>
-                        <a:t>3 · La solución y el prototipo en vivo</a:t>
-                      </a:r>
-                    </a:p>
-                  </a:txBody>
-                  <a:tcPr>
-                    <a:solidFill>
-                      <a:srgbClr val="FFFFFF"/>
-                    </a:solidFill>
-                  </a:tcPr>
-                </a:tc>
-                <a:tc>
-                  <a:txBody>
-                    <a:bodyPr/>
-                    <a:lstStyle/>
-                    <a:p>
-                      <a:r>
-                        <a:rPr sz="1100" b="1" i="0">
-                          <a:solidFill>
-                            <a:srgbClr val="333333"/>
-                          </a:solidFill>
-                          <a:latin typeface="Calibri"/>
-                        </a:rPr>
-                        <a:t>Muestra una tarea cumpliéndose</a:t>
-                      </a:r>
-                      <a:r>
-                        <a:rPr sz="1100" b="0" i="0">
-                          <a:solidFill>
-                            <a:srgbClr val="333333"/>
-                          </a:solidFill>
-                          <a:latin typeface="Calibri"/>
-                        </a:rPr>
-                        <a:t>, no describe la pantalla. Cabe en 3 minutos.</a:t>
-                      </a:r>
-                    </a:p>
-                  </a:txBody>
-                  <a:tcPr>
-                    <a:solidFill>
-                      <a:srgbClr val="FFFFFF"/>
-                    </a:solidFill>
-                  </a:tcPr>
-                </a:tc>
-                <a:tc>
-                  <a:txBody>
-                    <a:bodyPr/>
-                    <a:lstStyle/>
-                    <a:p>
-                      <a:r>
-                        <a:rPr sz="1100" b="0" i="0">
-                          <a:solidFill>
-                            <a:srgbClr val="333333"/>
-                          </a:solidFill>
-                          <a:latin typeface="Calibri"/>
-                        </a:rPr>
-                        <a:t>25</a:t>
-                      </a:r>
-                    </a:p>
-                  </a:txBody>
-                  <a:tcPr>
-                    <a:solidFill>
-                      <a:srgbClr val="FFFFFF"/>
-                    </a:solidFill>
-                  </a:tcPr>
-                </a:tc>
-              </a:tr>
-              <a:tr h="384048">
-                <a:tc>
-                  <a:txBody>
-                    <a:bodyPr/>
-                    <a:lstStyle/>
-                    <a:p>
-                      <a:r>
-                        <a:rPr sz="1100" b="0" i="0">
-                          <a:solidFill>
-                            <a:srgbClr val="333333"/>
-                          </a:solidFill>
-                          <a:latin typeface="Calibri"/>
-                        </a:rPr>
-                        <a:t>4 · Lo que falló y lo que aprendimos</a:t>
-                      </a:r>
-                    </a:p>
-                  </a:txBody>
-                  <a:tcPr>
-                    <a:solidFill>
-                      <a:srgbClr val="F2F2F2"/>
-                    </a:solidFill>
-                  </a:tcPr>
-                </a:tc>
-                <a:tc>
-                  <a:txBody>
-                    <a:bodyPr/>
-                    <a:lstStyle/>
-                    <a:p>
-                      <a:r>
-                        <a:rPr sz="1100" b="0" i="0">
-                          <a:solidFill>
-                            <a:srgbClr val="333333"/>
-                          </a:solidFill>
-                          <a:latin typeface="Calibri"/>
-                        </a:rPr>
-                        <a:t>Hallazgos con personas reales, qué se arregló y </a:t>
-                      </a:r>
-                      <a:r>
-                        <a:rPr sz="1100" b="1" i="0">
-                          <a:solidFill>
-                            <a:srgbClr val="333333"/>
-                          </a:solidFill>
-                          <a:latin typeface="Calibri"/>
-                        </a:rPr>
-                        <a:t>qué se decidió no arreglar</a:t>
-                      </a:r>
-                      <a:r>
-                        <a:rPr sz="1100" b="0" i="0">
-                          <a:solidFill>
-                            <a:srgbClr val="333333"/>
-                          </a:solidFill>
-                          <a:latin typeface="Calibri"/>
-                        </a:rPr>
-                        <a:t>.</a:t>
-                      </a:r>
-                    </a:p>
-                  </a:txBody>
-                  <a:tcPr>
-                    <a:solidFill>
-                      <a:srgbClr val="F2F2F2"/>
-                    </a:solidFill>
-                  </a:tcPr>
-                </a:tc>
-                <a:tc>
-                  <a:txBody>
-                    <a:bodyPr/>
-                    <a:lstStyle/>
-                    <a:p>
-                      <a:r>
-                        <a:rPr sz="1100" b="0" i="0">
-                          <a:solidFill>
-                            <a:srgbClr val="333333"/>
-                          </a:solidFill>
-                          <a:latin typeface="Calibri"/>
-                        </a:rPr>
-                        <a:t>20</a:t>
-                      </a:r>
-                    </a:p>
-                  </a:txBody>
-                  <a:tcPr>
-                    <a:solidFill>
-                      <a:srgbClr val="F2F2F2"/>
-                    </a:solidFill>
-                  </a:tcPr>
-                </a:tc>
-              </a:tr>
-              <a:tr h="384048">
-                <a:tc>
-                  <a:txBody>
-                    <a:bodyPr/>
-                    <a:lstStyle/>
-                    <a:p>
-                      <a:r>
-                        <a:rPr sz="1100" b="0" i="0">
-                          <a:solidFill>
-                            <a:srgbClr val="333333"/>
-                          </a:solidFill>
-                          <a:latin typeface="Calibri"/>
-                        </a:rPr>
-                        <a:t>5 · Impacto y siguiente paso</a:t>
-                      </a:r>
-                    </a:p>
-                  </a:txBody>
-                  <a:tcPr>
-                    <a:solidFill>
-                      <a:srgbClr val="FFFFFF"/>
-                    </a:solidFill>
-                  </a:tcPr>
-                </a:tc>
-                <a:tc>
-                  <a:txBody>
-                    <a:bodyPr/>
-                    <a:lstStyle/>
-                    <a:p>
-                      <a:r>
-                        <a:rPr sz="1100" b="0" i="0">
-                          <a:solidFill>
-                            <a:srgbClr val="333333"/>
-                          </a:solidFill>
-                          <a:latin typeface="Calibri"/>
-                        </a:rPr>
-                        <a:t>El impacto positivo con su número </a:t>
-                      </a:r>
-                      <a:r>
-                        <a:rPr sz="1100" b="1" i="0">
-                          <a:solidFill>
-                            <a:srgbClr val="333333"/>
-                          </a:solidFill>
-                          <a:latin typeface="Calibri"/>
-                        </a:rPr>
-                        <a:t>y el negativo con su mitigación</a:t>
-                      </a:r>
-                      <a:r>
-                        <a:rPr sz="1100" b="0" i="0">
-                          <a:solidFill>
-                            <a:srgbClr val="333333"/>
-                          </a:solidFill>
-                          <a:latin typeface="Calibri"/>
-                        </a:rPr>
-                        <a:t>.</a:t>
-                      </a:r>
-                    </a:p>
-                  </a:txBody>
-                  <a:tcPr>
-                    <a:solidFill>
-                      <a:srgbClr val="FFFFFF"/>
-                    </a:solidFill>
-                  </a:tcPr>
-                </a:tc>
-                <a:tc>
-                  <a:txBody>
-                    <a:bodyPr/>
-                    <a:lstStyle/>
-                    <a:p>
-                      <a:r>
-                        <a:rPr sz="1100" b="0" i="0">
-                          <a:solidFill>
-                            <a:srgbClr val="333333"/>
-                          </a:solidFill>
-                          <a:latin typeface="Calibri"/>
-                        </a:rPr>
-                        <a:t>15</a:t>
-                      </a:r>
-                    </a:p>
-                  </a:txBody>
-                  <a:tcPr>
-                    <a:solidFill>
-                      <a:srgbClr val="FFFFFF"/>
-                    </a:solidFill>
-                  </a:tcPr>
-                </a:tc>
-              </a:tr>
-            </a:tbl>
-          </a:graphicData>
-        </a:graphic>
-      </p:graphicFrame>
-      <p:sp>
-        <p:nvSpPr>
-          <p:cNvPr id="6" name="TextBox 5"/>
+              <a:t>El orden del día, y qué hace el equipo que no está exponiendo</a:t>
+            </a:r>
+          </a:p>
+        </p:txBody>
+      </p:sp>
+      <p:sp>
+        <p:nvSpPr>
+          <p:cNvPr id="5" name="TextBox 4"/>
           <p:cNvSpPr txBox="1"/>
           <p:nvPr/>
         </p:nvSpPr>
         <p:spPr>
           <a:xfrm>
-            <a:off x="457200" y="4297680"/>
-            <a:ext cx="11277295" cy="457200"/>
+            <a:off x="457200" y="566928"/>
+            <a:ext cx="11277295" cy="411480"/>
           </a:xfrm>
           <a:prstGeom prst="rect">
             <a:avLst/>
@@ -6727,92 +5876,920 @@
           <a:lstStyle/>
           <a:p>
             <a:r>
-              <a:rPr sz="1100" b="0" i="1">
-                <a:solidFill>
-                  <a:srgbClr val="666666"/>
-                </a:solidFill>
-                <a:latin typeface="Calibri"/>
-              </a:rPr>
-              <a:t>Además: </a:t>
-            </a:r>
-            <a:r>
-              <a:rPr sz="1100" b="1" i="1">
-                <a:solidFill>
-                  <a:srgbClr val="666666"/>
-                </a:solidFill>
-                <a:latin typeface="Calibri"/>
-              </a:rPr>
-              <a:t>se corta a los 9 minutos</a:t>
-            </a:r>
-            <a:r>
-              <a:rPr sz="1100" b="0" i="1">
-                <a:solidFill>
-                  <a:srgbClr val="666666"/>
-                </a:solidFill>
-                <a:latin typeface="Calibri"/>
-              </a:rPr>
-              <a:t>, y de los cien puntos se descuentan hasta </a:t>
-            </a:r>
-            <a:r>
-              <a:rPr sz="1100" b="1" i="1">
-                <a:solidFill>
-                  <a:srgbClr val="666666"/>
-                </a:solidFill>
-                <a:latin typeface="Calibri"/>
-              </a:rPr>
-              <a:t>10 si no todos los integrantes hablan</a:t>
-            </a:r>
-            <a:r>
-              <a:rPr sz="1100" b="0" i="1">
-                <a:solidFill>
-                  <a:srgbClr val="666666"/>
-                </a:solidFill>
-                <a:latin typeface="Calibri"/>
-              </a:rPr>
-              <a:t> y hasta </a:t>
-            </a:r>
-            <a:r>
-              <a:rPr sz="1100" b="1" i="1">
-                <a:solidFill>
-                  <a:srgbClr val="666666"/>
-                </a:solidFill>
-                <a:latin typeface="Calibri"/>
-              </a:rPr>
-              <a:t>10 si nadie sabe responder una pregunta de su propio tramo</a:t>
-            </a:r>
-            <a:r>
-              <a:rPr sz="1100" b="0" i="1">
-                <a:solidFill>
-                  <a:srgbClr val="666666"/>
-                </a:solidFill>
-                <a:latin typeface="Calibri"/>
-              </a:rPr>
-              <a:t>. La exposición vale el </a:t>
-            </a:r>
-            <a:r>
-              <a:rPr sz="1100" b="1" i="1">
-                <a:solidFill>
-                  <a:srgbClr val="666666"/>
-                </a:solidFill>
-                <a:latin typeface="Calibri"/>
-              </a:rPr>
-              <a:t>15 %</a:t>
-            </a:r>
-            <a:r>
-              <a:rPr sz="1100" b="0" i="1">
-                <a:solidFill>
-                  <a:srgbClr val="666666"/>
-                </a:solidFill>
-                <a:latin typeface="Calibri"/>
-              </a:rPr>
-              <a:t> del curso.</a:t>
-            </a:r>
-          </a:p>
-        </p:txBody>
-      </p:sp>
-      <p:sp>
-        <p:nvSpPr>
-          <p:cNvPr id="7" name="TextBox 6"/>
+              <a:rPr sz="1400" b="0" i="0">
+                <a:solidFill>
+                  <a:srgbClr val="B8D8EE"/>
+                </a:solidFill>
+                <a:latin typeface="Calibri"/>
+              </a:rPr>
+              <a:t>Escuchar también es trabajo de hoy: la ficha de valoración devuelve a cada equipo lo que el curso entendió</a:t>
+            </a:r>
+          </a:p>
+        </p:txBody>
+      </p:sp>
+      <p:sp>
+        <p:nvSpPr>
+          <p:cNvPr id="6" name="Rounded Rectangle 5"/>
+          <p:cNvSpPr/>
+          <p:nvPr/>
+        </p:nvSpPr>
+        <p:spPr>
+          <a:xfrm>
+            <a:off x="457200" y="1444752"/>
+            <a:ext cx="11277295" cy="908913"/>
+          </a:xfrm>
+          <a:prstGeom prst="roundRect">
+            <a:avLst>
+              <a:gd name="adj" fmla="val 12000"/>
+            </a:avLst>
+          </a:prstGeom>
+          <a:solidFill>
+            <a:srgbClr val="F2F2F2"/>
+          </a:solidFill>
+          <a:ln>
+            <a:noFill/>
+          </a:ln>
+        </p:spPr>
+        <p:style>
+          <a:lnRef idx="1">
+            <a:schemeClr val="accent1"/>
+          </a:lnRef>
+          <a:fillRef idx="3">
+            <a:schemeClr val="accent1"/>
+          </a:fillRef>
+          <a:effectRef idx="2">
+            <a:schemeClr val="accent1"/>
+          </a:effectRef>
+          <a:fontRef idx="minor">
+            <a:schemeClr val="lt1"/>
+          </a:fontRef>
+        </p:style>
+        <p:txBody>
+          <a:bodyPr rtlCol="0" anchor="ctr"/>
+          <a:lstStyle/>
+          <a:p>
+            <a:pPr algn="ctr"/>
+          </a:p>
+        </p:txBody>
+      </p:sp>
+      <p:sp>
+        <p:nvSpPr>
+          <p:cNvPr id="7" name="Rounded Rectangle 6"/>
+          <p:cNvSpPr/>
+          <p:nvPr/>
+        </p:nvSpPr>
+        <p:spPr>
+          <a:xfrm>
+            <a:off x="594360" y="1679752"/>
+            <a:ext cx="438912" cy="438912"/>
+          </a:xfrm>
+          <a:prstGeom prst="roundRect">
+            <a:avLst>
+              <a:gd name="adj" fmla="val 12000"/>
+            </a:avLst>
+          </a:prstGeom>
+          <a:solidFill>
+            <a:srgbClr val="095292"/>
+          </a:solidFill>
+          <a:ln>
+            <a:noFill/>
+          </a:ln>
+        </p:spPr>
+        <p:style>
+          <a:lnRef idx="1">
+            <a:schemeClr val="accent1"/>
+          </a:lnRef>
+          <a:fillRef idx="3">
+            <a:schemeClr val="accent1"/>
+          </a:fillRef>
+          <a:effectRef idx="2">
+            <a:schemeClr val="accent1"/>
+          </a:effectRef>
+          <a:fontRef idx="minor">
+            <a:schemeClr val="lt1"/>
+          </a:fontRef>
+        </p:style>
+        <p:txBody>
+          <a:bodyPr rtlCol="0" anchor="ctr"/>
+          <a:lstStyle/>
+          <a:p>
+            <a:pPr algn="ctr"/>
+          </a:p>
+        </p:txBody>
+      </p:sp>
+      <p:sp>
+        <p:nvSpPr>
+          <p:cNvPr id="8" name="TextBox 7"/>
+          <p:cNvSpPr txBox="1"/>
+          <p:nvPr/>
+        </p:nvSpPr>
+        <p:spPr>
+          <a:xfrm>
+            <a:off x="594360" y="1679752"/>
+            <a:ext cx="438912" cy="438912"/>
+          </a:xfrm>
+          <a:prstGeom prst="rect">
+            <a:avLst/>
+          </a:prstGeom>
+          <a:noFill/>
+        </p:spPr>
+        <p:txBody>
+          <a:bodyPr wrap="square" anchor="ctr"/>
+          <a:lstStyle/>
+          <a:p>
+            <a:pPr algn="ctr"/>
+            <a:r>
+              <a:rPr sz="1600" b="1" i="0">
+                <a:solidFill>
+                  <a:srgbClr val="FFFFFF"/>
+                </a:solidFill>
+                <a:latin typeface="Calibri"/>
+              </a:rPr>
+              <a:t>1</a:t>
+            </a:r>
+          </a:p>
+        </p:txBody>
+      </p:sp>
+      <p:sp>
+        <p:nvSpPr>
+          <p:cNvPr id="9" name="TextBox 8"/>
+          <p:cNvSpPr txBox="1"/>
+          <p:nvPr/>
+        </p:nvSpPr>
+        <p:spPr>
+          <a:xfrm>
+            <a:off x="1188720" y="1536192"/>
+            <a:ext cx="10271455" cy="744321"/>
+          </a:xfrm>
+          <a:prstGeom prst="rect">
+            <a:avLst/>
+          </a:prstGeom>
+          <a:noFill/>
+        </p:spPr>
+        <p:txBody>
+          <a:bodyPr wrap="square" anchor="ctr"/>
+          <a:lstStyle/>
+          <a:p>
+            <a:r>
+              <a:rPr sz="1500" b="1" i="0">
+                <a:solidFill>
+                  <a:srgbClr val="095292"/>
+                </a:solidFill>
+                <a:latin typeface="Calibri"/>
+              </a:rPr>
+              <a:t>1 · Se sortea el orden</a:t>
+            </a:r>
+          </a:p>
+          <a:p>
+            <a:pPr>
+              <a:spcBef>
+                <a:spcPts val="200"/>
+              </a:spcBef>
+            </a:pPr>
+            <a:r>
+              <a:rPr sz="1300" b="0" i="0">
+                <a:solidFill>
+                  <a:srgbClr val="333333"/>
+                </a:solidFill>
+                <a:latin typeface="Calibri"/>
+              </a:rPr>
+              <a:t>Al empezar, en pantalla. </a:t>
+            </a:r>
+            <a:r>
+              <a:rPr sz="1300" b="1" i="0">
+                <a:solidFill>
+                  <a:srgbClr val="333333"/>
+                </a:solidFill>
+                <a:latin typeface="Calibri"/>
+              </a:rPr>
+              <a:t>Nadie sabe si es primero</a:t>
+            </a:r>
+            <a:r>
+              <a:rPr sz="1300" b="0" i="0">
+                <a:solidFill>
+                  <a:srgbClr val="333333"/>
+                </a:solidFill>
+                <a:latin typeface="Calibri"/>
+              </a:rPr>
+              <a:t>, así que los cinco equipos están listos desde el minuto uno.</a:t>
+            </a:r>
+          </a:p>
+        </p:txBody>
+      </p:sp>
+      <p:sp>
+        <p:nvSpPr>
+          <p:cNvPr id="10" name="Rounded Rectangle 9"/>
+          <p:cNvSpPr/>
+          <p:nvPr/>
+        </p:nvSpPr>
+        <p:spPr>
+          <a:xfrm>
+            <a:off x="457200" y="2445105"/>
+            <a:ext cx="11277295" cy="908913"/>
+          </a:xfrm>
+          <a:prstGeom prst="roundRect">
+            <a:avLst>
+              <a:gd name="adj" fmla="val 12000"/>
+            </a:avLst>
+          </a:prstGeom>
+          <a:solidFill>
+            <a:srgbClr val="E8F4FA"/>
+          </a:solidFill>
+          <a:ln>
+            <a:noFill/>
+          </a:ln>
+        </p:spPr>
+        <p:style>
+          <a:lnRef idx="1">
+            <a:schemeClr val="accent1"/>
+          </a:lnRef>
+          <a:fillRef idx="3">
+            <a:schemeClr val="accent1"/>
+          </a:fillRef>
+          <a:effectRef idx="2">
+            <a:schemeClr val="accent1"/>
+          </a:effectRef>
+          <a:fontRef idx="minor">
+            <a:schemeClr val="lt1"/>
+          </a:fontRef>
+        </p:style>
+        <p:txBody>
+          <a:bodyPr rtlCol="0" anchor="ctr"/>
+          <a:lstStyle/>
+          <a:p>
+            <a:pPr algn="ctr"/>
+          </a:p>
+        </p:txBody>
+      </p:sp>
+      <p:sp>
+        <p:nvSpPr>
+          <p:cNvPr id="11" name="Rounded Rectangle 10"/>
+          <p:cNvSpPr/>
+          <p:nvPr/>
+        </p:nvSpPr>
+        <p:spPr>
+          <a:xfrm>
+            <a:off x="594360" y="2680106"/>
+            <a:ext cx="438912" cy="438912"/>
+          </a:xfrm>
+          <a:prstGeom prst="roundRect">
+            <a:avLst>
+              <a:gd name="adj" fmla="val 12000"/>
+            </a:avLst>
+          </a:prstGeom>
+          <a:solidFill>
+            <a:srgbClr val="095292"/>
+          </a:solidFill>
+          <a:ln>
+            <a:noFill/>
+          </a:ln>
+        </p:spPr>
+        <p:style>
+          <a:lnRef idx="1">
+            <a:schemeClr val="accent1"/>
+          </a:lnRef>
+          <a:fillRef idx="3">
+            <a:schemeClr val="accent1"/>
+          </a:fillRef>
+          <a:effectRef idx="2">
+            <a:schemeClr val="accent1"/>
+          </a:effectRef>
+          <a:fontRef idx="minor">
+            <a:schemeClr val="lt1"/>
+          </a:fontRef>
+        </p:style>
+        <p:txBody>
+          <a:bodyPr rtlCol="0" anchor="ctr"/>
+          <a:lstStyle/>
+          <a:p>
+            <a:pPr algn="ctr"/>
+          </a:p>
+        </p:txBody>
+      </p:sp>
+      <p:sp>
+        <p:nvSpPr>
+          <p:cNvPr id="12" name="TextBox 11"/>
+          <p:cNvSpPr txBox="1"/>
+          <p:nvPr/>
+        </p:nvSpPr>
+        <p:spPr>
+          <a:xfrm>
+            <a:off x="594360" y="2680106"/>
+            <a:ext cx="438912" cy="438912"/>
+          </a:xfrm>
+          <a:prstGeom prst="rect">
+            <a:avLst/>
+          </a:prstGeom>
+          <a:noFill/>
+        </p:spPr>
+        <p:txBody>
+          <a:bodyPr wrap="square" anchor="ctr"/>
+          <a:lstStyle/>
+          <a:p>
+            <a:pPr algn="ctr"/>
+            <a:r>
+              <a:rPr sz="1600" b="1" i="0">
+                <a:solidFill>
+                  <a:srgbClr val="FFFFFF"/>
+                </a:solidFill>
+                <a:latin typeface="Calibri"/>
+              </a:rPr>
+              <a:t>2</a:t>
+            </a:r>
+          </a:p>
+        </p:txBody>
+      </p:sp>
+      <p:sp>
+        <p:nvSpPr>
+          <p:cNvPr id="13" name="TextBox 12"/>
+          <p:cNvSpPr txBox="1"/>
+          <p:nvPr/>
+        </p:nvSpPr>
+        <p:spPr>
+          <a:xfrm>
+            <a:off x="1188720" y="2536545"/>
+            <a:ext cx="10271455" cy="744321"/>
+          </a:xfrm>
+          <a:prstGeom prst="rect">
+            <a:avLst/>
+          </a:prstGeom>
+          <a:noFill/>
+        </p:spPr>
+        <p:txBody>
+          <a:bodyPr wrap="square" anchor="ctr"/>
+          <a:lstStyle/>
+          <a:p>
+            <a:r>
+              <a:rPr sz="1500" b="1" i="0">
+                <a:solidFill>
+                  <a:srgbClr val="095292"/>
+                </a:solidFill>
+                <a:latin typeface="Calibri"/>
+              </a:rPr>
+              <a:t>2 · El equipo que expone comparte pantalla</a:t>
+            </a:r>
+          </a:p>
+          <a:p>
+            <a:pPr>
+              <a:spcBef>
+                <a:spcPts val="200"/>
+              </a:spcBef>
+            </a:pPr>
+            <a:r>
+              <a:rPr sz="1300" b="0" i="0">
+                <a:solidFill>
+                  <a:srgbClr val="333333"/>
+                </a:solidFill>
+                <a:latin typeface="Calibri"/>
+              </a:rPr>
+              <a:t>Un solo integrante comparte; los demás tienen la presentación en PDF abierta por si se cae.</a:t>
+            </a:r>
+          </a:p>
+        </p:txBody>
+      </p:sp>
+      <p:sp>
+        <p:nvSpPr>
+          <p:cNvPr id="14" name="Rounded Rectangle 13"/>
+          <p:cNvSpPr/>
+          <p:nvPr/>
+        </p:nvSpPr>
+        <p:spPr>
+          <a:xfrm>
+            <a:off x="457200" y="3445459"/>
+            <a:ext cx="11277295" cy="908913"/>
+          </a:xfrm>
+          <a:prstGeom prst="roundRect">
+            <a:avLst>
+              <a:gd name="adj" fmla="val 12000"/>
+            </a:avLst>
+          </a:prstGeom>
+          <a:solidFill>
+            <a:srgbClr val="F2F2F2"/>
+          </a:solidFill>
+          <a:ln>
+            <a:noFill/>
+          </a:ln>
+        </p:spPr>
+        <p:style>
+          <a:lnRef idx="1">
+            <a:schemeClr val="accent1"/>
+          </a:lnRef>
+          <a:fillRef idx="3">
+            <a:schemeClr val="accent1"/>
+          </a:fillRef>
+          <a:effectRef idx="2">
+            <a:schemeClr val="accent1"/>
+          </a:effectRef>
+          <a:fontRef idx="minor">
+            <a:schemeClr val="lt1"/>
+          </a:fontRef>
+        </p:style>
+        <p:txBody>
+          <a:bodyPr rtlCol="0" anchor="ctr"/>
+          <a:lstStyle/>
+          <a:p>
+            <a:pPr algn="ctr"/>
+          </a:p>
+        </p:txBody>
+      </p:sp>
+      <p:sp>
+        <p:nvSpPr>
+          <p:cNvPr id="15" name="Rounded Rectangle 14"/>
+          <p:cNvSpPr/>
+          <p:nvPr/>
+        </p:nvSpPr>
+        <p:spPr>
+          <a:xfrm>
+            <a:off x="594360" y="3680460"/>
+            <a:ext cx="438912" cy="438912"/>
+          </a:xfrm>
+          <a:prstGeom prst="roundRect">
+            <a:avLst>
+              <a:gd name="adj" fmla="val 12000"/>
+            </a:avLst>
+          </a:prstGeom>
+          <a:solidFill>
+            <a:srgbClr val="095292"/>
+          </a:solidFill>
+          <a:ln>
+            <a:noFill/>
+          </a:ln>
+        </p:spPr>
+        <p:style>
+          <a:lnRef idx="1">
+            <a:schemeClr val="accent1"/>
+          </a:lnRef>
+          <a:fillRef idx="3">
+            <a:schemeClr val="accent1"/>
+          </a:fillRef>
+          <a:effectRef idx="2">
+            <a:schemeClr val="accent1"/>
+          </a:effectRef>
+          <a:fontRef idx="minor">
+            <a:schemeClr val="lt1"/>
+          </a:fontRef>
+        </p:style>
+        <p:txBody>
+          <a:bodyPr rtlCol="0" anchor="ctr"/>
+          <a:lstStyle/>
+          <a:p>
+            <a:pPr algn="ctr"/>
+          </a:p>
+        </p:txBody>
+      </p:sp>
+      <p:sp>
+        <p:nvSpPr>
+          <p:cNvPr id="16" name="TextBox 15"/>
+          <p:cNvSpPr txBox="1"/>
+          <p:nvPr/>
+        </p:nvSpPr>
+        <p:spPr>
+          <a:xfrm>
+            <a:off x="594360" y="3680460"/>
+            <a:ext cx="438912" cy="438912"/>
+          </a:xfrm>
+          <a:prstGeom prst="rect">
+            <a:avLst/>
+          </a:prstGeom>
+          <a:noFill/>
+        </p:spPr>
+        <p:txBody>
+          <a:bodyPr wrap="square" anchor="ctr"/>
+          <a:lstStyle/>
+          <a:p>
+            <a:pPr algn="ctr"/>
+            <a:r>
+              <a:rPr sz="1600" b="1" i="0">
+                <a:solidFill>
+                  <a:srgbClr val="FFFFFF"/>
+                </a:solidFill>
+                <a:latin typeface="Calibri"/>
+              </a:rPr>
+              <a:t>3</a:t>
+            </a:r>
+          </a:p>
+        </p:txBody>
+      </p:sp>
+      <p:sp>
+        <p:nvSpPr>
+          <p:cNvPr id="17" name="TextBox 16"/>
+          <p:cNvSpPr txBox="1"/>
+          <p:nvPr/>
+        </p:nvSpPr>
+        <p:spPr>
+          <a:xfrm>
+            <a:off x="1188720" y="3536899"/>
+            <a:ext cx="10271455" cy="744321"/>
+          </a:xfrm>
+          <a:prstGeom prst="rect">
+            <a:avLst/>
+          </a:prstGeom>
+          <a:noFill/>
+        </p:spPr>
+        <p:txBody>
+          <a:bodyPr wrap="square" anchor="ctr"/>
+          <a:lstStyle/>
+          <a:p>
+            <a:r>
+              <a:rPr sz="1500" b="1" i="0">
+                <a:solidFill>
+                  <a:srgbClr val="095292"/>
+                </a:solidFill>
+                <a:latin typeface="Calibri"/>
+              </a:rPr>
+              <a:t>3 · Nueve minutos, con cronómetro visible</a:t>
+            </a:r>
+          </a:p>
+          <a:p>
+            <a:pPr>
+              <a:spcBef>
+                <a:spcPts val="200"/>
+              </a:spcBef>
+            </a:pPr>
+            <a:r>
+              <a:rPr sz="1300" b="0" i="0">
+                <a:solidFill>
+                  <a:srgbClr val="333333"/>
+                </a:solidFill>
+                <a:latin typeface="Calibri"/>
+              </a:rPr>
+              <a:t>Se corta al llegar a cero. A los 8 minutos aparece un aviso en el chat.</a:t>
+            </a:r>
+          </a:p>
+        </p:txBody>
+      </p:sp>
+      <p:sp>
+        <p:nvSpPr>
+          <p:cNvPr id="18" name="Rounded Rectangle 17"/>
+          <p:cNvSpPr/>
+          <p:nvPr/>
+        </p:nvSpPr>
+        <p:spPr>
+          <a:xfrm>
+            <a:off x="457200" y="4445812"/>
+            <a:ext cx="11277295" cy="908913"/>
+          </a:xfrm>
+          <a:prstGeom prst="roundRect">
+            <a:avLst>
+              <a:gd name="adj" fmla="val 12000"/>
+            </a:avLst>
+          </a:prstGeom>
+          <a:solidFill>
+            <a:srgbClr val="E8F4FA"/>
+          </a:solidFill>
+          <a:ln>
+            <a:noFill/>
+          </a:ln>
+        </p:spPr>
+        <p:style>
+          <a:lnRef idx="1">
+            <a:schemeClr val="accent1"/>
+          </a:lnRef>
+          <a:fillRef idx="3">
+            <a:schemeClr val="accent1"/>
+          </a:fillRef>
+          <a:effectRef idx="2">
+            <a:schemeClr val="accent1"/>
+          </a:effectRef>
+          <a:fontRef idx="minor">
+            <a:schemeClr val="lt1"/>
+          </a:fontRef>
+        </p:style>
+        <p:txBody>
+          <a:bodyPr rtlCol="0" anchor="ctr"/>
+          <a:lstStyle/>
+          <a:p>
+            <a:pPr algn="ctr"/>
+          </a:p>
+        </p:txBody>
+      </p:sp>
+      <p:sp>
+        <p:nvSpPr>
+          <p:cNvPr id="19" name="Rounded Rectangle 18"/>
+          <p:cNvSpPr/>
+          <p:nvPr/>
+        </p:nvSpPr>
+        <p:spPr>
+          <a:xfrm>
+            <a:off x="594360" y="4680813"/>
+            <a:ext cx="438912" cy="438912"/>
+          </a:xfrm>
+          <a:prstGeom prst="roundRect">
+            <a:avLst>
+              <a:gd name="adj" fmla="val 12000"/>
+            </a:avLst>
+          </a:prstGeom>
+          <a:solidFill>
+            <a:srgbClr val="095292"/>
+          </a:solidFill>
+          <a:ln>
+            <a:noFill/>
+          </a:ln>
+        </p:spPr>
+        <p:style>
+          <a:lnRef idx="1">
+            <a:schemeClr val="accent1"/>
+          </a:lnRef>
+          <a:fillRef idx="3">
+            <a:schemeClr val="accent1"/>
+          </a:fillRef>
+          <a:effectRef idx="2">
+            <a:schemeClr val="accent1"/>
+          </a:effectRef>
+          <a:fontRef idx="minor">
+            <a:schemeClr val="lt1"/>
+          </a:fontRef>
+        </p:style>
+        <p:txBody>
+          <a:bodyPr rtlCol="0" anchor="ctr"/>
+          <a:lstStyle/>
+          <a:p>
+            <a:pPr algn="ctr"/>
+          </a:p>
+        </p:txBody>
+      </p:sp>
+      <p:sp>
+        <p:nvSpPr>
+          <p:cNvPr id="20" name="TextBox 19"/>
+          <p:cNvSpPr txBox="1"/>
+          <p:nvPr/>
+        </p:nvSpPr>
+        <p:spPr>
+          <a:xfrm>
+            <a:off x="594360" y="4680813"/>
+            <a:ext cx="438912" cy="438912"/>
+          </a:xfrm>
+          <a:prstGeom prst="rect">
+            <a:avLst/>
+          </a:prstGeom>
+          <a:noFill/>
+        </p:spPr>
+        <p:txBody>
+          <a:bodyPr wrap="square" anchor="ctr"/>
+          <a:lstStyle/>
+          <a:p>
+            <a:pPr algn="ctr"/>
+            <a:r>
+              <a:rPr sz="1600" b="1" i="0">
+                <a:solidFill>
+                  <a:srgbClr val="FFFFFF"/>
+                </a:solidFill>
+                <a:latin typeface="Calibri"/>
+              </a:rPr>
+              <a:t>4</a:t>
+            </a:r>
+          </a:p>
+        </p:txBody>
+      </p:sp>
+      <p:sp>
+        <p:nvSpPr>
+          <p:cNvPr id="21" name="TextBox 20"/>
+          <p:cNvSpPr txBox="1"/>
+          <p:nvPr/>
+        </p:nvSpPr>
+        <p:spPr>
+          <a:xfrm>
+            <a:off x="1188720" y="4537252"/>
+            <a:ext cx="10271455" cy="744321"/>
+          </a:xfrm>
+          <a:prstGeom prst="rect">
+            <a:avLst/>
+          </a:prstGeom>
+          <a:noFill/>
+        </p:spPr>
+        <p:txBody>
+          <a:bodyPr wrap="square" anchor="ctr"/>
+          <a:lstStyle/>
+          <a:p>
+            <a:r>
+              <a:rPr sz="1500" b="1" i="0">
+                <a:solidFill>
+                  <a:srgbClr val="095292"/>
+                </a:solidFill>
+                <a:latin typeface="Calibri"/>
+              </a:rPr>
+              <a:t>4 · Tres minutos de preguntas</a:t>
+            </a:r>
+          </a:p>
+          <a:p>
+            <a:pPr>
+              <a:spcBef>
+                <a:spcPts val="200"/>
+              </a:spcBef>
+            </a:pPr>
+            <a:r>
+              <a:rPr sz="1300" b="0" i="0">
+                <a:solidFill>
+                  <a:srgbClr val="333333"/>
+                </a:solidFill>
+                <a:latin typeface="Calibri"/>
+              </a:rPr>
+              <a:t>Primero una pregunta del curso, después una del docente. </a:t>
+            </a:r>
+            <a:r>
+              <a:rPr sz="1300" b="1" i="0">
+                <a:solidFill>
+                  <a:srgbClr val="333333"/>
+                </a:solidFill>
+                <a:latin typeface="Calibri"/>
+              </a:rPr>
+              <a:t>Responde quien tenga el tramo.</a:t>
+            </a:r>
+          </a:p>
+        </p:txBody>
+      </p:sp>
+      <p:sp>
+        <p:nvSpPr>
+          <p:cNvPr id="22" name="Rounded Rectangle 21"/>
+          <p:cNvSpPr/>
+          <p:nvPr/>
+        </p:nvSpPr>
+        <p:spPr>
+          <a:xfrm>
+            <a:off x="457200" y="5446166"/>
+            <a:ext cx="11277295" cy="908913"/>
+          </a:xfrm>
+          <a:prstGeom prst="roundRect">
+            <a:avLst>
+              <a:gd name="adj" fmla="val 12000"/>
+            </a:avLst>
+          </a:prstGeom>
+          <a:solidFill>
+            <a:srgbClr val="F2F2F2"/>
+          </a:solidFill>
+          <a:ln>
+            <a:noFill/>
+          </a:ln>
+        </p:spPr>
+        <p:style>
+          <a:lnRef idx="1">
+            <a:schemeClr val="accent1"/>
+          </a:lnRef>
+          <a:fillRef idx="3">
+            <a:schemeClr val="accent1"/>
+          </a:fillRef>
+          <a:effectRef idx="2">
+            <a:schemeClr val="accent1"/>
+          </a:effectRef>
+          <a:fontRef idx="minor">
+            <a:schemeClr val="lt1"/>
+          </a:fontRef>
+        </p:style>
+        <p:txBody>
+          <a:bodyPr rtlCol="0" anchor="ctr"/>
+          <a:lstStyle/>
+          <a:p>
+            <a:pPr algn="ctr"/>
+          </a:p>
+        </p:txBody>
+      </p:sp>
+      <p:sp>
+        <p:nvSpPr>
+          <p:cNvPr id="23" name="Rounded Rectangle 22"/>
+          <p:cNvSpPr/>
+          <p:nvPr/>
+        </p:nvSpPr>
+        <p:spPr>
+          <a:xfrm>
+            <a:off x="594360" y="5681167"/>
+            <a:ext cx="438912" cy="438912"/>
+          </a:xfrm>
+          <a:prstGeom prst="roundRect">
+            <a:avLst>
+              <a:gd name="adj" fmla="val 12000"/>
+            </a:avLst>
+          </a:prstGeom>
+          <a:solidFill>
+            <a:srgbClr val="095292"/>
+          </a:solidFill>
+          <a:ln>
+            <a:noFill/>
+          </a:ln>
+        </p:spPr>
+        <p:style>
+          <a:lnRef idx="1">
+            <a:schemeClr val="accent1"/>
+          </a:lnRef>
+          <a:fillRef idx="3">
+            <a:schemeClr val="accent1"/>
+          </a:fillRef>
+          <a:effectRef idx="2">
+            <a:schemeClr val="accent1"/>
+          </a:effectRef>
+          <a:fontRef idx="minor">
+            <a:schemeClr val="lt1"/>
+          </a:fontRef>
+        </p:style>
+        <p:txBody>
+          <a:bodyPr rtlCol="0" anchor="ctr"/>
+          <a:lstStyle/>
+          <a:p>
+            <a:pPr algn="ctr"/>
+          </a:p>
+        </p:txBody>
+      </p:sp>
+      <p:sp>
+        <p:nvSpPr>
+          <p:cNvPr id="24" name="TextBox 23"/>
+          <p:cNvSpPr txBox="1"/>
+          <p:nvPr/>
+        </p:nvSpPr>
+        <p:spPr>
+          <a:xfrm>
+            <a:off x="594360" y="5681167"/>
+            <a:ext cx="438912" cy="438912"/>
+          </a:xfrm>
+          <a:prstGeom prst="rect">
+            <a:avLst/>
+          </a:prstGeom>
+          <a:noFill/>
+        </p:spPr>
+        <p:txBody>
+          <a:bodyPr wrap="square" anchor="ctr"/>
+          <a:lstStyle/>
+          <a:p>
+            <a:pPr algn="ctr"/>
+            <a:r>
+              <a:rPr sz="1600" b="1" i="0">
+                <a:solidFill>
+                  <a:srgbClr val="FFFFFF"/>
+                </a:solidFill>
+                <a:latin typeface="Calibri"/>
+              </a:rPr>
+              <a:t>5</a:t>
+            </a:r>
+          </a:p>
+        </p:txBody>
+      </p:sp>
+      <p:sp>
+        <p:nvSpPr>
+          <p:cNvPr id="25" name="TextBox 24"/>
+          <p:cNvSpPr txBox="1"/>
+          <p:nvPr/>
+        </p:nvSpPr>
+        <p:spPr>
+          <a:xfrm>
+            <a:off x="1188720" y="5537606"/>
+            <a:ext cx="10271455" cy="744321"/>
+          </a:xfrm>
+          <a:prstGeom prst="rect">
+            <a:avLst/>
+          </a:prstGeom>
+          <a:noFill/>
+        </p:spPr>
+        <p:txBody>
+          <a:bodyPr wrap="square" anchor="ctr"/>
+          <a:lstStyle/>
+          <a:p>
+            <a:r>
+              <a:rPr sz="1500" b="1" i="0">
+                <a:solidFill>
+                  <a:srgbClr val="095292"/>
+                </a:solidFill>
+                <a:latin typeface="Calibri"/>
+              </a:rPr>
+              <a:t>5 · Los que no exponen llenan la ficha</a:t>
+            </a:r>
+          </a:p>
+          <a:p>
+            <a:pPr>
+              <a:spcBef>
+                <a:spcPts val="200"/>
+              </a:spcBef>
+            </a:pPr>
+            <a:r>
+              <a:rPr sz="1300" b="0" i="0">
+                <a:solidFill>
+                  <a:srgbClr val="333333"/>
+                </a:solidFill>
+                <a:latin typeface="Calibri"/>
+              </a:rPr>
+              <a:t>Una fila por equipo: lo más fuerte, lo que no quedó claro y </a:t>
+            </a:r>
+            <a:r>
+              <a:rPr sz="1300" b="1" i="0">
+                <a:solidFill>
+                  <a:srgbClr val="333333"/>
+                </a:solidFill>
+                <a:latin typeface="Calibri"/>
+              </a:rPr>
+              <a:t>una pregunta</a:t>
+            </a:r>
+            <a:r>
+              <a:rPr sz="1300" b="0" i="0">
+                <a:solidFill>
+                  <a:srgbClr val="333333"/>
+                </a:solidFill>
+                <a:latin typeface="Calibri"/>
+              </a:rPr>
+              <a:t>. Se entrega en el muro.</a:t>
+            </a:r>
+          </a:p>
+        </p:txBody>
+      </p:sp>
+      <p:sp>
+        <p:nvSpPr>
+          <p:cNvPr id="26" name="TextBox 25"/>
           <p:cNvSpPr txBox="1"/>
           <p:nvPr/>
         </p:nvSpPr>
@@ -6880,7 +6857,7 @@
         <p:spPr>
           <a:xfrm>
             <a:off x="0" y="0"/>
-            <a:ext cx="12191695" cy="1170432"/>
+            <a:ext cx="12191695" cy="960120"/>
           </a:xfrm>
           <a:prstGeom prst="rect">
             <a:avLst/>
@@ -6922,7 +6899,7 @@
         </p:nvSpPr>
         <p:spPr>
           <a:xfrm>
-            <a:off x="0" y="1170432"/>
+            <a:off x="0" y="960120"/>
             <a:ext cx="12191695" cy="41148"/>
           </a:xfrm>
           <a:prstGeom prst="rect">
@@ -6966,7 +6943,7 @@
         <p:spPr>
           <a:xfrm>
             <a:off x="457200" y="164592"/>
-            <a:ext cx="11277295" cy="384048"/>
+            <a:ext cx="11277295" cy="502920"/>
           </a:xfrm>
           <a:prstGeom prst="rect">
             <a:avLst/>
@@ -6986,55 +6963,21 @@
                 </a:solidFill>
                 <a:latin typeface="Calibri"/>
               </a:rPr>
-              <a:t>El orden del día, y qué hace el equipo que no está exponiendo</a:t>
-            </a:r>
-          </a:p>
-        </p:txBody>
-      </p:sp>
-      <p:sp>
-        <p:nvSpPr>
-          <p:cNvPr id="5" name="TextBox 4"/>
-          <p:cNvSpPr txBox="1"/>
-          <p:nvPr/>
-        </p:nvSpPr>
-        <p:spPr>
-          <a:xfrm>
-            <a:off x="457200" y="566928"/>
-            <a:ext cx="11277295" cy="411480"/>
-          </a:xfrm>
-          <a:prstGeom prst="rect">
-            <a:avLst/>
-          </a:prstGeom>
-          <a:noFill/>
-        </p:spPr>
-        <p:txBody>
-          <a:bodyPr wrap="square">
-            <a:spAutoFit/>
-          </a:bodyPr>
-          <a:lstStyle/>
-          <a:p>
-            <a:r>
-              <a:rPr sz="1400" b="0" i="0">
-                <a:solidFill>
-                  <a:srgbClr val="B8D8EE"/>
-                </a:solidFill>
-                <a:latin typeface="Calibri"/>
-              </a:rPr>
-              <a:t>Escuchar también es trabajo de hoy: la ficha de valoración se califica dentro de la nota de exposiciones del corte</a:t>
-            </a:r>
-          </a:p>
-        </p:txBody>
-      </p:sp>
-      <p:sp>
-        <p:nvSpPr>
-          <p:cNvPr id="6" name="Rounded Rectangle 5"/>
+              <a:t>Los tres minutos de preguntas también son exposición</a:t>
+            </a:r>
+          </a:p>
+        </p:txBody>
+      </p:sp>
+      <p:sp>
+        <p:nvSpPr>
+          <p:cNvPr id="5" name="Rounded Rectangle 4"/>
           <p:cNvSpPr/>
           <p:nvPr/>
         </p:nvSpPr>
         <p:spPr>
           <a:xfrm>
-            <a:off x="457200" y="1444752"/>
-            <a:ext cx="11277295" cy="908913"/>
+            <a:off x="457200" y="1261872"/>
+            <a:ext cx="5547207" cy="2464308"/>
           </a:xfrm>
           <a:prstGeom prst="roundRect">
             <a:avLst>
@@ -7072,19 +7015,17 @@
       </p:sp>
       <p:sp>
         <p:nvSpPr>
-          <p:cNvPr id="7" name="Rounded Rectangle 6"/>
+          <p:cNvPr id="6" name="Rectangle 5"/>
           <p:cNvSpPr/>
           <p:nvPr/>
         </p:nvSpPr>
         <p:spPr>
           <a:xfrm>
-            <a:off x="594360" y="1679752"/>
-            <a:ext cx="438912" cy="438912"/>
-          </a:xfrm>
-          <a:prstGeom prst="roundRect">
-            <a:avLst>
-              <a:gd name="adj" fmla="val 12000"/>
-            </a:avLst>
+            <a:off x="457200" y="1261872"/>
+            <a:ext cx="5547207" cy="91440"/>
+          </a:xfrm>
+          <a:prstGeom prst="rect">
+            <a:avLst/>
           </a:prstGeom>
           <a:solidFill>
             <a:srgbClr val="095292"/>
@@ -7117,14 +7058,48 @@
       </p:sp>
       <p:sp>
         <p:nvSpPr>
+          <p:cNvPr id="7" name="TextBox 6"/>
+          <p:cNvSpPr txBox="1"/>
+          <p:nvPr/>
+        </p:nvSpPr>
+        <p:spPr>
+          <a:xfrm>
+            <a:off x="621792" y="1490472"/>
+            <a:ext cx="5218023" cy="411480"/>
+          </a:xfrm>
+          <a:prstGeom prst="rect">
+            <a:avLst/>
+          </a:prstGeom>
+          <a:noFill/>
+        </p:spPr>
+        <p:txBody>
+          <a:bodyPr wrap="square">
+            <a:spAutoFit/>
+          </a:bodyPr>
+          <a:lstStyle/>
+          <a:p>
+            <a:r>
+              <a:rPr sz="1500" b="1" i="0">
+                <a:solidFill>
+                  <a:srgbClr val="095292"/>
+                </a:solidFill>
+                <a:latin typeface="Calibri"/>
+              </a:rPr>
+              <a:t>Responde quien tiene el tramo</a:t>
+            </a:r>
+          </a:p>
+        </p:txBody>
+      </p:sp>
+      <p:sp>
+        <p:nvSpPr>
           <p:cNvPr id="8" name="TextBox 7"/>
           <p:cNvSpPr txBox="1"/>
           <p:nvPr/>
         </p:nvSpPr>
         <p:spPr>
           <a:xfrm>
-            <a:off x="594360" y="1679752"/>
-            <a:ext cx="438912" cy="438912"/>
+            <a:off x="621792" y="1947672"/>
+            <a:ext cx="5218023" cy="1595628"/>
           </a:xfrm>
           <a:prstGeom prst="rect">
             <a:avLst/>
@@ -7132,58 +7107,11 @@
           <a:noFill/>
         </p:spPr>
         <p:txBody>
-          <a:bodyPr wrap="square" anchor="ctr"/>
-          <a:lstStyle/>
-          <a:p>
-            <a:pPr algn="ctr"/>
-            <a:r>
-              <a:rPr sz="1600" b="1" i="0">
-                <a:solidFill>
-                  <a:srgbClr val="FFFFFF"/>
-                </a:solidFill>
-                <a:latin typeface="Calibri"/>
-              </a:rPr>
-              <a:t>1</a:t>
-            </a:r>
-          </a:p>
-        </p:txBody>
-      </p:sp>
-      <p:sp>
-        <p:nvSpPr>
-          <p:cNvPr id="9" name="TextBox 8"/>
-          <p:cNvSpPr txBox="1"/>
-          <p:nvPr/>
-        </p:nvSpPr>
-        <p:spPr>
-          <a:xfrm>
-            <a:off x="1188720" y="1536192"/>
-            <a:ext cx="10271455" cy="744321"/>
-          </a:xfrm>
-          <a:prstGeom prst="rect">
-            <a:avLst/>
-          </a:prstGeom>
-          <a:noFill/>
-        </p:spPr>
-        <p:txBody>
-          <a:bodyPr wrap="square" anchor="ctr"/>
-          <a:lstStyle/>
-          <a:p>
-            <a:r>
-              <a:rPr sz="1500" b="1" i="0">
-                <a:solidFill>
-                  <a:srgbClr val="095292"/>
-                </a:solidFill>
-                <a:latin typeface="Calibri"/>
-              </a:rPr>
-              <a:t>1 · Se sortea el orden</a:t>
-            </a:r>
-          </a:p>
-          <a:p>
-            <a:pPr>
-              <a:spcBef>
-                <a:spcPts val="200"/>
-              </a:spcBef>
-            </a:pPr>
+          <a:bodyPr wrap="square">
+            <a:spAutoFit/>
+          </a:bodyPr>
+          <a:lstStyle/>
+          <a:p>
             <a:r>
               <a:rPr sz="1300" b="0" i="0">
                 <a:solidFill>
@@ -7191,7 +7119,7 @@
                 </a:solidFill>
                 <a:latin typeface="Calibri"/>
               </a:rPr>
-              <a:t>Al empezar, en pantalla. </a:t>
+              <a:t>Si preguntan por la prueba con usuarios, responde quien la hizo. </a:t>
             </a:r>
             <a:r>
               <a:rPr sz="1300" b="1" i="0">
@@ -7200,7 +7128,7 @@
                 </a:solidFill>
                 <a:latin typeface="Calibri"/>
               </a:rPr>
-              <a:t>Nadie sabe si es primero</a:t>
+              <a:t>No responde siempre el mismo</a:t>
             </a:r>
             <a:r>
               <a:rPr sz="1300" b="0" i="0">
@@ -7209,21 +7137,21 @@
                 </a:solidFill>
                 <a:latin typeface="Calibri"/>
               </a:rPr>
-              <a:t>, así que los cinco equipos están listos desde el minuto uno.</a:t>
-            </a:r>
-          </a:p>
-        </p:txBody>
-      </p:sp>
-      <p:sp>
-        <p:nvSpPr>
-          <p:cNvPr id="10" name="Rounded Rectangle 9"/>
+              <a:t>: eso es lo que se está evaluando.</a:t>
+            </a:r>
+          </a:p>
+        </p:txBody>
+      </p:sp>
+      <p:sp>
+        <p:nvSpPr>
+          <p:cNvPr id="9" name="Rounded Rectangle 8"/>
           <p:cNvSpPr/>
           <p:nvPr/>
         </p:nvSpPr>
         <p:spPr>
           <a:xfrm>
-            <a:off x="457200" y="2445105"/>
-            <a:ext cx="11277295" cy="908913"/>
+            <a:off x="6187287" y="1261872"/>
+            <a:ext cx="5547207" cy="2464308"/>
           </a:xfrm>
           <a:prstGeom prst="roundRect">
             <a:avLst>
@@ -7231,7 +7159,7 @@
             </a:avLst>
           </a:prstGeom>
           <a:solidFill>
-            <a:srgbClr val="E8F4FA"/>
+            <a:srgbClr val="F2F2F2"/>
           </a:solidFill>
           <a:ln>
             <a:noFill/>
@@ -7261,19 +7189,365 @@
       </p:sp>
       <p:sp>
         <p:nvSpPr>
-          <p:cNvPr id="11" name="Rounded Rectangle 10"/>
+          <p:cNvPr id="10" name="Rectangle 9"/>
           <p:cNvSpPr/>
           <p:nvPr/>
         </p:nvSpPr>
         <p:spPr>
           <a:xfrm>
-            <a:off x="594360" y="2680106"/>
-            <a:ext cx="438912" cy="438912"/>
+            <a:off x="6187287" y="1261872"/>
+            <a:ext cx="5547207" cy="91440"/>
+          </a:xfrm>
+          <a:prstGeom prst="rect">
+            <a:avLst/>
+          </a:prstGeom>
+          <a:solidFill>
+            <a:srgbClr val="269CCB"/>
+          </a:solidFill>
+          <a:ln>
+            <a:noFill/>
+          </a:ln>
+        </p:spPr>
+        <p:style>
+          <a:lnRef idx="1">
+            <a:schemeClr val="accent1"/>
+          </a:lnRef>
+          <a:fillRef idx="3">
+            <a:schemeClr val="accent1"/>
+          </a:fillRef>
+          <a:effectRef idx="2">
+            <a:schemeClr val="accent1"/>
+          </a:effectRef>
+          <a:fontRef idx="minor">
+            <a:schemeClr val="lt1"/>
+          </a:fontRef>
+        </p:style>
+        <p:txBody>
+          <a:bodyPr rtlCol="0" anchor="ctr"/>
+          <a:lstStyle/>
+          <a:p>
+            <a:pPr algn="ctr"/>
+          </a:p>
+        </p:txBody>
+      </p:sp>
+      <p:sp>
+        <p:nvSpPr>
+          <p:cNvPr id="11" name="TextBox 10"/>
+          <p:cNvSpPr txBox="1"/>
+          <p:nvPr/>
+        </p:nvSpPr>
+        <p:spPr>
+          <a:xfrm>
+            <a:off x="6351879" y="1490472"/>
+            <a:ext cx="5218023" cy="411480"/>
+          </a:xfrm>
+          <a:prstGeom prst="rect">
+            <a:avLst/>
+          </a:prstGeom>
+          <a:noFill/>
+        </p:spPr>
+        <p:txBody>
+          <a:bodyPr wrap="square">
+            <a:spAutoFit/>
+          </a:bodyPr>
+          <a:lstStyle/>
+          <a:p>
+            <a:r>
+              <a:rPr sz="1500" b="1" i="0">
+                <a:solidFill>
+                  <a:srgbClr val="095292"/>
+                </a:solidFill>
+                <a:latin typeface="Calibri"/>
+              </a:rPr>
+              <a:t>«No lo medimos» es una respuesta válida</a:t>
+            </a:r>
+          </a:p>
+        </p:txBody>
+      </p:sp>
+      <p:sp>
+        <p:nvSpPr>
+          <p:cNvPr id="12" name="TextBox 11"/>
+          <p:cNvSpPr txBox="1"/>
+          <p:nvPr/>
+        </p:nvSpPr>
+        <p:spPr>
+          <a:xfrm>
+            <a:off x="6351879" y="1947672"/>
+            <a:ext cx="5218023" cy="1595628"/>
+          </a:xfrm>
+          <a:prstGeom prst="rect">
+            <a:avLst/>
+          </a:prstGeom>
+          <a:noFill/>
+        </p:spPr>
+        <p:txBody>
+          <a:bodyPr wrap="square">
+            <a:spAutoFit/>
+          </a:bodyPr>
+          <a:lstStyle/>
+          <a:p>
+            <a:r>
+              <a:rPr sz="1300" b="0" i="0">
+                <a:solidFill>
+                  <a:srgbClr val="333333"/>
+                </a:solidFill>
+                <a:latin typeface="Calibri"/>
+              </a:rPr>
+              <a:t>Decir </a:t>
+            </a:r>
+            <a:r>
+              <a:rPr sz="1300" b="1" i="0">
+                <a:solidFill>
+                  <a:srgbClr val="333333"/>
+                </a:solidFill>
+                <a:latin typeface="Calibri"/>
+              </a:rPr>
+              <a:t>«no tenemos ese dato»</a:t>
+            </a:r>
+            <a:r>
+              <a:rPr sz="1300" b="0" i="0">
+                <a:solidFill>
+                  <a:srgbClr val="333333"/>
+                </a:solidFill>
+                <a:latin typeface="Calibri"/>
+              </a:rPr>
+              <a:t> vale más que inventar una cifra. Lo que hunde una sustentación es responder con seguridad algo que no se verificó.</a:t>
+            </a:r>
+          </a:p>
+        </p:txBody>
+      </p:sp>
+      <p:sp>
+        <p:nvSpPr>
+          <p:cNvPr id="13" name="Rounded Rectangle 12"/>
+          <p:cNvSpPr/>
+          <p:nvPr/>
+        </p:nvSpPr>
+        <p:spPr>
+          <a:xfrm>
+            <a:off x="457200" y="3890772"/>
+            <a:ext cx="5547207" cy="2464308"/>
           </a:xfrm>
           <a:prstGeom prst="roundRect">
             <a:avLst>
               <a:gd name="adj" fmla="val 12000"/>
             </a:avLst>
+          </a:prstGeom>
+          <a:solidFill>
+            <a:srgbClr val="F2F2F2"/>
+          </a:solidFill>
+          <a:ln>
+            <a:noFill/>
+          </a:ln>
+        </p:spPr>
+        <p:style>
+          <a:lnRef idx="1">
+            <a:schemeClr val="accent1"/>
+          </a:lnRef>
+          <a:fillRef idx="3">
+            <a:schemeClr val="accent1"/>
+          </a:fillRef>
+          <a:effectRef idx="2">
+            <a:schemeClr val="accent1"/>
+          </a:effectRef>
+          <a:fontRef idx="minor">
+            <a:schemeClr val="lt1"/>
+          </a:fontRef>
+        </p:style>
+        <p:txBody>
+          <a:bodyPr rtlCol="0" anchor="ctr"/>
+          <a:lstStyle/>
+          <a:p>
+            <a:pPr algn="ctr"/>
+          </a:p>
+        </p:txBody>
+      </p:sp>
+      <p:sp>
+        <p:nvSpPr>
+          <p:cNvPr id="14" name="Rectangle 13"/>
+          <p:cNvSpPr/>
+          <p:nvPr/>
+        </p:nvSpPr>
+        <p:spPr>
+          <a:xfrm>
+            <a:off x="457200" y="3890772"/>
+            <a:ext cx="5547207" cy="91440"/>
+          </a:xfrm>
+          <a:prstGeom prst="rect">
+            <a:avLst/>
+          </a:prstGeom>
+          <a:solidFill>
+            <a:srgbClr val="FFD000"/>
+          </a:solidFill>
+          <a:ln>
+            <a:noFill/>
+          </a:ln>
+        </p:spPr>
+        <p:style>
+          <a:lnRef idx="1">
+            <a:schemeClr val="accent1"/>
+          </a:lnRef>
+          <a:fillRef idx="3">
+            <a:schemeClr val="accent1"/>
+          </a:fillRef>
+          <a:effectRef idx="2">
+            <a:schemeClr val="accent1"/>
+          </a:effectRef>
+          <a:fontRef idx="minor">
+            <a:schemeClr val="lt1"/>
+          </a:fontRef>
+        </p:style>
+        <p:txBody>
+          <a:bodyPr rtlCol="0" anchor="ctr"/>
+          <a:lstStyle/>
+          <a:p>
+            <a:pPr algn="ctr"/>
+          </a:p>
+        </p:txBody>
+      </p:sp>
+      <p:sp>
+        <p:nvSpPr>
+          <p:cNvPr id="15" name="TextBox 14"/>
+          <p:cNvSpPr txBox="1"/>
+          <p:nvPr/>
+        </p:nvSpPr>
+        <p:spPr>
+          <a:xfrm>
+            <a:off x="621792" y="4119372"/>
+            <a:ext cx="5218023" cy="411480"/>
+          </a:xfrm>
+          <a:prstGeom prst="rect">
+            <a:avLst/>
+          </a:prstGeom>
+          <a:noFill/>
+        </p:spPr>
+        <p:txBody>
+          <a:bodyPr wrap="square">
+            <a:spAutoFit/>
+          </a:bodyPr>
+          <a:lstStyle/>
+          <a:p>
+            <a:r>
+              <a:rPr sz="1500" b="1" i="0">
+                <a:solidFill>
+                  <a:srgbClr val="095292"/>
+                </a:solidFill>
+                <a:latin typeface="Calibri"/>
+              </a:rPr>
+              <a:t>Responder con la decisión, no con la excusa</a:t>
+            </a:r>
+          </a:p>
+        </p:txBody>
+      </p:sp>
+      <p:sp>
+        <p:nvSpPr>
+          <p:cNvPr id="16" name="TextBox 15"/>
+          <p:cNvSpPr txBox="1"/>
+          <p:nvPr/>
+        </p:nvSpPr>
+        <p:spPr>
+          <a:xfrm>
+            <a:off x="621792" y="4576572"/>
+            <a:ext cx="5218023" cy="1595628"/>
+          </a:xfrm>
+          <a:prstGeom prst="rect">
+            <a:avLst/>
+          </a:prstGeom>
+          <a:noFill/>
+        </p:spPr>
+        <p:txBody>
+          <a:bodyPr wrap="square">
+            <a:spAutoFit/>
+          </a:bodyPr>
+          <a:lstStyle/>
+          <a:p>
+            <a:r>
+              <a:rPr sz="1300" b="0" i="0">
+                <a:solidFill>
+                  <a:srgbClr val="333333"/>
+                </a:solidFill>
+                <a:latin typeface="Calibri"/>
+              </a:rPr>
+              <a:t>«No lo hicimos porque no alcanzamos» suena a excusa. </a:t>
+            </a:r>
+            <a:r>
+              <a:rPr sz="1300" b="1" i="0">
+                <a:solidFill>
+                  <a:srgbClr val="333333"/>
+                </a:solidFill>
+                <a:latin typeface="Calibri"/>
+              </a:rPr>
+              <a:t>«Decidimos no hacerlo y sacrificamos esto»</a:t>
+            </a:r>
+            <a:r>
+              <a:rPr sz="1300" b="0" i="0">
+                <a:solidFill>
+                  <a:srgbClr val="333333"/>
+                </a:solidFill>
+                <a:latin typeface="Calibri"/>
+              </a:rPr>
+              <a:t> es ingeniería, y está escrito desde la sesión 8.</a:t>
+            </a:r>
+          </a:p>
+        </p:txBody>
+      </p:sp>
+      <p:sp>
+        <p:nvSpPr>
+          <p:cNvPr id="17" name="Rounded Rectangle 16"/>
+          <p:cNvSpPr/>
+          <p:nvPr/>
+        </p:nvSpPr>
+        <p:spPr>
+          <a:xfrm>
+            <a:off x="6187287" y="3890772"/>
+            <a:ext cx="5547207" cy="2464308"/>
+          </a:xfrm>
+          <a:prstGeom prst="roundRect">
+            <a:avLst>
+              <a:gd name="adj" fmla="val 12000"/>
+            </a:avLst>
+          </a:prstGeom>
+          <a:solidFill>
+            <a:srgbClr val="F2F2F2"/>
+          </a:solidFill>
+          <a:ln>
+            <a:noFill/>
+          </a:ln>
+        </p:spPr>
+        <p:style>
+          <a:lnRef idx="1">
+            <a:schemeClr val="accent1"/>
+          </a:lnRef>
+          <a:fillRef idx="3">
+            <a:schemeClr val="accent1"/>
+          </a:fillRef>
+          <a:effectRef idx="2">
+            <a:schemeClr val="accent1"/>
+          </a:effectRef>
+          <a:fontRef idx="minor">
+            <a:schemeClr val="lt1"/>
+          </a:fontRef>
+        </p:style>
+        <p:txBody>
+          <a:bodyPr rtlCol="0" anchor="ctr"/>
+          <a:lstStyle/>
+          <a:p>
+            <a:pPr algn="ctr"/>
+          </a:p>
+        </p:txBody>
+      </p:sp>
+      <p:sp>
+        <p:nvSpPr>
+          <p:cNvPr id="18" name="Rectangle 17"/>
+          <p:cNvSpPr/>
+          <p:nvPr/>
+        </p:nvSpPr>
+        <p:spPr>
+          <a:xfrm>
+            <a:off x="6187287" y="3890772"/>
+            <a:ext cx="5547207" cy="91440"/>
+          </a:xfrm>
+          <a:prstGeom prst="rect">
+            <a:avLst/>
           </a:prstGeom>
           <a:solidFill>
             <a:srgbClr val="095292"/>
@@ -7306,14 +7580,14 @@
       </p:sp>
       <p:sp>
         <p:nvSpPr>
-          <p:cNvPr id="12" name="TextBox 11"/>
+          <p:cNvPr id="19" name="TextBox 18"/>
           <p:cNvSpPr txBox="1"/>
           <p:nvPr/>
         </p:nvSpPr>
         <p:spPr>
           <a:xfrm>
-            <a:off x="594360" y="2680106"/>
-            <a:ext cx="438912" cy="438912"/>
+            <a:off x="6351879" y="4119372"/>
+            <a:ext cx="5218023" cy="411480"/>
           </a:xfrm>
           <a:prstGeom prst="rect">
             <a:avLst/>
@@ -7321,40 +7595,9 @@
           <a:noFill/>
         </p:spPr>
         <p:txBody>
-          <a:bodyPr wrap="square" anchor="ctr"/>
-          <a:lstStyle/>
-          <a:p>
-            <a:pPr algn="ctr"/>
-            <a:r>
-              <a:rPr sz="1600" b="1" i="0">
-                <a:solidFill>
-                  <a:srgbClr val="FFFFFF"/>
-                </a:solidFill>
-                <a:latin typeface="Calibri"/>
-              </a:rPr>
-              <a:t>2</a:t>
-            </a:r>
-          </a:p>
-        </p:txBody>
-      </p:sp>
-      <p:sp>
-        <p:nvSpPr>
-          <p:cNvPr id="13" name="TextBox 12"/>
-          <p:cNvSpPr txBox="1"/>
-          <p:nvPr/>
-        </p:nvSpPr>
-        <p:spPr>
-          <a:xfrm>
-            <a:off x="1188720" y="2536545"/>
-            <a:ext cx="10271455" cy="744321"/>
-          </a:xfrm>
-          <a:prstGeom prst="rect">
-            <a:avLst/>
-          </a:prstGeom>
-          <a:noFill/>
-        </p:spPr>
-        <p:txBody>
-          <a:bodyPr wrap="square" anchor="ctr"/>
+          <a:bodyPr wrap="square">
+            <a:spAutoFit/>
+          </a:bodyPr>
           <a:lstStyle/>
           <a:p>
             <a:r>
@@ -7364,285 +7607,8 @@
                 </a:solidFill>
                 <a:latin typeface="Calibri"/>
               </a:rPr>
-              <a:t>2 · El equipo que expone comparte pantalla</a:t>
-            </a:r>
-          </a:p>
-          <a:p>
-            <a:pPr>
-              <a:spcBef>
-                <a:spcPts val="200"/>
-              </a:spcBef>
-            </a:pPr>
-            <a:r>
-              <a:rPr sz="1300" b="0" i="0">
-                <a:solidFill>
-                  <a:srgbClr val="333333"/>
-                </a:solidFill>
-                <a:latin typeface="Calibri"/>
-              </a:rPr>
-              <a:t>Un solo integrante comparte; los demás tienen la presentación en PDF abierta por si se cae.</a:t>
-            </a:r>
-          </a:p>
-        </p:txBody>
-      </p:sp>
-      <p:sp>
-        <p:nvSpPr>
-          <p:cNvPr id="14" name="Rounded Rectangle 13"/>
-          <p:cNvSpPr/>
-          <p:nvPr/>
-        </p:nvSpPr>
-        <p:spPr>
-          <a:xfrm>
-            <a:off x="457200" y="3445459"/>
-            <a:ext cx="11277295" cy="908913"/>
-          </a:xfrm>
-          <a:prstGeom prst="roundRect">
-            <a:avLst>
-              <a:gd name="adj" fmla="val 12000"/>
-            </a:avLst>
-          </a:prstGeom>
-          <a:solidFill>
-            <a:srgbClr val="F2F2F2"/>
-          </a:solidFill>
-          <a:ln>
-            <a:noFill/>
-          </a:ln>
-        </p:spPr>
-        <p:style>
-          <a:lnRef idx="1">
-            <a:schemeClr val="accent1"/>
-          </a:lnRef>
-          <a:fillRef idx="3">
-            <a:schemeClr val="accent1"/>
-          </a:fillRef>
-          <a:effectRef idx="2">
-            <a:schemeClr val="accent1"/>
-          </a:effectRef>
-          <a:fontRef idx="minor">
-            <a:schemeClr val="lt1"/>
-          </a:fontRef>
-        </p:style>
-        <p:txBody>
-          <a:bodyPr rtlCol="0" anchor="ctr"/>
-          <a:lstStyle/>
-          <a:p>
-            <a:pPr algn="ctr"/>
-          </a:p>
-        </p:txBody>
-      </p:sp>
-      <p:sp>
-        <p:nvSpPr>
-          <p:cNvPr id="15" name="Rounded Rectangle 14"/>
-          <p:cNvSpPr/>
-          <p:nvPr/>
-        </p:nvSpPr>
-        <p:spPr>
-          <a:xfrm>
-            <a:off x="594360" y="3680460"/>
-            <a:ext cx="438912" cy="438912"/>
-          </a:xfrm>
-          <a:prstGeom prst="roundRect">
-            <a:avLst>
-              <a:gd name="adj" fmla="val 12000"/>
-            </a:avLst>
-          </a:prstGeom>
-          <a:solidFill>
-            <a:srgbClr val="095292"/>
-          </a:solidFill>
-          <a:ln>
-            <a:noFill/>
-          </a:ln>
-        </p:spPr>
-        <p:style>
-          <a:lnRef idx="1">
-            <a:schemeClr val="accent1"/>
-          </a:lnRef>
-          <a:fillRef idx="3">
-            <a:schemeClr val="accent1"/>
-          </a:fillRef>
-          <a:effectRef idx="2">
-            <a:schemeClr val="accent1"/>
-          </a:effectRef>
-          <a:fontRef idx="minor">
-            <a:schemeClr val="lt1"/>
-          </a:fontRef>
-        </p:style>
-        <p:txBody>
-          <a:bodyPr rtlCol="0" anchor="ctr"/>
-          <a:lstStyle/>
-          <a:p>
-            <a:pPr algn="ctr"/>
-          </a:p>
-        </p:txBody>
-      </p:sp>
-      <p:sp>
-        <p:nvSpPr>
-          <p:cNvPr id="16" name="TextBox 15"/>
-          <p:cNvSpPr txBox="1"/>
-          <p:nvPr/>
-        </p:nvSpPr>
-        <p:spPr>
-          <a:xfrm>
-            <a:off x="594360" y="3680460"/>
-            <a:ext cx="438912" cy="438912"/>
-          </a:xfrm>
-          <a:prstGeom prst="rect">
-            <a:avLst/>
-          </a:prstGeom>
-          <a:noFill/>
-        </p:spPr>
-        <p:txBody>
-          <a:bodyPr wrap="square" anchor="ctr"/>
-          <a:lstStyle/>
-          <a:p>
-            <a:pPr algn="ctr"/>
-            <a:r>
-              <a:rPr sz="1600" b="1" i="0">
-                <a:solidFill>
-                  <a:srgbClr val="FFFFFF"/>
-                </a:solidFill>
-                <a:latin typeface="Calibri"/>
-              </a:rPr>
-              <a:t>3</a:t>
-            </a:r>
-          </a:p>
-        </p:txBody>
-      </p:sp>
-      <p:sp>
-        <p:nvSpPr>
-          <p:cNvPr id="17" name="TextBox 16"/>
-          <p:cNvSpPr txBox="1"/>
-          <p:nvPr/>
-        </p:nvSpPr>
-        <p:spPr>
-          <a:xfrm>
-            <a:off x="1188720" y="3536899"/>
-            <a:ext cx="10271455" cy="744321"/>
-          </a:xfrm>
-          <a:prstGeom prst="rect">
-            <a:avLst/>
-          </a:prstGeom>
-          <a:noFill/>
-        </p:spPr>
-        <p:txBody>
-          <a:bodyPr wrap="square" anchor="ctr"/>
-          <a:lstStyle/>
-          <a:p>
-            <a:r>
-              <a:rPr sz="1500" b="1" i="0">
-                <a:solidFill>
-                  <a:srgbClr val="095292"/>
-                </a:solidFill>
-                <a:latin typeface="Calibri"/>
-              </a:rPr>
-              <a:t>3 · Nueve minutos, con cronómetro visible</a:t>
-            </a:r>
-          </a:p>
-          <a:p>
-            <a:pPr>
-              <a:spcBef>
-                <a:spcPts val="200"/>
-              </a:spcBef>
-            </a:pPr>
-            <a:r>
-              <a:rPr sz="1300" b="0" i="0">
-                <a:solidFill>
-                  <a:srgbClr val="333333"/>
-                </a:solidFill>
-                <a:latin typeface="Calibri"/>
-              </a:rPr>
-              <a:t>Se corta al llegar a cero. A los 8 minutos aparece un aviso en el chat.</a:t>
-            </a:r>
-          </a:p>
-        </p:txBody>
-      </p:sp>
-      <p:sp>
-        <p:nvSpPr>
-          <p:cNvPr id="18" name="Rounded Rectangle 17"/>
-          <p:cNvSpPr/>
-          <p:nvPr/>
-        </p:nvSpPr>
-        <p:spPr>
-          <a:xfrm>
-            <a:off x="457200" y="4445812"/>
-            <a:ext cx="11277295" cy="908913"/>
-          </a:xfrm>
-          <a:prstGeom prst="roundRect">
-            <a:avLst>
-              <a:gd name="adj" fmla="val 12000"/>
-            </a:avLst>
-          </a:prstGeom>
-          <a:solidFill>
-            <a:srgbClr val="E8F4FA"/>
-          </a:solidFill>
-          <a:ln>
-            <a:noFill/>
-          </a:ln>
-        </p:spPr>
-        <p:style>
-          <a:lnRef idx="1">
-            <a:schemeClr val="accent1"/>
-          </a:lnRef>
-          <a:fillRef idx="3">
-            <a:schemeClr val="accent1"/>
-          </a:fillRef>
-          <a:effectRef idx="2">
-            <a:schemeClr val="accent1"/>
-          </a:effectRef>
-          <a:fontRef idx="minor">
-            <a:schemeClr val="lt1"/>
-          </a:fontRef>
-        </p:style>
-        <p:txBody>
-          <a:bodyPr rtlCol="0" anchor="ctr"/>
-          <a:lstStyle/>
-          <a:p>
-            <a:pPr algn="ctr"/>
-          </a:p>
-        </p:txBody>
-      </p:sp>
-      <p:sp>
-        <p:nvSpPr>
-          <p:cNvPr id="19" name="Rounded Rectangle 18"/>
-          <p:cNvSpPr/>
-          <p:nvPr/>
-        </p:nvSpPr>
-        <p:spPr>
-          <a:xfrm>
-            <a:off x="594360" y="4680813"/>
-            <a:ext cx="438912" cy="438912"/>
-          </a:xfrm>
-          <a:prstGeom prst="roundRect">
-            <a:avLst>
-              <a:gd name="adj" fmla="val 12000"/>
-            </a:avLst>
-          </a:prstGeom>
-          <a:solidFill>
-            <a:srgbClr val="095292"/>
-          </a:solidFill>
-          <a:ln>
-            <a:noFill/>
-          </a:ln>
-        </p:spPr>
-        <p:style>
-          <a:lnRef idx="1">
-            <a:schemeClr val="accent1"/>
-          </a:lnRef>
-          <a:fillRef idx="3">
-            <a:schemeClr val="accent1"/>
-          </a:fillRef>
-          <a:effectRef idx="2">
-            <a:schemeClr val="accent1"/>
-          </a:effectRef>
-          <a:fontRef idx="minor">
-            <a:schemeClr val="lt1"/>
-          </a:fontRef>
-        </p:style>
-        <p:txBody>
-          <a:bodyPr rtlCol="0" anchor="ctr"/>
-          <a:lstStyle/>
-          <a:p>
-            <a:pPr algn="ctr"/>
+              <a:t>Corto y al grano</a:t>
+            </a:r>
           </a:p>
         </p:txBody>
       </p:sp>
@@ -7654,8 +7620,8 @@
         </p:nvSpPr>
         <p:spPr>
           <a:xfrm>
-            <a:off x="594360" y="4680813"/>
-            <a:ext cx="438912" cy="438912"/>
+            <a:off x="6351879" y="4576572"/>
+            <a:ext cx="5218023" cy="1595628"/>
           </a:xfrm>
           <a:prstGeom prst="rect">
             <a:avLst/>
@@ -7663,18 +7629,19 @@
           <a:noFill/>
         </p:spPr>
         <p:txBody>
-          <a:bodyPr wrap="square" anchor="ctr"/>
-          <a:lstStyle/>
-          <a:p>
-            <a:pPr algn="ctr"/>
-            <a:r>
-              <a:rPr sz="1600" b="1" i="0">
-                <a:solidFill>
-                  <a:srgbClr val="FFFFFF"/>
-                </a:solidFill>
-                <a:latin typeface="Calibri"/>
-              </a:rPr>
-              <a:t>4</a:t>
+          <a:bodyPr wrap="square">
+            <a:spAutoFit/>
+          </a:bodyPr>
+          <a:lstStyle/>
+          <a:p>
+            <a:r>
+              <a:rPr sz="1300" b="0" i="0">
+                <a:solidFill>
+                  <a:srgbClr val="333333"/>
+                </a:solidFill>
+                <a:latin typeface="Calibri"/>
+              </a:rPr>
+              <a:t>Tres minutos alcanzan para dos o tres preguntas si las respuestas duran treinta segundos. Una respuesta de dos minutos se come las preguntas de los demás.</a:t>
             </a:r>
           </a:p>
         </p:txBody>
@@ -7682,252 +7649,6 @@
       <p:sp>
         <p:nvSpPr>
           <p:cNvPr id="21" name="TextBox 20"/>
-          <p:cNvSpPr txBox="1"/>
-          <p:nvPr/>
-        </p:nvSpPr>
-        <p:spPr>
-          <a:xfrm>
-            <a:off x="1188720" y="4537252"/>
-            <a:ext cx="10271455" cy="744321"/>
-          </a:xfrm>
-          <a:prstGeom prst="rect">
-            <a:avLst/>
-          </a:prstGeom>
-          <a:noFill/>
-        </p:spPr>
-        <p:txBody>
-          <a:bodyPr wrap="square" anchor="ctr"/>
-          <a:lstStyle/>
-          <a:p>
-            <a:r>
-              <a:rPr sz="1500" b="1" i="0">
-                <a:solidFill>
-                  <a:srgbClr val="095292"/>
-                </a:solidFill>
-                <a:latin typeface="Calibri"/>
-              </a:rPr>
-              <a:t>4 · Tres minutos de preguntas</a:t>
-            </a:r>
-          </a:p>
-          <a:p>
-            <a:pPr>
-              <a:spcBef>
-                <a:spcPts val="200"/>
-              </a:spcBef>
-            </a:pPr>
-            <a:r>
-              <a:rPr sz="1300" b="0" i="0">
-                <a:solidFill>
-                  <a:srgbClr val="333333"/>
-                </a:solidFill>
-                <a:latin typeface="Calibri"/>
-              </a:rPr>
-              <a:t>Primero una pregunta del curso, después una del docente. </a:t>
-            </a:r>
-            <a:r>
-              <a:rPr sz="1300" b="1" i="0">
-                <a:solidFill>
-                  <a:srgbClr val="333333"/>
-                </a:solidFill>
-                <a:latin typeface="Calibri"/>
-              </a:rPr>
-              <a:t>Responde quien tenga el tramo.</a:t>
-            </a:r>
-          </a:p>
-        </p:txBody>
-      </p:sp>
-      <p:sp>
-        <p:nvSpPr>
-          <p:cNvPr id="22" name="Rounded Rectangle 21"/>
-          <p:cNvSpPr/>
-          <p:nvPr/>
-        </p:nvSpPr>
-        <p:spPr>
-          <a:xfrm>
-            <a:off x="457200" y="5446166"/>
-            <a:ext cx="11277295" cy="908913"/>
-          </a:xfrm>
-          <a:prstGeom prst="roundRect">
-            <a:avLst>
-              <a:gd name="adj" fmla="val 12000"/>
-            </a:avLst>
-          </a:prstGeom>
-          <a:solidFill>
-            <a:srgbClr val="F2F2F2"/>
-          </a:solidFill>
-          <a:ln>
-            <a:noFill/>
-          </a:ln>
-        </p:spPr>
-        <p:style>
-          <a:lnRef idx="1">
-            <a:schemeClr val="accent1"/>
-          </a:lnRef>
-          <a:fillRef idx="3">
-            <a:schemeClr val="accent1"/>
-          </a:fillRef>
-          <a:effectRef idx="2">
-            <a:schemeClr val="accent1"/>
-          </a:effectRef>
-          <a:fontRef idx="minor">
-            <a:schemeClr val="lt1"/>
-          </a:fontRef>
-        </p:style>
-        <p:txBody>
-          <a:bodyPr rtlCol="0" anchor="ctr"/>
-          <a:lstStyle/>
-          <a:p>
-            <a:pPr algn="ctr"/>
-          </a:p>
-        </p:txBody>
-      </p:sp>
-      <p:sp>
-        <p:nvSpPr>
-          <p:cNvPr id="23" name="Rounded Rectangle 22"/>
-          <p:cNvSpPr/>
-          <p:nvPr/>
-        </p:nvSpPr>
-        <p:spPr>
-          <a:xfrm>
-            <a:off x="594360" y="5681167"/>
-            <a:ext cx="438912" cy="438912"/>
-          </a:xfrm>
-          <a:prstGeom prst="roundRect">
-            <a:avLst>
-              <a:gd name="adj" fmla="val 12000"/>
-            </a:avLst>
-          </a:prstGeom>
-          <a:solidFill>
-            <a:srgbClr val="095292"/>
-          </a:solidFill>
-          <a:ln>
-            <a:noFill/>
-          </a:ln>
-        </p:spPr>
-        <p:style>
-          <a:lnRef idx="1">
-            <a:schemeClr val="accent1"/>
-          </a:lnRef>
-          <a:fillRef idx="3">
-            <a:schemeClr val="accent1"/>
-          </a:fillRef>
-          <a:effectRef idx="2">
-            <a:schemeClr val="accent1"/>
-          </a:effectRef>
-          <a:fontRef idx="minor">
-            <a:schemeClr val="lt1"/>
-          </a:fontRef>
-        </p:style>
-        <p:txBody>
-          <a:bodyPr rtlCol="0" anchor="ctr"/>
-          <a:lstStyle/>
-          <a:p>
-            <a:pPr algn="ctr"/>
-          </a:p>
-        </p:txBody>
-      </p:sp>
-      <p:sp>
-        <p:nvSpPr>
-          <p:cNvPr id="24" name="TextBox 23"/>
-          <p:cNvSpPr txBox="1"/>
-          <p:nvPr/>
-        </p:nvSpPr>
-        <p:spPr>
-          <a:xfrm>
-            <a:off x="594360" y="5681167"/>
-            <a:ext cx="438912" cy="438912"/>
-          </a:xfrm>
-          <a:prstGeom prst="rect">
-            <a:avLst/>
-          </a:prstGeom>
-          <a:noFill/>
-        </p:spPr>
-        <p:txBody>
-          <a:bodyPr wrap="square" anchor="ctr"/>
-          <a:lstStyle/>
-          <a:p>
-            <a:pPr algn="ctr"/>
-            <a:r>
-              <a:rPr sz="1600" b="1" i="0">
-                <a:solidFill>
-                  <a:srgbClr val="FFFFFF"/>
-                </a:solidFill>
-                <a:latin typeface="Calibri"/>
-              </a:rPr>
-              <a:t>5</a:t>
-            </a:r>
-          </a:p>
-        </p:txBody>
-      </p:sp>
-      <p:sp>
-        <p:nvSpPr>
-          <p:cNvPr id="25" name="TextBox 24"/>
-          <p:cNvSpPr txBox="1"/>
-          <p:nvPr/>
-        </p:nvSpPr>
-        <p:spPr>
-          <a:xfrm>
-            <a:off x="1188720" y="5537606"/>
-            <a:ext cx="10271455" cy="744321"/>
-          </a:xfrm>
-          <a:prstGeom prst="rect">
-            <a:avLst/>
-          </a:prstGeom>
-          <a:noFill/>
-        </p:spPr>
-        <p:txBody>
-          <a:bodyPr wrap="square" anchor="ctr"/>
-          <a:lstStyle/>
-          <a:p>
-            <a:r>
-              <a:rPr sz="1500" b="1" i="0">
-                <a:solidFill>
-                  <a:srgbClr val="095292"/>
-                </a:solidFill>
-                <a:latin typeface="Calibri"/>
-              </a:rPr>
-              <a:t>5 · Los que no exponen llenan la ficha</a:t>
-            </a:r>
-          </a:p>
-          <a:p>
-            <a:pPr>
-              <a:spcBef>
-                <a:spcPts val="200"/>
-              </a:spcBef>
-            </a:pPr>
-            <a:r>
-              <a:rPr sz="1300" b="0" i="0">
-                <a:solidFill>
-                  <a:srgbClr val="333333"/>
-                </a:solidFill>
-                <a:latin typeface="Calibri"/>
-              </a:rPr>
-              <a:t>Una fila por equipo: lo más fuerte, lo que no quedó claro y </a:t>
-            </a:r>
-            <a:r>
-              <a:rPr sz="1300" b="1" i="0">
-                <a:solidFill>
-                  <a:srgbClr val="333333"/>
-                </a:solidFill>
-                <a:latin typeface="Calibri"/>
-              </a:rPr>
-              <a:t>una pregunta</a:t>
-            </a:r>
-            <a:r>
-              <a:rPr sz="1300" b="0" i="0">
-                <a:solidFill>
-                  <a:srgbClr val="333333"/>
-                </a:solidFill>
-                <a:latin typeface="Calibri"/>
-              </a:rPr>
-              <a:t>. Se entrega en el muro.</a:t>
-            </a:r>
-          </a:p>
-        </p:txBody>
-      </p:sp>
-      <p:sp>
-        <p:nvSpPr>
-          <p:cNvPr id="26" name="TextBox 25"/>
           <p:cNvSpPr txBox="1"/>
           <p:nvPr/>
         </p:nvSpPr>
@@ -7995,7 +7716,7 @@
         <p:spPr>
           <a:xfrm>
             <a:off x="0" y="0"/>
-            <a:ext cx="12191695" cy="960120"/>
+            <a:ext cx="12191695" cy="1170432"/>
           </a:xfrm>
           <a:prstGeom prst="rect">
             <a:avLst/>
@@ -8037,7 +7758,7 @@
         </p:nvSpPr>
         <p:spPr>
           <a:xfrm>
-            <a:off x="0" y="960120"/>
+            <a:off x="0" y="1170432"/>
             <a:ext cx="12191695" cy="41148"/>
           </a:xfrm>
           <a:prstGeom prst="rect">
@@ -8081,7 +7802,7 @@
         <p:spPr>
           <a:xfrm>
             <a:off x="457200" y="164592"/>
-            <a:ext cx="11277295" cy="502920"/>
+            <a:ext cx="11277295" cy="384048"/>
           </a:xfrm>
           <a:prstGeom prst="rect">
             <a:avLst/>
@@ -8101,21 +7822,55 @@
                 </a:solidFill>
                 <a:latin typeface="Calibri"/>
               </a:rPr>
-              <a:t>Los tres minutos de preguntas también se califican</a:t>
-            </a:r>
-          </a:p>
-        </p:txBody>
-      </p:sp>
-      <p:sp>
-        <p:nvSpPr>
-          <p:cNvPr id="5" name="Rounded Rectangle 4"/>
+              <a:t>Ejemplo: la misma pregunta, dos respuestas</a:t>
+            </a:r>
+          </a:p>
+        </p:txBody>
+      </p:sp>
+      <p:sp>
+        <p:nvSpPr>
+          <p:cNvPr id="5" name="TextBox 4"/>
+          <p:cNvSpPr txBox="1"/>
+          <p:nvPr/>
+        </p:nvSpPr>
+        <p:spPr>
+          <a:xfrm>
+            <a:off x="457200" y="566928"/>
+            <a:ext cx="11277295" cy="411480"/>
+          </a:xfrm>
+          <a:prstGeom prst="rect">
+            <a:avLst/>
+          </a:prstGeom>
+          <a:noFill/>
+        </p:spPr>
+        <p:txBody>
+          <a:bodyPr wrap="square">
+            <a:spAutoFit/>
+          </a:bodyPr>
+          <a:lstStyle/>
+          <a:p>
+            <a:r>
+              <a:rPr sz="1400" b="0" i="0">
+                <a:solidFill>
+                  <a:srgbClr val="B8D8EE"/>
+                </a:solidFill>
+                <a:latin typeface="Calibri"/>
+              </a:rPr>
+              <a:t>Pregunta del curso: «¿Por qué la app no deja pagar?»</a:t>
+            </a:r>
+          </a:p>
+        </p:txBody>
+      </p:sp>
+      <p:sp>
+        <p:nvSpPr>
+          <p:cNvPr id="6" name="Rounded Rectangle 5"/>
           <p:cNvSpPr/>
           <p:nvPr/>
         </p:nvSpPr>
         <p:spPr>
           <a:xfrm>
-            <a:off x="457200" y="1261872"/>
-            <a:ext cx="5547207" cy="2464308"/>
+            <a:off x="457200" y="1472184"/>
+            <a:ext cx="5478627" cy="4882896"/>
           </a:xfrm>
           <a:prstGeom prst="roundRect">
             <a:avLst>
@@ -8123,7 +7878,7 @@
             </a:avLst>
           </a:prstGeom>
           <a:solidFill>
-            <a:srgbClr val="F2F2F2"/>
+            <a:srgbClr val="FBE4E4"/>
           </a:solidFill>
           <a:ln>
             <a:noFill/>
@@ -8153,14 +7908,206 @@
       </p:sp>
       <p:sp>
         <p:nvSpPr>
-          <p:cNvPr id="6" name="Rectangle 5"/>
+          <p:cNvPr id="7" name="Rectangle 6"/>
           <p:cNvSpPr/>
           <p:nvPr/>
         </p:nvSpPr>
         <p:spPr>
           <a:xfrm>
-            <a:off x="457200" y="1261872"/>
-            <a:ext cx="5547207" cy="91440"/>
+            <a:off x="457200" y="1472184"/>
+            <a:ext cx="5478627" cy="502920"/>
+          </a:xfrm>
+          <a:prstGeom prst="rect">
+            <a:avLst/>
+          </a:prstGeom>
+          <a:solidFill>
+            <a:srgbClr val="A02030"/>
+          </a:solidFill>
+          <a:ln>
+            <a:noFill/>
+          </a:ln>
+        </p:spPr>
+        <p:style>
+          <a:lnRef idx="1">
+            <a:schemeClr val="accent1"/>
+          </a:lnRef>
+          <a:fillRef idx="3">
+            <a:schemeClr val="accent1"/>
+          </a:fillRef>
+          <a:effectRef idx="2">
+            <a:schemeClr val="accent1"/>
+          </a:effectRef>
+          <a:fontRef idx="minor">
+            <a:schemeClr val="lt1"/>
+          </a:fontRef>
+        </p:style>
+        <p:txBody>
+          <a:bodyPr rtlCol="0" anchor="ctr"/>
+          <a:lstStyle/>
+          <a:p>
+            <a:pPr algn="ctr"/>
+          </a:p>
+        </p:txBody>
+      </p:sp>
+      <p:sp>
+        <p:nvSpPr>
+          <p:cNvPr id="8" name="TextBox 7"/>
+          <p:cNvSpPr txBox="1"/>
+          <p:nvPr/>
+        </p:nvSpPr>
+        <p:spPr>
+          <a:xfrm>
+            <a:off x="594360" y="1563624"/>
+            <a:ext cx="5204307" cy="365760"/>
+          </a:xfrm>
+          <a:prstGeom prst="rect">
+            <a:avLst/>
+          </a:prstGeom>
+          <a:noFill/>
+        </p:spPr>
+        <p:txBody>
+          <a:bodyPr wrap="square" anchor="ctr"/>
+          <a:lstStyle/>
+          <a:p>
+            <a:pPr algn="ctr"/>
+            <a:r>
+              <a:rPr sz="1600" b="1" i="0">
+                <a:solidFill>
+                  <a:srgbClr val="FFFFFF"/>
+                </a:solidFill>
+                <a:latin typeface="Calibri"/>
+              </a:rPr>
+              <a:t>Excusa</a:t>
+            </a:r>
+          </a:p>
+        </p:txBody>
+      </p:sp>
+      <p:sp>
+        <p:nvSpPr>
+          <p:cNvPr id="9" name="TextBox 8"/>
+          <p:cNvSpPr txBox="1"/>
+          <p:nvPr/>
+        </p:nvSpPr>
+        <p:spPr>
+          <a:xfrm>
+            <a:off x="621792" y="2112263"/>
+            <a:ext cx="5158587" cy="4288536"/>
+          </a:xfrm>
+          <a:prstGeom prst="rect">
+            <a:avLst/>
+          </a:prstGeom>
+          <a:noFill/>
+        </p:spPr>
+        <p:txBody>
+          <a:bodyPr wrap="square">
+            <a:spAutoFit/>
+          </a:bodyPr>
+          <a:lstStyle/>
+          <a:p>
+            <a:pPr>
+              <a:spcAft>
+                <a:spcPts val="800"/>
+              </a:spcAft>
+            </a:pPr>
+            <a:r>
+              <a:rPr sz="1500" b="0" i="0">
+                <a:solidFill>
+                  <a:srgbClr val="333333"/>
+                </a:solidFill>
+                <a:latin typeface="Calibri"/>
+              </a:rPr>
+              <a:t>–   «No alcanzamos el tiempo».</a:t>
+            </a:r>
+          </a:p>
+          <a:p>
+            <a:pPr>
+              <a:spcAft>
+                <a:spcPts val="800"/>
+              </a:spcAft>
+            </a:pPr>
+            <a:r>
+              <a:rPr sz="1500" b="0" i="0">
+                <a:solidFill>
+                  <a:srgbClr val="333333"/>
+                </a:solidFill>
+                <a:latin typeface="Calibri"/>
+              </a:rPr>
+              <a:t>–   «Lo íbamos a hacer pero el profe dijo que no».</a:t>
+            </a:r>
+          </a:p>
+          <a:p>
+            <a:pPr>
+              <a:spcAft>
+                <a:spcPts val="800"/>
+              </a:spcAft>
+            </a:pPr>
+            <a:r>
+              <a:rPr sz="1500" b="0" i="0">
+                <a:solidFill>
+                  <a:srgbClr val="333333"/>
+                </a:solidFill>
+                <a:latin typeface="Calibri"/>
+              </a:rPr>
+              <a:t>–   Responde quien no hizo esa parte, y duda.</a:t>
+            </a:r>
+          </a:p>
+        </p:txBody>
+      </p:sp>
+      <p:sp>
+        <p:nvSpPr>
+          <p:cNvPr id="10" name="Rounded Rectangle 9"/>
+          <p:cNvSpPr/>
+          <p:nvPr/>
+        </p:nvSpPr>
+        <p:spPr>
+          <a:xfrm>
+            <a:off x="6255867" y="1472184"/>
+            <a:ext cx="5478627" cy="4882896"/>
+          </a:xfrm>
+          <a:prstGeom prst="roundRect">
+            <a:avLst>
+              <a:gd name="adj" fmla="val 12000"/>
+            </a:avLst>
+          </a:prstGeom>
+          <a:solidFill>
+            <a:srgbClr val="E8F4FA"/>
+          </a:solidFill>
+          <a:ln>
+            <a:noFill/>
+          </a:ln>
+        </p:spPr>
+        <p:style>
+          <a:lnRef idx="1">
+            <a:schemeClr val="accent1"/>
+          </a:lnRef>
+          <a:fillRef idx="3">
+            <a:schemeClr val="accent1"/>
+          </a:fillRef>
+          <a:effectRef idx="2">
+            <a:schemeClr val="accent1"/>
+          </a:effectRef>
+          <a:fontRef idx="minor">
+            <a:schemeClr val="lt1"/>
+          </a:fontRef>
+        </p:style>
+        <p:txBody>
+          <a:bodyPr rtlCol="0" anchor="ctr"/>
+          <a:lstStyle/>
+          <a:p>
+            <a:pPr algn="ctr"/>
+          </a:p>
+        </p:txBody>
+      </p:sp>
+      <p:sp>
+        <p:nvSpPr>
+          <p:cNvPr id="11" name="Rectangle 10"/>
+          <p:cNvSpPr/>
+          <p:nvPr/>
+        </p:nvSpPr>
+        <p:spPr>
+          <a:xfrm>
+            <a:off x="6255867" y="1472184"/>
+            <a:ext cx="5478627" cy="502920"/>
           </a:xfrm>
           <a:prstGeom prst="rect">
             <a:avLst/>
@@ -8196,14 +8143,47 @@
       </p:sp>
       <p:sp>
         <p:nvSpPr>
-          <p:cNvPr id="7" name="TextBox 6"/>
+          <p:cNvPr id="12" name="TextBox 11"/>
           <p:cNvSpPr txBox="1"/>
           <p:nvPr/>
         </p:nvSpPr>
         <p:spPr>
           <a:xfrm>
-            <a:off x="621792" y="1490472"/>
-            <a:ext cx="5218023" cy="411480"/>
+            <a:off x="6393027" y="1563624"/>
+            <a:ext cx="5204307" cy="365760"/>
+          </a:xfrm>
+          <a:prstGeom prst="rect">
+            <a:avLst/>
+          </a:prstGeom>
+          <a:noFill/>
+        </p:spPr>
+        <p:txBody>
+          <a:bodyPr wrap="square" anchor="ctr"/>
+          <a:lstStyle/>
+          <a:p>
+            <a:pPr algn="ctr"/>
+            <a:r>
+              <a:rPr sz="1600" b="1" i="0">
+                <a:solidFill>
+                  <a:srgbClr val="FFFFFF"/>
+                </a:solidFill>
+                <a:latin typeface="Calibri"/>
+              </a:rPr>
+              <a:t>Decisión</a:t>
+            </a:r>
+          </a:p>
+        </p:txBody>
+      </p:sp>
+      <p:sp>
+        <p:nvSpPr>
+          <p:cNvPr id="13" name="TextBox 12"/>
+          <p:cNvSpPr txBox="1"/>
+          <p:nvPr/>
+        </p:nvSpPr>
+        <p:spPr>
+          <a:xfrm>
+            <a:off x="6420459" y="2112263"/>
+            <a:ext cx="5158587" cy="4288536"/>
           </a:xfrm>
           <a:prstGeom prst="rect">
             <a:avLst/>
@@ -8216,577 +8196,76 @@
           </a:bodyPr>
           <a:lstStyle/>
           <a:p>
+            <a:pPr>
+              <a:spcAft>
+                <a:spcPts val="800"/>
+              </a:spcAft>
+            </a:pPr>
+            <a:r>
+              <a:rPr sz="1500" b="0" i="0">
+                <a:solidFill>
+                  <a:srgbClr val="333333"/>
+                </a:solidFill>
+                <a:latin typeface="Calibri"/>
+              </a:rPr>
+              <a:t>–   «</a:t>
+            </a:r>
             <a:r>
               <a:rPr sz="1500" b="1" i="0">
                 <a:solidFill>
-                  <a:srgbClr val="095292"/>
-                </a:solidFill>
-                <a:latin typeface="Calibri"/>
-              </a:rPr>
-              <a:t>Responde quien tiene el tramo</a:t>
-            </a:r>
-          </a:p>
-        </p:txBody>
-      </p:sp>
-      <p:sp>
-        <p:nvSpPr>
-          <p:cNvPr id="8" name="TextBox 7"/>
-          <p:cNvSpPr txBox="1"/>
-          <p:nvPr/>
-        </p:nvSpPr>
-        <p:spPr>
-          <a:xfrm>
-            <a:off x="621792" y="1947672"/>
-            <a:ext cx="5218023" cy="1595628"/>
-          </a:xfrm>
-          <a:prstGeom prst="rect">
-            <a:avLst/>
-          </a:prstGeom>
-          <a:noFill/>
-        </p:spPr>
-        <p:txBody>
-          <a:bodyPr wrap="square">
-            <a:spAutoFit/>
-          </a:bodyPr>
-          <a:lstStyle/>
-          <a:p>
-            <a:r>
-              <a:rPr sz="1300" b="0" i="0">
-                <a:solidFill>
                   <a:srgbClr val="333333"/>
                 </a:solidFill>
                 <a:latin typeface="Calibri"/>
               </a:rPr>
-              <a:t>Si preguntan por la prueba con usuarios, responde quien la hizo. </a:t>
-            </a:r>
-            <a:r>
-              <a:rPr sz="1300" b="1" i="0">
+              <a:t>Decidimos</a:t>
+            </a:r>
+            <a:r>
+              <a:rPr sz="1500" b="0" i="0">
                 <a:solidFill>
                   <a:srgbClr val="333333"/>
                 </a:solidFill>
                 <a:latin typeface="Calibri"/>
               </a:rPr>
-              <a:t>No responde siempre el mismo</a:t>
-            </a:r>
-            <a:r>
-              <a:rPr sz="1300" b="0" i="0">
+              <a:t> dejarlo fuera del alcance mínimo en la sesión 8».</a:t>
+            </a:r>
+          </a:p>
+          <a:p>
+            <a:pPr>
+              <a:spcAft>
+                <a:spcPts val="800"/>
+              </a:spcAft>
+            </a:pPr>
+            <a:r>
+              <a:rPr sz="1500" b="0" i="0">
                 <a:solidFill>
                   <a:srgbClr val="333333"/>
                 </a:solidFill>
                 <a:latin typeface="Calibri"/>
               </a:rPr>
-              <a:t>: eso es lo que se está evaluando.</a:t>
-            </a:r>
-          </a:p>
-        </p:txBody>
-      </p:sp>
-      <p:sp>
-        <p:nvSpPr>
-          <p:cNvPr id="9" name="Rounded Rectangle 8"/>
-          <p:cNvSpPr/>
-          <p:nvPr/>
-        </p:nvSpPr>
-        <p:spPr>
-          <a:xfrm>
-            <a:off x="6187287" y="1261872"/>
-            <a:ext cx="5547207" cy="2464308"/>
-          </a:xfrm>
-          <a:prstGeom prst="roundRect">
-            <a:avLst>
-              <a:gd name="adj" fmla="val 12000"/>
-            </a:avLst>
-          </a:prstGeom>
-          <a:solidFill>
-            <a:srgbClr val="F2F2F2"/>
-          </a:solidFill>
-          <a:ln>
-            <a:noFill/>
-          </a:ln>
-        </p:spPr>
-        <p:style>
-          <a:lnRef idx="1">
-            <a:schemeClr val="accent1"/>
-          </a:lnRef>
-          <a:fillRef idx="3">
-            <a:schemeClr val="accent1"/>
-          </a:fillRef>
-          <a:effectRef idx="2">
-            <a:schemeClr val="accent1"/>
-          </a:effectRef>
-          <a:fontRef idx="minor">
-            <a:schemeClr val="lt1"/>
-          </a:fontRef>
-        </p:style>
-        <p:txBody>
-          <a:bodyPr rtlCol="0" anchor="ctr"/>
-          <a:lstStyle/>
-          <a:p>
-            <a:pPr algn="ctr"/>
-          </a:p>
-        </p:txBody>
-      </p:sp>
-      <p:sp>
-        <p:nvSpPr>
-          <p:cNvPr id="10" name="Rectangle 9"/>
-          <p:cNvSpPr/>
-          <p:nvPr/>
-        </p:nvSpPr>
-        <p:spPr>
-          <a:xfrm>
-            <a:off x="6187287" y="1261872"/>
-            <a:ext cx="5547207" cy="91440"/>
-          </a:xfrm>
-          <a:prstGeom prst="rect">
-            <a:avLst/>
-          </a:prstGeom>
-          <a:solidFill>
-            <a:srgbClr val="269CCB"/>
-          </a:solidFill>
-          <a:ln>
-            <a:noFill/>
-          </a:ln>
-        </p:spPr>
-        <p:style>
-          <a:lnRef idx="1">
-            <a:schemeClr val="accent1"/>
-          </a:lnRef>
-          <a:fillRef idx="3">
-            <a:schemeClr val="accent1"/>
-          </a:fillRef>
-          <a:effectRef idx="2">
-            <a:schemeClr val="accent1"/>
-          </a:effectRef>
-          <a:fontRef idx="minor">
-            <a:schemeClr val="lt1"/>
-          </a:fontRef>
-        </p:style>
-        <p:txBody>
-          <a:bodyPr rtlCol="0" anchor="ctr"/>
-          <a:lstStyle/>
-          <a:p>
-            <a:pPr algn="ctr"/>
-          </a:p>
-        </p:txBody>
-      </p:sp>
-      <p:sp>
-        <p:nvSpPr>
-          <p:cNvPr id="11" name="TextBox 10"/>
-          <p:cNvSpPr txBox="1"/>
-          <p:nvPr/>
-        </p:nvSpPr>
-        <p:spPr>
-          <a:xfrm>
-            <a:off x="6351879" y="1490472"/>
-            <a:ext cx="5218023" cy="411480"/>
-          </a:xfrm>
-          <a:prstGeom prst="rect">
-            <a:avLst/>
-          </a:prstGeom>
-          <a:noFill/>
-        </p:spPr>
-        <p:txBody>
-          <a:bodyPr wrap="square">
-            <a:spAutoFit/>
-          </a:bodyPr>
-          <a:lstStyle/>
-          <a:p>
-            <a:r>
-              <a:rPr sz="1500" b="1" i="0">
-                <a:solidFill>
-                  <a:srgbClr val="095292"/>
-                </a:solidFill>
-                <a:latin typeface="Calibri"/>
-              </a:rPr>
-              <a:t>«No lo medimos» es una respuesta válida</a:t>
-            </a:r>
-          </a:p>
-        </p:txBody>
-      </p:sp>
-      <p:sp>
-        <p:nvSpPr>
-          <p:cNvPr id="12" name="TextBox 11"/>
-          <p:cNvSpPr txBox="1"/>
-          <p:nvPr/>
-        </p:nvSpPr>
-        <p:spPr>
-          <a:xfrm>
-            <a:off x="6351879" y="1947672"/>
-            <a:ext cx="5218023" cy="1595628"/>
-          </a:xfrm>
-          <a:prstGeom prst="rect">
-            <a:avLst/>
-          </a:prstGeom>
-          <a:noFill/>
-        </p:spPr>
-        <p:txBody>
-          <a:bodyPr wrap="square">
-            <a:spAutoFit/>
-          </a:bodyPr>
-          <a:lstStyle/>
-          <a:p>
-            <a:r>
-              <a:rPr sz="1300" b="0" i="0">
+              <a:t>–   «Pagar exige guardar datos que no necesitamos para el turno».</a:t>
+            </a:r>
+          </a:p>
+          <a:p>
+            <a:pPr>
+              <a:spcAft>
+                <a:spcPts val="800"/>
+              </a:spcAft>
+            </a:pPr>
+            <a:r>
+              <a:rPr sz="1500" b="0" i="0">
                 <a:solidFill>
                   <a:srgbClr val="333333"/>
                 </a:solidFill>
                 <a:latin typeface="Calibri"/>
               </a:rPr>
-              <a:t>Decir </a:t>
-            </a:r>
-            <a:r>
-              <a:rPr sz="1300" b="1" i="0">
-                <a:solidFill>
-                  <a:srgbClr val="333333"/>
-                </a:solidFill>
-                <a:latin typeface="Calibri"/>
-              </a:rPr>
-              <a:t>«no tenemos ese dato»</a:t>
-            </a:r>
-            <a:r>
-              <a:rPr sz="1300" b="0" i="0">
-                <a:solidFill>
-                  <a:srgbClr val="333333"/>
-                </a:solidFill>
-                <a:latin typeface="Calibri"/>
-              </a:rPr>
-              <a:t> vale más que inventar una cifra. Lo que hunde una sustentación es responder con seguridad algo que no se verificó.</a:t>
-            </a:r>
-          </a:p>
-        </p:txBody>
-      </p:sp>
-      <p:sp>
-        <p:nvSpPr>
-          <p:cNvPr id="13" name="Rounded Rectangle 12"/>
-          <p:cNvSpPr/>
-          <p:nvPr/>
-        </p:nvSpPr>
-        <p:spPr>
-          <a:xfrm>
-            <a:off x="457200" y="3890772"/>
-            <a:ext cx="5547207" cy="2464308"/>
-          </a:xfrm>
-          <a:prstGeom prst="roundRect">
-            <a:avLst>
-              <a:gd name="adj" fmla="val 12000"/>
-            </a:avLst>
-          </a:prstGeom>
-          <a:solidFill>
-            <a:srgbClr val="F2F2F2"/>
-          </a:solidFill>
-          <a:ln>
-            <a:noFill/>
-          </a:ln>
-        </p:spPr>
-        <p:style>
-          <a:lnRef idx="1">
-            <a:schemeClr val="accent1"/>
-          </a:lnRef>
-          <a:fillRef idx="3">
-            <a:schemeClr val="accent1"/>
-          </a:fillRef>
-          <a:effectRef idx="2">
-            <a:schemeClr val="accent1"/>
-          </a:effectRef>
-          <a:fontRef idx="minor">
-            <a:schemeClr val="lt1"/>
-          </a:fontRef>
-        </p:style>
-        <p:txBody>
-          <a:bodyPr rtlCol="0" anchor="ctr"/>
-          <a:lstStyle/>
-          <a:p>
-            <a:pPr algn="ctr"/>
-          </a:p>
-        </p:txBody>
-      </p:sp>
-      <p:sp>
-        <p:nvSpPr>
-          <p:cNvPr id="14" name="Rectangle 13"/>
-          <p:cNvSpPr/>
-          <p:nvPr/>
-        </p:nvSpPr>
-        <p:spPr>
-          <a:xfrm>
-            <a:off x="457200" y="3890772"/>
-            <a:ext cx="5547207" cy="91440"/>
-          </a:xfrm>
-          <a:prstGeom prst="rect">
-            <a:avLst/>
-          </a:prstGeom>
-          <a:solidFill>
-            <a:srgbClr val="FFD000"/>
-          </a:solidFill>
-          <a:ln>
-            <a:noFill/>
-          </a:ln>
-        </p:spPr>
-        <p:style>
-          <a:lnRef idx="1">
-            <a:schemeClr val="accent1"/>
-          </a:lnRef>
-          <a:fillRef idx="3">
-            <a:schemeClr val="accent1"/>
-          </a:fillRef>
-          <a:effectRef idx="2">
-            <a:schemeClr val="accent1"/>
-          </a:effectRef>
-          <a:fontRef idx="minor">
-            <a:schemeClr val="lt1"/>
-          </a:fontRef>
-        </p:style>
-        <p:txBody>
-          <a:bodyPr rtlCol="0" anchor="ctr"/>
-          <a:lstStyle/>
-          <a:p>
-            <a:pPr algn="ctr"/>
-          </a:p>
-        </p:txBody>
-      </p:sp>
-      <p:sp>
-        <p:nvSpPr>
-          <p:cNvPr id="15" name="TextBox 14"/>
-          <p:cNvSpPr txBox="1"/>
-          <p:nvPr/>
-        </p:nvSpPr>
-        <p:spPr>
-          <a:xfrm>
-            <a:off x="621792" y="4119372"/>
-            <a:ext cx="5218023" cy="411480"/>
-          </a:xfrm>
-          <a:prstGeom prst="rect">
-            <a:avLst/>
-          </a:prstGeom>
-          <a:noFill/>
-        </p:spPr>
-        <p:txBody>
-          <a:bodyPr wrap="square">
-            <a:spAutoFit/>
-          </a:bodyPr>
-          <a:lstStyle/>
-          <a:p>
-            <a:r>
-              <a:rPr sz="1500" b="1" i="0">
-                <a:solidFill>
-                  <a:srgbClr val="095292"/>
-                </a:solidFill>
-                <a:latin typeface="Calibri"/>
-              </a:rPr>
-              <a:t>Responder con la decisión, no con la excusa</a:t>
-            </a:r>
-          </a:p>
-        </p:txBody>
-      </p:sp>
-      <p:sp>
-        <p:nvSpPr>
-          <p:cNvPr id="16" name="TextBox 15"/>
-          <p:cNvSpPr txBox="1"/>
-          <p:nvPr/>
-        </p:nvSpPr>
-        <p:spPr>
-          <a:xfrm>
-            <a:off x="621792" y="4576572"/>
-            <a:ext cx="5218023" cy="1595628"/>
-          </a:xfrm>
-          <a:prstGeom prst="rect">
-            <a:avLst/>
-          </a:prstGeom>
-          <a:noFill/>
-        </p:spPr>
-        <p:txBody>
-          <a:bodyPr wrap="square">
-            <a:spAutoFit/>
-          </a:bodyPr>
-          <a:lstStyle/>
-          <a:p>
-            <a:r>
-              <a:rPr sz="1300" b="0" i="0">
-                <a:solidFill>
-                  <a:srgbClr val="333333"/>
-                </a:solidFill>
-                <a:latin typeface="Calibri"/>
-              </a:rPr>
-              <a:t>«No lo hicimos porque no alcanzamos» suena a excusa. </a:t>
-            </a:r>
-            <a:r>
-              <a:rPr sz="1300" b="1" i="0">
-                <a:solidFill>
-                  <a:srgbClr val="333333"/>
-                </a:solidFill>
-                <a:latin typeface="Calibri"/>
-              </a:rPr>
-              <a:t>«Decidimos no hacerlo y sacrificamos esto»</a:t>
-            </a:r>
-            <a:r>
-              <a:rPr sz="1300" b="0" i="0">
-                <a:solidFill>
-                  <a:srgbClr val="333333"/>
-                </a:solidFill>
-                <a:latin typeface="Calibri"/>
-              </a:rPr>
-              <a:t> es ingeniería, y está escrito desde la sesión 8.</a:t>
-            </a:r>
-          </a:p>
-        </p:txBody>
-      </p:sp>
-      <p:sp>
-        <p:nvSpPr>
-          <p:cNvPr id="17" name="Rounded Rectangle 16"/>
-          <p:cNvSpPr/>
-          <p:nvPr/>
-        </p:nvSpPr>
-        <p:spPr>
-          <a:xfrm>
-            <a:off x="6187287" y="3890772"/>
-            <a:ext cx="5547207" cy="2464308"/>
-          </a:xfrm>
-          <a:prstGeom prst="roundRect">
-            <a:avLst>
-              <a:gd name="adj" fmla="val 12000"/>
-            </a:avLst>
-          </a:prstGeom>
-          <a:solidFill>
-            <a:srgbClr val="F2F2F2"/>
-          </a:solidFill>
-          <a:ln>
-            <a:noFill/>
-          </a:ln>
-        </p:spPr>
-        <p:style>
-          <a:lnRef idx="1">
-            <a:schemeClr val="accent1"/>
-          </a:lnRef>
-          <a:fillRef idx="3">
-            <a:schemeClr val="accent1"/>
-          </a:fillRef>
-          <a:effectRef idx="2">
-            <a:schemeClr val="accent1"/>
-          </a:effectRef>
-          <a:fontRef idx="minor">
-            <a:schemeClr val="lt1"/>
-          </a:fontRef>
-        </p:style>
-        <p:txBody>
-          <a:bodyPr rtlCol="0" anchor="ctr"/>
-          <a:lstStyle/>
-          <a:p>
-            <a:pPr algn="ctr"/>
-          </a:p>
-        </p:txBody>
-      </p:sp>
-      <p:sp>
-        <p:nvSpPr>
-          <p:cNvPr id="18" name="Rectangle 17"/>
-          <p:cNvSpPr/>
-          <p:nvPr/>
-        </p:nvSpPr>
-        <p:spPr>
-          <a:xfrm>
-            <a:off x="6187287" y="3890772"/>
-            <a:ext cx="5547207" cy="91440"/>
-          </a:xfrm>
-          <a:prstGeom prst="rect">
-            <a:avLst/>
-          </a:prstGeom>
-          <a:solidFill>
-            <a:srgbClr val="095292"/>
-          </a:solidFill>
-          <a:ln>
-            <a:noFill/>
-          </a:ln>
-        </p:spPr>
-        <p:style>
-          <a:lnRef idx="1">
-            <a:schemeClr val="accent1"/>
-          </a:lnRef>
-          <a:fillRef idx="3">
-            <a:schemeClr val="accent1"/>
-          </a:fillRef>
-          <a:effectRef idx="2">
-            <a:schemeClr val="accent1"/>
-          </a:effectRef>
-          <a:fontRef idx="minor">
-            <a:schemeClr val="lt1"/>
-          </a:fontRef>
-        </p:style>
-        <p:txBody>
-          <a:bodyPr rtlCol="0" anchor="ctr"/>
-          <a:lstStyle/>
-          <a:p>
-            <a:pPr algn="ctr"/>
-          </a:p>
-        </p:txBody>
-      </p:sp>
-      <p:sp>
-        <p:nvSpPr>
-          <p:cNvPr id="19" name="TextBox 18"/>
-          <p:cNvSpPr txBox="1"/>
-          <p:nvPr/>
-        </p:nvSpPr>
-        <p:spPr>
-          <a:xfrm>
-            <a:off x="6351879" y="4119372"/>
-            <a:ext cx="5218023" cy="411480"/>
-          </a:xfrm>
-          <a:prstGeom prst="rect">
-            <a:avLst/>
-          </a:prstGeom>
-          <a:noFill/>
-        </p:spPr>
-        <p:txBody>
-          <a:bodyPr wrap="square">
-            <a:spAutoFit/>
-          </a:bodyPr>
-          <a:lstStyle/>
-          <a:p>
-            <a:r>
-              <a:rPr sz="1500" b="1" i="0">
-                <a:solidFill>
-                  <a:srgbClr val="095292"/>
-                </a:solidFill>
-                <a:latin typeface="Calibri"/>
-              </a:rPr>
-              <a:t>Corto y al grano</a:t>
-            </a:r>
-          </a:p>
-        </p:txBody>
-      </p:sp>
-      <p:sp>
-        <p:nvSpPr>
-          <p:cNvPr id="20" name="TextBox 19"/>
-          <p:cNvSpPr txBox="1"/>
-          <p:nvPr/>
-        </p:nvSpPr>
-        <p:spPr>
-          <a:xfrm>
-            <a:off x="6351879" y="4576572"/>
-            <a:ext cx="5218023" cy="1595628"/>
-          </a:xfrm>
-          <a:prstGeom prst="rect">
-            <a:avLst/>
-          </a:prstGeom>
-          <a:noFill/>
-        </p:spPr>
-        <p:txBody>
-          <a:bodyPr wrap="square">
-            <a:spAutoFit/>
-          </a:bodyPr>
-          <a:lstStyle/>
-          <a:p>
-            <a:r>
-              <a:rPr sz="1300" b="0" i="0">
-                <a:solidFill>
-                  <a:srgbClr val="333333"/>
-                </a:solidFill>
-                <a:latin typeface="Calibri"/>
-              </a:rPr>
-              <a:t>Tres minutos alcanzan para dos o tres preguntas si las respuestas duran treinta segundos. Una respuesta de dos minutos se come las preguntas de los demás.</a:t>
-            </a:r>
-          </a:p>
-        </p:txBody>
-      </p:sp>
-      <p:sp>
-        <p:nvSpPr>
-          <p:cNvPr id="21" name="TextBox 20"/>
+              <a:t>–   Responde quien hizo la matriz, en 30 segundos.</a:t>
+            </a:r>
+          </a:p>
+        </p:txBody>
+      </p:sp>
+      <p:sp>
+        <p:nvSpPr>
+          <p:cNvPr id="14" name="TextBox 13"/>
           <p:cNvSpPr txBox="1"/>
           <p:nvPr/>
         </p:nvSpPr>
@@ -8854,7 +8333,7 @@
         <p:spPr>
           <a:xfrm>
             <a:off x="0" y="0"/>
-            <a:ext cx="12191695" cy="1170432"/>
+            <a:ext cx="12191695" cy="960120"/>
           </a:xfrm>
           <a:prstGeom prst="rect">
             <a:avLst/>
@@ -8896,7 +8375,7 @@
         </p:nvSpPr>
         <p:spPr>
           <a:xfrm>
-            <a:off x="0" y="1170432"/>
+            <a:off x="0" y="960120"/>
             <a:ext cx="12191695" cy="41148"/>
           </a:xfrm>
           <a:prstGeom prst="rect">
@@ -8940,7 +8419,7 @@
         <p:spPr>
           <a:xfrm>
             <a:off x="457200" y="164592"/>
-            <a:ext cx="11277295" cy="384048"/>
+            <a:ext cx="11277295" cy="502920"/>
           </a:xfrm>
           <a:prstGeom prst="rect">
             <a:avLst/>
@@ -8960,55 +8439,21 @@
                 </a:solidFill>
                 <a:latin typeface="Calibri"/>
               </a:rPr>
-              <a:t>Ejemplo: la misma pregunta, dos respuestas</a:t>
-            </a:r>
-          </a:p>
-        </p:txBody>
-      </p:sp>
-      <p:sp>
-        <p:nvSpPr>
-          <p:cNvPr id="5" name="TextBox 4"/>
-          <p:cNvSpPr txBox="1"/>
-          <p:nvPr/>
-        </p:nvSpPr>
-        <p:spPr>
-          <a:xfrm>
-            <a:off x="457200" y="566928"/>
-            <a:ext cx="11277295" cy="411480"/>
-          </a:xfrm>
-          <a:prstGeom prst="rect">
-            <a:avLst/>
-          </a:prstGeom>
-          <a:noFill/>
-        </p:spPr>
-        <p:txBody>
-          <a:bodyPr wrap="square">
-            <a:spAutoFit/>
-          </a:bodyPr>
-          <a:lstStyle/>
-          <a:p>
-            <a:r>
-              <a:rPr sz="1400" b="0" i="0">
-                <a:solidFill>
-                  <a:srgbClr val="B8D8EE"/>
-                </a:solidFill>
-                <a:latin typeface="Calibri"/>
-              </a:rPr>
-              <a:t>Pregunta del curso: «¿Por qué la app no deja pagar?»</a:t>
-            </a:r>
-          </a:p>
-        </p:txBody>
-      </p:sp>
-      <p:sp>
-        <p:nvSpPr>
-          <p:cNvPr id="6" name="Rounded Rectangle 5"/>
+              <a:t>Tres cosas antes de empezar</a:t>
+            </a:r>
+          </a:p>
+        </p:txBody>
+      </p:sp>
+      <p:sp>
+        <p:nvSpPr>
+          <p:cNvPr id="5" name="Rounded Rectangle 4"/>
           <p:cNvSpPr/>
           <p:nvPr/>
         </p:nvSpPr>
         <p:spPr>
           <a:xfrm>
-            <a:off x="457200" y="1472184"/>
-            <a:ext cx="5478627" cy="4882896"/>
+            <a:off x="457200" y="1261872"/>
+            <a:ext cx="11277295" cy="1051560"/>
           </a:xfrm>
           <a:prstGeom prst="roundRect">
             <a:avLst>
@@ -9046,14 +8491,14 @@
       </p:sp>
       <p:sp>
         <p:nvSpPr>
-          <p:cNvPr id="7" name="Rectangle 6"/>
+          <p:cNvPr id="6" name="Rectangle 5"/>
           <p:cNvSpPr/>
           <p:nvPr/>
         </p:nvSpPr>
         <p:spPr>
           <a:xfrm>
-            <a:off x="457200" y="1472184"/>
-            <a:ext cx="5478627" cy="502920"/>
+            <a:off x="457200" y="1261872"/>
+            <a:ext cx="128016" cy="1051560"/>
           </a:xfrm>
           <a:prstGeom prst="rect">
             <a:avLst/>
@@ -9089,47 +8534,14 @@
       </p:sp>
       <p:sp>
         <p:nvSpPr>
-          <p:cNvPr id="8" name="TextBox 7"/>
+          <p:cNvPr id="7" name="TextBox 6"/>
           <p:cNvSpPr txBox="1"/>
           <p:nvPr/>
         </p:nvSpPr>
         <p:spPr>
           <a:xfrm>
-            <a:off x="594360" y="1563624"/>
-            <a:ext cx="5204307" cy="365760"/>
-          </a:xfrm>
-          <a:prstGeom prst="rect">
-            <a:avLst/>
-          </a:prstGeom>
-          <a:noFill/>
-        </p:spPr>
-        <p:txBody>
-          <a:bodyPr wrap="square" anchor="ctr"/>
-          <a:lstStyle/>
-          <a:p>
-            <a:pPr algn="ctr"/>
-            <a:r>
-              <a:rPr sz="1600" b="1" i="0">
-                <a:solidFill>
-                  <a:srgbClr val="FFFFFF"/>
-                </a:solidFill>
-                <a:latin typeface="Calibri"/>
-              </a:rPr>
-              <a:t>Excusa</a:t>
-            </a:r>
-          </a:p>
-        </p:txBody>
-      </p:sp>
-      <p:sp>
-        <p:nvSpPr>
-          <p:cNvPr id="9" name="TextBox 8"/>
-          <p:cNvSpPr txBox="1"/>
-          <p:nvPr/>
-        </p:nvSpPr>
-        <p:spPr>
-          <a:xfrm>
-            <a:off x="621792" y="2112263"/>
-            <a:ext cx="5158587" cy="4288536"/>
+            <a:off x="777240" y="1399031"/>
+            <a:ext cx="10774375" cy="822959"/>
           </a:xfrm>
           <a:prstGeom prst="rect">
             <a:avLst/>
@@ -9142,65 +8554,71 @@
           </a:bodyPr>
           <a:lstStyle/>
           <a:p>
+            <a:r>
+              <a:rPr sz="1200" b="1" i="0">
+                <a:solidFill>
+                  <a:srgbClr val="A02030"/>
+                </a:solidFill>
+                <a:latin typeface="Calibri"/>
+              </a:rPr>
+              <a:t>Atención</a:t>
+            </a:r>
+          </a:p>
+          <a:p>
             <a:pPr>
-              <a:spcAft>
-                <a:spcPts val="800"/>
-              </a:spcAft>
+              <a:spcBef>
+                <a:spcPts val="400"/>
+              </a:spcBef>
             </a:pPr>
             <a:r>
-              <a:rPr sz="1500" b="0" i="0">
+              <a:rPr sz="1400" b="1" i="0">
                 <a:solidFill>
                   <a:srgbClr val="333333"/>
                 </a:solidFill>
                 <a:latin typeface="Calibri"/>
               </a:rPr>
-              <a:t>–   «No alcanzamos el tiempo».</a:t>
-            </a:r>
-          </a:p>
-          <a:p>
-            <a:pPr>
-              <a:spcAft>
-                <a:spcPts val="800"/>
-              </a:spcAft>
-            </a:pPr>
-            <a:r>
-              <a:rPr sz="1500" b="0" i="0">
+              <a:t>El PDF y las capturas, en la carpeta, ahora.</a:t>
+            </a:r>
+            <a:r>
+              <a:rPr sz="1400" b="0" i="0">
                 <a:solidFill>
                   <a:srgbClr val="333333"/>
                 </a:solidFill>
                 <a:latin typeface="Calibri"/>
               </a:rPr>
-              <a:t>–   «Lo íbamos a hacer pero el profe dijo que no».</a:t>
-            </a:r>
-          </a:p>
-          <a:p>
-            <a:pPr>
-              <a:spcAft>
-                <a:spcPts val="800"/>
-              </a:spcAft>
-            </a:pPr>
-            <a:r>
-              <a:rPr sz="1500" b="0" i="0">
+              <a:t> No al final, no «después de exponer». Si el prototipo no carga en vivo, el equipo narra el mismo recorrido sobre las capturas y </a:t>
+            </a:r>
+            <a:r>
+              <a:rPr sz="1400" b="1" i="0">
                 <a:solidFill>
                   <a:srgbClr val="333333"/>
                 </a:solidFill>
                 <a:latin typeface="Calibri"/>
               </a:rPr>
-              <a:t>–   Responde quien no hizo esa parte, y duda.</a:t>
-            </a:r>
-          </a:p>
-        </p:txBody>
-      </p:sp>
-      <p:sp>
-        <p:nvSpPr>
-          <p:cNvPr id="10" name="Rounded Rectangle 9"/>
+              <a:t>no pierde la demostración</a:t>
+            </a:r>
+            <a:r>
+              <a:rPr sz="1400" b="0" i="0">
+                <a:solidFill>
+                  <a:srgbClr val="333333"/>
+                </a:solidFill>
+                <a:latin typeface="Calibri"/>
+              </a:rPr>
+              <a:t>. Es literalmente para hoy que se preparó eso en la Clase 14.</a:t>
+            </a:r>
+          </a:p>
+        </p:txBody>
+      </p:sp>
+      <p:sp>
+        <p:nvSpPr>
+          <p:cNvPr id="8" name="Rounded Rectangle 7"/>
           <p:cNvSpPr/>
           <p:nvPr/>
         </p:nvSpPr>
         <p:spPr>
           <a:xfrm>
-            <a:off x="6255867" y="1472184"/>
-            <a:ext cx="5478627" cy="4882896"/>
+            <a:off x="457200" y="2478024"/>
+            <a:ext cx="11277295" cy="1051560"/>
           </a:xfrm>
           <a:prstGeom prst="roundRect">
             <a:avLst>
@@ -9238,20 +8656,20 @@
       </p:sp>
       <p:sp>
         <p:nvSpPr>
-          <p:cNvPr id="11" name="Rectangle 10"/>
+          <p:cNvPr id="9" name="Rectangle 8"/>
           <p:cNvSpPr/>
           <p:nvPr/>
         </p:nvSpPr>
         <p:spPr>
           <a:xfrm>
-            <a:off x="6255867" y="1472184"/>
-            <a:ext cx="5478627" cy="502920"/>
+            <a:off x="457200" y="2478024"/>
+            <a:ext cx="128016" cy="1051560"/>
           </a:xfrm>
           <a:prstGeom prst="rect">
             <a:avLst/>
           </a:prstGeom>
           <a:solidFill>
-            <a:srgbClr val="095292"/>
+            <a:srgbClr val="269CCB"/>
           </a:solidFill>
           <a:ln>
             <a:noFill/>
@@ -9281,47 +8699,14 @@
       </p:sp>
       <p:sp>
         <p:nvSpPr>
-          <p:cNvPr id="12" name="TextBox 11"/>
+          <p:cNvPr id="10" name="TextBox 9"/>
           <p:cNvSpPr txBox="1"/>
           <p:nvPr/>
         </p:nvSpPr>
         <p:spPr>
           <a:xfrm>
-            <a:off x="6393027" y="1563624"/>
-            <a:ext cx="5204307" cy="365760"/>
-          </a:xfrm>
-          <a:prstGeom prst="rect">
-            <a:avLst/>
-          </a:prstGeom>
-          <a:noFill/>
-        </p:spPr>
-        <p:txBody>
-          <a:bodyPr wrap="square" anchor="ctr"/>
-          <a:lstStyle/>
-          <a:p>
-            <a:pPr algn="ctr"/>
-            <a:r>
-              <a:rPr sz="1600" b="1" i="0">
-                <a:solidFill>
-                  <a:srgbClr val="FFFFFF"/>
-                </a:solidFill>
-                <a:latin typeface="Calibri"/>
-              </a:rPr>
-              <a:t>Decisión</a:t>
-            </a:r>
-          </a:p>
-        </p:txBody>
-      </p:sp>
-      <p:sp>
-        <p:nvSpPr>
-          <p:cNvPr id="13" name="TextBox 12"/>
-          <p:cNvSpPr txBox="1"/>
-          <p:nvPr/>
-        </p:nvSpPr>
-        <p:spPr>
-          <a:xfrm>
-            <a:off x="6420459" y="2112263"/>
-            <a:ext cx="5158587" cy="4288536"/>
+            <a:off x="777240" y="2615184"/>
+            <a:ext cx="10774375" cy="822959"/>
           </a:xfrm>
           <a:prstGeom prst="rect">
             <a:avLst/>
@@ -9334,69 +8719,204 @@
           </a:bodyPr>
           <a:lstStyle/>
           <a:p>
+            <a:r>
+              <a:rPr sz="1200" b="1" i="0">
+                <a:solidFill>
+                  <a:srgbClr val="269CCB"/>
+                </a:solidFill>
+                <a:latin typeface="Calibri"/>
+              </a:rPr>
+              <a:t>Info</a:t>
+            </a:r>
+          </a:p>
+          <a:p>
             <a:pPr>
-              <a:spcAft>
-                <a:spcPts val="800"/>
-              </a:spcAft>
+              <a:spcBef>
+                <a:spcPts val="400"/>
+              </a:spcBef>
             </a:pPr>
             <a:r>
-              <a:rPr sz="1500" b="0" i="0">
+              <a:rPr sz="1400" b="1" i="0">
                 <a:solidFill>
                   <a:srgbClr val="333333"/>
                 </a:solidFill>
                 <a:latin typeface="Calibri"/>
               </a:rPr>
-              <a:t>–   «</a:t>
-            </a:r>
-            <a:r>
-              <a:rPr sz="1500" b="1" i="0">
+              <a:t>Se corta a los nueve minutos y no es rigidez por rigidez:</a:t>
+            </a:r>
+            <a:r>
+              <a:rPr sz="1400" b="0" i="0">
                 <a:solidFill>
                   <a:srgbClr val="333333"/>
                 </a:solidFill>
                 <a:latin typeface="Calibri"/>
               </a:rPr>
-              <a:t>Decidimos</a:t>
-            </a:r>
-            <a:r>
-              <a:rPr sz="1500" b="0" i="0">
+              <a:t> con cinco equipos en 90 minutos, cada minuto que un equipo se pasa lo pierde el último en exponer. En una sustentación de grado o en un comité funciona igual — el tiempo asignado es todo el tiempo que hay.</a:t>
+            </a:r>
+          </a:p>
+        </p:txBody>
+      </p:sp>
+      <p:sp>
+        <p:nvSpPr>
+          <p:cNvPr id="11" name="Rounded Rectangle 10"/>
+          <p:cNvSpPr/>
+          <p:nvPr/>
+        </p:nvSpPr>
+        <p:spPr>
+          <a:xfrm>
+            <a:off x="457200" y="3694176"/>
+            <a:ext cx="11277295" cy="1051560"/>
+          </a:xfrm>
+          <a:prstGeom prst="roundRect">
+            <a:avLst>
+              <a:gd name="adj" fmla="val 12000"/>
+            </a:avLst>
+          </a:prstGeom>
+          <a:solidFill>
+            <a:srgbClr val="FFF8E1"/>
+          </a:solidFill>
+          <a:ln>
+            <a:noFill/>
+          </a:ln>
+        </p:spPr>
+        <p:style>
+          <a:lnRef idx="1">
+            <a:schemeClr val="accent1"/>
+          </a:lnRef>
+          <a:fillRef idx="3">
+            <a:schemeClr val="accent1"/>
+          </a:fillRef>
+          <a:effectRef idx="2">
+            <a:schemeClr val="accent1"/>
+          </a:effectRef>
+          <a:fontRef idx="minor">
+            <a:schemeClr val="lt1"/>
+          </a:fontRef>
+        </p:style>
+        <p:txBody>
+          <a:bodyPr rtlCol="0" anchor="ctr"/>
+          <a:lstStyle/>
+          <a:p>
+            <a:pPr algn="ctr"/>
+          </a:p>
+        </p:txBody>
+      </p:sp>
+      <p:sp>
+        <p:nvSpPr>
+          <p:cNvPr id="12" name="Rectangle 11"/>
+          <p:cNvSpPr/>
+          <p:nvPr/>
+        </p:nvSpPr>
+        <p:spPr>
+          <a:xfrm>
+            <a:off x="457200" y="3694176"/>
+            <a:ext cx="128016" cy="1051560"/>
+          </a:xfrm>
+          <a:prstGeom prst="rect">
+            <a:avLst/>
+          </a:prstGeom>
+          <a:solidFill>
+            <a:srgbClr val="FFD000"/>
+          </a:solidFill>
+          <a:ln>
+            <a:noFill/>
+          </a:ln>
+        </p:spPr>
+        <p:style>
+          <a:lnRef idx="1">
+            <a:schemeClr val="accent1"/>
+          </a:lnRef>
+          <a:fillRef idx="3">
+            <a:schemeClr val="accent1"/>
+          </a:fillRef>
+          <a:effectRef idx="2">
+            <a:schemeClr val="accent1"/>
+          </a:effectRef>
+          <a:fontRef idx="minor">
+            <a:schemeClr val="lt1"/>
+          </a:fontRef>
+        </p:style>
+        <p:txBody>
+          <a:bodyPr rtlCol="0" anchor="ctr"/>
+          <a:lstStyle/>
+          <a:p>
+            <a:pPr algn="ctr"/>
+          </a:p>
+        </p:txBody>
+      </p:sp>
+      <p:sp>
+        <p:nvSpPr>
+          <p:cNvPr id="13" name="TextBox 12"/>
+          <p:cNvSpPr txBox="1"/>
+          <p:nvPr/>
+        </p:nvSpPr>
+        <p:spPr>
+          <a:xfrm>
+            <a:off x="777240" y="3831336"/>
+            <a:ext cx="10774375" cy="822959"/>
+          </a:xfrm>
+          <a:prstGeom prst="rect">
+            <a:avLst/>
+          </a:prstGeom>
+          <a:noFill/>
+        </p:spPr>
+        <p:txBody>
+          <a:bodyPr wrap="square">
+            <a:spAutoFit/>
+          </a:bodyPr>
+          <a:lstStyle/>
+          <a:p>
+            <a:r>
+              <a:rPr sz="1200" b="1" i="0">
+                <a:solidFill>
+                  <a:srgbClr val="FFD000"/>
+                </a:solidFill>
+                <a:latin typeface="Calibri"/>
+              </a:rPr>
+              <a:t>Aclaración</a:t>
+            </a:r>
+          </a:p>
+          <a:p>
+            <a:pPr>
+              <a:spcBef>
+                <a:spcPts val="400"/>
+              </a:spcBef>
+            </a:pPr>
+            <a:r>
+              <a:rPr sz="1400" b="1" i="0">
                 <a:solidFill>
                   <a:srgbClr val="333333"/>
                 </a:solidFill>
                 <a:latin typeface="Calibri"/>
               </a:rPr>
-              <a:t> dejarlo fuera del alcance mínimo en la sesión 8».</a:t>
-            </a:r>
-          </a:p>
-          <a:p>
-            <a:pPr>
-              <a:spcAft>
-                <a:spcPts val="800"/>
-              </a:spcAft>
-            </a:pPr>
-            <a:r>
-              <a:rPr sz="1500" b="0" i="0">
+              <a:t>Nada de esto termina hoy.</a:t>
+            </a:r>
+            <a:r>
+              <a:rPr sz="1400" b="0" i="0">
                 <a:solidFill>
                   <a:srgbClr val="333333"/>
                 </a:solidFill>
                 <a:latin typeface="Calibri"/>
               </a:rPr>
-              <a:t>–   «Pagar exige guardar datos que no necesitamos para el turno».</a:t>
-            </a:r>
-          </a:p>
-          <a:p>
-            <a:pPr>
-              <a:spcAft>
-                <a:spcPts val="800"/>
-              </a:spcAft>
-            </a:pPr>
-            <a:r>
-              <a:rPr sz="1500" b="0" i="0">
+              <a:t> De cada exposición sale una lista de ajustes para el </a:t>
+            </a:r>
+            <a:r>
+              <a:rPr sz="1400" b="1" i="0">
                 <a:solidFill>
                   <a:srgbClr val="333333"/>
                 </a:solidFill>
                 <a:latin typeface="Calibri"/>
               </a:rPr>
-              <a:t>–   Responde quien hizo la matriz, en 30 segundos.</a:t>
+              <a:t>informe final de la Clase 16</a:t>
+            </a:r>
+            <a:r>
+              <a:rPr sz="1400" b="0" i="0">
+                <a:solidFill>
+                  <a:srgbClr val="333333"/>
+                </a:solidFill>
+                <a:latin typeface="Calibri"/>
+              </a:rPr>
+              <a:t>. Anoten lo que el curso no entendió: eso es exactamente lo que hay que escribir mejor en el informe.</a:t>
             </a:r>
           </a:p>
         </p:txBody>
@@ -9471,337 +8991,7 @@
         <p:spPr>
           <a:xfrm>
             <a:off x="0" y="0"/>
-            <a:ext cx="12191695" cy="960120"/>
-          </a:xfrm>
-          <a:prstGeom prst="rect">
-            <a:avLst/>
-          </a:prstGeom>
-          <a:solidFill>
-            <a:srgbClr val="095292"/>
-          </a:solidFill>
-          <a:ln>
-            <a:noFill/>
-          </a:ln>
-        </p:spPr>
-        <p:style>
-          <a:lnRef idx="1">
-            <a:schemeClr val="accent1"/>
-          </a:lnRef>
-          <a:fillRef idx="3">
-            <a:schemeClr val="accent1"/>
-          </a:fillRef>
-          <a:effectRef idx="2">
-            <a:schemeClr val="accent1"/>
-          </a:effectRef>
-          <a:fontRef idx="minor">
-            <a:schemeClr val="lt1"/>
-          </a:fontRef>
-        </p:style>
-        <p:txBody>
-          <a:bodyPr rtlCol="0" anchor="ctr"/>
-          <a:lstStyle/>
-          <a:p>
-            <a:pPr algn="ctr"/>
-          </a:p>
-        </p:txBody>
-      </p:sp>
-      <p:sp>
-        <p:nvSpPr>
-          <p:cNvPr id="3" name="Rectangle 2"/>
-          <p:cNvSpPr/>
-          <p:nvPr/>
-        </p:nvSpPr>
-        <p:spPr>
-          <a:xfrm>
-            <a:off x="0" y="960120"/>
-            <a:ext cx="12191695" cy="41148"/>
-          </a:xfrm>
-          <a:prstGeom prst="rect">
-            <a:avLst/>
-          </a:prstGeom>
-          <a:solidFill>
-            <a:srgbClr val="FFD000"/>
-          </a:solidFill>
-          <a:ln>
-            <a:noFill/>
-          </a:ln>
-        </p:spPr>
-        <p:style>
-          <a:lnRef idx="1">
-            <a:schemeClr val="accent1"/>
-          </a:lnRef>
-          <a:fillRef idx="3">
-            <a:schemeClr val="accent1"/>
-          </a:fillRef>
-          <a:effectRef idx="2">
-            <a:schemeClr val="accent1"/>
-          </a:effectRef>
-          <a:fontRef idx="minor">
-            <a:schemeClr val="lt1"/>
-          </a:fontRef>
-        </p:style>
-        <p:txBody>
-          <a:bodyPr rtlCol="0" anchor="ctr"/>
-          <a:lstStyle/>
-          <a:p>
-            <a:pPr algn="ctr"/>
-          </a:p>
-        </p:txBody>
-      </p:sp>
-      <p:sp>
-        <p:nvSpPr>
-          <p:cNvPr id="4" name="TextBox 3"/>
-          <p:cNvSpPr txBox="1"/>
-          <p:nvPr/>
-        </p:nvSpPr>
-        <p:spPr>
-          <a:xfrm>
-            <a:off x="457200" y="164592"/>
-            <a:ext cx="11277295" cy="502920"/>
-          </a:xfrm>
-          <a:prstGeom prst="rect">
-            <a:avLst/>
-          </a:prstGeom>
-          <a:noFill/>
-        </p:spPr>
-        <p:txBody>
-          <a:bodyPr wrap="square">
-            <a:spAutoFit/>
-          </a:bodyPr>
-          <a:lstStyle/>
-          <a:p>
-            <a:r>
-              <a:rPr sz="2600" b="1" i="0">
-                <a:solidFill>
-                  <a:srgbClr val="FFFFFF"/>
-                </a:solidFill>
-                <a:latin typeface="Calibri"/>
-              </a:rPr>
-              <a:t>Tres cosas antes de empezar</a:t>
-            </a:r>
-          </a:p>
-        </p:txBody>
-      </p:sp>
-      <p:sp>
-        <p:nvSpPr>
-          <p:cNvPr id="5" name="Rounded Rectangle 4"/>
-          <p:cNvSpPr/>
-          <p:nvPr/>
-        </p:nvSpPr>
-        <p:spPr>
-          <a:xfrm>
-            <a:off x="457200" y="1261872"/>
-            <a:ext cx="11277295" cy="1051560"/>
-          </a:xfrm>
-          <a:prstGeom prst="roundRect">
-            <a:avLst>
-              <a:gd name="adj" fmla="val 12000"/>
-            </a:avLst>
-          </a:prstGeom>
-          <a:solidFill>
-            <a:srgbClr val="FBE4E4"/>
-          </a:solidFill>
-          <a:ln>
-            <a:noFill/>
-          </a:ln>
-        </p:spPr>
-        <p:style>
-          <a:lnRef idx="1">
-            <a:schemeClr val="accent1"/>
-          </a:lnRef>
-          <a:fillRef idx="3">
-            <a:schemeClr val="accent1"/>
-          </a:fillRef>
-          <a:effectRef idx="2">
-            <a:schemeClr val="accent1"/>
-          </a:effectRef>
-          <a:fontRef idx="minor">
-            <a:schemeClr val="lt1"/>
-          </a:fontRef>
-        </p:style>
-        <p:txBody>
-          <a:bodyPr rtlCol="0" anchor="ctr"/>
-          <a:lstStyle/>
-          <a:p>
-            <a:pPr algn="ctr"/>
-          </a:p>
-        </p:txBody>
-      </p:sp>
-      <p:sp>
-        <p:nvSpPr>
-          <p:cNvPr id="6" name="Rectangle 5"/>
-          <p:cNvSpPr/>
-          <p:nvPr/>
-        </p:nvSpPr>
-        <p:spPr>
-          <a:xfrm>
-            <a:off x="457200" y="1261872"/>
-            <a:ext cx="128016" cy="1051560"/>
-          </a:xfrm>
-          <a:prstGeom prst="rect">
-            <a:avLst/>
-          </a:prstGeom>
-          <a:solidFill>
-            <a:srgbClr val="A02030"/>
-          </a:solidFill>
-          <a:ln>
-            <a:noFill/>
-          </a:ln>
-        </p:spPr>
-        <p:style>
-          <a:lnRef idx="1">
-            <a:schemeClr val="accent1"/>
-          </a:lnRef>
-          <a:fillRef idx="3">
-            <a:schemeClr val="accent1"/>
-          </a:fillRef>
-          <a:effectRef idx="2">
-            <a:schemeClr val="accent1"/>
-          </a:effectRef>
-          <a:fontRef idx="minor">
-            <a:schemeClr val="lt1"/>
-          </a:fontRef>
-        </p:style>
-        <p:txBody>
-          <a:bodyPr rtlCol="0" anchor="ctr"/>
-          <a:lstStyle/>
-          <a:p>
-            <a:pPr algn="ctr"/>
-          </a:p>
-        </p:txBody>
-      </p:sp>
-      <p:sp>
-        <p:nvSpPr>
-          <p:cNvPr id="7" name="TextBox 6"/>
-          <p:cNvSpPr txBox="1"/>
-          <p:nvPr/>
-        </p:nvSpPr>
-        <p:spPr>
-          <a:xfrm>
-            <a:off x="777240" y="1399031"/>
-            <a:ext cx="10774375" cy="822959"/>
-          </a:xfrm>
-          <a:prstGeom prst="rect">
-            <a:avLst/>
-          </a:prstGeom>
-          <a:noFill/>
-        </p:spPr>
-        <p:txBody>
-          <a:bodyPr wrap="square">
-            <a:spAutoFit/>
-          </a:bodyPr>
-          <a:lstStyle/>
-          <a:p>
-            <a:r>
-              <a:rPr sz="1200" b="1" i="0">
-                <a:solidFill>
-                  <a:srgbClr val="A02030"/>
-                </a:solidFill>
-                <a:latin typeface="Calibri"/>
-              </a:rPr>
-              <a:t>Atención</a:t>
-            </a:r>
-          </a:p>
-          <a:p>
-            <a:pPr>
-              <a:spcBef>
-                <a:spcPts val="400"/>
-              </a:spcBef>
-            </a:pPr>
-            <a:r>
-              <a:rPr sz="1400" b="1" i="0">
-                <a:solidFill>
-                  <a:srgbClr val="333333"/>
-                </a:solidFill>
-                <a:latin typeface="Calibri"/>
-              </a:rPr>
-              <a:t>El PDF y las capturas, en la carpeta, ahora.</a:t>
-            </a:r>
-            <a:r>
-              <a:rPr sz="1400" b="0" i="0">
-                <a:solidFill>
-                  <a:srgbClr val="333333"/>
-                </a:solidFill>
-                <a:latin typeface="Calibri"/>
-              </a:rPr>
-              <a:t> No al final, no «después de exponer». Si el prototipo no carga en vivo, el equipo narra el mismo recorrido sobre las capturas y </a:t>
-            </a:r>
-            <a:r>
-              <a:rPr sz="1400" b="1" i="0">
-                <a:solidFill>
-                  <a:srgbClr val="333333"/>
-                </a:solidFill>
-                <a:latin typeface="Calibri"/>
-              </a:rPr>
-              <a:t>no pierde el tramo de 25 puntos</a:t>
-            </a:r>
-            <a:r>
-              <a:rPr sz="1400" b="0" i="0">
-                <a:solidFill>
-                  <a:srgbClr val="333333"/>
-                </a:solidFill>
-                <a:latin typeface="Calibri"/>
-              </a:rPr>
-              <a:t>. Es literalmente para hoy que se preparó eso en la Clase 14.</a:t>
-            </a:r>
-          </a:p>
-        </p:txBody>
-      </p:sp>
-      <p:sp>
-        <p:nvSpPr>
-          <p:cNvPr id="8" name="Rounded Rectangle 7"/>
-          <p:cNvSpPr/>
-          <p:nvPr/>
-        </p:nvSpPr>
-        <p:spPr>
-          <a:xfrm>
-            <a:off x="457200" y="2478024"/>
-            <a:ext cx="11277295" cy="1051560"/>
-          </a:xfrm>
-          <a:prstGeom prst="roundRect">
-            <a:avLst>
-              <a:gd name="adj" fmla="val 12000"/>
-            </a:avLst>
-          </a:prstGeom>
-          <a:solidFill>
-            <a:srgbClr val="E8F4FA"/>
-          </a:solidFill>
-          <a:ln>
-            <a:noFill/>
-          </a:ln>
-        </p:spPr>
-        <p:style>
-          <a:lnRef idx="1">
-            <a:schemeClr val="accent1"/>
-          </a:lnRef>
-          <a:fillRef idx="3">
-            <a:schemeClr val="accent1"/>
-          </a:fillRef>
-          <a:effectRef idx="2">
-            <a:schemeClr val="accent1"/>
-          </a:effectRef>
-          <a:fontRef idx="minor">
-            <a:schemeClr val="lt1"/>
-          </a:fontRef>
-        </p:style>
-        <p:txBody>
-          <a:bodyPr rtlCol="0" anchor="ctr"/>
-          <a:lstStyle/>
-          <a:p>
-            <a:pPr algn="ctr"/>
-          </a:p>
-        </p:txBody>
-      </p:sp>
-      <p:sp>
-        <p:nvSpPr>
-          <p:cNvPr id="9" name="Rectangle 8"/>
-          <p:cNvSpPr/>
-          <p:nvPr/>
-        </p:nvSpPr>
-        <p:spPr>
-          <a:xfrm>
-            <a:off x="457200" y="2478024"/>
-            <a:ext cx="128016" cy="1051560"/>
+            <a:ext cx="12191695" cy="164592"/>
           </a:xfrm>
           <a:prstGeom prst="rect">
             <a:avLst/>
@@ -9835,16 +9025,73 @@
           </a:p>
         </p:txBody>
       </p:sp>
-      <p:sp>
-        <p:nvSpPr>
-          <p:cNvPr id="10" name="TextBox 9"/>
+      <p:pic>
+        <p:nvPicPr>
+          <p:cNvPr id="3" name="Picture 2" descr="logo_uniajc_color.png"/>
+          <p:cNvPicPr>
+            <a:picLocks noChangeAspect="1"/>
+          </p:cNvPicPr>
+          <p:nvPr/>
+        </p:nvPicPr>
+        <p:blipFill>
+          <a:blip r:embed="rId2"/>
+          <a:stretch>
+            <a:fillRect/>
+          </a:stretch>
+        </p:blipFill>
+        <p:spPr>
+          <a:xfrm>
+            <a:off x="10271455" y="5998464"/>
+            <a:ext cx="1463040" cy="643233"/>
+          </a:xfrm>
+          <a:prstGeom prst="rect">
+            <a:avLst/>
+          </a:prstGeom>
+        </p:spPr>
+      </p:pic>
+      <p:sp>
+        <p:nvSpPr>
+          <p:cNvPr id="4" name="TextBox 3"/>
           <p:cNvSpPr txBox="1"/>
           <p:nvPr/>
         </p:nvSpPr>
         <p:spPr>
           <a:xfrm>
-            <a:off x="777240" y="2615184"/>
-            <a:ext cx="10774375" cy="822959"/>
+            <a:off x="457200" y="1737360"/>
+            <a:ext cx="11277295" cy="1097280"/>
+          </a:xfrm>
+          <a:prstGeom prst="rect">
+            <a:avLst/>
+          </a:prstGeom>
+          <a:noFill/>
+        </p:spPr>
+        <p:txBody>
+          <a:bodyPr wrap="square" anchor="ctr"/>
+          <a:lstStyle/>
+          <a:p>
+            <a:pPr algn="ctr"/>
+            <a:r>
+              <a:rPr sz="3400" b="1" i="0">
+                <a:solidFill>
+                  <a:srgbClr val="095292"/>
+                </a:solidFill>
+                <a:latin typeface="Calibri"/>
+              </a:rPr>
+              <a:t>Nos vemos en la Clase 16 · la última</a:t>
+            </a:r>
+          </a:p>
+        </p:txBody>
+      </p:sp>
+      <p:sp>
+        <p:nvSpPr>
+          <p:cNvPr id="5" name="TextBox 4"/>
+          <p:cNvSpPr txBox="1"/>
+          <p:nvPr/>
+        </p:nvSpPr>
+        <p:spPr>
+          <a:xfrm>
+            <a:off x="457200" y="3017520"/>
+            <a:ext cx="11277295" cy="1645920"/>
           </a:xfrm>
           <a:prstGeom prst="rect">
             <a:avLst/>
@@ -9857,141 +9104,49 @@
           </a:bodyPr>
           <a:lstStyle/>
           <a:p>
-            <a:r>
-              <a:rPr sz="1200" b="1" i="0">
-                <a:solidFill>
-                  <a:srgbClr val="269CCB"/>
-                </a:solidFill>
-                <a:latin typeface="Calibri"/>
-              </a:rPr>
-              <a:t>Info</a:t>
-            </a:r>
-          </a:p>
-          <a:p>
-            <a:pPr>
-              <a:spcBef>
-                <a:spcPts val="400"/>
-              </a:spcBef>
+            <a:pPr algn="ctr">
+              <a:spcAft>
+                <a:spcPts val="600"/>
+              </a:spcAft>
             </a:pPr>
             <a:r>
-              <a:rPr sz="1400" b="1" i="0">
+              <a:rPr sz="1600" b="0" i="0">
                 <a:solidFill>
                   <a:srgbClr val="333333"/>
                 </a:solidFill>
                 <a:latin typeface="Calibri"/>
               </a:rPr>
-              <a:t>Se corta a los nueve minutos y no es rigidez por rigidez:</a:t>
-            </a:r>
-            <a:r>
-              <a:rPr sz="1400" b="0" i="0">
+              <a:t>Exposición final de proyectos · Clase 15</a:t>
+            </a:r>
+          </a:p>
+          <a:p>
+            <a:pPr algn="ctr">
+              <a:spcAft>
+                <a:spcPts val="600"/>
+              </a:spcAft>
+            </a:pPr>
+            <a:r>
+              <a:rPr sz="1600" b="0" i="0">
                 <a:solidFill>
                   <a:srgbClr val="333333"/>
                 </a:solidFill>
                 <a:latin typeface="Calibri"/>
               </a:rPr>
-              <a:t> con cinco equipos en 90 minutos, cada minuto que un equipo se pasa lo pierde el último en exponer. En una sustentación de grado o en un comité funciona igual — el tiempo asignado es todo el tiempo que hay.</a:t>
-            </a:r>
-          </a:p>
-        </p:txBody>
-      </p:sp>
-      <p:sp>
-        <p:nvSpPr>
-          <p:cNvPr id="11" name="Rounded Rectangle 10"/>
-          <p:cNvSpPr/>
-          <p:nvPr/>
-        </p:nvSpPr>
-        <p:spPr>
-          <a:xfrm>
-            <a:off x="457200" y="3694176"/>
-            <a:ext cx="11277295" cy="1051560"/>
-          </a:xfrm>
-          <a:prstGeom prst="roundRect">
-            <a:avLst>
-              <a:gd name="adj" fmla="val 12000"/>
-            </a:avLst>
-          </a:prstGeom>
-          <a:solidFill>
-            <a:srgbClr val="FFF8E1"/>
-          </a:solidFill>
-          <a:ln>
-            <a:noFill/>
-          </a:ln>
-        </p:spPr>
-        <p:style>
-          <a:lnRef idx="1">
-            <a:schemeClr val="accent1"/>
-          </a:lnRef>
-          <a:fillRef idx="3">
-            <a:schemeClr val="accent1"/>
-          </a:fillRef>
-          <a:effectRef idx="2">
-            <a:schemeClr val="accent1"/>
-          </a:effectRef>
-          <a:fontRef idx="minor">
-            <a:schemeClr val="lt1"/>
-          </a:fontRef>
-        </p:style>
-        <p:txBody>
-          <a:bodyPr rtlCol="0" anchor="ctr"/>
-          <a:lstStyle/>
-          <a:p>
-            <a:pPr algn="ctr"/>
-          </a:p>
-        </p:txBody>
-      </p:sp>
-      <p:sp>
-        <p:nvSpPr>
-          <p:cNvPr id="12" name="Rectangle 11"/>
-          <p:cNvSpPr/>
-          <p:nvPr/>
-        </p:nvSpPr>
-        <p:spPr>
-          <a:xfrm>
-            <a:off x="457200" y="3694176"/>
-            <a:ext cx="128016" cy="1051560"/>
-          </a:xfrm>
-          <a:prstGeom prst="rect">
-            <a:avLst/>
-          </a:prstGeom>
-          <a:solidFill>
-            <a:srgbClr val="FFD000"/>
-          </a:solidFill>
-          <a:ln>
-            <a:noFill/>
-          </a:ln>
-        </p:spPr>
-        <p:style>
-          <a:lnRef idx="1">
-            <a:schemeClr val="accent1"/>
-          </a:lnRef>
-          <a:fillRef idx="3">
-            <a:schemeClr val="accent1"/>
-          </a:fillRef>
-          <a:effectRef idx="2">
-            <a:schemeClr val="accent1"/>
-          </a:effectRef>
-          <a:fontRef idx="minor">
-            <a:schemeClr val="lt1"/>
-          </a:fontRef>
-        </p:style>
-        <p:txBody>
-          <a:bodyPr rtlCol="0" anchor="ctr"/>
-          <a:lstStyle/>
-          <a:p>
-            <a:pPr algn="ctr"/>
-          </a:p>
-        </p:txBody>
-      </p:sp>
-      <p:sp>
-        <p:nvSpPr>
-          <p:cNvPr id="13" name="TextBox 12"/>
+              <a:t>FI300101 · UNIAJC · Ingeniería de Sistemas</a:t>
+            </a:r>
+          </a:p>
+        </p:txBody>
+      </p:sp>
+      <p:sp>
+        <p:nvSpPr>
+          <p:cNvPr id="6" name="TextBox 5"/>
           <p:cNvSpPr txBox="1"/>
           <p:nvPr/>
         </p:nvSpPr>
         <p:spPr>
           <a:xfrm>
-            <a:off x="777240" y="3831336"/>
-            <a:ext cx="10774375" cy="822959"/>
+            <a:off x="457200" y="4754880"/>
+            <a:ext cx="11277295" cy="640080"/>
           </a:xfrm>
           <a:prstGeom prst="rect">
             <a:avLst/>
@@ -10004,92 +9159,15 @@
           </a:bodyPr>
           <a:lstStyle/>
           <a:p>
-            <a:r>
-              <a:rPr sz="1200" b="1" i="0">
-                <a:solidFill>
-                  <a:srgbClr val="FFD000"/>
-                </a:solidFill>
-                <a:latin typeface="Calibri"/>
-              </a:rPr>
-              <a:t>Aclaración</a:t>
-            </a:r>
-          </a:p>
-          <a:p>
-            <a:pPr>
-              <a:spcBef>
-                <a:spcPts val="400"/>
-              </a:spcBef>
-            </a:pPr>
-            <a:r>
-              <a:rPr sz="1400" b="1" i="0">
-                <a:solidFill>
-                  <a:srgbClr val="333333"/>
-                </a:solidFill>
-                <a:latin typeface="Calibri"/>
-              </a:rPr>
-              <a:t>Nada de esto termina hoy.</a:t>
-            </a:r>
-            <a:r>
-              <a:rPr sz="1400" b="0" i="0">
-                <a:solidFill>
-                  <a:srgbClr val="333333"/>
-                </a:solidFill>
-                <a:latin typeface="Calibri"/>
-              </a:rPr>
-              <a:t> De cada exposición sale una lista de ajustes para el </a:t>
-            </a:r>
-            <a:r>
-              <a:rPr sz="1400" b="1" i="0">
-                <a:solidFill>
-                  <a:srgbClr val="333333"/>
-                </a:solidFill>
-                <a:latin typeface="Calibri"/>
-              </a:rPr>
-              <a:t>informe final de la Clase 16, que vale el 20 %</a:t>
-            </a:r>
-            <a:r>
-              <a:rPr sz="1400" b="0" i="0">
-                <a:solidFill>
-                  <a:srgbClr val="333333"/>
-                </a:solidFill>
-                <a:latin typeface="Calibri"/>
-              </a:rPr>
-              <a:t>. Anoten lo que el curso no entendió: eso es exactamente lo que hay que escribir mejor en el informe.</a:t>
-            </a:r>
-          </a:p>
-        </p:txBody>
-      </p:sp>
-      <p:sp>
-        <p:nvSpPr>
-          <p:cNvPr id="14" name="TextBox 13"/>
-          <p:cNvSpPr txBox="1"/>
-          <p:nvPr/>
-        </p:nvSpPr>
-        <p:spPr>
-          <a:xfrm>
-            <a:off x="11185855" y="6473952"/>
-            <a:ext cx="640080" cy="274320"/>
-          </a:xfrm>
-          <a:prstGeom prst="rect">
-            <a:avLst/>
-          </a:prstGeom>
-          <a:noFill/>
-        </p:spPr>
-        <p:txBody>
-          <a:bodyPr wrap="square">
-            <a:spAutoFit/>
-          </a:bodyPr>
-          <a:lstStyle/>
-          <a:p>
-            <a:pPr algn="r"/>
-            <a:r>
-              <a:rPr sz="1100" b="0" i="0">
-                <a:solidFill>
-                  <a:srgbClr val="666666"/>
-                </a:solidFill>
-                <a:latin typeface="Calibri"/>
-              </a:rPr>
-              <a:t>9</a:t>
+            <a:pPr algn="ctr"/>
+            <a:r>
+              <a:rPr sz="2000" b="1" i="0">
+                <a:solidFill>
+                  <a:srgbClr val="269CCB"/>
+                </a:solidFill>
+                <a:latin typeface="Calibri"/>
+              </a:rPr>
+              <a:t>Hace quince sesiones era una ocurrencia; hoy es un proyecto sustentado</a:t>
             </a:r>
           </a:p>
         </p:txBody>

--- a/Introduccion a la Ingenieria/Clases/Clase 15 - Exposicion final de proyectos/Presentacion.pptx
+++ b/Introduccion a la Ingenieria/Clases/Clase 15 - Exposicion final de proyectos/Presentacion.pptx
@@ -5221,14 +5221,118 @@
       </p:sp>
       <p:sp>
         <p:nvSpPr>
-          <p:cNvPr id="5" name="TextBox 4"/>
+          <p:cNvPr id="5" name="Rounded Rectangle 4"/>
+          <p:cNvSpPr/>
+          <p:nvPr/>
+        </p:nvSpPr>
+        <p:spPr>
+          <a:xfrm>
+            <a:off x="5797149" y="1573813"/>
+            <a:ext cx="6010497" cy="4057845"/>
+          </a:xfrm>
+          <a:prstGeom prst="roundRect">
+            <a:avLst>
+              <a:gd name="adj" fmla="val 4000"/>
+            </a:avLst>
+          </a:prstGeom>
+          <a:solidFill>
+            <a:srgbClr val="E8EEF4"/>
+          </a:solidFill>
+          <a:ln>
+            <a:noFill/>
+          </a:ln>
+        </p:spPr>
+        <p:style>
+          <a:lnRef idx="1">
+            <a:schemeClr val="accent1"/>
+          </a:lnRef>
+          <a:fillRef idx="3">
+            <a:schemeClr val="accent1"/>
+          </a:fillRef>
+          <a:effectRef idx="2">
+            <a:schemeClr val="accent1"/>
+          </a:effectRef>
+          <a:fontRef idx="minor">
+            <a:schemeClr val="lt1"/>
+          </a:fontRef>
+        </p:style>
+        <p:txBody>
+          <a:bodyPr rtlCol="0" anchor="ctr"/>
+          <a:lstStyle/>
+          <a:p>
+            <a:pPr algn="ctr"/>
+          </a:p>
+        </p:txBody>
+      </p:sp>
+      <p:pic>
+        <p:nvPicPr>
+          <p:cNvPr id="6" name="Picture 5" descr="students-learning-laptops-classroom.jpg"/>
+          <p:cNvPicPr>
+            <a:picLocks noChangeAspect="1"/>
+          </p:cNvPicPr>
+          <p:nvPr/>
+        </p:nvPicPr>
+        <p:blipFill>
+          <a:blip r:embed="rId2"/>
+          <a:stretch>
+            <a:fillRect/>
+          </a:stretch>
+        </p:blipFill>
+        <p:spPr>
+          <a:xfrm>
+            <a:off x="5870301" y="1646965"/>
+            <a:ext cx="5864193" cy="3911541"/>
+          </a:xfrm>
+          <a:prstGeom prst="rect">
+            <a:avLst/>
+          </a:prstGeom>
+        </p:spPr>
+      </p:pic>
+      <p:sp>
+        <p:nvSpPr>
+          <p:cNvPr id="7" name="TextBox 6"/>
           <p:cNvSpPr txBox="1"/>
           <p:nvPr/>
         </p:nvSpPr>
         <p:spPr>
           <a:xfrm>
-            <a:off x="457200" y="1170432"/>
-            <a:ext cx="11277295" cy="5230368"/>
+            <a:off x="5870301" y="5961888"/>
+            <a:ext cx="5864193" cy="320040"/>
+          </a:xfrm>
+          <a:prstGeom prst="rect">
+            <a:avLst/>
+          </a:prstGeom>
+          <a:noFill/>
+        </p:spPr>
+        <p:txBody>
+          <a:bodyPr wrap="square">
+            <a:spAutoFit/>
+          </a:bodyPr>
+          <a:lstStyle/>
+          <a:p>
+            <a:pPr algn="ctr"/>
+            <a:r>
+              <a:rPr sz="1100" b="0" i="1">
+                <a:solidFill>
+                  <a:srgbClr val="666666"/>
+                </a:solidFill>
+                <a:latin typeface="Calibri"/>
+              </a:rPr>
+              <a:t>Foto: Mikhail Nilov · Pexels</a:t>
+            </a:r>
+          </a:p>
+        </p:txBody>
+      </p:sp>
+      <p:sp>
+        <p:nvSpPr>
+          <p:cNvPr id="8" name="TextBox 7"/>
+          <p:cNvSpPr txBox="1"/>
+          <p:nvPr/>
+        </p:nvSpPr>
+        <p:spPr>
+          <a:xfrm>
+            <a:off x="457200" y="1353312"/>
+            <a:ext cx="5093061" cy="5047488"/>
           </a:xfrm>
           <a:prstGeom prst="rect">
             <a:avLst/>
@@ -5380,7 +5484,7 @@
       </p:sp>
       <p:sp>
         <p:nvSpPr>
-          <p:cNvPr id="6" name="TextBox 5"/>
+          <p:cNvPr id="9" name="TextBox 8"/>
           <p:cNvSpPr txBox="1"/>
           <p:nvPr/>
         </p:nvSpPr>
@@ -8263,9 +8367,57 @@
           </a:p>
         </p:txBody>
       </p:sp>
-      <p:sp>
-        <p:nvSpPr>
-          <p:cNvPr id="14" name="TextBox 13"/>
+      <p:pic>
+        <p:nvPicPr>
+          <p:cNvPr id="14" name="Picture 13" descr="sello_mal.png"/>
+          <p:cNvPicPr>
+            <a:picLocks noChangeAspect="1"/>
+          </p:cNvPicPr>
+          <p:nvPr/>
+        </p:nvPicPr>
+        <p:blipFill>
+          <a:blip r:embed="rId2"/>
+          <a:stretch>
+            <a:fillRect/>
+          </a:stretch>
+        </p:blipFill>
+        <p:spPr>
+          <a:xfrm>
+            <a:off x="566928" y="1527048"/>
+            <a:ext cx="393192" cy="393192"/>
+          </a:xfrm>
+          <a:prstGeom prst="rect">
+            <a:avLst/>
+          </a:prstGeom>
+        </p:spPr>
+      </p:pic>
+      <p:pic>
+        <p:nvPicPr>
+          <p:cNvPr id="15" name="Picture 14" descr="sello_bien.png"/>
+          <p:cNvPicPr>
+            <a:picLocks noChangeAspect="1"/>
+          </p:cNvPicPr>
+          <p:nvPr/>
+        </p:nvPicPr>
+        <p:blipFill>
+          <a:blip r:embed="rId3"/>
+          <a:stretch>
+            <a:fillRect/>
+          </a:stretch>
+        </p:blipFill>
+        <p:spPr>
+          <a:xfrm>
+            <a:off x="6365595" y="1527048"/>
+            <a:ext cx="393192" cy="393192"/>
+          </a:xfrm>
+          <a:prstGeom prst="rect">
+            <a:avLst/>
+          </a:prstGeom>
+        </p:spPr>
+      </p:pic>
+      <p:sp>
+        <p:nvSpPr>
+          <p:cNvPr id="16" name="TextBox 15"/>
           <p:cNvSpPr txBox="1"/>
           <p:nvPr/>
         </p:nvSpPr>

--- a/Introduccion a la Ingenieria/Clases/Clase 15 - Exposicion final de proyectos/Presentacion.pptx
+++ b/Introduccion a la Ingenieria/Clases/Clase 15 - Exposicion final de proyectos/Presentacion.pptx
@@ -5221,118 +5221,14 @@
       </p:sp>
       <p:sp>
         <p:nvSpPr>
-          <p:cNvPr id="5" name="Rounded Rectangle 4"/>
-          <p:cNvSpPr/>
-          <p:nvPr/>
-        </p:nvSpPr>
-        <p:spPr>
-          <a:xfrm>
-            <a:off x="5797149" y="1573813"/>
-            <a:ext cx="6010497" cy="4057845"/>
-          </a:xfrm>
-          <a:prstGeom prst="roundRect">
-            <a:avLst>
-              <a:gd name="adj" fmla="val 4000"/>
-            </a:avLst>
-          </a:prstGeom>
-          <a:solidFill>
-            <a:srgbClr val="E8EEF4"/>
-          </a:solidFill>
-          <a:ln>
-            <a:noFill/>
-          </a:ln>
-        </p:spPr>
-        <p:style>
-          <a:lnRef idx="1">
-            <a:schemeClr val="accent1"/>
-          </a:lnRef>
-          <a:fillRef idx="3">
-            <a:schemeClr val="accent1"/>
-          </a:fillRef>
-          <a:effectRef idx="2">
-            <a:schemeClr val="accent1"/>
-          </a:effectRef>
-          <a:fontRef idx="minor">
-            <a:schemeClr val="lt1"/>
-          </a:fontRef>
-        </p:style>
-        <p:txBody>
-          <a:bodyPr rtlCol="0" anchor="ctr"/>
-          <a:lstStyle/>
-          <a:p>
-            <a:pPr algn="ctr"/>
-          </a:p>
-        </p:txBody>
-      </p:sp>
-      <p:pic>
-        <p:nvPicPr>
-          <p:cNvPr id="6" name="Picture 5" descr="students-learning-laptops-classroom.jpg"/>
-          <p:cNvPicPr>
-            <a:picLocks noChangeAspect="1"/>
-          </p:cNvPicPr>
-          <p:nvPr/>
-        </p:nvPicPr>
-        <p:blipFill>
-          <a:blip r:embed="rId2"/>
-          <a:stretch>
-            <a:fillRect/>
-          </a:stretch>
-        </p:blipFill>
-        <p:spPr>
-          <a:xfrm>
-            <a:off x="5870301" y="1646965"/>
-            <a:ext cx="5864193" cy="3911541"/>
-          </a:xfrm>
-          <a:prstGeom prst="rect">
-            <a:avLst/>
-          </a:prstGeom>
-        </p:spPr>
-      </p:pic>
-      <p:sp>
-        <p:nvSpPr>
-          <p:cNvPr id="7" name="TextBox 6"/>
+          <p:cNvPr id="5" name="TextBox 4"/>
           <p:cNvSpPr txBox="1"/>
           <p:nvPr/>
         </p:nvSpPr>
         <p:spPr>
           <a:xfrm>
-            <a:off x="5870301" y="5961888"/>
-            <a:ext cx="5864193" cy="320040"/>
-          </a:xfrm>
-          <a:prstGeom prst="rect">
-            <a:avLst/>
-          </a:prstGeom>
-          <a:noFill/>
-        </p:spPr>
-        <p:txBody>
-          <a:bodyPr wrap="square">
-            <a:spAutoFit/>
-          </a:bodyPr>
-          <a:lstStyle/>
-          <a:p>
-            <a:pPr algn="ctr"/>
-            <a:r>
-              <a:rPr sz="1100" b="0" i="1">
-                <a:solidFill>
-                  <a:srgbClr val="666666"/>
-                </a:solidFill>
-                <a:latin typeface="Calibri"/>
-              </a:rPr>
-              <a:t>Foto: Mikhail Nilov · Pexels</a:t>
-            </a:r>
-          </a:p>
-        </p:txBody>
-      </p:sp>
-      <p:sp>
-        <p:nvSpPr>
-          <p:cNvPr id="8" name="TextBox 7"/>
-          <p:cNvSpPr txBox="1"/>
-          <p:nvPr/>
-        </p:nvSpPr>
-        <p:spPr>
-          <a:xfrm>
-            <a:off x="457200" y="1353312"/>
-            <a:ext cx="5093061" cy="5047488"/>
+            <a:off x="457200" y="1170432"/>
+            <a:ext cx="11277295" cy="5230368"/>
           </a:xfrm>
           <a:prstGeom prst="rect">
             <a:avLst/>
@@ -5484,7 +5380,7 @@
       </p:sp>
       <p:sp>
         <p:nvSpPr>
-          <p:cNvPr id="9" name="TextBox 8"/>
+          <p:cNvPr id="6" name="TextBox 5"/>
           <p:cNvSpPr txBox="1"/>
           <p:nvPr/>
         </p:nvSpPr>
